--- a/slides/Intel_CET_Linux_Summit_NA_2026.pptx
+++ b/slides/Intel_CET_Linux_Summit_NA_2026.pptx
@@ -4,27 +4,30 @@
   <p:sldMasterIdLst>
     <p:sldMasterId id="2147483648" r:id="rId1"/>
   </p:sldMasterIdLst>
+  <p:notesMasterIdLst>
+    <p:notesMasterId r:id="rId20"/>
+  </p:notesMasterIdLst>
   <p:sldIdLst>
-    <p:sldId id="256" r:id="rId7"/>
-    <p:sldId id="257" r:id="rId8"/>
-    <p:sldId id="258" r:id="rId9"/>
-    <p:sldId id="259" r:id="rId10"/>
-    <p:sldId id="260" r:id="rId11"/>
-    <p:sldId id="261" r:id="rId12"/>
-    <p:sldId id="262" r:id="rId13"/>
-    <p:sldId id="263" r:id="rId14"/>
-    <p:sldId id="264" r:id="rId15"/>
-    <p:sldId id="265" r:id="rId16"/>
-    <p:sldId id="266" r:id="rId17"/>
-    <p:sldId id="267" r:id="rId18"/>
-    <p:sldId id="268" r:id="rId19"/>
-    <p:sldId id="269" r:id="rId20"/>
-    <p:sldId id="270" r:id="rId21"/>
-    <p:sldId id="271" r:id="rId22"/>
-    <p:sldId id="272" r:id="rId23"/>
-    <p:sldId id="273" r:id="rId24"/>
+    <p:sldId id="256" r:id="rId2"/>
+    <p:sldId id="257" r:id="rId3"/>
+    <p:sldId id="258" r:id="rId4"/>
+    <p:sldId id="259" r:id="rId5"/>
+    <p:sldId id="260" r:id="rId6"/>
+    <p:sldId id="262" r:id="rId7"/>
+    <p:sldId id="261" r:id="rId8"/>
+    <p:sldId id="263" r:id="rId9"/>
+    <p:sldId id="264" r:id="rId10"/>
+    <p:sldId id="265" r:id="rId11"/>
+    <p:sldId id="266" r:id="rId12"/>
+    <p:sldId id="267" r:id="rId13"/>
+    <p:sldId id="268" r:id="rId14"/>
+    <p:sldId id="269" r:id="rId15"/>
+    <p:sldId id="270" r:id="rId16"/>
+    <p:sldId id="271" r:id="rId17"/>
+    <p:sldId id="272" r:id="rId18"/>
+    <p:sldId id="273" r:id="rId19"/>
   </p:sldIdLst>
-  <p:sldSz cx="12192000" cy="6858000" type="screen4x3"/>
+  <p:sldSz cx="12192000" cy="6858000"/>
   <p:notesSz cx="6858000" cy="9144000"/>
   <p:defaultTextStyle>
     <a:defPPr>
@@ -121,7 +124,431 @@
       </a:defRPr>
     </a:lvl9pPr>
   </p:defaultTextStyle>
+  <p:extLst>
+    <p:ext uri="{EFAFB233-063F-42B5-8137-9DF3F51BA10A}">
+      <p15:sldGuideLst xmlns:p15="http://schemas.microsoft.com/office/powerpoint/2012/main">
+        <p15:guide id="1" orient="horz" pos="2160">
+          <p15:clr>
+            <a:srgbClr val="A4A3A4"/>
+          </p15:clr>
+        </p15:guide>
+        <p15:guide id="2" pos="2880">
+          <p15:clr>
+            <a:srgbClr val="A4A3A4"/>
+          </p15:clr>
+        </p15:guide>
+      </p15:sldGuideLst>
+    </p:ext>
+  </p:extLst>
 </p:presentation>
+</file>
+
+<file path=ppt/notesMasters/notesMaster1.xml><?xml version="1.0" encoding="utf-8"?>
+<p:notesMaster xmlns:a="http://schemas.openxmlformats.org/drawingml/2006/main" xmlns:r="http://schemas.openxmlformats.org/officeDocument/2006/relationships" xmlns:p="http://schemas.openxmlformats.org/presentationml/2006/main">
+  <p:cSld>
+    <p:bg>
+      <p:bgRef idx="1001">
+        <a:schemeClr val="bg1"/>
+      </p:bgRef>
+    </p:bg>
+    <p:spTree>
+      <p:nvGrpSpPr>
+        <p:cNvPr id="1" name=""/>
+        <p:cNvGrpSpPr/>
+        <p:nvPr/>
+      </p:nvGrpSpPr>
+      <p:grpSpPr>
+        <a:xfrm>
+          <a:off x="0" y="0"/>
+          <a:ext cx="0" cy="0"/>
+          <a:chOff x="0" y="0"/>
+          <a:chExt cx="0" cy="0"/>
+        </a:xfrm>
+      </p:grpSpPr>
+      <p:sp>
+        <p:nvSpPr>
+          <p:cNvPr id="2" name="Header Placeholder 1"/>
+          <p:cNvSpPr>
+            <a:spLocks noGrp="1"/>
+          </p:cNvSpPr>
+          <p:nvPr>
+            <p:ph type="hdr" sz="quarter"/>
+          </p:nvPr>
+        </p:nvSpPr>
+        <p:spPr>
+          <a:xfrm>
+            <a:off x="0" y="0"/>
+            <a:ext cx="2971800" cy="458788"/>
+          </a:xfrm>
+          <a:prstGeom prst="rect">
+            <a:avLst/>
+          </a:prstGeom>
+        </p:spPr>
+        <p:txBody>
+          <a:bodyPr vert="horz" lIns="91440" tIns="45720" rIns="91440" bIns="45720" rtlCol="0"/>
+          <a:lstStyle>
+            <a:lvl1pPr algn="l">
+              <a:defRPr sz="1200"/>
+            </a:lvl1pPr>
+          </a:lstStyle>
+          <a:p>
+            <a:endParaRPr lang="en-US"/>
+          </a:p>
+        </p:txBody>
+      </p:sp>
+      <p:sp>
+        <p:nvSpPr>
+          <p:cNvPr id="3" name="Date Placeholder 2"/>
+          <p:cNvSpPr>
+            <a:spLocks noGrp="1"/>
+          </p:cNvSpPr>
+          <p:nvPr>
+            <p:ph type="dt" idx="1"/>
+          </p:nvPr>
+        </p:nvSpPr>
+        <p:spPr>
+          <a:xfrm>
+            <a:off x="3884613" y="0"/>
+            <a:ext cx="2971800" cy="458788"/>
+          </a:xfrm>
+          <a:prstGeom prst="rect">
+            <a:avLst/>
+          </a:prstGeom>
+        </p:spPr>
+        <p:txBody>
+          <a:bodyPr vert="horz" lIns="91440" tIns="45720" rIns="91440" bIns="45720" rtlCol="0"/>
+          <a:lstStyle>
+            <a:lvl1pPr algn="r">
+              <a:defRPr sz="1200"/>
+            </a:lvl1pPr>
+          </a:lstStyle>
+          <a:p>
+            <a:fld id="{F49FE757-DDF4-A24B-877B-B462EA62A178}" type="datetimeFigureOut">
+              <a:rPr lang="en-US" smtClean="0"/>
+              <a:t>5/19/26</a:t>
+            </a:fld>
+            <a:endParaRPr lang="en-US"/>
+          </a:p>
+        </p:txBody>
+      </p:sp>
+      <p:sp>
+        <p:nvSpPr>
+          <p:cNvPr id="4" name="Slide Image Placeholder 3"/>
+          <p:cNvSpPr>
+            <a:spLocks noGrp="1" noRot="1" noChangeAspect="1"/>
+          </p:cNvSpPr>
+          <p:nvPr>
+            <p:ph type="sldImg" idx="2"/>
+          </p:nvPr>
+        </p:nvSpPr>
+        <p:spPr>
+          <a:xfrm>
+            <a:off x="685800" y="1143000"/>
+            <a:ext cx="5486400" cy="3086100"/>
+          </a:xfrm>
+          <a:prstGeom prst="rect">
+            <a:avLst/>
+          </a:prstGeom>
+          <a:noFill/>
+          <a:ln w="12700">
+            <a:solidFill>
+              <a:prstClr val="black"/>
+            </a:solidFill>
+          </a:ln>
+        </p:spPr>
+        <p:txBody>
+          <a:bodyPr vert="horz" lIns="91440" tIns="45720" rIns="91440" bIns="45720" rtlCol="0" anchor="ctr"/>
+          <a:lstStyle/>
+          <a:p>
+            <a:endParaRPr lang="en-US"/>
+          </a:p>
+        </p:txBody>
+      </p:sp>
+      <p:sp>
+        <p:nvSpPr>
+          <p:cNvPr id="5" name="Notes Placeholder 4"/>
+          <p:cNvSpPr>
+            <a:spLocks noGrp="1"/>
+          </p:cNvSpPr>
+          <p:nvPr>
+            <p:ph type="body" sz="quarter" idx="3"/>
+          </p:nvPr>
+        </p:nvSpPr>
+        <p:spPr>
+          <a:xfrm>
+            <a:off x="685800" y="4400550"/>
+            <a:ext cx="5486400" cy="3600450"/>
+          </a:xfrm>
+          <a:prstGeom prst="rect">
+            <a:avLst/>
+          </a:prstGeom>
+        </p:spPr>
+        <p:txBody>
+          <a:bodyPr vert="horz" lIns="91440" tIns="45720" rIns="91440" bIns="45720" rtlCol="0"/>
+          <a:lstStyle/>
+          <a:p>
+            <a:pPr lvl="0"/>
+            <a:r>
+              <a:rPr lang="en-US"/>
+              <a:t>Click to edit Master text styles</a:t>
+            </a:r>
+          </a:p>
+          <a:p>
+            <a:pPr lvl="1"/>
+            <a:r>
+              <a:rPr lang="en-US"/>
+              <a:t>Second level</a:t>
+            </a:r>
+          </a:p>
+          <a:p>
+            <a:pPr lvl="2"/>
+            <a:r>
+              <a:rPr lang="en-US"/>
+              <a:t>Third level</a:t>
+            </a:r>
+          </a:p>
+          <a:p>
+            <a:pPr lvl="3"/>
+            <a:r>
+              <a:rPr lang="en-US"/>
+              <a:t>Fourth level</a:t>
+            </a:r>
+          </a:p>
+          <a:p>
+            <a:pPr lvl="4"/>
+            <a:r>
+              <a:rPr lang="en-US"/>
+              <a:t>Fifth level</a:t>
+            </a:r>
+          </a:p>
+        </p:txBody>
+      </p:sp>
+      <p:sp>
+        <p:nvSpPr>
+          <p:cNvPr id="6" name="Footer Placeholder 5"/>
+          <p:cNvSpPr>
+            <a:spLocks noGrp="1"/>
+          </p:cNvSpPr>
+          <p:nvPr>
+            <p:ph type="ftr" sz="quarter" idx="4"/>
+          </p:nvPr>
+        </p:nvSpPr>
+        <p:spPr>
+          <a:xfrm>
+            <a:off x="0" y="8685213"/>
+            <a:ext cx="2971800" cy="458787"/>
+          </a:xfrm>
+          <a:prstGeom prst="rect">
+            <a:avLst/>
+          </a:prstGeom>
+        </p:spPr>
+        <p:txBody>
+          <a:bodyPr vert="horz" lIns="91440" tIns="45720" rIns="91440" bIns="45720" rtlCol="0" anchor="b"/>
+          <a:lstStyle>
+            <a:lvl1pPr algn="l">
+              <a:defRPr sz="1200"/>
+            </a:lvl1pPr>
+          </a:lstStyle>
+          <a:p>
+            <a:endParaRPr lang="en-US"/>
+          </a:p>
+        </p:txBody>
+      </p:sp>
+      <p:sp>
+        <p:nvSpPr>
+          <p:cNvPr id="7" name="Slide Number Placeholder 6"/>
+          <p:cNvSpPr>
+            <a:spLocks noGrp="1"/>
+          </p:cNvSpPr>
+          <p:nvPr>
+            <p:ph type="sldNum" sz="quarter" idx="5"/>
+          </p:nvPr>
+        </p:nvSpPr>
+        <p:spPr>
+          <a:xfrm>
+            <a:off x="3884613" y="8685213"/>
+            <a:ext cx="2971800" cy="458787"/>
+          </a:xfrm>
+          <a:prstGeom prst="rect">
+            <a:avLst/>
+          </a:prstGeom>
+        </p:spPr>
+        <p:txBody>
+          <a:bodyPr vert="horz" lIns="91440" tIns="45720" rIns="91440" bIns="45720" rtlCol="0" anchor="b"/>
+          <a:lstStyle>
+            <a:lvl1pPr algn="r">
+              <a:defRPr sz="1200"/>
+            </a:lvl1pPr>
+          </a:lstStyle>
+          <a:p>
+            <a:fld id="{16CCB02A-2C36-7D41-A991-BF5889B25D15}" type="slidenum">
+              <a:rPr lang="en-US" smtClean="0"/>
+              <a:t>‹#›</a:t>
+            </a:fld>
+            <a:endParaRPr lang="en-US"/>
+          </a:p>
+        </p:txBody>
+      </p:sp>
+    </p:spTree>
+    <p:extLst>
+      <p:ext uri="{BB962C8B-B14F-4D97-AF65-F5344CB8AC3E}">
+        <p14:creationId xmlns:p14="http://schemas.microsoft.com/office/powerpoint/2010/main" val="901115636"/>
+      </p:ext>
+    </p:extLst>
+  </p:cSld>
+  <p:clrMap bg1="lt1" tx1="dk1" bg2="lt2" tx2="dk2" accent1="accent1" accent2="accent2" accent3="accent3" accent4="accent4" accent5="accent5" accent6="accent6" hlink="hlink" folHlink="folHlink"/>
+  <p:notesStyle>
+    <a:lvl1pPr marL="0" algn="l" defTabSz="914400" rtl="0" eaLnBrk="1" latinLnBrk="0" hangingPunct="1">
+      <a:defRPr sz="1200" kern="1200">
+        <a:solidFill>
+          <a:schemeClr val="tx1"/>
+        </a:solidFill>
+        <a:latin typeface="+mn-lt"/>
+        <a:ea typeface="+mn-ea"/>
+        <a:cs typeface="+mn-cs"/>
+      </a:defRPr>
+    </a:lvl1pPr>
+    <a:lvl2pPr marL="457200" algn="l" defTabSz="914400" rtl="0" eaLnBrk="1" latinLnBrk="0" hangingPunct="1">
+      <a:defRPr sz="1200" kern="1200">
+        <a:solidFill>
+          <a:schemeClr val="tx1"/>
+        </a:solidFill>
+        <a:latin typeface="+mn-lt"/>
+        <a:ea typeface="+mn-ea"/>
+        <a:cs typeface="+mn-cs"/>
+      </a:defRPr>
+    </a:lvl2pPr>
+    <a:lvl3pPr marL="914400" algn="l" defTabSz="914400" rtl="0" eaLnBrk="1" latinLnBrk="0" hangingPunct="1">
+      <a:defRPr sz="1200" kern="1200">
+        <a:solidFill>
+          <a:schemeClr val="tx1"/>
+        </a:solidFill>
+        <a:latin typeface="+mn-lt"/>
+        <a:ea typeface="+mn-ea"/>
+        <a:cs typeface="+mn-cs"/>
+      </a:defRPr>
+    </a:lvl3pPr>
+    <a:lvl4pPr marL="1371600" algn="l" defTabSz="914400" rtl="0" eaLnBrk="1" latinLnBrk="0" hangingPunct="1">
+      <a:defRPr sz="1200" kern="1200">
+        <a:solidFill>
+          <a:schemeClr val="tx1"/>
+        </a:solidFill>
+        <a:latin typeface="+mn-lt"/>
+        <a:ea typeface="+mn-ea"/>
+        <a:cs typeface="+mn-cs"/>
+      </a:defRPr>
+    </a:lvl4pPr>
+    <a:lvl5pPr marL="1828800" algn="l" defTabSz="914400" rtl="0" eaLnBrk="1" latinLnBrk="0" hangingPunct="1">
+      <a:defRPr sz="1200" kern="1200">
+        <a:solidFill>
+          <a:schemeClr val="tx1"/>
+        </a:solidFill>
+        <a:latin typeface="+mn-lt"/>
+        <a:ea typeface="+mn-ea"/>
+        <a:cs typeface="+mn-cs"/>
+      </a:defRPr>
+    </a:lvl5pPr>
+    <a:lvl6pPr marL="2286000" algn="l" defTabSz="914400" rtl="0" eaLnBrk="1" latinLnBrk="0" hangingPunct="1">
+      <a:defRPr sz="1200" kern="1200">
+        <a:solidFill>
+          <a:schemeClr val="tx1"/>
+        </a:solidFill>
+        <a:latin typeface="+mn-lt"/>
+        <a:ea typeface="+mn-ea"/>
+        <a:cs typeface="+mn-cs"/>
+      </a:defRPr>
+    </a:lvl6pPr>
+    <a:lvl7pPr marL="2743200" algn="l" defTabSz="914400" rtl="0" eaLnBrk="1" latinLnBrk="0" hangingPunct="1">
+      <a:defRPr sz="1200" kern="1200">
+        <a:solidFill>
+          <a:schemeClr val="tx1"/>
+        </a:solidFill>
+        <a:latin typeface="+mn-lt"/>
+        <a:ea typeface="+mn-ea"/>
+        <a:cs typeface="+mn-cs"/>
+      </a:defRPr>
+    </a:lvl7pPr>
+    <a:lvl8pPr marL="3200400" algn="l" defTabSz="914400" rtl="0" eaLnBrk="1" latinLnBrk="0" hangingPunct="1">
+      <a:defRPr sz="1200" kern="1200">
+        <a:solidFill>
+          <a:schemeClr val="tx1"/>
+        </a:solidFill>
+        <a:latin typeface="+mn-lt"/>
+        <a:ea typeface="+mn-ea"/>
+        <a:cs typeface="+mn-cs"/>
+      </a:defRPr>
+    </a:lvl8pPr>
+    <a:lvl9pPr marL="3657600" algn="l" defTabSz="914400" rtl="0" eaLnBrk="1" latinLnBrk="0" hangingPunct="1">
+      <a:defRPr sz="1200" kern="1200">
+        <a:solidFill>
+          <a:schemeClr val="tx1"/>
+        </a:solidFill>
+        <a:latin typeface="+mn-lt"/>
+        <a:ea typeface="+mn-ea"/>
+        <a:cs typeface="+mn-cs"/>
+      </a:defRPr>
+    </a:lvl9pPr>
+  </p:notesStyle>
+</p:notesMaster>
+</file>
+
+<file path=ppt/notesSlides/notesSlide1.xml><?xml version="1.0" encoding="utf-8"?>
+<p:notes xmlns:a="http://schemas.openxmlformats.org/drawingml/2006/main" xmlns:r="http://schemas.openxmlformats.org/officeDocument/2006/relationships" xmlns:p="http://schemas.openxmlformats.org/presentationml/2006/main">
+  <p:cSld>
+    <p:spTree>
+      <p:nvGrpSpPr>
+        <p:cNvPr id="1" name=""/>
+        <p:cNvGrpSpPr/>
+        <p:nvPr/>
+      </p:nvGrpSpPr>
+      <p:grpSpPr>
+        <a:xfrm>
+          <a:off x="0" y="0"/>
+          <a:ext cx="0" cy="0"/>
+          <a:chOff x="0" y="0"/>
+          <a:chExt cx="0" cy="0"/>
+        </a:xfrm>
+      </p:grpSpPr>
+      <p:sp>
+        <p:nvSpPr>
+          <p:cNvPr id="2" name="Slide Image Placeholder 1"/>
+          <p:cNvSpPr>
+            <a:spLocks noGrp="1" noRot="1" noChangeAspect="1"/>
+          </p:cNvSpPr>
+          <p:nvPr>
+            <p:ph type="sldImg"/>
+          </p:nvPr>
+        </p:nvSpPr>
+        <p:spPr/>
+      </p:sp>
+      <p:sp>
+        <p:nvSpPr>
+          <p:cNvPr id="3" name="Notes Placeholder 2"/>
+          <p:cNvSpPr>
+            <a:spLocks noGrp="1"/>
+          </p:cNvSpPr>
+          <p:nvPr>
+            <p:ph type="body" idx="1"/>
+          </p:nvPr>
+        </p:nvSpPr>
+        <p:spPr/>
+        <p:txBody>
+          <a:bodyPr/>
+          <a:lstStyle/>
+          <a:p>
+            <a:r>
+              <a:rPr lang="zh-CN" dirty="0"/>
+              <a:t>Good morning everyone. Today I'm going to take you through a deep dive into Intel's Control-Flow Enforcement Technology and how it's implemented in the Linux kernel. We'll look at actual kernel source code, understand the hardware mechanisms, and see how the kernel handles all the tricky edge cases -- signals, fork, context switches -- that make this a fascinating piece of systems engineering.</a:t>
+            </a:r>
+          </a:p>
+        </p:txBody>
+      </p:sp>
+    </p:spTree>
+  </p:cSld>
+  <p:clrMapOvr>
+    <a:masterClrMapping/>
+  </p:clrMapOvr>
+</p:notes>
 </file>
 
 <file path=ppt/notesSlides/notesSlide10.xml><?xml version="1.0" encoding="utf-8"?>
@@ -170,7 +597,7 @@
           <a:p>
             <a:r>
               <a:rPr lang="zh-CN" dirty="0"/>
-              <a:t>The shadow stack concept is beautifully simple. The CPU maintains two stacks in parallel. When CALL executes, it pushes the return address to both the normal stack and the shadow stack. When RET executes, it pops from both and compares. If they match -- normal execution. If they don't -- CP fault, code CP_RET. The critical property: the shadow stack is not writable by normal memory instructions. You cannot MOV or PUSH to it. Only CALL and RET can modify it through normal operation. There's also WRSS -- a special instruction that can write to the shadow stack -- but that requires explicit opt-in, and we'll see why that matters for setjmp.</a:t>
+              <a:t>Here's shstk_setup -- the function that enables shadow stacks for the current thread. First it allocates the shadow stack memory. The size defaults to the minimum of RLIMIT_STACK and four gigabytes, page-aligned. A key detail: MAP_ABOVE4G ensures the allocation is above the four-gigabyte boundary, preventing 32-bit address aliasing attacks. Then we write the MSRs: PL3_SSP gets set to the top of the allocated region because stacks grow downward, and U_CET gets the shadow stack enable bit set. The guard page detail is important -- INCSSP can advance the shadow stack pointer by at most 2040 bytes per instruction, and a 4096-byte guard page guarantees that any attempt to slide into an adjacent shadow stack will fault.</a:t>
             </a:r>
           </a:p>
         </p:txBody>
@@ -229,7 +656,7 @@
           <a:p>
             <a:r>
               <a:rPr lang="zh-CN" dirty="0"/>
-              <a:t>Here's shstk_setup -- the function that enables shadow stacks for the current thread. First it allocates the shadow stack memory. The size defaults to the minimum of RLIMIT_STACK and four gigabytes, page-aligned. A key detail: MAP_ABOVE4G ensures the allocation is above the four-gigabyte boundary, preventing 32-bit address aliasing attacks. Then we write the MSRs: PL3_SSP gets set to the top of the allocated region because stacks grow downward, and U_CET gets the shadow stack enable bit set. The guard page detail is important -- INCSSP can advance the shadow stack pointer by at most 2040 bytes per instruction, and a 4096-byte guard page guarantees that any attempt to slide into an adjacent shadow stack will fault.</a:t>
+              <a:t>This is where it gets tricky. When a signal arrives, the kernel diverts execution to the signal handler. The handler eventually returns via a trampoline that calls rt_sigreturn. But here's the problem: that return goes through a RET instruction, and the shadow stack still has the original caller's return address -- not the trampoline's address. Without a fixup mechanism, every single signal return would trigger a CP fault. The solution is elegant: during signal delivery, the kernel pushes a special sigframe token onto the shadow stack -- the original SSP with bit 63 set. Bit 63 means this is not a return address -- the CPU will never match it. Then it pushes the sa_restorer address so the handler's RET will match. On sigreturn, the kernel validates the token and restores the original SSP.</a:t>
             </a:r>
           </a:p>
         </p:txBody>
@@ -288,7 +715,7 @@
           <a:p>
             <a:r>
               <a:rPr lang="zh-CN" dirty="0"/>
-              <a:t>This is where it gets tricky. When a signal arrives, the kernel diverts execution to the signal handler. The handler eventually returns via a trampoline that calls rt_sigreturn. But here's the problem: that return goes through a RET instruction, and the shadow stack still has the original caller's return address -- not the trampoline's address. Without a fixup mechanism, every single signal return would trigger a CP fault. The solution is elegant: during signal delivery, the kernel pushes a special sigframe token onto the shadow stack -- the original SSP with bit 63 set. Bit 63 means this is not a return address -- the CPU will never match it. Then it pushes the sa_restorer address so the handler's RET will match. On sigreturn, the kernel validates the token and restores the original SSP.</a:t>
+              <a:t>Here's the actual code. setup_signal_shadow_stack is called during signal delivery, after the signal frame is constructed on the normal stack. It reads the current SSP, then pushes a restore token -- the old SSP OR'd with SHSTK_DATA_BIT, bit 63. Then it pushes the restorer address -- that's the __restore_rt trampoline in the vDSO -- so when the signal handler does its final RET, it matches. Finally it updates the SSP MSR to the new position. On the way back, restore_signal_shadow_stack reverses everything: validates the token, checks it's on a shadow stack VMA, and restores the original SSP.</a:t>
             </a:r>
           </a:p>
         </p:txBody>
@@ -347,7 +774,7 @@
           <a:p>
             <a:r>
               <a:rPr lang="zh-CN" dirty="0"/>
-              <a:t>Here's the actual code. setup_signal_shadow_stack is called during signal delivery, after the signal frame is constructed on the normal stack. It reads the current SSP, then pushes a restore token -- the old SSP OR'd with SHSTK_DATA_BIT, bit 63. Then it pushes the restorer address -- that's the __restore_rt trampoline in the vDSO -- so when the signal handler does its final RET, it matches. Finally it updates the SSP MSR to the new position. On the way back, restore_signal_shadow_stack reverses everything: validates the token, checks it's on a shadow stack VMA, and restores the original SSP.</a:t>
+              <a:t>Shadow stack behavior during process creation has three cases. For fork -- no CLONE_VM -- the child gets a copy-on-write copy of the parent's shadow stack. This is free -- normal COW page fault handling duplicates pages on write. For vfork -- CLONE_VFORK -- the child temporarily shares the parent's shadow stack. We set base and size to zero so shstk_free won't accidentally unmap the parent's stack when the child exits. For pthread_create -- CLONE_VM -- the child shares the address space, so it needs its own shadow stack. We allocate a fresh one and return the new SSP pointing to the top.</a:t>
             </a:r>
           </a:p>
         </p:txBody>
@@ -406,7 +833,7 @@
           <a:p>
             <a:r>
               <a:rPr lang="zh-CN" dirty="0"/>
-              <a:t>Shadow stack behavior during process creation has three cases. For fork -- no CLONE_VM -- the child gets a copy-on-write copy of the parent's shadow stack. This is free -- normal COW page fault handling duplicates pages on write. For vfork -- CLONE_VFORK -- the child temporarily shares the parent's shadow stack. We set base and size to zero so shstk_free won't accidentally unmap the parent's stack when the child exits. For pthread_create -- CLONE_VM -- the child shares the address space, so it needs its own shadow stack. We allocate a fresh one and return the new SSP pointing to the top.</a:t>
+              <a:t>The shadow stack pointer lives in the XSAVE area under XFEATURE_CET_USER. This is elegant: during a context switch, the normal XSAVE instruction saves the outgoing task's SSP, and XRSTOR on the incoming task loads its SSP. No special code needed in the scheduler fast path. The only time we explicitly touch the SSP in the XSAVE buffer is during fpu_clone -- when we need to set the child's initial SSP to point to its newly allocated shadow stack.</a:t>
             </a:r>
           </a:p>
         </p:txBody>
@@ -465,7 +892,7 @@
           <a:p>
             <a:r>
               <a:rPr lang="zh-CN" dirty="0"/>
-              <a:t>The shadow stack pointer lives in the XSAVE area under XFEATURE_CET_USER. This is elegant: during a context switch, the normal XSAVE instruction saves the outgoing task's SSP, and XRSTOR on the incoming task loads its SSP. No special code needed in the scheduler fast path. The only time we explicitly touch the SSP in the XSAVE buffer is during fpu_clone -- when we need to set the child's initial SSP to point to its newly allocated shadow stack.</a:t>
+              <a:t>Userspace controls shadow stacks through arch_prctl. ENABLE turns it on -- calls shstk_setup that we just saw. DISABLE turns it off -- zeroes the MSR, unmaps the shadow stack. The critical one is LOCK. Once you lock a feature, the process cannot disable it -- even if an attacker gains arbitrary code execution and tries to call arch_prctl with DISABLE. UNLOCK is only available via ptrace -- this is for checkpoint and restore scenarios. In practice, glibc handles all of this: when loading a binary with CET GNU property notes, the dynamic linker enables and locks shadow stacks before main runs. For production deployments where you need to disable CET for specific applications, GLIBC_TUNABLES provides a per-process escape hatch without any kernel changes.</a:t>
             </a:r>
           </a:p>
         </p:txBody>
@@ -524,7 +951,7 @@
           <a:p>
             <a:r>
               <a:rPr lang="zh-CN" dirty="0"/>
-              <a:t>Userspace controls shadow stacks through arch_prctl. ENABLE turns it on -- calls shstk_setup that we just saw. DISABLE turns it off -- zeroes the MSR, unmaps the shadow stack. The critical one is LOCK. Once you lock a feature, the process cannot disable it -- even if an attacker gains arbitrary code execution and tries to call arch_prctl with DISABLE. UNLOCK is only available via ptrace -- this is for checkpoint and restore scenarios. In practice, glibc handles all of this: when loading a binary with CET GNU property notes, the dynamic linker enables and locks shadow stacks before main runs. For production deployments where you need to disable CET for specific applications, GLIBC_TUNABLES provides a per-process escape hatch without any kernel changes.</a:t>
+              <a:t>Three important edge cases. First, setjmp and longjmp: when you longjmp back, the shadow stack has stale entries from the intermediate calls. Glibc's longjmp implementation uses INCSSP to advance past those entries. For particularly deep longjmps, WRSS might be needed -- that's why it's a separate opt-in feature. Second, JIT engines: any JIT that generates code with indirect branches -- V8, LuaJIT, eBPF -- must emit ENDBR at all generated targets. The map_shadow_stack syscall lets JIT engines allocate shadow stacks for custom coroutines or fibers. Third, for production deployment, GLIBC_TUNABLES is your escape hatch. Set glibc.cpu.hwcaps equals minus SHSTK and the dynamic linker skips enabling shadow stacks for that process. No kernel restart, no system-wide impact.</a:t>
             </a:r>
           </a:p>
         </p:txBody>
@@ -538,65 +965,6 @@
 </file>
 
 <file path=ppt/notesSlides/notesSlide17.xml><?xml version="1.0" encoding="utf-8"?>
-<p:notes xmlns:a="http://schemas.openxmlformats.org/drawingml/2006/main" xmlns:r="http://schemas.openxmlformats.org/officeDocument/2006/relationships" xmlns:p="http://schemas.openxmlformats.org/presentationml/2006/main">
-  <p:cSld>
-    <p:spTree>
-      <p:nvGrpSpPr>
-        <p:cNvPr id="1" name=""/>
-        <p:cNvGrpSpPr/>
-        <p:nvPr/>
-      </p:nvGrpSpPr>
-      <p:grpSpPr>
-        <a:xfrm>
-          <a:off x="0" y="0"/>
-          <a:ext cx="0" cy="0"/>
-          <a:chOff x="0" y="0"/>
-          <a:chExt cx="0" cy="0"/>
-        </a:xfrm>
-      </p:grpSpPr>
-      <p:sp>
-        <p:nvSpPr>
-          <p:cNvPr id="2" name="Slide Image Placeholder 1"/>
-          <p:cNvSpPr>
-            <a:spLocks noGrp="1" noRot="1" noChangeAspect="1"/>
-          </p:cNvSpPr>
-          <p:nvPr>
-            <p:ph type="sldImg"/>
-          </p:nvPr>
-        </p:nvSpPr>
-        <p:spPr/>
-      </p:sp>
-      <p:sp>
-        <p:nvSpPr>
-          <p:cNvPr id="3" name="Notes Placeholder 2"/>
-          <p:cNvSpPr>
-            <a:spLocks noGrp="1"/>
-          </p:cNvSpPr>
-          <p:nvPr>
-            <p:ph type="body" idx="1"/>
-          </p:nvPr>
-        </p:nvSpPr>
-        <p:spPr/>
-        <p:txBody>
-          <a:bodyPr/>
-          <a:lstStyle/>
-          <a:p>
-            <a:r>
-              <a:rPr lang="zh-CN" dirty="0"/>
-              <a:t>Three important edge cases. First, setjmp and longjmp: when you longjmp back, the shadow stack has stale entries from the intermediate calls. Glibc's longjmp implementation uses INCSSP to advance past those entries. For particularly deep longjmps, WRSS might be needed -- that's why it's a separate opt-in feature. Second, JIT engines: any JIT that generates code with indirect branches -- V8, LuaJIT, eBPF -- must emit ENDBR at all generated targets. The map_shadow_stack syscall lets JIT engines allocate shadow stacks for custom coroutines or fibers. Third, for production deployment, GLIBC_TUNABLES is your escape hatch. Set glibc.cpu.hwcaps equals minus SHSTK and the dynamic linker skips enabling shadow stacks for that process. No kernel restart, no system-wide impact.</a:t>
-            </a:r>
-          </a:p>
-        </p:txBody>
-      </p:sp>
-    </p:spTree>
-  </p:cSld>
-  <p:clrMapOvr>
-    <a:masterClrMapping/>
-  </p:clrMapOvr>
-</p:notes>
-</file>
-
-<file path=ppt/notesSlides/notesSlide18.xml><?xml version="1.0" encoding="utf-8"?>
 <p:notes xmlns:a="http://schemas.openxmlformats.org/drawingml/2006/main" xmlns:r="http://schemas.openxmlformats.org/officeDocument/2006/relationships" xmlns:p="http://schemas.openxmlformats.org/presentationml/2006/main">
   <p:cSld>
     <p:spTree>
@@ -701,7 +1069,7 @@
           <a:p>
             <a:r>
               <a:rPr lang="zh-CN" dirty="0"/>
-              <a:t>Good morning everyone. Today I'm going to take you through a deep dive into Intel's Control-Flow Enforcement Technology and how it's implemented in the Linux kernel. We'll look at actual kernel source code, understand the hardware mechanisms, and see how the kernel handles all the tricky edge cases -- signals, fork, context switches -- that make this a fascinating piece of systems engineering.</a:t>
+              <a:t>Let's start with why we need hardware CFI. Once we got NX -- non-executable stacks -- attackers couldn't inject shellcode anymore. So they adapted. Return-Oriented Programming chains tiny sequences of existing code that end in RET -- called gadgets -- to achieve arbitrary computation without ever injecting new code. Jump-Oriented Programming is the same idea but using indirect JMP and CALL instructions. Software defenses like retpolines and kCFI work but have performance costs. CET gives us silicon-level enforcement: the CPU itself checks control flow at every RET and every indirect branch, with essentially zero overhead in the common case.</a:t>
             </a:r>
           </a:p>
         </p:txBody>
@@ -760,7 +1128,7 @@
           <a:p>
             <a:r>
               <a:rPr lang="zh-CN" dirty="0"/>
-              <a:t>Let's start with why we need hardware CFI. Once we got NX -- non-executable stacks -- attackers couldn't inject shellcode anymore. So they adapted. Return-Oriented Programming chains tiny sequences of existing code that end in RET -- called gadgets -- to achieve arbitrary computation without ever injecting new code. Jump-Oriented Programming is the same idea but using indirect JMP and CALL instructions. Software defenses like retpolines and kCFI work but have performance costs. CET gives us silicon-level enforcement: the CPU itself checks control flow at every RET and every indirect branch, with essentially zero overhead in the common case.</a:t>
+              <a:t>CET has two complementary mechanisms. IBT -- Indirect Branch Tracking -- is the forward-edge defense. It ensures that every indirect CALL or JMP lands on a valid target marked with an ENDBR instruction. It was merged for the kernel in Linux 5.18. Shadow Stacks are the backward-edge defense. The CPU maintains a second, read-only stack that stores only return addresses. On every RET, it compares both stacks. Userspace shadow stack support landed in Linux 6.6. Both mechanisms share a single exception vector -- trap 21, the Control Protection fault.</a:t>
             </a:r>
           </a:p>
         </p:txBody>
@@ -819,7 +1187,7 @@
           <a:p>
             <a:r>
               <a:rPr lang="zh-CN" dirty="0"/>
-              <a:t>CET has two complementary mechanisms. IBT -- Indirect Branch Tracking -- is the forward-edge defense. It ensures that every indirect CALL or JMP lands on a valid target marked with an ENDBR instruction. It was merged for the kernel in Linux 5.18. Shadow Stacks are the backward-edge defense. The CPU maintains a second, read-only stack that stores only return addresses. On every RET, it compares both stacks. Userspace shadow stack support landed in Linux 6.6. Both mechanisms share a single exception vector -- trap 21, the Control Protection fault.</a:t>
+              <a:t>Here's how IBT works at the microarchitectural level. When the CPU executes an indirect CALL or JMP, it enters a state called Wait For ENDBRANCH. The very next instruction that executes must be an ENDBR64 instruction -- a specific four-byte opcode. If it is, the WFE state clears and execution proceeds normally. If it isn't, the CPU raises a CP fault with error code 3 -- CP_ENDBR. The compiler handles the emission: with cf-protection equals branch, GCC and Clang emit ENDBR at every function that could potentially be an indirect call target. The cost is just 4 bytes per valid target -- the ENDBR instruction itself is essentially a fancy NOP when executed sequentially.</a:t>
             </a:r>
           </a:p>
         </p:txBody>
@@ -878,7 +1246,7 @@
           <a:p>
             <a:r>
               <a:rPr lang="zh-CN" dirty="0"/>
-              <a:t>Here's how IBT works at the microarchitectural level. When the CPU executes an indirect CALL or JMP, it enters a state called Wait For ENDBRANCH. The very next instruction that executes must be an ENDBR64 instruction -- a specific four-byte opcode. If it is, the WFE state clears and execution proceeds normally. If it isn't, the CPU raises a CP fault with error code 3 -- CP_ENDBR. The compiler handles the emission: with cf-protection equals branch, GCC and Clang emit ENDBR at every function that could potentially be an indirect call target. The cost is just 4 bytes per valid target -- the ENDBR instruction itself is essentially a fancy NOP when executed sequentially.</a:t>
+              <a:t>This slide shows the full ENDBR lifecycle across three phases. At compile time, GCC with fcf-protection equals branch emits ENDBR at every function entry. It's conservative because it can't always prove whether a function pointer exists. Then objtool, a build-time static analysis tool, walks the object files and finds functions that are only ever reached by direct CALL. It records their addresses in a special ELF section called dot ibt_endbr_seal. At boot time, apply_seal_endbr iterates that section. For each address, it verifies the instruction is actually ENDBR using gen_endbr, then replaces it with gen_endbr_poison -- the unique poison NOP, nopl minus 42 percent rax, opcode 0xd6401f0f -- via text_poke_early. After sealing, an indirect jump to those sites triggers a CP fault. But the story doesn't end at boot. JIT engines like BPF, V8, and LuaJIT generate code at runtime with indirect branch targets, so they must also emit ENDBR. The BPF JIT does this with EMIT_ENDBR, which calls gen_endbr to get the opcode and writes the raw bytes f3 0f 1e fa into the generated code buffer. Each phase corrects the previous one's limitations: GCC over-marks, objtool identifies the excess, the kernel seals them, and JIT engines extend the system to dynamically generated code.</a:t>
             </a:r>
           </a:p>
         </p:txBody>
@@ -996,7 +1364,7 @@
           <a:p>
             <a:r>
               <a:rPr lang="zh-CN" dirty="0"/>
-              <a:t>This slide shows the full ENDBR lifecycle across three phases. At compile time, GCC with fcf-protection equals branch emits ENDBR at every function entry. It's conservative because it can't always prove whether a function pointer exists. Then objtool, a build-time static analysis tool, walks the object files and finds functions that are only ever reached by direct CALL. It records their addresses in a special ELF section called dot ibt_endbr_seal. At boot time, apply_seal_endbr iterates that section. For each address, it verifies the instruction is actually ENDBR using gen_endbr, then replaces it with gen_endbr_poison -- the unique poison NOP, nopl minus 42 percent rax, opcode 0xd6401f0f -- via text_poke_early. After sealing, an indirect jump to those sites triggers a CP fault. But the story doesn't end at boot. JIT engines like BPF, V8, and LuaJIT generate code at runtime with indirect branch targets, so they must also emit ENDBR. The BPF JIT does this with EMIT_ENDBR, which calls gen_endbr to get the opcode and writes the raw bytes f3 0f 1e fa into the generated code buffer. Each phase corrects the previous one's limitations: GCC over-marks, objtool identifies the excess, the kernel seals them, and JIT engines extend the system to dynamically generated code.</a:t>
+              <a:t>The CP fault carries an error code that tells us exactly what went wrong. CP_RET means the return address from the normal stack didn't match the shadow stack -- a ROP attempt was just blocked. CP_ENDBR means an indirect branch landed somewhere without ENDBR -- a JOP attempt blocked. CP_RSTRORSSP and CP_SETSSBSY relate to shadow stack management instructions that failed validation. And bit 15 tells us if the fault happened inside an SGX enclave.</a:t>
             </a:r>
           </a:p>
         </p:txBody>
@@ -1055,7 +1423,7 @@
           <a:p>
             <a:r>
               <a:rPr lang="zh-CN" dirty="0"/>
-              <a:t>The CP fault carries an error code that tells us exactly what went wrong. CP_RET means the return address from the normal stack didn't match the shadow stack -- a ROP attempt was just blocked. CP_ENDBR means an indirect branch landed somewhere without ENDBR -- a JOP attempt blocked. CP_RSTRORSSP and CP_SETSSBSY relate to shadow stack management instructions that failed validation. And bit 15 tells us if the fault happened inside an SGX enclave.</a:t>
+              <a:t>Here's the actual exception handler. It's clean and straightforward. First check: are we coming from user mode or kernel mode? User-mode CP means a shadow stack violation -- the process tried to RET to a tampered address. The kernel delivers SIGSEGV with the new signal code SEGV_CPERR. Kernel-mode CP means an IBT violation -- an indirect branch in kernel code landed on a non-ENDBR instruction. By default that's a BUG -- you can soften it to a WARN with the ibt equals warn boot parameter for debugging. There's one special case for FRED-aware CPUs: newer Intel processors preserve the WFE state across exception delivery, so we have to explicitly clear it.</a:t>
             </a:r>
           </a:p>
         </p:txBody>
@@ -1114,7 +1482,7 @@
           <a:p>
             <a:r>
               <a:rPr lang="zh-CN" dirty="0"/>
-              <a:t>Here's the actual exception handler. It's clean and straightforward. First check: are we coming from user mode or kernel mode? User-mode CP means a shadow stack violation -- the process tried to RET to a tampered address. The kernel delivers SIGSEGV with the new signal code SEGV_CPERR. Kernel-mode CP means an IBT violation -- an indirect branch in kernel code landed on a non-ENDBR instruction. By default that's a BUG -- you can soften it to a WARN with the ibt equals warn boot parameter for debugging. There's one special case for FRED-aware CPUs: newer Intel processors preserve the WFE state across exception delivery, so we have to explicitly clear it.</a:t>
+              <a:t>The shadow stack concept is beautifully simple. The CPU maintains two stacks in parallel. When CALL executes, it pushes the return address to both the normal stack and the shadow stack. When RET executes, it pops from both and compares. If they match -- normal execution. If they don't -- CP fault, code CP_RET. The critical property: the shadow stack is not writable by normal memory instructions. You cannot MOV or PUSH to it. Only CALL and RET can modify it through normal operation. There's also WRSS -- a special instruction that can write to the shadow stack -- but that requires explicit opt-in, and we'll see why that matters for setjmp.</a:t>
             </a:r>
           </a:p>
         </p:txBody>
@@ -1165,10 +1533,9 @@
           <a:lstStyle/>
           <a:p>
             <a:r>
-              <a:rPr lang="en-US" smtClean="0"/>
+              <a:rPr lang="en-US"/>
               <a:t>Click to edit Master title style</a:t>
             </a:r>
-            <a:endParaRPr lang="en-US"/>
           </a:p>
         </p:txBody>
       </p:sp>
@@ -1284,10 +1651,9 @@
           </a:lstStyle>
           <a:p>
             <a:r>
-              <a:rPr lang="en-US" smtClean="0"/>
+              <a:rPr lang="en-US"/>
               <a:t>Click to edit Master subtitle style</a:t>
             </a:r>
-            <a:endParaRPr lang="en-US"/>
           </a:p>
         </p:txBody>
       </p:sp>
@@ -1308,7 +1674,7 @@
           <a:p>
             <a:fld id="{5BCAD085-E8A6-8845-BD4E-CB4CCA059FC4}" type="datetimeFigureOut">
               <a:rPr lang="en-US" smtClean="0"/>
-              <a:t>1/27/13</a:t>
+              <a:t>5/19/26</a:t>
             </a:fld>
             <a:endParaRPr lang="en-US"/>
           </a:p>
@@ -1402,10 +1768,9 @@
           <a:lstStyle/>
           <a:p>
             <a:r>
-              <a:rPr lang="en-US" smtClean="0"/>
+              <a:rPr lang="en-US"/>
               <a:t>Click to edit Master title style</a:t>
             </a:r>
-            <a:endParaRPr lang="en-US"/>
           </a:p>
         </p:txBody>
       </p:sp>
@@ -1426,38 +1791,37 @@
           <a:p>
             <a:pPr lvl="0"/>
             <a:r>
-              <a:rPr lang="en-US" smtClean="0"/>
+              <a:rPr lang="en-US"/>
               <a:t>Click to edit Master text styles</a:t>
             </a:r>
           </a:p>
           <a:p>
             <a:pPr lvl="1"/>
             <a:r>
-              <a:rPr lang="en-US" smtClean="0"/>
+              <a:rPr lang="en-US"/>
               <a:t>Second level</a:t>
             </a:r>
           </a:p>
           <a:p>
             <a:pPr lvl="2"/>
             <a:r>
-              <a:rPr lang="en-US" smtClean="0"/>
+              <a:rPr lang="en-US"/>
               <a:t>Third level</a:t>
             </a:r>
           </a:p>
           <a:p>
             <a:pPr lvl="3"/>
             <a:r>
-              <a:rPr lang="en-US" smtClean="0"/>
+              <a:rPr lang="en-US"/>
               <a:t>Fourth level</a:t>
             </a:r>
           </a:p>
           <a:p>
             <a:pPr lvl="4"/>
             <a:r>
-              <a:rPr lang="en-US" smtClean="0"/>
+              <a:rPr lang="en-US"/>
               <a:t>Fifth level</a:t>
             </a:r>
-            <a:endParaRPr lang="en-US"/>
           </a:p>
         </p:txBody>
       </p:sp>
@@ -1478,7 +1842,7 @@
           <a:p>
             <a:fld id="{5BCAD085-E8A6-8845-BD4E-CB4CCA059FC4}" type="datetimeFigureOut">
               <a:rPr lang="en-US" smtClean="0"/>
-              <a:t>1/27/13</a:t>
+              <a:t>5/19/26</a:t>
             </a:fld>
             <a:endParaRPr lang="en-US"/>
           </a:p>
@@ -1577,10 +1941,9 @@
           <a:lstStyle/>
           <a:p>
             <a:r>
-              <a:rPr lang="en-US" smtClean="0"/>
+              <a:rPr lang="en-US"/>
               <a:t>Click to edit Master title style</a:t>
             </a:r>
-            <a:endParaRPr lang="en-US"/>
           </a:p>
         </p:txBody>
       </p:sp>
@@ -1606,38 +1969,37 @@
           <a:p>
             <a:pPr lvl="0"/>
             <a:r>
-              <a:rPr lang="en-US" smtClean="0"/>
+              <a:rPr lang="en-US"/>
               <a:t>Click to edit Master text styles</a:t>
             </a:r>
           </a:p>
           <a:p>
             <a:pPr lvl="1"/>
             <a:r>
-              <a:rPr lang="en-US" smtClean="0"/>
+              <a:rPr lang="en-US"/>
               <a:t>Second level</a:t>
             </a:r>
           </a:p>
           <a:p>
             <a:pPr lvl="2"/>
             <a:r>
-              <a:rPr lang="en-US" smtClean="0"/>
+              <a:rPr lang="en-US"/>
               <a:t>Third level</a:t>
             </a:r>
           </a:p>
           <a:p>
             <a:pPr lvl="3"/>
             <a:r>
-              <a:rPr lang="en-US" smtClean="0"/>
+              <a:rPr lang="en-US"/>
               <a:t>Fourth level</a:t>
             </a:r>
           </a:p>
           <a:p>
             <a:pPr lvl="4"/>
             <a:r>
-              <a:rPr lang="en-US" smtClean="0"/>
+              <a:rPr lang="en-US"/>
               <a:t>Fifth level</a:t>
             </a:r>
-            <a:endParaRPr lang="en-US"/>
           </a:p>
         </p:txBody>
       </p:sp>
@@ -1658,7 +2020,7 @@
           <a:p>
             <a:fld id="{5BCAD085-E8A6-8845-BD4E-CB4CCA059FC4}" type="datetimeFigureOut">
               <a:rPr lang="en-US" smtClean="0"/>
-              <a:t>1/27/13</a:t>
+              <a:t>5/19/26</a:t>
             </a:fld>
             <a:endParaRPr lang="en-US"/>
           </a:p>
@@ -1752,10 +2114,9 @@
           <a:lstStyle/>
           <a:p>
             <a:r>
-              <a:rPr lang="en-US" smtClean="0"/>
+              <a:rPr lang="en-US"/>
               <a:t>Click to edit Master title style</a:t>
             </a:r>
-            <a:endParaRPr lang="en-US"/>
           </a:p>
         </p:txBody>
       </p:sp>
@@ -1776,38 +2137,37 @@
           <a:p>
             <a:pPr lvl="0"/>
             <a:r>
-              <a:rPr lang="en-US" smtClean="0"/>
+              <a:rPr lang="en-US"/>
               <a:t>Click to edit Master text styles</a:t>
             </a:r>
           </a:p>
           <a:p>
             <a:pPr lvl="1"/>
             <a:r>
-              <a:rPr lang="en-US" smtClean="0"/>
+              <a:rPr lang="en-US"/>
               <a:t>Second level</a:t>
             </a:r>
           </a:p>
           <a:p>
             <a:pPr lvl="2"/>
             <a:r>
-              <a:rPr lang="en-US" smtClean="0"/>
+              <a:rPr lang="en-US"/>
               <a:t>Third level</a:t>
             </a:r>
           </a:p>
           <a:p>
             <a:pPr lvl="3"/>
             <a:r>
-              <a:rPr lang="en-US" smtClean="0"/>
+              <a:rPr lang="en-US"/>
               <a:t>Fourth level</a:t>
             </a:r>
           </a:p>
           <a:p>
             <a:pPr lvl="4"/>
             <a:r>
-              <a:rPr lang="en-US" smtClean="0"/>
+              <a:rPr lang="en-US"/>
               <a:t>Fifth level</a:t>
             </a:r>
-            <a:endParaRPr lang="en-US"/>
           </a:p>
         </p:txBody>
       </p:sp>
@@ -1828,7 +2188,7 @@
           <a:p>
             <a:fld id="{5BCAD085-E8A6-8845-BD4E-CB4CCA059FC4}" type="datetimeFigureOut">
               <a:rPr lang="en-US" smtClean="0"/>
-              <a:t>1/27/13</a:t>
+              <a:t>5/19/26</a:t>
             </a:fld>
             <a:endParaRPr lang="en-US"/>
           </a:p>
@@ -1931,10 +2291,9 @@
           </a:lstStyle>
           <a:p>
             <a:r>
-              <a:rPr lang="en-US" smtClean="0"/>
+              <a:rPr lang="en-US"/>
               <a:t>Click to edit Master title style</a:t>
             </a:r>
-            <a:endParaRPr lang="en-US"/>
           </a:p>
         </p:txBody>
       </p:sp>
@@ -2051,7 +2410,7 @@
           <a:p>
             <a:pPr lvl="0"/>
             <a:r>
-              <a:rPr lang="en-US" smtClean="0"/>
+              <a:rPr lang="en-US"/>
               <a:t>Click to edit Master text styles</a:t>
             </a:r>
           </a:p>
@@ -2074,7 +2433,7 @@
           <a:p>
             <a:fld id="{5BCAD085-E8A6-8845-BD4E-CB4CCA059FC4}" type="datetimeFigureOut">
               <a:rPr lang="en-US" smtClean="0"/>
-              <a:t>1/27/13</a:t>
+              <a:t>5/19/26</a:t>
             </a:fld>
             <a:endParaRPr lang="en-US"/>
           </a:p>
@@ -2168,10 +2527,9 @@
           <a:lstStyle/>
           <a:p>
             <a:r>
-              <a:rPr lang="en-US" smtClean="0"/>
+              <a:rPr lang="en-US"/>
               <a:t>Click to edit Master title style</a:t>
             </a:r>
-            <a:endParaRPr lang="en-US"/>
           </a:p>
         </p:txBody>
       </p:sp>
@@ -2225,38 +2583,37 @@
           <a:p>
             <a:pPr lvl="0"/>
             <a:r>
-              <a:rPr lang="en-US" smtClean="0"/>
+              <a:rPr lang="en-US"/>
               <a:t>Click to edit Master text styles</a:t>
             </a:r>
           </a:p>
           <a:p>
             <a:pPr lvl="1"/>
             <a:r>
-              <a:rPr lang="en-US" smtClean="0"/>
+              <a:rPr lang="en-US"/>
               <a:t>Second level</a:t>
             </a:r>
           </a:p>
           <a:p>
             <a:pPr lvl="2"/>
             <a:r>
-              <a:rPr lang="en-US" smtClean="0"/>
+              <a:rPr lang="en-US"/>
               <a:t>Third level</a:t>
             </a:r>
           </a:p>
           <a:p>
             <a:pPr lvl="3"/>
             <a:r>
-              <a:rPr lang="en-US" smtClean="0"/>
+              <a:rPr lang="en-US"/>
               <a:t>Fourth level</a:t>
             </a:r>
           </a:p>
           <a:p>
             <a:pPr lvl="4"/>
             <a:r>
-              <a:rPr lang="en-US" smtClean="0"/>
+              <a:rPr lang="en-US"/>
               <a:t>Fifth level</a:t>
             </a:r>
-            <a:endParaRPr lang="en-US"/>
           </a:p>
         </p:txBody>
       </p:sp>
@@ -2310,38 +2667,37 @@
           <a:p>
             <a:pPr lvl="0"/>
             <a:r>
-              <a:rPr lang="en-US" smtClean="0"/>
+              <a:rPr lang="en-US"/>
               <a:t>Click to edit Master text styles</a:t>
             </a:r>
           </a:p>
           <a:p>
             <a:pPr lvl="1"/>
             <a:r>
-              <a:rPr lang="en-US" smtClean="0"/>
+              <a:rPr lang="en-US"/>
               <a:t>Second level</a:t>
             </a:r>
           </a:p>
           <a:p>
             <a:pPr lvl="2"/>
             <a:r>
-              <a:rPr lang="en-US" smtClean="0"/>
+              <a:rPr lang="en-US"/>
               <a:t>Third level</a:t>
             </a:r>
           </a:p>
           <a:p>
             <a:pPr lvl="3"/>
             <a:r>
-              <a:rPr lang="en-US" smtClean="0"/>
+              <a:rPr lang="en-US"/>
               <a:t>Fourth level</a:t>
             </a:r>
           </a:p>
           <a:p>
             <a:pPr lvl="4"/>
             <a:r>
-              <a:rPr lang="en-US" smtClean="0"/>
+              <a:rPr lang="en-US"/>
               <a:t>Fifth level</a:t>
             </a:r>
-            <a:endParaRPr lang="en-US"/>
           </a:p>
         </p:txBody>
       </p:sp>
@@ -2362,7 +2718,7 @@
           <a:p>
             <a:fld id="{5BCAD085-E8A6-8845-BD4E-CB4CCA059FC4}" type="datetimeFigureOut">
               <a:rPr lang="en-US" smtClean="0"/>
-              <a:t>1/27/13</a:t>
+              <a:t>5/19/26</a:t>
             </a:fld>
             <a:endParaRPr lang="en-US"/>
           </a:p>
@@ -2460,10 +2816,9 @@
           </a:lstStyle>
           <a:p>
             <a:r>
-              <a:rPr lang="en-US" smtClean="0"/>
+              <a:rPr lang="en-US"/>
               <a:t>Click to edit Master title style</a:t>
             </a:r>
-            <a:endParaRPr lang="en-US"/>
           </a:p>
         </p:txBody>
       </p:sp>
@@ -2526,7 +2881,7 @@
           <a:p>
             <a:pPr lvl="0"/>
             <a:r>
-              <a:rPr lang="en-US" smtClean="0"/>
+              <a:rPr lang="en-US"/>
               <a:t>Click to edit Master text styles</a:t>
             </a:r>
           </a:p>
@@ -2582,38 +2937,37 @@
           <a:p>
             <a:pPr lvl="0"/>
             <a:r>
-              <a:rPr lang="en-US" smtClean="0"/>
+              <a:rPr lang="en-US"/>
               <a:t>Click to edit Master text styles</a:t>
             </a:r>
           </a:p>
           <a:p>
             <a:pPr lvl="1"/>
             <a:r>
-              <a:rPr lang="en-US" smtClean="0"/>
+              <a:rPr lang="en-US"/>
               <a:t>Second level</a:t>
             </a:r>
           </a:p>
           <a:p>
             <a:pPr lvl="2"/>
             <a:r>
-              <a:rPr lang="en-US" smtClean="0"/>
+              <a:rPr lang="en-US"/>
               <a:t>Third level</a:t>
             </a:r>
           </a:p>
           <a:p>
             <a:pPr lvl="3"/>
             <a:r>
-              <a:rPr lang="en-US" smtClean="0"/>
+              <a:rPr lang="en-US"/>
               <a:t>Fourth level</a:t>
             </a:r>
           </a:p>
           <a:p>
             <a:pPr lvl="4"/>
             <a:r>
-              <a:rPr lang="en-US" smtClean="0"/>
+              <a:rPr lang="en-US"/>
               <a:t>Fifth level</a:t>
             </a:r>
-            <a:endParaRPr lang="en-US"/>
           </a:p>
         </p:txBody>
       </p:sp>
@@ -2676,7 +3030,7 @@
           <a:p>
             <a:pPr lvl="0"/>
             <a:r>
-              <a:rPr lang="en-US" smtClean="0"/>
+              <a:rPr lang="en-US"/>
               <a:t>Click to edit Master text styles</a:t>
             </a:r>
           </a:p>
@@ -2732,38 +3086,37 @@
           <a:p>
             <a:pPr lvl="0"/>
             <a:r>
-              <a:rPr lang="en-US" smtClean="0"/>
+              <a:rPr lang="en-US"/>
               <a:t>Click to edit Master text styles</a:t>
             </a:r>
           </a:p>
           <a:p>
             <a:pPr lvl="1"/>
             <a:r>
-              <a:rPr lang="en-US" smtClean="0"/>
+              <a:rPr lang="en-US"/>
               <a:t>Second level</a:t>
             </a:r>
           </a:p>
           <a:p>
             <a:pPr lvl="2"/>
             <a:r>
-              <a:rPr lang="en-US" smtClean="0"/>
+              <a:rPr lang="en-US"/>
               <a:t>Third level</a:t>
             </a:r>
           </a:p>
           <a:p>
             <a:pPr lvl="3"/>
             <a:r>
-              <a:rPr lang="en-US" smtClean="0"/>
+              <a:rPr lang="en-US"/>
               <a:t>Fourth level</a:t>
             </a:r>
           </a:p>
           <a:p>
             <a:pPr lvl="4"/>
             <a:r>
-              <a:rPr lang="en-US" smtClean="0"/>
+              <a:rPr lang="en-US"/>
               <a:t>Fifth level</a:t>
             </a:r>
-            <a:endParaRPr lang="en-US"/>
           </a:p>
         </p:txBody>
       </p:sp>
@@ -2784,7 +3137,7 @@
           <a:p>
             <a:fld id="{5BCAD085-E8A6-8845-BD4E-CB4CCA059FC4}" type="datetimeFigureOut">
               <a:rPr lang="en-US" smtClean="0"/>
-              <a:t>1/27/13</a:t>
+              <a:t>5/19/26</a:t>
             </a:fld>
             <a:endParaRPr lang="en-US"/>
           </a:p>
@@ -2878,10 +3231,9 @@
           <a:lstStyle/>
           <a:p>
             <a:r>
-              <a:rPr lang="en-US" smtClean="0"/>
+              <a:rPr lang="en-US"/>
               <a:t>Click to edit Master title style</a:t>
             </a:r>
-            <a:endParaRPr lang="en-US"/>
           </a:p>
         </p:txBody>
       </p:sp>
@@ -2902,7 +3254,7 @@
           <a:p>
             <a:fld id="{5BCAD085-E8A6-8845-BD4E-CB4CCA059FC4}" type="datetimeFigureOut">
               <a:rPr lang="en-US" smtClean="0"/>
-              <a:t>1/27/13</a:t>
+              <a:t>5/19/26</a:t>
             </a:fld>
             <a:endParaRPr lang="en-US"/>
           </a:p>
@@ -2997,7 +3349,7 @@
           <a:p>
             <a:fld id="{5BCAD085-E8A6-8845-BD4E-CB4CCA059FC4}" type="datetimeFigureOut">
               <a:rPr lang="en-US" smtClean="0"/>
-              <a:t>1/27/13</a:t>
+              <a:t>5/19/26</a:t>
             </a:fld>
             <a:endParaRPr lang="en-US"/>
           </a:p>
@@ -3100,10 +3452,9 @@
           </a:lstStyle>
           <a:p>
             <a:r>
-              <a:rPr lang="en-US" smtClean="0"/>
+              <a:rPr lang="en-US"/>
               <a:t>Click to edit Master title style</a:t>
             </a:r>
-            <a:endParaRPr lang="en-US"/>
           </a:p>
         </p:txBody>
       </p:sp>
@@ -3157,38 +3508,37 @@
           <a:p>
             <a:pPr lvl="0"/>
             <a:r>
-              <a:rPr lang="en-US" smtClean="0"/>
+              <a:rPr lang="en-US"/>
               <a:t>Click to edit Master text styles</a:t>
             </a:r>
           </a:p>
           <a:p>
             <a:pPr lvl="1"/>
             <a:r>
-              <a:rPr lang="en-US" smtClean="0"/>
+              <a:rPr lang="en-US"/>
               <a:t>Second level</a:t>
             </a:r>
           </a:p>
           <a:p>
             <a:pPr lvl="2"/>
             <a:r>
-              <a:rPr lang="en-US" smtClean="0"/>
+              <a:rPr lang="en-US"/>
               <a:t>Third level</a:t>
             </a:r>
           </a:p>
           <a:p>
             <a:pPr lvl="3"/>
             <a:r>
-              <a:rPr lang="en-US" smtClean="0"/>
+              <a:rPr lang="en-US"/>
               <a:t>Fourth level</a:t>
             </a:r>
           </a:p>
           <a:p>
             <a:pPr lvl="4"/>
             <a:r>
-              <a:rPr lang="en-US" smtClean="0"/>
+              <a:rPr lang="en-US"/>
               <a:t>Fifth level</a:t>
             </a:r>
-            <a:endParaRPr lang="en-US"/>
           </a:p>
         </p:txBody>
       </p:sp>
@@ -3251,7 +3601,7 @@
           <a:p>
             <a:pPr lvl="0"/>
             <a:r>
-              <a:rPr lang="en-US" smtClean="0"/>
+              <a:rPr lang="en-US"/>
               <a:t>Click to edit Master text styles</a:t>
             </a:r>
           </a:p>
@@ -3274,7 +3624,7 @@
           <a:p>
             <a:fld id="{5BCAD085-E8A6-8845-BD4E-CB4CCA059FC4}" type="datetimeFigureOut">
               <a:rPr lang="en-US" smtClean="0"/>
-              <a:t>1/27/13</a:t>
+              <a:t>5/19/26</a:t>
             </a:fld>
             <a:endParaRPr lang="en-US"/>
           </a:p>
@@ -3377,10 +3727,9 @@
           </a:lstStyle>
           <a:p>
             <a:r>
-              <a:rPr lang="en-US" smtClean="0"/>
+              <a:rPr lang="en-US"/>
               <a:t>Click to edit Master title style</a:t>
             </a:r>
-            <a:endParaRPr lang="en-US"/>
           </a:p>
         </p:txBody>
       </p:sp>
@@ -3504,7 +3853,7 @@
           <a:p>
             <a:pPr lvl="0"/>
             <a:r>
-              <a:rPr lang="en-US" smtClean="0"/>
+              <a:rPr lang="en-US"/>
               <a:t>Click to edit Master text styles</a:t>
             </a:r>
           </a:p>
@@ -3527,7 +3876,7 @@
           <a:p>
             <a:fld id="{5BCAD085-E8A6-8845-BD4E-CB4CCA059FC4}" type="datetimeFigureOut">
               <a:rPr lang="en-US" smtClean="0"/>
-              <a:t>1/27/13</a:t>
+              <a:t>5/19/26</a:t>
             </a:fld>
             <a:endParaRPr lang="en-US"/>
           </a:p>
@@ -3636,10 +3985,9 @@
           <a:lstStyle/>
           <a:p>
             <a:r>
-              <a:rPr lang="en-US" smtClean="0"/>
+              <a:rPr lang="en-US"/>
               <a:t>Click to edit Master title style</a:t>
             </a:r>
-            <a:endParaRPr lang="en-US"/>
           </a:p>
         </p:txBody>
       </p:sp>
@@ -3670,38 +4018,37 @@
           <a:p>
             <a:pPr lvl="0"/>
             <a:r>
-              <a:rPr lang="en-US" smtClean="0"/>
+              <a:rPr lang="en-US"/>
               <a:t>Click to edit Master text styles</a:t>
             </a:r>
           </a:p>
           <a:p>
             <a:pPr lvl="1"/>
             <a:r>
-              <a:rPr lang="en-US" smtClean="0"/>
+              <a:rPr lang="en-US"/>
               <a:t>Second level</a:t>
             </a:r>
           </a:p>
           <a:p>
             <a:pPr lvl="2"/>
             <a:r>
-              <a:rPr lang="en-US" smtClean="0"/>
+              <a:rPr lang="en-US"/>
               <a:t>Third level</a:t>
             </a:r>
           </a:p>
           <a:p>
             <a:pPr lvl="3"/>
             <a:r>
-              <a:rPr lang="en-US" smtClean="0"/>
+              <a:rPr lang="en-US"/>
               <a:t>Fourth level</a:t>
             </a:r>
           </a:p>
           <a:p>
             <a:pPr lvl="4"/>
             <a:r>
-              <a:rPr lang="en-US" smtClean="0"/>
+              <a:rPr lang="en-US"/>
               <a:t>Fifth level</a:t>
             </a:r>
-            <a:endParaRPr lang="en-US"/>
           </a:p>
         </p:txBody>
       </p:sp>
@@ -3740,7 +4087,7 @@
           <a:p>
             <a:fld id="{5BCAD085-E8A6-8845-BD4E-CB4CCA059FC4}" type="datetimeFigureOut">
               <a:rPr lang="en-US" smtClean="0"/>
-              <a:t>1/27/13</a:t>
+              <a:t>5/19/26</a:t>
             </a:fld>
             <a:endParaRPr lang="en-US"/>
           </a:p>
@@ -4125,7 +4472,7 @@
         </p:nvPicPr>
         <p:blipFill>
           <a:blip r:embed="rId2"/>
-          <a:srcRect l="0" t="781" r="0" b="781"/>
+          <a:srcRect t="781" b="781"/>
           <a:stretch>
             <a:fillRect/>
           </a:stretch>
@@ -4230,26 +4577,25 @@
           </p:nvSpPr>
           <p:spPr>
             <a:xfrm>
-              <a:off x="725805" y="3435668"/>
-              <a:ext cx="3984029" cy="579120"/>
-            </a:xfrm>
-            <a:prstGeom prst="rect">
-              <a:avLst/>
-            </a:prstGeom>
-            <a:noFill/>
-            <a:ln>
-              <a:noFill/>
-            </a:ln>
-          </p:spPr>
-          <p:txBody>
-            <a:bodyPr wrap="none" lIns="0" tIns="0" rIns="0" bIns="0" anchor="t" anchorCtr="0">
-              <a:spAutoFit/>
-            </a:bodyPr>
-            <a:lstStyle/>
-            <a:p>
-              <a:pPr algn="l"/>
-              <a:r>
-                <a:rPr lang="zh-CN" sz="2850" b="1" dirty="0">
+              <a:off x="725805" y="3111011"/>
+              <a:ext cx="6274988" cy="877163"/>
+            </a:xfrm>
+            <a:prstGeom prst="rect">
+              <a:avLst/>
+            </a:prstGeom>
+            <a:noFill/>
+            <a:ln>
+              <a:noFill/>
+            </a:ln>
+          </p:spPr>
+          <p:txBody>
+            <a:bodyPr wrap="none" lIns="0" tIns="0" rIns="0" bIns="0" anchor="t" anchorCtr="0">
+              <a:spAutoFit/>
+            </a:bodyPr>
+            <a:lstStyle/>
+            <a:p>
+              <a:r>
+                <a:rPr lang="en-US" altLang="zh-CN" sz="2850" b="1" dirty="0">
                   <a:solidFill>
                     <a:srgbClr val="000000"/>
                   </a:solidFill>
@@ -4257,8 +4603,29 @@
                   <a:ea typeface="Microsoft YaHei"/>
                   <a:cs typeface="Arial"/>
                 </a:rPr>
-                <a:t>Intel CET Deep Dive</a:t>
-              </a:r>
+                <a:t>A technical deep dive into Intel CET </a:t>
+              </a:r>
+            </a:p>
+            <a:p>
+              <a:r>
+                <a:rPr lang="en-US" altLang="zh-CN" sz="2850" b="1" dirty="0">
+                  <a:solidFill>
+                    <a:srgbClr val="000000"/>
+                  </a:solidFill>
+                  <a:latin typeface="Arial"/>
+                  <a:ea typeface="Microsoft YaHei"/>
+                  <a:cs typeface="Arial"/>
+                </a:rPr>
+                <a:t>Implementation in Linux</a:t>
+              </a:r>
+              <a:endParaRPr lang="zh-CN" altLang="en-US" sz="2850" b="1" dirty="0">
+                <a:solidFill>
+                  <a:srgbClr val="000000"/>
+                </a:solidFill>
+                <a:latin typeface="Arial"/>
+                <a:ea typeface="Microsoft YaHei"/>
+                <a:cs typeface="Arial"/>
+              </a:endParaRPr>
             </a:p>
           </p:txBody>
         </p:sp>
@@ -4271,10 +4638,10 @@
         </p:nvGrpSpPr>
         <p:grpSpPr>
           <a:xfrm>
-            <a:off x="438150" y="4581525"/>
-            <a:ext cx="5415172" cy="533400"/>
+            <a:off x="588757" y="4594860"/>
+            <a:ext cx="2573991" cy="533400"/>
             <a:chOff x="438150" y="4581525"/>
-            <a:chExt cx="5415172" cy="533400"/>
+            <a:chExt cx="2573991" cy="533400"/>
           </a:xfrm>
         </p:grpSpPr>
         <p:sp>
@@ -4286,7 +4653,7 @@
           <p:spPr>
             <a:xfrm>
               <a:off x="438150" y="4581525"/>
-              <a:ext cx="4038600" cy="533400"/>
+              <a:ext cx="2573991" cy="533400"/>
             </a:xfrm>
             <a:prstGeom prst="rect">
               <a:avLst/>
@@ -4308,7 +4675,7 @@
           <p:spPr>
             <a:xfrm>
               <a:off x="601980" y="4769168"/>
-              <a:ext cx="5251342" cy="274320"/>
+              <a:ext cx="2154436" cy="207749"/>
             </a:xfrm>
             <a:prstGeom prst="rect">
               <a:avLst/>
@@ -4326,7 +4693,7 @@
             <a:p>
               <a:pPr algn="l"/>
               <a:r>
-                <a:rPr lang="zh-CN" sz="1350" b="1" dirty="0">
+                <a:rPr lang="en-US" altLang="zh-CN" sz="1350" b="1" dirty="0">
                   <a:solidFill>
                     <a:srgbClr val="FFFFFF"/>
                   </a:solidFill>
@@ -4334,147 +4701,16 @@
                   <a:ea typeface="Microsoft YaHei"/>
                   <a:cs typeface="Arial"/>
                 </a:rPr>
-                <a:t>Hardware Control-Flow Integrity in the Linux Kernel</a:t>
-              </a:r>
-            </a:p>
-          </p:txBody>
-        </p:sp>
-      </p:grpSp>
-      <p:grpSp>
-        <p:nvGrpSpPr>
-          <p:cNvPr id="14" name="Group 14"/>
-          <p:cNvGrpSpPr/>
-          <p:nvPr/>
-        </p:nvGrpSpPr>
-        <p:grpSpPr>
-          <a:xfrm>
-            <a:off x="422910" y="5737860"/>
-            <a:ext cx="2291763" cy="641509"/>
-            <a:chOff x="422910" y="5737860"/>
-            <a:chExt cx="2291763" cy="641509"/>
-          </a:xfrm>
-        </p:grpSpPr>
-        <p:sp>
-          <p:nvSpPr>
-            <p:cNvPr id="11" name="TextBox 11"/>
-            <p:cNvSpPr txBox="1"/>
-            <p:nvPr/>
-          </p:nvSpPr>
-          <p:spPr>
-            <a:xfrm>
-              <a:off x="422910" y="5737860"/>
-              <a:ext cx="1134618" cy="243840"/>
-            </a:xfrm>
-            <a:prstGeom prst="rect">
-              <a:avLst/>
-            </a:prstGeom>
-            <a:noFill/>
-            <a:ln>
-              <a:noFill/>
-            </a:ln>
-          </p:spPr>
-          <p:txBody>
-            <a:bodyPr wrap="none" lIns="0" tIns="0" rIns="0" bIns="0" anchor="t" anchorCtr="0">
-              <a:spAutoFit/>
-            </a:bodyPr>
-            <a:lstStyle/>
-            <a:p>
-              <a:pPr algn="l"/>
-              <a:r>
-                <a:rPr lang="zh-CN" sz="1200" dirty="0">
-                  <a:solidFill>
-                    <a:srgbClr val="FFFFFF"/>
-                  </a:solidFill>
-                  <a:latin typeface="Arial"/>
-                  <a:ea typeface="Microsoft YaHei"/>
-                  <a:cs typeface="Arial"/>
-                </a:rPr>
-                <a:t>Jay Tharwani</a:t>
-              </a:r>
-            </a:p>
-          </p:txBody>
-        </p:sp>
-        <p:sp>
-          <p:nvSpPr>
-            <p:cNvPr id="12" name="TextBox 12"/>
-            <p:cNvSpPr txBox="1"/>
-            <p:nvPr/>
-          </p:nvSpPr>
-          <p:spPr>
-            <a:xfrm>
-              <a:off x="425768" y="5990749"/>
-              <a:ext cx="1854589" cy="198120"/>
-            </a:xfrm>
-            <a:prstGeom prst="rect">
-              <a:avLst/>
-            </a:prstGeom>
-            <a:noFill/>
-            <a:ln>
-              <a:noFill/>
-            </a:ln>
-          </p:spPr>
-          <p:txBody>
-            <a:bodyPr wrap="none" lIns="0" tIns="0" rIns="0" bIns="0" anchor="t" anchorCtr="0">
-              <a:spAutoFit/>
-            </a:bodyPr>
-            <a:lstStyle/>
-            <a:p>
-              <a:pPr algn="l"/>
-              <a:r>
-                <a:rPr lang="zh-CN" sz="975" dirty="0">
-                  <a:solidFill>
-                    <a:srgbClr val="FFFFFF">
-                      <a:alpha val="80000"/>
-                    </a:srgbClr>
-                  </a:solidFill>
-                  <a:latin typeface="Arial"/>
-                  <a:ea typeface="Microsoft YaHei"/>
-                  <a:cs typeface="Arial"/>
-                </a:rPr>
-                <a:t>jtharwan@alumni.uncc.edu</a:t>
-              </a:r>
-            </a:p>
-          </p:txBody>
-        </p:sp>
-        <p:sp>
-          <p:nvSpPr>
-            <p:cNvPr id="13" name="TextBox 13"/>
-            <p:cNvSpPr txBox="1"/>
-            <p:nvPr/>
-          </p:nvSpPr>
-          <p:spPr>
-            <a:xfrm>
-              <a:off x="425768" y="6181249"/>
-              <a:ext cx="2288905" cy="198120"/>
-            </a:xfrm>
-            <a:prstGeom prst="rect">
-              <a:avLst/>
-            </a:prstGeom>
-            <a:noFill/>
-            <a:ln>
-              <a:noFill/>
-            </a:ln>
-          </p:spPr>
-          <p:txBody>
-            <a:bodyPr wrap="none" lIns="0" tIns="0" rIns="0" bIns="0" anchor="t" anchorCtr="0">
-              <a:spAutoFit/>
-            </a:bodyPr>
-            <a:lstStyle/>
-            <a:p>
-              <a:pPr algn="l"/>
-              <a:r>
-                <a:rPr lang="zh-CN" sz="975" dirty="0">
-                  <a:solidFill>
-                    <a:srgbClr val="FFFFFF">
-                      <a:alpha val="60000"/>
-                    </a:srgbClr>
-                  </a:solidFill>
-                  <a:latin typeface="Arial"/>
-                  <a:ea typeface="Microsoft YaHei"/>
-                  <a:cs typeface="Arial"/>
-                </a:rPr>
-                <a:t>Linux Summit North America 2026</a:t>
-              </a:r>
+                <a:t>Jay Tharwani, NetApp Inc.</a:t>
+              </a:r>
+              <a:endParaRPr lang="zh-CN" sz="1350" b="1" dirty="0">
+                <a:solidFill>
+                  <a:srgbClr val="FFFFFF"/>
+                </a:solidFill>
+                <a:latin typeface="Arial"/>
+                <a:ea typeface="Microsoft YaHei"/>
+                <a:cs typeface="Arial"/>
+              </a:endParaRPr>
             </a:p>
           </p:txBody>
         </p:sp>
@@ -4508,9 +4744,18 @@
   <p:clrMapOvr>
     <a:masterClrMapping/>
   </p:clrMapOvr>
-  <p:transition xmlns:p14="http://schemas.microsoft.com/office/powerpoint/2010/main" p14:dur="400">
-    <p:fade/>
-  </p:transition>
+  <mc:AlternateContent xmlns:mc="http://schemas.openxmlformats.org/markup-compatibility/2006">
+    <mc:Choice xmlns:p14="http://schemas.microsoft.com/office/powerpoint/2010/main" Requires="p14">
+      <p:transition p14:dur="400">
+        <p:fade/>
+      </p:transition>
+    </mc:Choice>
+    <mc:Fallback>
+      <p:transition>
+        <p:fade/>
+      </p:transition>
+    </mc:Fallback>
+  </mc:AlternateContent>
   <p:timing>
     <p:tnLst>
       <p:par>
@@ -4616,50 +4861,6 @@
                             </p:childTnLst>
                           </p:cTn>
                         </p:par>
-                        <p:par>
-                          <p:cTn id="12" fill="hold">
-                            <p:stCondLst>
-                              <p:cond delay="1800"/>
-                            </p:stCondLst>
-                            <p:childTnLst>
-                              <p:par>
-                                <p:cTn id="13" presetID="5" presetClass="entr" presetSubtype="6" fill="hold" nodeType="afterEffect">
-                                  <p:stCondLst>
-                                    <p:cond delay="0"/>
-                                  </p:stCondLst>
-                                  <p:childTnLst>
-                                    <p:set>
-                                      <p:cBhvr>
-                                        <p:cTn id="14" dur="1" fill="hold">
-                                          <p:stCondLst>
-                                            <p:cond delay="0"/>
-                                          </p:stCondLst>
-                                        </p:cTn>
-                                        <p:tgtEl>
-                                          <p:spTgt spid="14"/>
-                                        </p:tgtEl>
-                                        <p:attrNameLst>
-                                          <p:attrName>style.visibility</p:attrName>
-                                        </p:attrNameLst>
-                                      </p:cBhvr>
-                                      <p:to>
-                                        <p:strVal val="visible"/>
-                                      </p:to>
-                                    </p:set>
-                                    <p:animEffect transition="in" filter="checkerboard(across)">
-                                      <p:cBhvr>
-                                        <p:cTn id="15" dur="400"/>
-                                        <p:tgtEl>
-                                          <p:spTgt spid="14"/>
-                                        </p:tgtEl>
-                                      </p:cBhvr>
-                                    </p:animEffect>
-                                  </p:childTnLst>
-                                </p:cTn>
-                              </p:par>
-                            </p:childTnLst>
-                          </p:cTn>
-                        </p:par>
                       </p:childTnLst>
                     </p:cTn>
                   </p:par>
@@ -4687,7 +4888,6 @@
     <p:bldLst>
       <p:bldP spid="7" grpId="0"/>
       <p:bldP spid="10" grpId="0"/>
-      <p:bldP spid="14" grpId="0"/>
     </p:bldLst>
   </p:timing>
 </p:sld>
@@ -4733,8 +4933,8 @@
             <p:nvPr/>
           </p:nvPicPr>
           <p:blipFill>
-            <a:blip r:embed="rId2"/>
-            <a:srcRect l="0" t="781" r="0" b="781"/>
+            <a:blip r:embed="rId3"/>
+            <a:srcRect t="781" b="781"/>
             <a:stretch>
               <a:fillRect/>
             </a:stretch>
@@ -6373,7 +6573,7 @@
                   <a:ea typeface="Microsoft YaHei"/>
                   <a:cs typeface="Arial"/>
                 </a:rPr>
-                <a:t xml:space="preserve">Shadow stack is </a:t>
+                <a:t>Shadow stack is </a:t>
               </a:r>
               <a:r>
                 <a:rPr lang="zh-CN" sz="1050" b="1" dirty="0">
@@ -6395,7 +6595,7 @@
                   <a:ea typeface="Microsoft YaHei"/>
                   <a:cs typeface="Arial"/>
                 </a:rPr>
-                <a:t xml:space="preserve"> writable by normal MOV/PUSH instructions</a:t>
+                <a:t> writable by normal MOV/PUSH instructions</a:t>
               </a:r>
             </a:p>
           </p:txBody>
@@ -6848,7 +7048,7 @@
                   <a:ea typeface="Microsoft YaHei"/>
                   <a:cs typeface="Arial"/>
                 </a:rPr>
-                <a:t xml:space="preserve">Only </a:t>
+                <a:t>Only </a:t>
               </a:r>
               <a:r>
                 <a:rPr lang="zh-CN" sz="1050" b="1" dirty="0">
@@ -6870,7 +7070,7 @@
                   <a:ea typeface="Microsoft YaHei"/>
                   <a:cs typeface="Arial"/>
                 </a:rPr>
-                <a:t xml:space="preserve">, </a:t>
+                <a:t>, </a:t>
               </a:r>
               <a:r>
                 <a:rPr lang="zh-CN" sz="1050" b="1" dirty="0">
@@ -7133,7 +7333,7 @@
                   <a:ea typeface="Microsoft YaHei"/>
                   <a:cs typeface="Arial"/>
                 </a:rPr>
-                <a:t xml:space="preserve"> holds the current user Shadow Stack Pointer</a:t>
+                <a:t> holds the current user Shadow Stack Pointer</a:t>
               </a:r>
             </a:p>
           </p:txBody>
@@ -7313,7 +7513,7 @@
                   <a:ea typeface="Microsoft YaHei"/>
                   <a:cs typeface="Arial"/>
                 </a:rPr>
-                <a:t xml:space="preserve">Mismatch on RET triggers #CP with error code </a:t>
+                <a:t>Mismatch on RET triggers #CP with error code </a:t>
               </a:r>
               <a:r>
                 <a:rPr lang="zh-CN" sz="1050" dirty="0">
@@ -7419,7 +7619,7 @@
             <p:nvPr/>
           </p:nvPicPr>
           <p:blipFill>
-            <a:blip r:embed="rId3"/>
+            <a:blip r:embed="rId4"/>
             <a:stretch>
               <a:fillRect/>
             </a:stretch>
@@ -7482,9 +7682,18 @@
   <p:clrMapOvr>
     <a:masterClrMapping/>
   </p:clrMapOvr>
-  <p:transition xmlns:p14="http://schemas.microsoft.com/office/powerpoint/2010/main" p14:dur="400">
-    <p:fade/>
-  </p:transition>
+  <mc:AlternateContent xmlns:mc="http://schemas.openxmlformats.org/markup-compatibility/2006">
+    <mc:Choice xmlns:p14="http://schemas.microsoft.com/office/powerpoint/2010/main" Requires="p14">
+      <p:transition p14:dur="400">
+        <p:fade/>
+      </p:transition>
+    </mc:Choice>
+    <mc:Fallback>
+      <p:transition>
+        <p:fade/>
+      </p:transition>
+    </mc:Fallback>
+  </mc:AlternateContent>
   <p:timing>
     <p:tnLst>
       <p:par>
@@ -7842,8 +8051,8 @@
             <p:nvPr/>
           </p:nvPicPr>
           <p:blipFill>
-            <a:blip r:embed="rId2"/>
-            <a:srcRect l="0" t="781" r="0" b="781"/>
+            <a:blip r:embed="rId3"/>
+            <a:srcRect t="781" b="781"/>
             <a:stretch>
               <a:fillRect/>
             </a:stretch>
@@ -7929,10 +8138,10 @@
         </p:nvGrpSpPr>
         <p:grpSpPr>
           <a:xfrm>
-            <a:off x="476250" y="1285875"/>
-            <a:ext cx="6667500" cy="4071937"/>
-            <a:chOff x="476250" y="1285875"/>
-            <a:chExt cx="6667500" cy="4071937"/>
+            <a:off x="476250" y="1285874"/>
+            <a:ext cx="6667500" cy="4101941"/>
+            <a:chOff x="476250" y="1285874"/>
+            <a:chExt cx="6667500" cy="4101941"/>
           </a:xfrm>
         </p:grpSpPr>
         <p:sp>
@@ -7943,8 +8152,8 @@
           </p:nvSpPr>
           <p:spPr>
             <a:xfrm>
-              <a:off x="476250" y="1285875"/>
-              <a:ext cx="6667500" cy="3810000"/>
+              <a:off x="476250" y="1285874"/>
+              <a:ext cx="6667500" cy="4101941"/>
             </a:xfrm>
             <a:prstGeom prst="roundRect">
               <a:avLst>
@@ -8045,7 +8254,7 @@
                   <a:ea typeface="Microsoft YaHei"/>
                   <a:cs typeface="Consolas"/>
                 </a:rPr>
-                <a:t xml:space="preserve"> </a:t>
+                <a:t> </a:t>
               </a:r>
               <a:r>
                 <a:rPr lang="zh-CN" sz="1050" dirty="0">
@@ -8067,7 +8276,7 @@
                   <a:ea typeface="Microsoft YaHei"/>
                   <a:cs typeface="Consolas"/>
                 </a:rPr>
-                <a:t xml:space="preserve"> shstk_setup(</a:t>
+                <a:t> shstk_setup(</a:t>
               </a:r>
               <a:r>
                 <a:rPr lang="zh-CN" sz="1050" dirty="0">
@@ -8089,18 +8298,7 @@
                   <a:ea typeface="Microsoft YaHei"/>
                   <a:cs typeface="Consolas"/>
                 </a:rPr>
-                <a:t>)</a:t>
-              </a:r>
-              <a:r>
-                <a:rPr lang="zh-CN" sz="1050" dirty="0">
-                  <a:solidFill>
-                    <a:srgbClr val="E0E0E0"/>
-                  </a:solidFill>
-                  <a:latin typeface="Consolas"/>
-                  <a:ea typeface="Microsoft YaHei"/>
-                  <a:cs typeface="Consolas"/>
-                </a:rPr>
-                <a:t xml:space="preserve">
+                <a:t>)
 </a:t>
               </a:r>
             </a:p>
@@ -8181,7 +8379,7 @@
                   <a:ea typeface="Microsoft YaHei"/>
                   <a:cs typeface="Consolas"/>
                 </a:rPr>
-                <a:t xml:space="preserve">    </a:t>
+                <a:t>    </a:t>
               </a:r>
               <a:r>
                 <a:rPr lang="zh-CN" sz="1050" dirty="0">
@@ -8203,18 +8401,7 @@
                   <a:ea typeface="Microsoft YaHei"/>
                   <a:cs typeface="Consolas"/>
                 </a:rPr>
-                <a:t xml:space="preserve"> thread_shstk *shstk =</a:t>
-              </a:r>
-              <a:r>
-                <a:rPr lang="zh-CN" sz="1050" dirty="0">
-                  <a:solidFill>
-                    <a:srgbClr val="E0E0E0"/>
-                  </a:solidFill>
-                  <a:latin typeface="Consolas"/>
-                  <a:ea typeface="Microsoft YaHei"/>
-                  <a:cs typeface="Consolas"/>
-                </a:rPr>
-                <a:t xml:space="preserve">
+                <a:t> thread_shstk *shstk =
 </a:t>
               </a:r>
             </a:p>
@@ -8255,7 +8442,7 @@
                   <a:ea typeface="Microsoft YaHei"/>
                   <a:cs typeface="Consolas"/>
                 </a:rPr>
-                <a:t xml:space="preserve">        &amp;current-&gt;thread.shstk;</a:t>
+                <a:t>        &amp;current-&gt;thread.shstk;</a:t>
               </a:r>
             </a:p>
           </p:txBody>
@@ -8295,7 +8482,7 @@
                   <a:ea typeface="Microsoft YaHei"/>
                   <a:cs typeface="Consolas"/>
                 </a:rPr>
-                <a:t xml:space="preserve">    </a:t>
+                <a:t>    </a:t>
               </a:r>
               <a:r>
                 <a:rPr lang="zh-CN" sz="1050" dirty="0">
@@ -8317,7 +8504,7 @@
                   <a:ea typeface="Microsoft YaHei"/>
                   <a:cs typeface="Consolas"/>
                 </a:rPr>
-                <a:t xml:space="preserve"> </a:t>
+                <a:t> </a:t>
               </a:r>
               <a:r>
                 <a:rPr lang="zh-CN" sz="1050" dirty="0">
@@ -8339,18 +8526,7 @@
                   <a:ea typeface="Microsoft YaHei"/>
                   <a:cs typeface="Consolas"/>
                 </a:rPr>
-                <a:t xml:space="preserve"> addr, size;</a:t>
-              </a:r>
-              <a:r>
-                <a:rPr lang="zh-CN" sz="1050" dirty="0">
-                  <a:solidFill>
-                    <a:srgbClr val="E0E0E0"/>
-                  </a:solidFill>
-                  <a:latin typeface="Consolas"/>
-                  <a:ea typeface="Microsoft YaHei"/>
-                  <a:cs typeface="Consolas"/>
-                </a:rPr>
-                <a:t xml:space="preserve">
+                <a:t> addr, size;
 </a:t>
               </a:r>
             </a:p>
@@ -8391,7 +8567,7 @@
                   <a:ea typeface="Microsoft YaHei"/>
                   <a:cs typeface="Consolas"/>
                 </a:rPr>
-                <a:t xml:space="preserve">    </a:t>
+                <a:t>    </a:t>
               </a:r>
               <a:r>
                 <a:rPr lang="zh-CN" sz="1050" dirty="0">
@@ -8413,7 +8589,7 @@
                   <a:ea typeface="Microsoft YaHei"/>
                   <a:cs typeface="Consolas"/>
                 </a:rPr>
-                <a:t xml:space="preserve"> (features_enabled(</a:t>
+                <a:t> (features_enabled(</a:t>
               </a:r>
               <a:r>
                 <a:rPr lang="zh-CN" sz="1050" dirty="0">
@@ -8435,18 +8611,7 @@
                   <a:ea typeface="Microsoft YaHei"/>
                   <a:cs typeface="Consolas"/>
                 </a:rPr>
-                <a:t>))</a:t>
-              </a:r>
-              <a:r>
-                <a:rPr lang="zh-CN" sz="1050" dirty="0">
-                  <a:solidFill>
-                    <a:srgbClr val="E0E0E0"/>
-                  </a:solidFill>
-                  <a:latin typeface="Consolas"/>
-                  <a:ea typeface="Microsoft YaHei"/>
-                  <a:cs typeface="Consolas"/>
-                </a:rPr>
-                <a:t xml:space="preserve">
+                <a:t>))
 </a:t>
               </a:r>
             </a:p>
@@ -8487,7 +8652,7 @@
                   <a:ea typeface="Microsoft YaHei"/>
                   <a:cs typeface="Consolas"/>
                 </a:rPr>
-                <a:t xml:space="preserve">        </a:t>
+                <a:t>        </a:t>
               </a:r>
               <a:r>
                 <a:rPr lang="zh-CN" sz="1050" dirty="0">
@@ -8509,7 +8674,7 @@
                   <a:ea typeface="Microsoft YaHei"/>
                   <a:cs typeface="Consolas"/>
                 </a:rPr>
-                <a:t xml:space="preserve"> </a:t>
+                <a:t> </a:t>
               </a:r>
               <a:r>
                 <a:rPr lang="zh-CN" sz="1050" dirty="0">
@@ -8531,7 +8696,7 @@
                   <a:ea typeface="Microsoft YaHei"/>
                   <a:cs typeface="Consolas"/>
                 </a:rPr>
-                <a:t xml:space="preserve">;  </a:t>
+                <a:t>;  </a:t>
               </a:r>
               <a:r>
                 <a:rPr lang="zh-CN" sz="1050" dirty="0">
@@ -8553,7 +8718,7 @@
                   <a:ea typeface="Microsoft YaHei"/>
                   <a:cs typeface="Consolas"/>
                 </a:rPr>
-                <a:t xml:space="preserve">
+                <a:t>
 </a:t>
               </a:r>
             </a:p>
@@ -8594,7 +8759,7 @@
                   <a:ea typeface="Microsoft YaHei"/>
                   <a:cs typeface="Consolas"/>
                 </a:rPr>
-                <a:t xml:space="preserve">    size = adjust_shstk_size(</a:t>
+                <a:t>    size = adjust_shstk_size(</a:t>
               </a:r>
               <a:r>
                 <a:rPr lang="zh-CN" sz="1050" dirty="0">
@@ -8616,18 +8781,7 @@
                   <a:ea typeface="Microsoft YaHei"/>
                   <a:cs typeface="Consolas"/>
                 </a:rPr>
-                <a:t>);</a:t>
-              </a:r>
-              <a:r>
-                <a:rPr lang="zh-CN" sz="1050" dirty="0">
-                  <a:solidFill>
-                    <a:srgbClr val="E0E0E0"/>
-                  </a:solidFill>
-                  <a:latin typeface="Consolas"/>
-                  <a:ea typeface="Microsoft YaHei"/>
-                  <a:cs typeface="Consolas"/>
-                </a:rPr>
-                <a:t xml:space="preserve">
+                <a:t>);
 </a:t>
               </a:r>
             </a:p>
@@ -8668,7 +8822,7 @@
                   <a:ea typeface="Microsoft YaHei"/>
                   <a:cs typeface="Consolas"/>
                 </a:rPr>
-                <a:t xml:space="preserve">    addr = alloc_shstk(</a:t>
+                <a:t>    addr = alloc_shstk(</a:t>
               </a:r>
               <a:r>
                 <a:rPr lang="zh-CN" sz="1050" dirty="0">
@@ -8690,7 +8844,7 @@
                   <a:ea typeface="Microsoft YaHei"/>
                   <a:cs typeface="Consolas"/>
                 </a:rPr>
-                <a:t xml:space="preserve">, size, </a:t>
+                <a:t>, size, </a:t>
               </a:r>
               <a:r>
                 <a:rPr lang="zh-CN" sz="1050" dirty="0">
@@ -8712,7 +8866,7 @@
                   <a:ea typeface="Microsoft YaHei"/>
                   <a:cs typeface="Consolas"/>
                 </a:rPr>
-                <a:t xml:space="preserve">, </a:t>
+                <a:t>, </a:t>
               </a:r>
               <a:r>
                 <a:rPr lang="zh-CN" sz="1050" dirty="0">
@@ -8734,18 +8888,7 @@
                   <a:ea typeface="Microsoft YaHei"/>
                   <a:cs typeface="Consolas"/>
                 </a:rPr>
-                <a:t>);</a:t>
-              </a:r>
-              <a:r>
-                <a:rPr lang="zh-CN" sz="1050" dirty="0">
-                  <a:solidFill>
-                    <a:srgbClr val="E0E0E0"/>
-                  </a:solidFill>
-                  <a:latin typeface="Consolas"/>
-                  <a:ea typeface="Microsoft YaHei"/>
-                  <a:cs typeface="Consolas"/>
-                </a:rPr>
-                <a:t xml:space="preserve">
+                <a:t>);
 </a:t>
               </a:r>
             </a:p>
@@ -8786,7 +8929,7 @@
                   <a:ea typeface="Microsoft YaHei"/>
                   <a:cs typeface="Consolas"/>
                 </a:rPr>
-                <a:t xml:space="preserve">    fpregs_lock_and_load();</a:t>
+                <a:t>    fpregs_lock_and_load();</a:t>
               </a:r>
             </a:p>
           </p:txBody>
@@ -8826,7 +8969,7 @@
                   <a:ea typeface="Microsoft YaHei"/>
                   <a:cs typeface="Consolas"/>
                 </a:rPr>
-                <a:t xml:space="preserve">    wrmsrq(</a:t>
+                <a:t>    wrmsrq(</a:t>
               </a:r>
               <a:r>
                 <a:rPr lang="zh-CN" sz="1050" dirty="0">
@@ -8848,18 +8991,7 @@
                   <a:ea typeface="Microsoft YaHei"/>
                   <a:cs typeface="Consolas"/>
                 </a:rPr>
-                <a:t>, addr + size);</a:t>
-              </a:r>
-              <a:r>
-                <a:rPr lang="zh-CN" sz="1050" dirty="0">
-                  <a:solidFill>
-                    <a:srgbClr val="E0E0E0"/>
-                  </a:solidFill>
-                  <a:latin typeface="Consolas"/>
-                  <a:ea typeface="Microsoft YaHei"/>
-                  <a:cs typeface="Consolas"/>
-                </a:rPr>
-                <a:t xml:space="preserve">
+                <a:t>, addr + size);
 </a:t>
               </a:r>
             </a:p>
@@ -8900,7 +9032,7 @@
                   <a:ea typeface="Microsoft YaHei"/>
                   <a:cs typeface="Consolas"/>
                 </a:rPr>
-                <a:t xml:space="preserve">    wrmsrq(</a:t>
+                <a:t>    wrmsrq(</a:t>
               </a:r>
               <a:r>
                 <a:rPr lang="zh-CN" sz="1050" dirty="0">
@@ -8922,7 +9054,7 @@
                   <a:ea typeface="Microsoft YaHei"/>
                   <a:cs typeface="Consolas"/>
                 </a:rPr>
-                <a:t xml:space="preserve">, </a:t>
+                <a:t>, </a:t>
               </a:r>
               <a:r>
                 <a:rPr lang="zh-CN" sz="1050" dirty="0">
@@ -8944,18 +9076,7 @@
                   <a:ea typeface="Microsoft YaHei"/>
                   <a:cs typeface="Consolas"/>
                 </a:rPr>
-                <a:t>);</a:t>
-              </a:r>
-              <a:r>
-                <a:rPr lang="zh-CN" sz="1050" dirty="0">
-                  <a:solidFill>
-                    <a:srgbClr val="E0E0E0"/>
-                  </a:solidFill>
-                  <a:latin typeface="Consolas"/>
-                  <a:ea typeface="Microsoft YaHei"/>
-                  <a:cs typeface="Consolas"/>
-                </a:rPr>
-                <a:t xml:space="preserve">
+                <a:t>);
 </a:t>
               </a:r>
             </a:p>
@@ -8996,7 +9117,7 @@
                   <a:ea typeface="Microsoft YaHei"/>
                   <a:cs typeface="Consolas"/>
                 </a:rPr>
-                <a:t xml:space="preserve">    fpregs_unlock();</a:t>
+                <a:t>    fpregs_unlock();</a:t>
               </a:r>
             </a:p>
           </p:txBody>
@@ -9036,7 +9157,7 @@
                   <a:ea typeface="Microsoft YaHei"/>
                   <a:cs typeface="Consolas"/>
                 </a:rPr>
-                <a:t xml:space="preserve">    shstk-&gt;base = addr;</a:t>
+                <a:t>    shstk-&gt;base = addr;</a:t>
               </a:r>
             </a:p>
           </p:txBody>
@@ -9076,7 +9197,7 @@
                   <a:ea typeface="Microsoft YaHei"/>
                   <a:cs typeface="Consolas"/>
                 </a:rPr>
-                <a:t xml:space="preserve">    shstk-&gt;size = size;</a:t>
+                <a:t>    shstk-&gt;size = size;</a:t>
               </a:r>
             </a:p>
           </p:txBody>
@@ -9116,7 +9237,7 @@
                   <a:ea typeface="Microsoft YaHei"/>
                   <a:cs typeface="Consolas"/>
                 </a:rPr>
-                <a:t xml:space="preserve">    features_set(</a:t>
+                <a:t>    features_set(</a:t>
               </a:r>
               <a:r>
                 <a:rPr lang="zh-CN" sz="1050" dirty="0">
@@ -9138,18 +9259,7 @@
                   <a:ea typeface="Microsoft YaHei"/>
                   <a:cs typeface="Consolas"/>
                 </a:rPr>
-                <a:t>);</a:t>
-              </a:r>
-              <a:r>
-                <a:rPr lang="zh-CN" sz="1050" dirty="0">
-                  <a:solidFill>
-                    <a:srgbClr val="E0E0E0"/>
-                  </a:solidFill>
-                  <a:latin typeface="Consolas"/>
-                  <a:ea typeface="Microsoft YaHei"/>
-                  <a:cs typeface="Consolas"/>
-                </a:rPr>
-                <a:t xml:space="preserve">
+                <a:t>);
 </a:t>
               </a:r>
             </a:p>
@@ -9190,7 +9300,7 @@
                   <a:ea typeface="Microsoft YaHei"/>
                   <a:cs typeface="Consolas"/>
                 </a:rPr>
-                <a:t xml:space="preserve">    </a:t>
+                <a:t>    </a:t>
               </a:r>
               <a:r>
                 <a:rPr lang="zh-CN" sz="1050" dirty="0">
@@ -9212,7 +9322,7 @@
                   <a:ea typeface="Microsoft YaHei"/>
                   <a:cs typeface="Consolas"/>
                 </a:rPr>
-                <a:t xml:space="preserve"> </a:t>
+                <a:t> </a:t>
               </a:r>
               <a:r>
                 <a:rPr lang="zh-CN" sz="1050" dirty="0">
@@ -9234,18 +9344,7 @@
                   <a:ea typeface="Microsoft YaHei"/>
                   <a:cs typeface="Consolas"/>
                 </a:rPr>
-                <a:t>;</a:t>
-              </a:r>
-              <a:r>
-                <a:rPr lang="zh-CN" sz="1050" dirty="0">
-                  <a:solidFill>
-                    <a:srgbClr val="E0E0E0"/>
-                  </a:solidFill>
-                  <a:latin typeface="Consolas"/>
-                  <a:ea typeface="Microsoft YaHei"/>
-                  <a:cs typeface="Consolas"/>
-                </a:rPr>
-                <a:t xml:space="preserve">
+                <a:t>;
 </a:t>
               </a:r>
             </a:p>
@@ -9770,7 +9869,7 @@
                   <a:ea typeface="Microsoft YaHei"/>
                   <a:cs typeface="Arial"/>
                 </a:rPr>
-                <a:t xml:space="preserve">INCSSP max reach = </a:t>
+                <a:t>INCSSP max reach = </a:t>
               </a:r>
               <a:r>
                 <a:rPr lang="zh-CN" sz="975" b="1" dirty="0">
@@ -10107,7 +10206,7 @@
             <p:nvPr/>
           </p:nvPicPr>
           <p:blipFill>
-            <a:blip r:embed="rId3"/>
+            <a:blip r:embed="rId4"/>
             <a:stretch>
               <a:fillRect/>
             </a:stretch>
@@ -10170,9 +10269,18 @@
   <p:clrMapOvr>
     <a:masterClrMapping/>
   </p:clrMapOvr>
-  <p:transition xmlns:p14="http://schemas.microsoft.com/office/powerpoint/2010/main" p14:dur="400">
-    <p:fade/>
-  </p:transition>
+  <mc:AlternateContent xmlns:mc="http://schemas.openxmlformats.org/markup-compatibility/2006">
+    <mc:Choice xmlns:p14="http://schemas.microsoft.com/office/powerpoint/2010/main" Requires="p14">
+      <p:transition p14:dur="400">
+        <p:fade/>
+      </p:transition>
+    </mc:Choice>
+    <mc:Fallback>
+      <p:transition>
+        <p:fade/>
+      </p:transition>
+    </mc:Fallback>
+  </mc:AlternateContent>
   <p:timing>
     <p:tnLst>
       <p:par>
@@ -10530,8 +10638,8 @@
             <p:nvPr/>
           </p:nvPicPr>
           <p:blipFill>
-            <a:blip r:embed="rId2"/>
-            <a:srcRect l="0" t="781" r="0" b="781"/>
+            <a:blip r:embed="rId3"/>
+            <a:srcRect t="781" b="781"/>
             <a:stretch>
               <a:fillRect/>
             </a:stretch>
@@ -10781,7 +10889,7 @@
                   <a:ea typeface="Microsoft YaHei"/>
                   <a:cs typeface="Arial"/>
                 </a:rPr>
-                <a:t xml:space="preserve"> Signal delivery diverts control flow to handler</a:t>
+                <a:t> Signal delivery diverts control flow to handler</a:t>
               </a:r>
             </a:p>
           </p:txBody>
@@ -10832,7 +10940,7 @@
                   <a:ea typeface="Microsoft YaHei"/>
                   <a:cs typeface="Arial"/>
                 </a:rPr>
-                <a:t xml:space="preserve"> Handler returns via </a:t>
+                <a:t> Handler returns via </a:t>
               </a:r>
               <a:r>
                 <a:rPr lang="zh-CN" sz="1050" dirty="0">
@@ -10854,7 +10962,7 @@
                   <a:ea typeface="Microsoft YaHei"/>
                   <a:cs typeface="Arial"/>
                 </a:rPr>
-                <a:t xml:space="preserve"> trampoline (RET)</a:t>
+                <a:t> trampoline (RET)</a:t>
               </a:r>
             </a:p>
           </p:txBody>
@@ -10905,7 +11013,7 @@
                   <a:ea typeface="Microsoft YaHei"/>
                   <a:cs typeface="Arial"/>
                 </a:rPr>
-                <a:t xml:space="preserve"> Shadow stack expects the </a:t>
+                <a:t> Shadow stack expects the </a:t>
               </a:r>
               <a:r>
                 <a:rPr lang="zh-CN" sz="1050" b="1" dirty="0">
@@ -10927,7 +11035,7 @@
                   <a:ea typeface="Microsoft YaHei"/>
                   <a:cs typeface="Arial"/>
                 </a:rPr>
-                <a:t xml:space="preserve"> return address</a:t>
+                <a:t> return address</a:t>
               </a:r>
             </a:p>
           </p:txBody>
@@ -10978,7 +11086,7 @@
                   <a:ea typeface="Microsoft YaHei"/>
                   <a:cs typeface="Arial"/>
                 </a:rPr>
-                <a:t xml:space="preserve"> Without fixup: </a:t>
+                <a:t> Without fixup: </a:t>
               </a:r>
               <a:r>
                 <a:rPr lang="zh-CN" sz="1050" b="1" dirty="0">
@@ -12015,7 +12123,7 @@
                   <a:ea typeface="Microsoft YaHei"/>
                   <a:cs typeface="Arial"/>
                 </a:rPr>
-                <a:t xml:space="preserve"> BIT(63) ensures token can never match a RET address — attacker cannot forge tokens without WRSS or kernel access</a:t>
+                <a:t> BIT(63) ensures token can never match a RET address — attacker cannot forge tokens without WRSS or kernel access</a:t>
               </a:r>
             </a:p>
           </p:txBody>
@@ -12105,7 +12213,7 @@
                   <a:ea typeface="Microsoft YaHei"/>
                   <a:cs typeface="Arial"/>
                 </a:rPr>
-                <a:t xml:space="preserve"> = </a:t>
+                <a:t> = </a:t>
               </a:r>
               <a:r>
                 <a:rPr lang="zh-CN" sz="1125" dirty="0">
@@ -12127,7 +12235,7 @@
                   <a:ea typeface="Microsoft YaHei"/>
                   <a:cs typeface="Arial"/>
                 </a:rPr>
-                <a:t xml:space="preserve"> in vDSO — calls </a:t>
+                <a:t> in vDSO — calls </a:t>
               </a:r>
               <a:r>
                 <a:rPr lang="zh-CN" sz="1125" dirty="0">
@@ -12209,7 +12317,7 @@
             <p:nvPr/>
           </p:nvPicPr>
           <p:blipFill>
-            <a:blip r:embed="rId3"/>
+            <a:blip r:embed="rId4"/>
             <a:stretch>
               <a:fillRect/>
             </a:stretch>
@@ -12272,9 +12380,18 @@
   <p:clrMapOvr>
     <a:masterClrMapping/>
   </p:clrMapOvr>
-  <p:transition xmlns:p14="http://schemas.microsoft.com/office/powerpoint/2010/main" p14:dur="400">
-    <p:fade/>
-  </p:transition>
+  <mc:AlternateContent xmlns:mc="http://schemas.openxmlformats.org/markup-compatibility/2006">
+    <mc:Choice xmlns:p14="http://schemas.microsoft.com/office/powerpoint/2010/main" Requires="p14">
+      <p:transition p14:dur="400">
+        <p:fade/>
+      </p:transition>
+    </mc:Choice>
+    <mc:Fallback>
+      <p:transition>
+        <p:fade/>
+      </p:transition>
+    </mc:Fallback>
+  </mc:AlternateContent>
   <p:timing>
     <p:tnLst>
       <p:par>
@@ -12497,8 +12614,8 @@
             <p:nvPr/>
           </p:nvPicPr>
           <p:blipFill>
-            <a:blip r:embed="rId2"/>
-            <a:srcRect l="0" t="781" r="0" b="781"/>
+            <a:blip r:embed="rId3"/>
+            <a:srcRect t="781" b="781"/>
             <a:stretch>
               <a:fillRect/>
             </a:stretch>
@@ -12584,10 +12701,10 @@
         </p:nvGrpSpPr>
         <p:grpSpPr>
           <a:xfrm>
-            <a:off x="476250" y="1285875"/>
-            <a:ext cx="6667500" cy="4700587"/>
-            <a:chOff x="476250" y="1285875"/>
-            <a:chExt cx="6667500" cy="4700587"/>
+            <a:off x="476250" y="1285874"/>
+            <a:ext cx="6667500" cy="4700588"/>
+            <a:chOff x="476250" y="1285874"/>
+            <a:chExt cx="6667500" cy="4700588"/>
           </a:xfrm>
         </p:grpSpPr>
         <p:sp>
@@ -12598,8 +12715,8 @@
           </p:nvSpPr>
           <p:spPr>
             <a:xfrm>
-              <a:off x="476250" y="1285875"/>
-              <a:ext cx="6667500" cy="3905250"/>
+              <a:off x="476250" y="1285874"/>
+              <a:ext cx="6667500" cy="4700587"/>
             </a:xfrm>
             <a:prstGeom prst="roundRect">
               <a:avLst>
@@ -12700,18 +12817,7 @@
                   <a:ea typeface="Microsoft YaHei"/>
                   <a:cs typeface="Consolas"/>
                 </a:rPr>
-                <a:t xml:space="preserve"> setup_signal_shadow_stack(</a:t>
-              </a:r>
-              <a:r>
-                <a:rPr lang="zh-CN" sz="1050" dirty="0">
-                  <a:solidFill>
-                    <a:srgbClr val="E0E0E0"/>
-                  </a:solidFill>
-                  <a:latin typeface="Consolas"/>
-                  <a:ea typeface="Microsoft YaHei"/>
-                  <a:cs typeface="Consolas"/>
-                </a:rPr>
-                <a:t xml:space="preserve">
+                <a:t> setup_signal_shadow_stack(
 </a:t>
               </a:r>
             </a:p>
@@ -12752,7 +12858,7 @@
                   <a:ea typeface="Microsoft YaHei"/>
                   <a:cs typeface="Consolas"/>
                 </a:rPr>
-                <a:t xml:space="preserve">    </a:t>
+                <a:t>    </a:t>
               </a:r>
               <a:r>
                 <a:rPr lang="zh-CN" sz="1050" dirty="0">
@@ -12774,18 +12880,7 @@
                   <a:ea typeface="Microsoft YaHei"/>
                   <a:cs typeface="Consolas"/>
                 </a:rPr>
-                <a:t xml:space="preserve"> ksignal *ksig)</a:t>
-              </a:r>
-              <a:r>
-                <a:rPr lang="zh-CN" sz="1050" dirty="0">
-                  <a:solidFill>
-                    <a:srgbClr val="E0E0E0"/>
-                  </a:solidFill>
-                  <a:latin typeface="Consolas"/>
-                  <a:ea typeface="Microsoft YaHei"/>
-                  <a:cs typeface="Consolas"/>
-                </a:rPr>
-                <a:t xml:space="preserve">
+                <a:t> ksignal *ksig)
 </a:t>
               </a:r>
             </a:p>
@@ -12866,7 +12961,7 @@
                   <a:ea typeface="Microsoft YaHei"/>
                   <a:cs typeface="Consolas"/>
                 </a:rPr>
-                <a:t xml:space="preserve">    </a:t>
+                <a:t>    </a:t>
               </a:r>
               <a:r>
                 <a:rPr lang="zh-CN" sz="1050" dirty="0">
@@ -12888,18 +12983,7 @@
                   <a:ea typeface="Microsoft YaHei"/>
                   <a:cs typeface="Consolas"/>
                 </a:rPr>
-                <a:t xml:space="preserve"> __user *restorer =</a:t>
-              </a:r>
-              <a:r>
-                <a:rPr lang="zh-CN" sz="1050" dirty="0">
-                  <a:solidFill>
-                    <a:srgbClr val="E0E0E0"/>
-                  </a:solidFill>
-                  <a:latin typeface="Consolas"/>
-                  <a:ea typeface="Microsoft YaHei"/>
-                  <a:cs typeface="Consolas"/>
-                </a:rPr>
-                <a:t xml:space="preserve">
+                <a:t> __user *restorer =
 </a:t>
               </a:r>
             </a:p>
@@ -12940,7 +13024,7 @@
                   <a:ea typeface="Microsoft YaHei"/>
                   <a:cs typeface="Consolas"/>
                 </a:rPr>
-                <a:t xml:space="preserve">        ksig-&gt;ka.sa.sa_restorer;</a:t>
+                <a:t>        ksig-&gt;ka.sa.sa_restorer;</a:t>
               </a:r>
             </a:p>
           </p:txBody>
@@ -12980,7 +13064,7 @@
                   <a:ea typeface="Microsoft YaHei"/>
                   <a:cs typeface="Consolas"/>
                 </a:rPr>
-                <a:t xml:space="preserve">    </a:t>
+                <a:t>    </a:t>
               </a:r>
               <a:r>
                 <a:rPr lang="zh-CN" sz="1050" dirty="0">
@@ -13002,7 +13086,7 @@
                   <a:ea typeface="Microsoft YaHei"/>
                   <a:cs typeface="Consolas"/>
                 </a:rPr>
-                <a:t xml:space="preserve"> </a:t>
+                <a:t> </a:t>
               </a:r>
               <a:r>
                 <a:rPr lang="zh-CN" sz="1050" dirty="0">
@@ -13024,18 +13108,7 @@
                   <a:ea typeface="Microsoft YaHei"/>
                   <a:cs typeface="Consolas"/>
                 </a:rPr>
-                <a:t xml:space="preserve"> ssp;</a:t>
-              </a:r>
-              <a:r>
-                <a:rPr lang="zh-CN" sz="1050" dirty="0">
-                  <a:solidFill>
-                    <a:srgbClr val="E0E0E0"/>
-                  </a:solidFill>
-                  <a:latin typeface="Consolas"/>
-                  <a:ea typeface="Microsoft YaHei"/>
-                  <a:cs typeface="Consolas"/>
-                </a:rPr>
-                <a:t xml:space="preserve">
+                <a:t> ssp;
 </a:t>
               </a:r>
             </a:p>
@@ -13076,7 +13149,7 @@
                   <a:ea typeface="Microsoft YaHei"/>
                   <a:cs typeface="Consolas"/>
                 </a:rPr>
-                <a:t xml:space="preserve">    ssp = get_user_shstk_addr();</a:t>
+                <a:t>    ssp = get_user_shstk_addr();</a:t>
               </a:r>
             </a:p>
           </p:txBody>
@@ -13116,7 +13189,7 @@
                   <a:ea typeface="Microsoft YaHei"/>
                   <a:cs typeface="Consolas"/>
                 </a:rPr>
-                <a:t xml:space="preserve">    </a:t>
+                <a:t>    </a:t>
               </a:r>
               <a:r>
                 <a:rPr lang="zh-CN" sz="1050" dirty="0">
@@ -13138,7 +13211,7 @@
                   <a:ea typeface="Microsoft YaHei"/>
                   <a:cs typeface="Consolas"/>
                 </a:rPr>
-                <a:t xml:space="preserve">
+                <a:t>
 </a:t>
               </a:r>
             </a:p>
@@ -13179,7 +13252,7 @@
                   <a:ea typeface="Microsoft YaHei"/>
                   <a:cs typeface="Consolas"/>
                 </a:rPr>
-                <a:t xml:space="preserve">     * old_ssp | BIT(63) */</a:t>
+                <a:t>     * old_ssp | BIT(63) */</a:t>
               </a:r>
               <a:r>
                 <a:rPr lang="zh-CN" sz="1050" dirty="0">
@@ -13190,7 +13263,7 @@
                   <a:ea typeface="Microsoft YaHei"/>
                   <a:cs typeface="Consolas"/>
                 </a:rPr>
-                <a:t xml:space="preserve">
+                <a:t>
 </a:t>
               </a:r>
             </a:p>
@@ -13231,7 +13304,7 @@
                   <a:ea typeface="Microsoft YaHei"/>
                   <a:cs typeface="Consolas"/>
                 </a:rPr>
-                <a:t xml:space="preserve">    shstk_push_sigframe(&amp;ssp);</a:t>
+                <a:t>    shstk_push_sigframe(&amp;ssp);</a:t>
               </a:r>
             </a:p>
           </p:txBody>
@@ -13271,7 +13344,7 @@
                   <a:ea typeface="Microsoft YaHei"/>
                   <a:cs typeface="Consolas"/>
                 </a:rPr>
-                <a:t xml:space="preserve">    </a:t>
+                <a:t>    </a:t>
               </a:r>
               <a:r>
                 <a:rPr lang="zh-CN" sz="1050" dirty="0">
@@ -13293,7 +13366,7 @@
                   <a:ea typeface="Microsoft YaHei"/>
                   <a:cs typeface="Consolas"/>
                 </a:rPr>
-                <a:t xml:space="preserve">
+                <a:t>
 </a:t>
               </a:r>
             </a:p>
@@ -13334,7 +13407,7 @@
                   <a:ea typeface="Microsoft YaHei"/>
                   <a:cs typeface="Consolas"/>
                 </a:rPr>
-                <a:t xml:space="preserve">     * RET matches */</a:t>
+                <a:t>     * RET matches */</a:t>
               </a:r>
               <a:r>
                 <a:rPr lang="zh-CN" sz="1050" dirty="0">
@@ -13345,7 +13418,7 @@
                   <a:ea typeface="Microsoft YaHei"/>
                   <a:cs typeface="Consolas"/>
                 </a:rPr>
-                <a:t xml:space="preserve">
+                <a:t>
 </a:t>
               </a:r>
             </a:p>
@@ -13386,7 +13459,7 @@
                   <a:ea typeface="Microsoft YaHei"/>
                   <a:cs typeface="Consolas"/>
                 </a:rPr>
-                <a:t xml:space="preserve">    ssp -= </a:t>
+                <a:t>    ssp -= </a:t>
               </a:r>
               <a:r>
                 <a:rPr lang="zh-CN" sz="1050" dirty="0">
@@ -13408,18 +13481,7 @@
                   <a:ea typeface="Microsoft YaHei"/>
                   <a:cs typeface="Consolas"/>
                 </a:rPr>
-                <a:t>;</a:t>
-              </a:r>
-              <a:r>
-                <a:rPr lang="zh-CN" sz="1050" dirty="0">
-                  <a:solidFill>
-                    <a:srgbClr val="E0E0E0"/>
-                  </a:solidFill>
-                  <a:latin typeface="Consolas"/>
-                  <a:ea typeface="Microsoft YaHei"/>
-                  <a:cs typeface="Consolas"/>
-                </a:rPr>
-                <a:t xml:space="preserve">
+                <a:t>;
 </a:t>
               </a:r>
             </a:p>
@@ -13460,7 +13522,7 @@
                   <a:ea typeface="Microsoft YaHei"/>
                   <a:cs typeface="Consolas"/>
                 </a:rPr>
-                <a:t xml:space="preserve">    write_user_shstk_64(</a:t>
+                <a:t>    write_user_shstk_64(</a:t>
               </a:r>
             </a:p>
           </p:txBody>
@@ -13500,40 +13562,7 @@
                   <a:ea typeface="Microsoft YaHei"/>
                   <a:cs typeface="Consolas"/>
                 </a:rPr>
-                <a:t xml:space="preserve">        (</a:t>
-              </a:r>
-              <a:r>
-                <a:rPr lang="zh-CN" sz="1050" dirty="0">
-                  <a:solidFill>
-                    <a:srgbClr val="E0E0E0"/>
-                  </a:solidFill>
-                  <a:latin typeface="Consolas"/>
-                  <a:ea typeface="Microsoft YaHei"/>
-                  <a:cs typeface="Consolas"/>
-                </a:rPr>
-                <a:t>u64</a:t>
-              </a:r>
-              <a:r>
-                <a:rPr lang="zh-CN" sz="1050" dirty="0">
-                  <a:solidFill>
-                    <a:srgbClr val="E0E0E0"/>
-                  </a:solidFill>
-                  <a:latin typeface="Consolas"/>
-                  <a:ea typeface="Microsoft YaHei"/>
-                  <a:cs typeface="Consolas"/>
-                </a:rPr>
-                <a:t xml:space="preserve"> __user *)ssp,</a:t>
-              </a:r>
-              <a:r>
-                <a:rPr lang="zh-CN" sz="1050" dirty="0">
-                  <a:solidFill>
-                    <a:srgbClr val="E0E0E0"/>
-                  </a:solidFill>
-                  <a:latin typeface="Consolas"/>
-                  <a:ea typeface="Microsoft YaHei"/>
-                  <a:cs typeface="Consolas"/>
-                </a:rPr>
-                <a:t xml:space="preserve">
+                <a:t>        (u64 __user *)ssp,
 </a:t>
               </a:r>
             </a:p>
@@ -13574,40 +13603,7 @@
                   <a:ea typeface="Microsoft YaHei"/>
                   <a:cs typeface="Consolas"/>
                 </a:rPr>
-                <a:t xml:space="preserve">        (</a:t>
-              </a:r>
-              <a:r>
-                <a:rPr lang="zh-CN" sz="1050" dirty="0">
-                  <a:solidFill>
-                    <a:srgbClr val="E0E0E0"/>
-                  </a:solidFill>
-                  <a:latin typeface="Consolas"/>
-                  <a:ea typeface="Microsoft YaHei"/>
-                  <a:cs typeface="Consolas"/>
-                </a:rPr>
-                <a:t>u64</a:t>
-              </a:r>
-              <a:r>
-                <a:rPr lang="zh-CN" sz="1050" dirty="0">
-                  <a:solidFill>
-                    <a:srgbClr val="E0E0E0"/>
-                  </a:solidFill>
-                  <a:latin typeface="Consolas"/>
-                  <a:ea typeface="Microsoft YaHei"/>
-                  <a:cs typeface="Consolas"/>
-                </a:rPr>
-                <a:t>)restorer);</a:t>
-              </a:r>
-              <a:r>
-                <a:rPr lang="zh-CN" sz="1050" dirty="0">
-                  <a:solidFill>
-                    <a:srgbClr val="E0E0E0"/>
-                  </a:solidFill>
-                  <a:latin typeface="Consolas"/>
-                  <a:ea typeface="Microsoft YaHei"/>
-                  <a:cs typeface="Consolas"/>
-                </a:rPr>
-                <a:t xml:space="preserve">
+                <a:t>        (u64)restorer);
 </a:t>
               </a:r>
             </a:p>
@@ -13648,7 +13644,7 @@
                   <a:ea typeface="Microsoft YaHei"/>
                   <a:cs typeface="Consolas"/>
                 </a:rPr>
-                <a:t xml:space="preserve">    fpregs_lock_and_load();</a:t>
+                <a:t>    fpregs_lock_and_load();</a:t>
               </a:r>
             </a:p>
           </p:txBody>
@@ -13688,7 +13684,7 @@
                   <a:ea typeface="Microsoft YaHei"/>
                   <a:cs typeface="Consolas"/>
                 </a:rPr>
-                <a:t xml:space="preserve">    wrmsrq(</a:t>
+                <a:t>    wrmsrq(</a:t>
               </a:r>
               <a:r>
                 <a:rPr lang="zh-CN" sz="1050" dirty="0">
@@ -13710,18 +13706,7 @@
                   <a:ea typeface="Microsoft YaHei"/>
                   <a:cs typeface="Consolas"/>
                 </a:rPr>
-                <a:t>, ssp);</a:t>
-              </a:r>
-              <a:r>
-                <a:rPr lang="zh-CN" sz="1050" dirty="0">
-                  <a:solidFill>
-                    <a:srgbClr val="E0E0E0"/>
-                  </a:solidFill>
-                  <a:latin typeface="Consolas"/>
-                  <a:ea typeface="Microsoft YaHei"/>
-                  <a:cs typeface="Consolas"/>
-                </a:rPr>
-                <a:t xml:space="preserve">
+                <a:t>, ssp);
 </a:t>
               </a:r>
             </a:p>
@@ -13762,7 +13747,7 @@
                   <a:ea typeface="Microsoft YaHei"/>
                   <a:cs typeface="Consolas"/>
                 </a:rPr>
-                <a:t xml:space="preserve">    fpregs_unlock();</a:t>
+                <a:t>    fpregs_unlock();</a:t>
               </a:r>
             </a:p>
           </p:txBody>
@@ -13802,7 +13787,7 @@
                   <a:ea typeface="Microsoft YaHei"/>
                   <a:cs typeface="Consolas"/>
                 </a:rPr>
-                <a:t xml:space="preserve">    </a:t>
+                <a:t>    </a:t>
               </a:r>
               <a:r>
                 <a:rPr lang="zh-CN" sz="1050" dirty="0">
@@ -13824,7 +13809,7 @@
                   <a:ea typeface="Microsoft YaHei"/>
                   <a:cs typeface="Consolas"/>
                 </a:rPr>
-                <a:t xml:space="preserve"> </a:t>
+                <a:t> </a:t>
               </a:r>
               <a:r>
                 <a:rPr lang="zh-CN" sz="1050" dirty="0">
@@ -13846,18 +13831,7 @@
                   <a:ea typeface="Microsoft YaHei"/>
                   <a:cs typeface="Consolas"/>
                 </a:rPr>
-                <a:t>;</a:t>
-              </a:r>
-              <a:r>
-                <a:rPr lang="zh-CN" sz="1050" dirty="0">
-                  <a:solidFill>
-                    <a:srgbClr val="E0E0E0"/>
-                  </a:solidFill>
-                  <a:latin typeface="Consolas"/>
-                  <a:ea typeface="Microsoft YaHei"/>
-                  <a:cs typeface="Consolas"/>
-                </a:rPr>
-                <a:t xml:space="preserve">
+                <a:t>;
 </a:t>
               </a:r>
             </a:p>
@@ -14697,7 +14671,7 @@
             <p:nvPr/>
           </p:nvPicPr>
           <p:blipFill>
-            <a:blip r:embed="rId3"/>
+            <a:blip r:embed="rId4"/>
             <a:stretch>
               <a:fillRect/>
             </a:stretch>
@@ -14760,9 +14734,18 @@
   <p:clrMapOvr>
     <a:masterClrMapping/>
   </p:clrMapOvr>
-  <p:transition xmlns:p14="http://schemas.microsoft.com/office/powerpoint/2010/main" p14:dur="400">
-    <p:fade/>
-  </p:transition>
+  <mc:AlternateContent xmlns:mc="http://schemas.openxmlformats.org/markup-compatibility/2006">
+    <mc:Choice xmlns:p14="http://schemas.microsoft.com/office/powerpoint/2010/main" Requires="p14">
+      <p:transition p14:dur="400">
+        <p:fade/>
+      </p:transition>
+    </mc:Choice>
+    <mc:Fallback>
+      <p:transition>
+        <p:fade/>
+      </p:transition>
+    </mc:Fallback>
+  </mc:AlternateContent>
   <p:timing>
     <p:tnLst>
       <p:par>
@@ -15075,8 +15058,8 @@
             <p:nvPr/>
           </p:nvPicPr>
           <p:blipFill>
-            <a:blip r:embed="rId2"/>
-            <a:srcRect l="0" t="781" r="0" b="781"/>
+            <a:blip r:embed="rId3"/>
+            <a:srcRect t="781" b="781"/>
             <a:stretch>
               <a:fillRect/>
             </a:stretch>
@@ -15162,10 +15145,10 @@
         </p:nvGrpSpPr>
         <p:grpSpPr>
           <a:xfrm>
-            <a:off x="476250" y="1285875"/>
-            <a:ext cx="6096000" cy="4071937"/>
-            <a:chOff x="476250" y="1285875"/>
-            <a:chExt cx="6096000" cy="4071937"/>
+            <a:off x="476250" y="1285874"/>
+            <a:ext cx="6096000" cy="4071938"/>
+            <a:chOff x="476250" y="1285874"/>
+            <a:chExt cx="6096000" cy="4071938"/>
           </a:xfrm>
         </p:grpSpPr>
         <p:sp>
@@ -15176,8 +15159,8 @@
           </p:nvSpPr>
           <p:spPr>
             <a:xfrm>
-              <a:off x="476250" y="1285875"/>
-              <a:ext cx="6096000" cy="3619500"/>
+              <a:off x="476250" y="1285874"/>
+              <a:ext cx="6096000" cy="4071938"/>
             </a:xfrm>
             <a:prstGeom prst="roundRect">
               <a:avLst>
@@ -15278,7 +15261,7 @@
                   <a:ea typeface="Microsoft YaHei"/>
                   <a:cs typeface="Consolas"/>
                 </a:rPr>
-                <a:t xml:space="preserve"> </a:t>
+                <a:t> </a:t>
               </a:r>
               <a:r>
                 <a:rPr lang="zh-CN" sz="1050" dirty="0">
@@ -15300,18 +15283,7 @@
                   <a:ea typeface="Microsoft YaHei"/>
                   <a:cs typeface="Consolas"/>
                 </a:rPr>
-                <a:t xml:space="preserve"> shstk_alloc_thread_stack(</a:t>
-              </a:r>
-              <a:r>
-                <a:rPr lang="zh-CN" sz="1050" dirty="0">
-                  <a:solidFill>
-                    <a:srgbClr val="E0E0E0"/>
-                  </a:solidFill>
-                  <a:latin typeface="Consolas"/>
-                  <a:ea typeface="Microsoft YaHei"/>
-                  <a:cs typeface="Consolas"/>
-                </a:rPr>
-                <a:t xml:space="preserve">
+                <a:t> shstk_alloc_thread_stack(
 </a:t>
               </a:r>
             </a:p>
@@ -15352,7 +15324,7 @@
                   <a:ea typeface="Microsoft YaHei"/>
                   <a:cs typeface="Consolas"/>
                 </a:rPr>
-                <a:t xml:space="preserve">    </a:t>
+                <a:t>    </a:t>
               </a:r>
               <a:r>
                 <a:rPr lang="zh-CN" sz="1050" dirty="0">
@@ -15374,18 +15346,7 @@
                   <a:ea typeface="Microsoft YaHei"/>
                   <a:cs typeface="Consolas"/>
                 </a:rPr>
-                <a:t xml:space="preserve"> task_struct *tsk,</a:t>
-              </a:r>
-              <a:r>
-                <a:rPr lang="zh-CN" sz="1050" dirty="0">
-                  <a:solidFill>
-                    <a:srgbClr val="E0E0E0"/>
-                  </a:solidFill>
-                  <a:latin typeface="Consolas"/>
-                  <a:ea typeface="Microsoft YaHei"/>
-                  <a:cs typeface="Consolas"/>
-                </a:rPr>
-                <a:t xml:space="preserve">
+                <a:t> task_struct *tsk,
 </a:t>
               </a:r>
             </a:p>
@@ -15426,40 +15387,7 @@
                   <a:ea typeface="Microsoft YaHei"/>
                   <a:cs typeface="Consolas"/>
                 </a:rPr>
-                <a:t xml:space="preserve">    </a:t>
-              </a:r>
-              <a:r>
-                <a:rPr lang="zh-CN" sz="1050" dirty="0">
-                  <a:solidFill>
-                    <a:srgbClr val="E0E0E0"/>
-                  </a:solidFill>
-                  <a:latin typeface="Consolas"/>
-                  <a:ea typeface="Microsoft YaHei"/>
-                  <a:cs typeface="Consolas"/>
-                </a:rPr>
-                <a:t>u64</a:t>
-              </a:r>
-              <a:r>
-                <a:rPr lang="zh-CN" sz="1050" dirty="0">
-                  <a:solidFill>
-                    <a:srgbClr val="E0E0E0"/>
-                  </a:solidFill>
-                  <a:latin typeface="Consolas"/>
-                  <a:ea typeface="Microsoft YaHei"/>
-                  <a:cs typeface="Consolas"/>
-                </a:rPr>
-                <a:t xml:space="preserve"> clone_flags,</a:t>
-              </a:r>
-              <a:r>
-                <a:rPr lang="zh-CN" sz="1050" dirty="0">
-                  <a:solidFill>
-                    <a:srgbClr val="E0E0E0"/>
-                  </a:solidFill>
-                  <a:latin typeface="Consolas"/>
-                  <a:ea typeface="Microsoft YaHei"/>
-                  <a:cs typeface="Consolas"/>
-                </a:rPr>
-                <a:t xml:space="preserve">
+                <a:t>    u64 clone_flags,
 </a:t>
               </a:r>
             </a:p>
@@ -15500,7 +15428,7 @@
                   <a:ea typeface="Microsoft YaHei"/>
                   <a:cs typeface="Consolas"/>
                 </a:rPr>
-                <a:t xml:space="preserve">    </a:t>
+                <a:t>    </a:t>
               </a:r>
               <a:r>
                 <a:rPr lang="zh-CN" sz="1050" dirty="0">
@@ -15522,7 +15450,7 @@
                   <a:ea typeface="Microsoft YaHei"/>
                   <a:cs typeface="Consolas"/>
                 </a:rPr>
-                <a:t xml:space="preserve"> </a:t>
+                <a:t> </a:t>
               </a:r>
               <a:r>
                 <a:rPr lang="zh-CN" sz="1050" dirty="0">
@@ -15544,18 +15472,7 @@
                   <a:ea typeface="Microsoft YaHei"/>
                   <a:cs typeface="Consolas"/>
                 </a:rPr>
-                <a:t xml:space="preserve"> stack_size)</a:t>
-              </a:r>
-              <a:r>
-                <a:rPr lang="zh-CN" sz="1050" dirty="0">
-                  <a:solidFill>
-                    <a:srgbClr val="E0E0E0"/>
-                  </a:solidFill>
-                  <a:latin typeface="Consolas"/>
-                  <a:ea typeface="Microsoft YaHei"/>
-                  <a:cs typeface="Consolas"/>
-                </a:rPr>
-                <a:t xml:space="preserve">
+                <a:t> stack_size)
 </a:t>
               </a:r>
             </a:p>
@@ -15636,7 +15553,7 @@
                   <a:ea typeface="Microsoft YaHei"/>
                   <a:cs typeface="Consolas"/>
                 </a:rPr>
-                <a:t xml:space="preserve">    </a:t>
+                <a:t>    </a:t>
               </a:r>
               <a:r>
                 <a:rPr lang="zh-CN" sz="1050" dirty="0">
@@ -15658,7 +15575,7 @@
                   <a:ea typeface="Microsoft YaHei"/>
                   <a:cs typeface="Consolas"/>
                 </a:rPr>
-                <a:t xml:space="preserve"> (clone_flags &amp; </a:t>
+                <a:t> (clone_flags &amp; </a:t>
               </a:r>
               <a:r>
                 <a:rPr lang="zh-CN" sz="1050" dirty="0">
@@ -15680,18 +15597,7 @@
                   <a:ea typeface="Microsoft YaHei"/>
                   <a:cs typeface="Consolas"/>
                 </a:rPr>
-                <a:t>) {</a:t>
-              </a:r>
-              <a:r>
-                <a:rPr lang="zh-CN" sz="1050" dirty="0">
-                  <a:solidFill>
-                    <a:srgbClr val="E0E0E0"/>
-                  </a:solidFill>
-                  <a:latin typeface="Consolas"/>
-                  <a:ea typeface="Microsoft YaHei"/>
-                  <a:cs typeface="Consolas"/>
-                </a:rPr>
-                <a:t xml:space="preserve">
+                <a:t>) {
 </a:t>
               </a:r>
             </a:p>
@@ -15732,7 +15638,7 @@
                   <a:ea typeface="Microsoft YaHei"/>
                   <a:cs typeface="Consolas"/>
                 </a:rPr>
-                <a:t xml:space="preserve">        shstk-&gt;base = </a:t>
+                <a:t>        shstk-&gt;base = </a:t>
               </a:r>
               <a:r>
                 <a:rPr lang="zh-CN" sz="1050" dirty="0">
@@ -15754,18 +15660,7 @@
                   <a:ea typeface="Microsoft YaHei"/>
                   <a:cs typeface="Consolas"/>
                 </a:rPr>
-                <a:t>;</a:t>
-              </a:r>
-              <a:r>
-                <a:rPr lang="zh-CN" sz="1050" dirty="0">
-                  <a:solidFill>
-                    <a:srgbClr val="E0E0E0"/>
-                  </a:solidFill>
-                  <a:latin typeface="Consolas"/>
-                  <a:ea typeface="Microsoft YaHei"/>
-                  <a:cs typeface="Consolas"/>
-                </a:rPr>
-                <a:t xml:space="preserve">
+                <a:t>;
 </a:t>
               </a:r>
             </a:p>
@@ -15806,7 +15701,7 @@
                   <a:ea typeface="Microsoft YaHei"/>
                   <a:cs typeface="Consolas"/>
                 </a:rPr>
-                <a:t xml:space="preserve">        </a:t>
+                <a:t>        </a:t>
               </a:r>
               <a:r>
                 <a:rPr lang="zh-CN" sz="1050" dirty="0">
@@ -15828,7 +15723,7 @@
                   <a:ea typeface="Microsoft YaHei"/>
                   <a:cs typeface="Consolas"/>
                 </a:rPr>
-                <a:t xml:space="preserve">
+                <a:t>
 </a:t>
               </a:r>
             </a:p>
@@ -15869,7 +15764,7 @@
                   <a:ea typeface="Microsoft YaHei"/>
                   <a:cs typeface="Consolas"/>
                 </a:rPr>
-                <a:t xml:space="preserve">        shstk-&gt;size = </a:t>
+                <a:t>        shstk-&gt;size = </a:t>
               </a:r>
               <a:r>
                 <a:rPr lang="zh-CN" sz="1050" dirty="0">
@@ -15891,18 +15786,7 @@
                   <a:ea typeface="Microsoft YaHei"/>
                   <a:cs typeface="Consolas"/>
                 </a:rPr>
-                <a:t>;</a:t>
-              </a:r>
-              <a:r>
-                <a:rPr lang="zh-CN" sz="1050" dirty="0">
-                  <a:solidFill>
-                    <a:srgbClr val="E0E0E0"/>
-                  </a:solidFill>
-                  <a:latin typeface="Consolas"/>
-                  <a:ea typeface="Microsoft YaHei"/>
-                  <a:cs typeface="Consolas"/>
-                </a:rPr>
-                <a:t xml:space="preserve">
+                <a:t>;
 </a:t>
               </a:r>
             </a:p>
@@ -15943,7 +15827,7 @@
                   <a:ea typeface="Microsoft YaHei"/>
                   <a:cs typeface="Consolas"/>
                 </a:rPr>
-                <a:t xml:space="preserve">        </a:t>
+                <a:t>        </a:t>
               </a:r>
               <a:r>
                 <a:rPr lang="zh-CN" sz="1050" dirty="0">
@@ -15965,7 +15849,7 @@
                   <a:ea typeface="Microsoft YaHei"/>
                   <a:cs typeface="Consolas"/>
                 </a:rPr>
-                <a:t xml:space="preserve"> </a:t>
+                <a:t> </a:t>
               </a:r>
               <a:r>
                 <a:rPr lang="zh-CN" sz="1050" dirty="0">
@@ -15987,18 +15871,7 @@
                   <a:ea typeface="Microsoft YaHei"/>
                   <a:cs typeface="Consolas"/>
                 </a:rPr>
-                <a:t>;</a:t>
-              </a:r>
-              <a:r>
-                <a:rPr lang="zh-CN" sz="1050" dirty="0">
-                  <a:solidFill>
-                    <a:srgbClr val="E0E0E0"/>
-                  </a:solidFill>
-                  <a:latin typeface="Consolas"/>
-                  <a:ea typeface="Microsoft YaHei"/>
-                  <a:cs typeface="Consolas"/>
-                </a:rPr>
-                <a:t xml:space="preserve">
+                <a:t>;
 </a:t>
               </a:r>
             </a:p>
@@ -16039,7 +15912,7 @@
                   <a:ea typeface="Microsoft YaHei"/>
                   <a:cs typeface="Consolas"/>
                 </a:rPr>
-                <a:t xml:space="preserve">    }</a:t>
+                <a:t>    }</a:t>
               </a:r>
             </a:p>
           </p:txBody>
@@ -16079,7 +15952,7 @@
                   <a:ea typeface="Microsoft YaHei"/>
                   <a:cs typeface="Consolas"/>
                 </a:rPr>
-                <a:t xml:space="preserve">    </a:t>
+                <a:t>    </a:t>
               </a:r>
               <a:r>
                 <a:rPr lang="zh-CN" sz="1050" dirty="0">
@@ -16101,7 +15974,7 @@
                   <a:ea typeface="Microsoft YaHei"/>
                   <a:cs typeface="Consolas"/>
                 </a:rPr>
-                <a:t xml:space="preserve"> (!(</a:t>
+                <a:t> (!(</a:t>
               </a:r>
               <a:r>
                 <a:rPr lang="zh-CN" sz="1050" dirty="0">
@@ -16123,7 +15996,7 @@
                   <a:ea typeface="Microsoft YaHei"/>
                   <a:cs typeface="Consolas"/>
                 </a:rPr>
-                <a:t xml:space="preserve"> &amp; </a:t>
+                <a:t> &amp; </a:t>
               </a:r>
               <a:r>
                 <a:rPr lang="zh-CN" sz="1050" dirty="0">
@@ -16145,18 +16018,7 @@
                   <a:ea typeface="Microsoft YaHei"/>
                   <a:cs typeface="Consolas"/>
                 </a:rPr>
-                <a:t>))</a:t>
-              </a:r>
-              <a:r>
-                <a:rPr lang="zh-CN" sz="1050" dirty="0">
-                  <a:solidFill>
-                    <a:srgbClr val="E0E0E0"/>
-                  </a:solidFill>
-                  <a:latin typeface="Consolas"/>
-                  <a:ea typeface="Microsoft YaHei"/>
-                  <a:cs typeface="Consolas"/>
-                </a:rPr>
-                <a:t xml:space="preserve">
+                <a:t>))
 </a:t>
               </a:r>
             </a:p>
@@ -16197,7 +16059,7 @@
                   <a:ea typeface="Microsoft YaHei"/>
                   <a:cs typeface="Consolas"/>
                 </a:rPr>
-                <a:t xml:space="preserve">        </a:t>
+                <a:t>        </a:t>
               </a:r>
               <a:r>
                 <a:rPr lang="zh-CN" sz="1050" dirty="0">
@@ -16219,7 +16081,7 @@
                   <a:ea typeface="Microsoft YaHei"/>
                   <a:cs typeface="Consolas"/>
                 </a:rPr>
-                <a:t xml:space="preserve"> </a:t>
+                <a:t> </a:t>
               </a:r>
               <a:r>
                 <a:rPr lang="zh-CN" sz="1050" dirty="0">
@@ -16241,7 +16103,7 @@
                   <a:ea typeface="Microsoft YaHei"/>
                   <a:cs typeface="Consolas"/>
                 </a:rPr>
-                <a:t xml:space="preserve">; </a:t>
+                <a:t>; </a:t>
               </a:r>
               <a:r>
                 <a:rPr lang="zh-CN" sz="1050" dirty="0">
@@ -16263,7 +16125,7 @@
                   <a:ea typeface="Microsoft YaHei"/>
                   <a:cs typeface="Consolas"/>
                 </a:rPr>
-                <a:t xml:space="preserve">
+                <a:t>
 </a:t>
               </a:r>
             </a:p>
@@ -16304,7 +16166,7 @@
                   <a:ea typeface="Microsoft YaHei"/>
                   <a:cs typeface="Consolas"/>
                 </a:rPr>
-                <a:t xml:space="preserve">    </a:t>
+                <a:t>    </a:t>
               </a:r>
               <a:r>
                 <a:rPr lang="zh-CN" sz="1050" dirty="0">
@@ -16326,7 +16188,7 @@
                   <a:ea typeface="Microsoft YaHei"/>
                   <a:cs typeface="Consolas"/>
                 </a:rPr>
-                <a:t xml:space="preserve">
+                <a:t>
 </a:t>
               </a:r>
             </a:p>
@@ -16367,7 +16229,7 @@
                   <a:ea typeface="Microsoft YaHei"/>
                   <a:cs typeface="Consolas"/>
                 </a:rPr>
-                <a:t xml:space="preserve">    size = adjust_shstk_size(stack_size);</a:t>
+                <a:t>    size = adjust_shstk_size(stack_size);</a:t>
               </a:r>
             </a:p>
           </p:txBody>
@@ -16407,7 +16269,7 @@
                   <a:ea typeface="Microsoft YaHei"/>
                   <a:cs typeface="Consolas"/>
                 </a:rPr>
-                <a:t xml:space="preserve">    addr = alloc_shstk(</a:t>
+                <a:t>    addr = alloc_shstk(</a:t>
               </a:r>
               <a:r>
                 <a:rPr lang="zh-CN" sz="1050" dirty="0">
@@ -16429,7 +16291,7 @@
                   <a:ea typeface="Microsoft YaHei"/>
                   <a:cs typeface="Consolas"/>
                 </a:rPr>
-                <a:t xml:space="preserve">, size, </a:t>
+                <a:t>, size, </a:t>
               </a:r>
               <a:r>
                 <a:rPr lang="zh-CN" sz="1050" dirty="0">
@@ -16451,7 +16313,7 @@
                   <a:ea typeface="Microsoft YaHei"/>
                   <a:cs typeface="Consolas"/>
                 </a:rPr>
-                <a:t xml:space="preserve">, </a:t>
+                <a:t>, </a:t>
               </a:r>
               <a:r>
                 <a:rPr lang="zh-CN" sz="1050" dirty="0">
@@ -16473,18 +16335,7 @@
                   <a:ea typeface="Microsoft YaHei"/>
                   <a:cs typeface="Consolas"/>
                 </a:rPr>
-                <a:t>);</a:t>
-              </a:r>
-              <a:r>
-                <a:rPr lang="zh-CN" sz="1050" dirty="0">
-                  <a:solidFill>
-                    <a:srgbClr val="E0E0E0"/>
-                  </a:solidFill>
-                  <a:latin typeface="Consolas"/>
-                  <a:ea typeface="Microsoft YaHei"/>
-                  <a:cs typeface="Consolas"/>
-                </a:rPr>
-                <a:t xml:space="preserve">
+                <a:t>);
 </a:t>
               </a:r>
             </a:p>
@@ -16525,7 +16376,7 @@
                   <a:ea typeface="Microsoft YaHei"/>
                   <a:cs typeface="Consolas"/>
                 </a:rPr>
-                <a:t xml:space="preserve">    shstk-&gt;base = addr;</a:t>
+                <a:t>    shstk-&gt;base = addr;</a:t>
               </a:r>
             </a:p>
           </p:txBody>
@@ -16565,7 +16416,7 @@
                   <a:ea typeface="Microsoft YaHei"/>
                   <a:cs typeface="Consolas"/>
                 </a:rPr>
-                <a:t xml:space="preserve">    shstk-&gt;size = size;</a:t>
+                <a:t>    shstk-&gt;size = size;</a:t>
               </a:r>
             </a:p>
           </p:txBody>
@@ -16605,7 +16456,7 @@
                   <a:ea typeface="Microsoft YaHei"/>
                   <a:cs typeface="Consolas"/>
                 </a:rPr>
-                <a:t xml:space="preserve">    </a:t>
+                <a:t>    </a:t>
               </a:r>
               <a:r>
                 <a:rPr lang="zh-CN" sz="1050" dirty="0">
@@ -16627,18 +16478,7 @@
                   <a:ea typeface="Microsoft YaHei"/>
                   <a:cs typeface="Consolas"/>
                 </a:rPr>
-                <a:t xml:space="preserve"> addr + size;</a:t>
-              </a:r>
-              <a:r>
-                <a:rPr lang="zh-CN" sz="1050" dirty="0">
-                  <a:solidFill>
-                    <a:srgbClr val="E0E0E0"/>
-                  </a:solidFill>
-                  <a:latin typeface="Consolas"/>
-                  <a:ea typeface="Microsoft YaHei"/>
-                  <a:cs typeface="Consolas"/>
-                </a:rPr>
-                <a:t xml:space="preserve">
+                <a:t> addr + size;
 </a:t>
               </a:r>
             </a:p>
@@ -17643,7 +17483,7 @@
         </p:nvGrpSpPr>
         <p:grpSpPr>
           <a:xfrm>
-            <a:off x="476250" y="5143500"/>
+            <a:off x="222218" y="5404485"/>
             <a:ext cx="11239500" cy="619125"/>
             <a:chOff x="476250" y="5143500"/>
             <a:chExt cx="11239500" cy="619125"/>
@@ -17712,7 +17552,7 @@
                   <a:ea typeface="Microsoft YaHei"/>
                   <a:cs typeface="Arial"/>
                 </a:rPr>
-                <a:t xml:space="preserve">Returned SSP is stored into child's XSAVE area by </a:t>
+                <a:t>Returned SSP is stored into child's XSAVE area by </a:t>
               </a:r>
               <a:r>
                 <a:rPr lang="zh-CN" sz="1125" dirty="0">
@@ -17792,7 +17632,7 @@
             <p:nvPr/>
           </p:nvPicPr>
           <p:blipFill>
-            <a:blip r:embed="rId3"/>
+            <a:blip r:embed="rId4"/>
             <a:stretch>
               <a:fillRect/>
             </a:stretch>
@@ -17855,9 +17695,18 @@
   <p:clrMapOvr>
     <a:masterClrMapping/>
   </p:clrMapOvr>
-  <p:transition xmlns:p14="http://schemas.microsoft.com/office/powerpoint/2010/main" p14:dur="400">
-    <p:fade/>
-  </p:transition>
+  <mc:AlternateContent xmlns:mc="http://schemas.openxmlformats.org/markup-compatibility/2006">
+    <mc:Choice xmlns:p14="http://schemas.microsoft.com/office/powerpoint/2010/main" Requires="p14">
+      <p:transition p14:dur="400">
+        <p:fade/>
+      </p:transition>
+    </mc:Choice>
+    <mc:Fallback>
+      <p:transition>
+        <p:fade/>
+      </p:transition>
+    </mc:Fallback>
+  </mc:AlternateContent>
   <p:timing>
     <p:tnLst>
       <p:par>
@@ -18125,8 +17974,8 @@
             <p:nvPr/>
           </p:nvPicPr>
           <p:blipFill>
-            <a:blip r:embed="rId2"/>
-            <a:srcRect l="0" t="781" r="0" b="781"/>
+            <a:blip r:embed="rId3"/>
+            <a:srcRect t="781" b="781"/>
             <a:stretch>
               <a:fillRect/>
             </a:stretch>
@@ -18328,7 +18177,7 @@
                   <a:ea typeface="Microsoft YaHei"/>
                   <a:cs typeface="Consolas"/>
                 </a:rPr>
-                <a:t xml:space="preserve"> </a:t>
+                <a:t> </a:t>
               </a:r>
               <a:r>
                 <a:rPr lang="zh-CN" sz="1050" dirty="0">
@@ -18350,18 +18199,7 @@
                   <a:ea typeface="Microsoft YaHei"/>
                   <a:cs typeface="Consolas"/>
                 </a:rPr>
-                <a:t xml:space="preserve"> update_fpu_shstk(</a:t>
-              </a:r>
-              <a:r>
-                <a:rPr lang="zh-CN" sz="1050" dirty="0">
-                  <a:solidFill>
-                    <a:srgbClr val="E0E0E0"/>
-                  </a:solidFill>
-                  <a:latin typeface="Consolas"/>
-                  <a:ea typeface="Microsoft YaHei"/>
-                  <a:cs typeface="Consolas"/>
-                </a:rPr>
-                <a:t xml:space="preserve">
+                <a:t> update_fpu_shstk(
 </a:t>
               </a:r>
             </a:p>
@@ -18402,7 +18240,7 @@
                   <a:ea typeface="Microsoft YaHei"/>
                   <a:cs typeface="Consolas"/>
                 </a:rPr>
-                <a:t xml:space="preserve">    </a:t>
+                <a:t>    </a:t>
               </a:r>
               <a:r>
                 <a:rPr lang="zh-CN" sz="1050" dirty="0">
@@ -18424,18 +18262,7 @@
                   <a:ea typeface="Microsoft YaHei"/>
                   <a:cs typeface="Consolas"/>
                 </a:rPr>
-                <a:t xml:space="preserve"> task_struct *dst,</a:t>
-              </a:r>
-              <a:r>
-                <a:rPr lang="zh-CN" sz="1050" dirty="0">
-                  <a:solidFill>
-                    <a:srgbClr val="E0E0E0"/>
-                  </a:solidFill>
-                  <a:latin typeface="Consolas"/>
-                  <a:ea typeface="Microsoft YaHei"/>
-                  <a:cs typeface="Consolas"/>
-                </a:rPr>
-                <a:t xml:space="preserve">
+                <a:t> task_struct *dst,
 </a:t>
               </a:r>
             </a:p>
@@ -18476,7 +18303,7 @@
                   <a:ea typeface="Microsoft YaHei"/>
                   <a:cs typeface="Consolas"/>
                 </a:rPr>
-                <a:t xml:space="preserve">    </a:t>
+                <a:t>    </a:t>
               </a:r>
               <a:r>
                 <a:rPr lang="zh-CN" sz="1050" dirty="0">
@@ -18498,7 +18325,7 @@
                   <a:ea typeface="Microsoft YaHei"/>
                   <a:cs typeface="Consolas"/>
                 </a:rPr>
-                <a:t xml:space="preserve"> </a:t>
+                <a:t> </a:t>
               </a:r>
               <a:r>
                 <a:rPr lang="zh-CN" sz="1050" dirty="0">
@@ -18520,18 +18347,7 @@
                   <a:ea typeface="Microsoft YaHei"/>
                   <a:cs typeface="Consolas"/>
                 </a:rPr>
-                <a:t xml:space="preserve"> ssp)</a:t>
-              </a:r>
-              <a:r>
-                <a:rPr lang="zh-CN" sz="1050" dirty="0">
-                  <a:solidFill>
-                    <a:srgbClr val="E0E0E0"/>
-                  </a:solidFill>
-                  <a:latin typeface="Consolas"/>
-                  <a:ea typeface="Microsoft YaHei"/>
-                  <a:cs typeface="Consolas"/>
-                </a:rPr>
-                <a:t xml:space="preserve">
+                <a:t> ssp)
 </a:t>
               </a:r>
             </a:p>
@@ -18612,7 +18428,7 @@
                   <a:ea typeface="Microsoft YaHei"/>
                   <a:cs typeface="Consolas"/>
                 </a:rPr>
-                <a:t xml:space="preserve">    </a:t>
+                <a:t>    </a:t>
               </a:r>
               <a:r>
                 <a:rPr lang="zh-CN" sz="1050" dirty="0">
@@ -18634,18 +18450,7 @@
                   <a:ea typeface="Microsoft YaHei"/>
                   <a:cs typeface="Consolas"/>
                 </a:rPr>
-                <a:t xml:space="preserve"> cet_user_state *xstate;</a:t>
-              </a:r>
-              <a:r>
-                <a:rPr lang="zh-CN" sz="1050" dirty="0">
-                  <a:solidFill>
-                    <a:srgbClr val="E0E0E0"/>
-                  </a:solidFill>
-                  <a:latin typeface="Consolas"/>
-                  <a:ea typeface="Microsoft YaHei"/>
-                  <a:cs typeface="Consolas"/>
-                </a:rPr>
-                <a:t xml:space="preserve">
+                <a:t> cet_user_state *xstate;
 </a:t>
               </a:r>
             </a:p>
@@ -18686,7 +18491,7 @@
                   <a:ea typeface="Microsoft YaHei"/>
                   <a:cs typeface="Consolas"/>
                 </a:rPr>
-                <a:t xml:space="preserve">    </a:t>
+                <a:t>    </a:t>
               </a:r>
               <a:r>
                 <a:rPr lang="zh-CN" sz="1050" dirty="0">
@@ -18708,18 +18513,7 @@
                   <a:ea typeface="Microsoft YaHei"/>
                   <a:cs typeface="Consolas"/>
                 </a:rPr>
-                <a:t xml:space="preserve"> (!ssp)</a:t>
-              </a:r>
-              <a:r>
-                <a:rPr lang="zh-CN" sz="1050" dirty="0">
-                  <a:solidFill>
-                    <a:srgbClr val="E0E0E0"/>
-                  </a:solidFill>
-                  <a:latin typeface="Consolas"/>
-                  <a:ea typeface="Microsoft YaHei"/>
-                  <a:cs typeface="Consolas"/>
-                </a:rPr>
-                <a:t xml:space="preserve">
+                <a:t> (!ssp)
 </a:t>
               </a:r>
             </a:p>
@@ -18760,7 +18554,7 @@
                   <a:ea typeface="Microsoft YaHei"/>
                   <a:cs typeface="Consolas"/>
                 </a:rPr>
-                <a:t xml:space="preserve">        </a:t>
+                <a:t>        </a:t>
               </a:r>
               <a:r>
                 <a:rPr lang="zh-CN" sz="1050" dirty="0">
@@ -18782,7 +18576,7 @@
                   <a:ea typeface="Microsoft YaHei"/>
                   <a:cs typeface="Consolas"/>
                 </a:rPr>
-                <a:t xml:space="preserve"> </a:t>
+                <a:t> </a:t>
               </a:r>
               <a:r>
                 <a:rPr lang="zh-CN" sz="1050" dirty="0">
@@ -18804,18 +18598,7 @@
                   <a:ea typeface="Microsoft YaHei"/>
                   <a:cs typeface="Consolas"/>
                 </a:rPr>
-                <a:t>;</a:t>
-              </a:r>
-              <a:r>
-                <a:rPr lang="zh-CN" sz="1050" dirty="0">
-                  <a:solidFill>
-                    <a:srgbClr val="E0E0E0"/>
-                  </a:solidFill>
-                  <a:latin typeface="Consolas"/>
-                  <a:ea typeface="Microsoft YaHei"/>
-                  <a:cs typeface="Consolas"/>
-                </a:rPr>
-                <a:t xml:space="preserve">
+                <a:t>;
 </a:t>
               </a:r>
             </a:p>
@@ -18856,7 +18639,7 @@
                   <a:ea typeface="Microsoft YaHei"/>
                   <a:cs typeface="Consolas"/>
                 </a:rPr>
-                <a:t xml:space="preserve">    xstate = get_xsave_addr(</a:t>
+                <a:t>    xstate = get_xsave_addr(</a:t>
               </a:r>
             </a:p>
           </p:txBody>
@@ -18896,7 +18679,7 @@
                   <a:ea typeface="Microsoft YaHei"/>
                   <a:cs typeface="Consolas"/>
                 </a:rPr>
-                <a:t xml:space="preserve">        &amp;x86_task_fpu(dst)</a:t>
+                <a:t>        &amp;x86_task_fpu(dst)</a:t>
               </a:r>
             </a:p>
           </p:txBody>
@@ -18936,7 +18719,7 @@
                   <a:ea typeface="Microsoft YaHei"/>
                   <a:cs typeface="Consolas"/>
                 </a:rPr>
-                <a:t xml:space="preserve">            -&gt;fpstate-&gt;regs.xsave,</a:t>
+                <a:t>            -&gt;fpstate-&gt;regs.xsave,</a:t>
               </a:r>
             </a:p>
           </p:txBody>
@@ -18976,7 +18759,7 @@
                   <a:ea typeface="Microsoft YaHei"/>
                   <a:cs typeface="Consolas"/>
                 </a:rPr>
-                <a:t xml:space="preserve">        </a:t>
+                <a:t>        </a:t>
               </a:r>
               <a:r>
                 <a:rPr lang="zh-CN" sz="1050" dirty="0">
@@ -18998,18 +18781,7 @@
                   <a:ea typeface="Microsoft YaHei"/>
                   <a:cs typeface="Consolas"/>
                 </a:rPr>
-                <a:t>);</a:t>
-              </a:r>
-              <a:r>
-                <a:rPr lang="zh-CN" sz="1050" dirty="0">
-                  <a:solidFill>
-                    <a:srgbClr val="E0E0E0"/>
-                  </a:solidFill>
-                  <a:latin typeface="Consolas"/>
-                  <a:ea typeface="Microsoft YaHei"/>
-                  <a:cs typeface="Consolas"/>
-                </a:rPr>
-                <a:t xml:space="preserve">
+                <a:t>);
 </a:t>
               </a:r>
             </a:p>
@@ -19050,40 +18822,7 @@
                   <a:ea typeface="Microsoft YaHei"/>
                   <a:cs typeface="Consolas"/>
                 </a:rPr>
-                <a:t xml:space="preserve">    xstate-&gt;user_ssp = (</a:t>
-              </a:r>
-              <a:r>
-                <a:rPr lang="zh-CN" sz="1050" dirty="0">
-                  <a:solidFill>
-                    <a:srgbClr val="E0E0E0"/>
-                  </a:solidFill>
-                  <a:latin typeface="Consolas"/>
-                  <a:ea typeface="Microsoft YaHei"/>
-                  <a:cs typeface="Consolas"/>
-                </a:rPr>
-                <a:t>u64</a:t>
-              </a:r>
-              <a:r>
-                <a:rPr lang="zh-CN" sz="1050" dirty="0">
-                  <a:solidFill>
-                    <a:srgbClr val="E0E0E0"/>
-                  </a:solidFill>
-                  <a:latin typeface="Consolas"/>
-                  <a:ea typeface="Microsoft YaHei"/>
-                  <a:cs typeface="Consolas"/>
-                </a:rPr>
-                <a:t>)ssp;</a:t>
-              </a:r>
-              <a:r>
-                <a:rPr lang="zh-CN" sz="1050" dirty="0">
-                  <a:solidFill>
-                    <a:srgbClr val="E0E0E0"/>
-                  </a:solidFill>
-                  <a:latin typeface="Consolas"/>
-                  <a:ea typeface="Microsoft YaHei"/>
-                  <a:cs typeface="Consolas"/>
-                </a:rPr>
-                <a:t xml:space="preserve">
+                <a:t>    xstate-&gt;user_ssp = (u64)ssp;
 </a:t>
               </a:r>
             </a:p>
@@ -19124,7 +18863,7 @@
                   <a:ea typeface="Microsoft YaHei"/>
                   <a:cs typeface="Consolas"/>
                 </a:rPr>
-                <a:t xml:space="preserve">    </a:t>
+                <a:t>    </a:t>
               </a:r>
               <a:r>
                 <a:rPr lang="zh-CN" sz="1050" dirty="0">
@@ -19146,7 +18885,7 @@
                   <a:ea typeface="Microsoft YaHei"/>
                   <a:cs typeface="Consolas"/>
                 </a:rPr>
-                <a:t xml:space="preserve"> </a:t>
+                <a:t> </a:t>
               </a:r>
               <a:r>
                 <a:rPr lang="zh-CN" sz="1050" dirty="0">
@@ -19168,18 +18907,7 @@
                   <a:ea typeface="Microsoft YaHei"/>
                   <a:cs typeface="Consolas"/>
                 </a:rPr>
-                <a:t>;</a:t>
-              </a:r>
-              <a:r>
-                <a:rPr lang="zh-CN" sz="1050" dirty="0">
-                  <a:solidFill>
-                    <a:srgbClr val="E0E0E0"/>
-                  </a:solidFill>
-                  <a:latin typeface="Consolas"/>
-                  <a:ea typeface="Microsoft YaHei"/>
-                  <a:cs typeface="Consolas"/>
-                </a:rPr>
-                <a:t xml:space="preserve">
+                <a:t>;
 </a:t>
               </a:r>
             </a:p>
@@ -20382,7 +20110,7 @@
             <p:nvPr/>
           </p:nvPicPr>
           <p:blipFill>
-            <a:blip r:embed="rId3"/>
+            <a:blip r:embed="rId4"/>
             <a:stretch>
               <a:fillRect/>
             </a:stretch>
@@ -20445,9 +20173,18 @@
   <p:clrMapOvr>
     <a:masterClrMapping/>
   </p:clrMapOvr>
-  <p:transition xmlns:p14="http://schemas.microsoft.com/office/powerpoint/2010/main" p14:dur="400">
-    <p:fade/>
-  </p:transition>
+  <mc:AlternateContent xmlns:mc="http://schemas.openxmlformats.org/markup-compatibility/2006">
+    <mc:Choice xmlns:p14="http://schemas.microsoft.com/office/powerpoint/2010/main" Requires="p14">
+      <p:transition p14:dur="400">
+        <p:fade/>
+      </p:transition>
+    </mc:Choice>
+    <mc:Fallback>
+      <p:transition>
+        <p:fade/>
+      </p:transition>
+    </mc:Fallback>
+  </mc:AlternateContent>
   <p:timing>
     <p:tnLst>
       <p:par>
@@ -20805,8 +20542,8 @@
             <p:nvPr/>
           </p:nvPicPr>
           <p:blipFill>
-            <a:blip r:embed="rId2"/>
-            <a:srcRect l="0" t="781" r="0" b="781"/>
+            <a:blip r:embed="rId3"/>
+            <a:srcRect t="781" b="781"/>
             <a:stretch>
               <a:fillRect/>
             </a:stretch>
@@ -21008,7 +20745,7 @@
                   <a:ea typeface="Microsoft YaHei"/>
                   <a:cs typeface="Consolas"/>
                 </a:rPr>
-                <a:t xml:space="preserve"> </a:t>
+                <a:t> </a:t>
               </a:r>
               <a:r>
                 <a:rPr lang="zh-CN" sz="1050" dirty="0">
@@ -21030,7 +20767,7 @@
                   <a:ea typeface="Microsoft YaHei"/>
                   <a:cs typeface="Consolas"/>
                 </a:rPr>
-                <a:t xml:space="preserve">   </a:t>
+                <a:t>   </a:t>
               </a:r>
               <a:r>
                 <a:rPr lang="zh-CN" sz="1050" dirty="0">
@@ -21052,7 +20789,7 @@
                   <a:ea typeface="Microsoft YaHei"/>
                   <a:cs typeface="Consolas"/>
                 </a:rPr>
-                <a:t xml:space="preserve">
+                <a:t>
 </a:t>
               </a:r>
             </a:p>
@@ -21104,7 +20841,7 @@
                   <a:ea typeface="Microsoft YaHei"/>
                   <a:cs typeface="Consolas"/>
                 </a:rPr>
-                <a:t xml:space="preserve"> </a:t>
+                <a:t> </a:t>
               </a:r>
               <a:r>
                 <a:rPr lang="zh-CN" sz="1050" dirty="0">
@@ -21126,7 +20863,7 @@
                   <a:ea typeface="Microsoft YaHei"/>
                   <a:cs typeface="Consolas"/>
                 </a:rPr>
-                <a:t xml:space="preserve">  </a:t>
+                <a:t>  </a:t>
               </a:r>
               <a:r>
                 <a:rPr lang="zh-CN" sz="1050" dirty="0">
@@ -21148,7 +20885,7 @@
                   <a:ea typeface="Microsoft YaHei"/>
                   <a:cs typeface="Consolas"/>
                 </a:rPr>
-                <a:t xml:space="preserve">
+                <a:t>
 </a:t>
               </a:r>
             </a:p>
@@ -21200,7 +20937,7 @@
                   <a:ea typeface="Microsoft YaHei"/>
                   <a:cs typeface="Consolas"/>
                 </a:rPr>
-                <a:t xml:space="preserve"> </a:t>
+                <a:t> </a:t>
               </a:r>
               <a:r>
                 <a:rPr lang="zh-CN" sz="1050" dirty="0">
@@ -21222,7 +20959,7 @@
                   <a:ea typeface="Microsoft YaHei"/>
                   <a:cs typeface="Consolas"/>
                 </a:rPr>
-                <a:t xml:space="preserve">     </a:t>
+                <a:t>     </a:t>
               </a:r>
               <a:r>
                 <a:rPr lang="zh-CN" sz="1050" dirty="0">
@@ -21244,7 +20981,7 @@
                   <a:ea typeface="Microsoft YaHei"/>
                   <a:cs typeface="Consolas"/>
                 </a:rPr>
-                <a:t xml:space="preserve">
+                <a:t>
 </a:t>
               </a:r>
             </a:p>
@@ -21296,7 +21033,7 @@
                   <a:ea typeface="Microsoft YaHei"/>
                   <a:cs typeface="Consolas"/>
                 </a:rPr>
-                <a:t xml:space="preserve"> </a:t>
+                <a:t> </a:t>
               </a:r>
               <a:r>
                 <a:rPr lang="zh-CN" sz="1050" dirty="0">
@@ -21318,7 +21055,7 @@
                   <a:ea typeface="Microsoft YaHei"/>
                   <a:cs typeface="Consolas"/>
                 </a:rPr>
-                <a:t xml:space="preserve">   </a:t>
+                <a:t>   </a:t>
               </a:r>
               <a:r>
                 <a:rPr lang="zh-CN" sz="1050" dirty="0">
@@ -21340,7 +21077,7 @@
                   <a:ea typeface="Microsoft YaHei"/>
                   <a:cs typeface="Consolas"/>
                 </a:rPr>
-                <a:t xml:space="preserve">
+                <a:t>
 </a:t>
               </a:r>
             </a:p>
@@ -21392,7 +21129,7 @@
                   <a:ea typeface="Microsoft YaHei"/>
                   <a:cs typeface="Consolas"/>
                 </a:rPr>
-                <a:t xml:space="preserve"> </a:t>
+                <a:t> </a:t>
               </a:r>
               <a:r>
                 <a:rPr lang="zh-CN" sz="1050" dirty="0">
@@ -21414,7 +21151,7 @@
                   <a:ea typeface="Microsoft YaHei"/>
                   <a:cs typeface="Consolas"/>
                 </a:rPr>
-                <a:t xml:space="preserve">   </a:t>
+                <a:t>   </a:t>
               </a:r>
               <a:r>
                 <a:rPr lang="zh-CN" sz="1050" dirty="0">
@@ -21436,7 +21173,7 @@
                   <a:ea typeface="Microsoft YaHei"/>
                   <a:cs typeface="Consolas"/>
                 </a:rPr>
-                <a:t xml:space="preserve">
+                <a:t>
 </a:t>
               </a:r>
             </a:p>
@@ -21488,7 +21225,7 @@
                   <a:ea typeface="Microsoft YaHei"/>
                   <a:cs typeface="Consolas"/>
                 </a:rPr>
-                <a:t xml:space="preserve"> </a:t>
+                <a:t> </a:t>
               </a:r>
               <a:r>
                 <a:rPr lang="zh-CN" sz="1050" dirty="0">
@@ -21510,7 +21247,7 @@
                   <a:ea typeface="Microsoft YaHei"/>
                   <a:cs typeface="Consolas"/>
                 </a:rPr>
-                <a:t xml:space="preserve">  (</a:t>
+                <a:t>  (</a:t>
               </a:r>
               <a:r>
                 <a:rPr lang="zh-CN" sz="1050" dirty="0">
@@ -21532,7 +21269,7 @@
                   <a:ea typeface="Microsoft YaHei"/>
                   <a:cs typeface="Consolas"/>
                 </a:rPr>
-                <a:t xml:space="preserve"> &lt;&lt; </a:t>
+                <a:t> &lt;&lt; </a:t>
               </a:r>
               <a:r>
                 <a:rPr lang="zh-CN" sz="1050" dirty="0">
@@ -21554,18 +21291,7 @@
                   <a:ea typeface="Microsoft YaHei"/>
                   <a:cs typeface="Consolas"/>
                 </a:rPr>
-                <a:t>)</a:t>
-              </a:r>
-              <a:r>
-                <a:rPr lang="zh-CN" sz="1050" dirty="0">
-                  <a:solidFill>
-                    <a:srgbClr val="E0E0E0"/>
-                  </a:solidFill>
-                  <a:latin typeface="Consolas"/>
-                  <a:ea typeface="Microsoft YaHei"/>
-                  <a:cs typeface="Consolas"/>
-                </a:rPr>
-                <a:t xml:space="preserve">
+                <a:t>)
 </a:t>
               </a:r>
             </a:p>
@@ -21617,7 +21343,7 @@
                   <a:ea typeface="Microsoft YaHei"/>
                   <a:cs typeface="Consolas"/>
                 </a:rPr>
-                <a:t xml:space="preserve"> </a:t>
+                <a:t> </a:t>
               </a:r>
               <a:r>
                 <a:rPr lang="zh-CN" sz="1050" dirty="0">
@@ -21639,7 +21365,7 @@
                   <a:ea typeface="Microsoft YaHei"/>
                   <a:cs typeface="Consolas"/>
                 </a:rPr>
-                <a:t xml:space="preserve">   (</a:t>
+                <a:t>   (</a:t>
               </a:r>
               <a:r>
                 <a:rPr lang="zh-CN" sz="1050" dirty="0">
@@ -21661,7 +21387,7 @@
                   <a:ea typeface="Microsoft YaHei"/>
                   <a:cs typeface="Consolas"/>
                 </a:rPr>
-                <a:t xml:space="preserve"> &lt;&lt; </a:t>
+                <a:t> &lt;&lt; </a:t>
               </a:r>
               <a:r>
                 <a:rPr lang="zh-CN" sz="1050" dirty="0">
@@ -21683,18 +21409,7 @@
                   <a:ea typeface="Microsoft YaHei"/>
                   <a:cs typeface="Consolas"/>
                 </a:rPr>
-                <a:t>)</a:t>
-              </a:r>
-              <a:r>
-                <a:rPr lang="zh-CN" sz="1050" dirty="0">
-                  <a:solidFill>
-                    <a:srgbClr val="E0E0E0"/>
-                  </a:solidFill>
-                  <a:latin typeface="Consolas"/>
-                  <a:ea typeface="Microsoft YaHei"/>
-                  <a:cs typeface="Consolas"/>
-                </a:rPr>
-                <a:t xml:space="preserve">
+                <a:t>)
 </a:t>
               </a:r>
             </a:p>
@@ -21825,7 +21540,7 @@
                   <a:ea typeface="Microsoft YaHei"/>
                   <a:cs typeface="Consolas"/>
                 </a:rPr>
-                <a:t xml:space="preserve">
+                <a:t>
 </a:t>
               </a:r>
             </a:p>
@@ -21888,18 +21603,7 @@
                   <a:ea typeface="Microsoft YaHei"/>
                   <a:cs typeface="Consolas"/>
                 </a:rPr>
-                <a:t>,</a:t>
-              </a:r>
-              <a:r>
-                <a:rPr lang="zh-CN" sz="1050" dirty="0">
-                  <a:solidFill>
-                    <a:srgbClr val="E0E0E0"/>
-                  </a:solidFill>
-                  <a:latin typeface="Consolas"/>
-                  <a:ea typeface="Microsoft YaHei"/>
-                  <a:cs typeface="Consolas"/>
-                </a:rPr>
-                <a:t xml:space="preserve">
+                <a:t>,
 </a:t>
               </a:r>
             </a:p>
@@ -21940,7 +21644,7 @@
                   <a:ea typeface="Microsoft YaHei"/>
                   <a:cs typeface="Consolas"/>
                 </a:rPr>
-                <a:t xml:space="preserve">           </a:t>
+                <a:t>           </a:t>
               </a:r>
               <a:r>
                 <a:rPr lang="zh-CN" sz="1050" dirty="0">
@@ -21962,18 +21666,7 @@
                   <a:ea typeface="Microsoft YaHei"/>
                   <a:cs typeface="Consolas"/>
                 </a:rPr>
-                <a:t>);</a:t>
-              </a:r>
-              <a:r>
-                <a:rPr lang="zh-CN" sz="1050" dirty="0">
-                  <a:solidFill>
-                    <a:srgbClr val="E0E0E0"/>
-                  </a:solidFill>
-                  <a:latin typeface="Consolas"/>
-                  <a:ea typeface="Microsoft YaHei"/>
-                  <a:cs typeface="Consolas"/>
-                </a:rPr>
-                <a:t xml:space="preserve">
+                <a:t>);
 </a:t>
               </a:r>
             </a:p>
@@ -22025,7 +21718,7 @@
                   <a:ea typeface="Microsoft YaHei"/>
                   <a:cs typeface="Consolas"/>
                 </a:rPr>
-                <a:t xml:space="preserve">
+                <a:t>
 </a:t>
               </a:r>
             </a:p>
@@ -22088,18 +21781,7 @@
                   <a:ea typeface="Microsoft YaHei"/>
                   <a:cs typeface="Consolas"/>
                 </a:rPr>
-                <a:t>,</a:t>
-              </a:r>
-              <a:r>
-                <a:rPr lang="zh-CN" sz="1050" dirty="0">
-                  <a:solidFill>
-                    <a:srgbClr val="E0E0E0"/>
-                  </a:solidFill>
-                  <a:latin typeface="Consolas"/>
-                  <a:ea typeface="Microsoft YaHei"/>
-                  <a:cs typeface="Consolas"/>
-                </a:rPr>
-                <a:t xml:space="preserve">
+                <a:t>,
 </a:t>
               </a:r>
             </a:p>
@@ -22140,7 +21822,7 @@
                   <a:ea typeface="Microsoft YaHei"/>
                   <a:cs typeface="Consolas"/>
                 </a:rPr>
-                <a:t xml:space="preserve">           </a:t>
+                <a:t>           </a:t>
               </a:r>
               <a:r>
                 <a:rPr lang="zh-CN" sz="1050" dirty="0">
@@ -22162,18 +21844,7 @@
                   <a:ea typeface="Microsoft YaHei"/>
                   <a:cs typeface="Consolas"/>
                 </a:rPr>
-                <a:t>);</a:t>
-              </a:r>
-              <a:r>
-                <a:rPr lang="zh-CN" sz="1050" dirty="0">
-                  <a:solidFill>
-                    <a:srgbClr val="E0E0E0"/>
-                  </a:solidFill>
-                  <a:latin typeface="Consolas"/>
-                  <a:ea typeface="Microsoft YaHei"/>
-                  <a:cs typeface="Consolas"/>
-                </a:rPr>
-                <a:t xml:space="preserve">
+                <a:t>);
 </a:t>
               </a:r>
             </a:p>
@@ -23210,7 +22881,7 @@
             <p:nvPr/>
           </p:nvPicPr>
           <p:blipFill>
-            <a:blip r:embed="rId3"/>
+            <a:blip r:embed="rId4"/>
             <a:stretch>
               <a:fillRect/>
             </a:stretch>
@@ -23273,9 +22944,18 @@
   <p:clrMapOvr>
     <a:masterClrMapping/>
   </p:clrMapOvr>
-  <p:transition xmlns:p14="http://schemas.microsoft.com/office/powerpoint/2010/main" p14:dur="400">
-    <p:fade/>
-  </p:transition>
+  <mc:AlternateContent xmlns:mc="http://schemas.openxmlformats.org/markup-compatibility/2006">
+    <mc:Choice xmlns:p14="http://schemas.microsoft.com/office/powerpoint/2010/main" Requires="p14">
+      <p:transition p14:dur="400">
+        <p:fade/>
+      </p:transition>
+    </mc:Choice>
+    <mc:Fallback>
+      <p:transition>
+        <p:fade/>
+      </p:transition>
+    </mc:Fallback>
+  </mc:AlternateContent>
   <p:timing>
     <p:tnLst>
       <p:par>
@@ -23633,8 +23313,8 @@
             <p:nvPr/>
           </p:nvPicPr>
           <p:blipFill>
-            <a:blip r:embed="rId2"/>
-            <a:srcRect l="0" t="781" r="0" b="781"/>
+            <a:blip r:embed="rId3"/>
+            <a:srcRect t="781" b="781"/>
             <a:stretch>
               <a:fillRect/>
             </a:stretch>
@@ -24095,7 +23775,7 @@
                   <a:ea typeface="Microsoft YaHei"/>
                   <a:cs typeface="Arial"/>
                 </a:rPr>
-                <a:t xml:space="preserve">glibc uses </a:t>
+                <a:t>glibc uses </a:t>
               </a:r>
               <a:r>
                 <a:rPr lang="zh-CN" sz="1050" dirty="0">
@@ -24248,7 +23928,7 @@
                   <a:ea typeface="Microsoft YaHei"/>
                   <a:cs typeface="Arial"/>
                 </a:rPr>
-                <a:t xml:space="preserve">May require </a:t>
+                <a:t>May require </a:t>
               </a:r>
               <a:r>
                 <a:rPr lang="zh-CN" sz="1050" dirty="0">
@@ -24546,7 +24226,7 @@
                   <a:ea typeface="Microsoft YaHei"/>
                   <a:cs typeface="Arial"/>
                 </a:rPr>
-                <a:t xml:space="preserve">Must emit </a:t>
+                <a:t>Must emit </a:t>
               </a:r>
               <a:r>
                 <a:rPr lang="zh-CN" sz="1050" dirty="0">
@@ -24568,7 +24248,7 @@
                   <a:ea typeface="Microsoft YaHei"/>
                   <a:cs typeface="Arial"/>
                 </a:rPr>
-                <a:t xml:space="preserve"> at all</a:t>
+                <a:t> at all</a:t>
               </a:r>
             </a:p>
           </p:txBody>
@@ -25338,7 +25018,7 @@
                   <a:ea typeface="Microsoft YaHei"/>
                   <a:cs typeface="Arial"/>
                 </a:rPr>
-                <a:t xml:space="preserve"> Per-process control</a:t>
+                <a:t> Per-process control</a:t>
               </a:r>
             </a:p>
           </p:txBody>
@@ -25389,7 +25069,7 @@
                   <a:ea typeface="Microsoft YaHei"/>
                   <a:cs typeface="Arial"/>
                 </a:rPr>
-                <a:t xml:space="preserve"> No kernel restart</a:t>
+                <a:t> No kernel restart</a:t>
               </a:r>
             </a:p>
           </p:txBody>
@@ -25440,7 +25120,7 @@
                   <a:ea typeface="Microsoft YaHei"/>
                   <a:cs typeface="Arial"/>
                 </a:rPr>
-                <a:t xml:space="preserve"> Legacy app support</a:t>
+                <a:t> Legacy app support</a:t>
               </a:r>
             </a:p>
           </p:txBody>
@@ -25491,7 +25171,7 @@
                   <a:ea typeface="Microsoft YaHei"/>
                   <a:cs typeface="Arial"/>
                 </a:rPr>
-                <a:t xml:space="preserve"> Debugging use cases</a:t>
+                <a:t> Debugging use cases</a:t>
               </a:r>
             </a:p>
           </p:txBody>
@@ -25520,7 +25200,7 @@
             <p:nvPr/>
           </p:nvPicPr>
           <p:blipFill>
-            <a:blip r:embed="rId3"/>
+            <a:blip r:embed="rId4"/>
             <a:stretch>
               <a:fillRect/>
             </a:stretch>
@@ -25583,9 +25263,18 @@
   <p:clrMapOvr>
     <a:masterClrMapping/>
   </p:clrMapOvr>
-  <p:transition xmlns:p14="http://schemas.microsoft.com/office/powerpoint/2010/main" p14:dur="400">
-    <p:fade/>
-  </p:transition>
+  <mc:AlternateContent xmlns:mc="http://schemas.openxmlformats.org/markup-compatibility/2006">
+    <mc:Choice xmlns:p14="http://schemas.microsoft.com/office/powerpoint/2010/main" Requires="p14">
+      <p:transition p14:dur="400">
+        <p:fade/>
+      </p:transition>
+    </mc:Choice>
+    <mc:Fallback>
+      <p:transition>
+        <p:fade/>
+      </p:transition>
+    </mc:Fallback>
+  </mc:AlternateContent>
   <p:timing>
     <p:tnLst>
       <p:par>
@@ -25794,8 +25483,8 @@
           <p:nvPr/>
         </p:nvPicPr>
         <p:blipFill>
-          <a:blip r:embed="rId2"/>
-          <a:srcRect l="0" t="781" r="0" b="781"/>
+          <a:blip r:embed="rId3"/>
+          <a:srcRect t="781" b="781"/>
           <a:stretch>
             <a:fillRect/>
           </a:stretch>
@@ -26957,9 +26646,9 @@
         <p:grpSpPr>
           <a:xfrm>
             <a:off x="745808" y="4624864"/>
-            <a:ext cx="5280731" cy="259080"/>
+            <a:ext cx="3809150" cy="259080"/>
             <a:chOff x="745808" y="4624864"/>
-            <a:chExt cx="5280731" cy="259080"/>
+            <a:chExt cx="3809150" cy="259080"/>
           </a:xfrm>
         </p:grpSpPr>
         <p:sp>
@@ -27011,7 +26700,7 @@
           <p:spPr>
             <a:xfrm>
               <a:off x="1031558" y="4624864"/>
-              <a:ext cx="4994981" cy="259080"/>
+              <a:ext cx="3523400" cy="196208"/>
             </a:xfrm>
             <a:prstGeom prst="rect">
               <a:avLst/>
@@ -27037,7 +26726,7 @@
                   <a:ea typeface="Microsoft YaHei"/>
                   <a:cs typeface="Arial"/>
                 </a:rPr>
-                <a:t>Entire implementation lives in ~5 files under arch/x86/</a:t>
+                <a:t>Entire implementation lives files under arch/x86/</a:t>
               </a:r>
             </a:p>
           </p:txBody>
@@ -27208,7 +26897,7 @@
         </p:nvGrpSpPr>
         <p:grpSpPr>
           <a:xfrm>
-            <a:off x="9334500" y="5238750"/>
+            <a:off x="9251735" y="2988862"/>
             <a:ext cx="1143000" cy="1335881"/>
             <a:chOff x="9334500" y="5238750"/>
             <a:chExt cx="1143000" cy="1335881"/>
@@ -27223,7 +26912,7 @@
             <p:nvPr/>
           </p:nvPicPr>
           <p:blipFill>
-            <a:blip r:embed="rId3"/>
+            <a:blip r:embed="rId4"/>
             <a:stretch>
               <a:fillRect/>
             </a:stretch>
@@ -27288,7 +26977,7 @@
           <p:nvPr/>
         </p:nvPicPr>
         <p:blipFill>
-          <a:blip r:embed="rId4"/>
+          <a:blip r:embed="rId5"/>
           <a:stretch>
             <a:fillRect/>
           </a:stretch>
@@ -27348,9 +27037,18 @@
   <p:clrMapOvr>
     <a:masterClrMapping/>
   </p:clrMapOvr>
-  <p:transition xmlns:p14="http://schemas.microsoft.com/office/powerpoint/2010/main" p14:dur="400">
-    <p:fade/>
-  </p:transition>
+  <mc:AlternateContent xmlns:mc="http://schemas.openxmlformats.org/markup-compatibility/2006">
+    <mc:Choice xmlns:p14="http://schemas.microsoft.com/office/powerpoint/2010/main" Requires="p14">
+      <p:transition p14:dur="400">
+        <p:fade/>
+      </p:transition>
+    </mc:Choice>
+    <mc:Fallback>
+      <p:transition>
+        <p:fade/>
+      </p:transition>
+    </mc:Fallback>
+  </mc:AlternateContent>
   <p:timing>
     <p:tnLst>
       <p:par>
@@ -27829,8 +27527,8 @@
           <p:nvPr/>
         </p:nvPicPr>
         <p:blipFill>
-          <a:blip r:embed="rId2"/>
-          <a:srcRect l="0" t="781" r="0" b="781"/>
+          <a:blip r:embed="rId3"/>
+          <a:srcRect t="781" b="781"/>
           <a:stretch>
             <a:fillRect/>
           </a:stretch>
@@ -28658,7 +28356,7 @@
           <p:nvPr/>
         </p:nvPicPr>
         <p:blipFill>
-          <a:blip r:embed="rId3"/>
+          <a:blip r:embed="rId4"/>
           <a:stretch>
             <a:fillRect/>
           </a:stretch>
@@ -28718,9 +28416,18 @@
   <p:clrMapOvr>
     <a:masterClrMapping/>
   </p:clrMapOvr>
-  <p:transition xmlns:p14="http://schemas.microsoft.com/office/powerpoint/2010/main" p14:dur="400">
-    <p:fade/>
-  </p:transition>
+  <mc:AlternateContent xmlns:mc="http://schemas.openxmlformats.org/markup-compatibility/2006">
+    <mc:Choice xmlns:p14="http://schemas.microsoft.com/office/powerpoint/2010/main" Requires="p14">
+      <p:transition p14:dur="400">
+        <p:fade/>
+      </p:transition>
+    </mc:Choice>
+    <mc:Fallback>
+      <p:transition>
+        <p:fade/>
+      </p:transition>
+    </mc:Fallback>
+  </mc:AlternateContent>
   <p:timing>
     <p:tnLst>
       <p:par>
@@ -29168,8 +28875,8 @@
             <p:nvPr/>
           </p:nvPicPr>
           <p:blipFill>
-            <a:blip r:embed="rId2"/>
-            <a:srcRect l="0" t="781" r="0" b="781"/>
+            <a:blip r:embed="rId3"/>
+            <a:srcRect t="781" b="781"/>
             <a:stretch>
               <a:fillRect/>
             </a:stretch>
@@ -30475,7 +30182,7 @@
             <p:nvPr/>
           </p:nvPicPr>
           <p:blipFill>
-            <a:blip r:embed="rId3"/>
+            <a:blip r:embed="rId4"/>
             <a:stretch>
               <a:fillRect/>
             </a:stretch>
@@ -30538,9 +30245,18 @@
   <p:clrMapOvr>
     <a:masterClrMapping/>
   </p:clrMapOvr>
-  <p:transition xmlns:p14="http://schemas.microsoft.com/office/powerpoint/2010/main" p14:dur="400">
-    <p:fade/>
-  </p:transition>
+  <mc:AlternateContent xmlns:mc="http://schemas.openxmlformats.org/markup-compatibility/2006">
+    <mc:Choice xmlns:p14="http://schemas.microsoft.com/office/powerpoint/2010/main" Requires="p14">
+      <p:transition p14:dur="400">
+        <p:fade/>
+      </p:transition>
+    </mc:Choice>
+    <mc:Fallback>
+      <p:transition>
+        <p:fade/>
+      </p:transition>
+    </mc:Fallback>
+  </mc:AlternateContent>
   <p:timing>
     <p:tnLst>
       <p:par>
@@ -30673,8 +30389,8 @@
             <p:nvPr/>
           </p:nvPicPr>
           <p:blipFill>
-            <a:blip r:embed="rId2"/>
-            <a:srcRect l="0" t="781" r="0" b="781"/>
+            <a:blip r:embed="rId3"/>
+            <a:srcRect t="781" b="781"/>
             <a:stretch>
               <a:fillRect/>
             </a:stretch>
@@ -32666,7 +32382,7 @@
             <p:nvPr/>
           </p:nvPicPr>
           <p:blipFill>
-            <a:blip r:embed="rId3"/>
+            <a:blip r:embed="rId4"/>
             <a:stretch>
               <a:fillRect/>
             </a:stretch>
@@ -32729,9 +32445,18 @@
   <p:clrMapOvr>
     <a:masterClrMapping/>
   </p:clrMapOvr>
-  <p:transition xmlns:p14="http://schemas.microsoft.com/office/powerpoint/2010/main" p14:dur="400">
-    <p:fade/>
-  </p:transition>
+  <mc:AlternateContent xmlns:mc="http://schemas.openxmlformats.org/markup-compatibility/2006">
+    <mc:Choice xmlns:p14="http://schemas.microsoft.com/office/powerpoint/2010/main" Requires="p14">
+      <p:transition p14:dur="400">
+        <p:fade/>
+      </p:transition>
+    </mc:Choice>
+    <mc:Fallback>
+      <p:transition>
+        <p:fade/>
+      </p:transition>
+    </mc:Fallback>
+  </mc:AlternateContent>
   <p:timing>
     <p:tnLst>
       <p:par>
@@ -32864,8 +32589,8 @@
             <p:nvPr/>
           </p:nvPicPr>
           <p:blipFill>
-            <a:blip r:embed="rId2"/>
-            <a:srcRect l="0" t="781" r="0" b="781"/>
+            <a:blip r:embed="rId3"/>
+            <a:srcRect t="781" b="781"/>
             <a:stretch>
               <a:fillRect/>
             </a:stretch>
@@ -34566,7 +34291,7 @@
                   <a:ea typeface="Microsoft YaHei"/>
                   <a:cs typeface="Consolas"/>
                 </a:rPr>
-                <a:t xml:space="preserve">ENDBR64 opcode:  F3 0F 1E FA    (encodes as REP NOP on older CPUs)</a:t>
+                <a:t>ENDBR64 opcode:  F3 0F 1E FA    (encodes as REP NOP on older CPUs)</a:t>
               </a:r>
             </a:p>
           </p:txBody>
@@ -34606,7 +34331,7 @@
                   <a:ea typeface="Microsoft YaHei"/>
                   <a:cs typeface="Consolas"/>
                 </a:rPr>
-                <a:t xml:space="preserve">ENDBR32 opcode:  F3 0F 1E FB    (32-bit variant)</a:t>
+                <a:t>ENDBR32 opcode:  F3 0F 1E FB    (32-bit variant)</a:t>
               </a:r>
             </a:p>
           </p:txBody>
@@ -34755,7 +34480,7 @@
             <p:nvPr/>
           </p:nvPicPr>
           <p:blipFill>
-            <a:blip r:embed="rId3"/>
+            <a:blip r:embed="rId4"/>
             <a:stretch>
               <a:fillRect/>
             </a:stretch>
@@ -34818,9 +34543,18 @@
   <p:clrMapOvr>
     <a:masterClrMapping/>
   </p:clrMapOvr>
-  <p:transition xmlns:p14="http://schemas.microsoft.com/office/powerpoint/2010/main" p14:dur="400">
-    <p:fade/>
-  </p:transition>
+  <mc:AlternateContent xmlns:mc="http://schemas.openxmlformats.org/markup-compatibility/2006">
+    <mc:Choice xmlns:p14="http://schemas.microsoft.com/office/powerpoint/2010/main" Requires="p14">
+      <p:transition p14:dur="400">
+        <p:fade/>
+      </p:transition>
+    </mc:Choice>
+    <mc:Fallback>
+      <p:transition>
+        <p:fade/>
+      </p:transition>
+    </mc:Fallback>
+  </mc:AlternateContent>
   <p:timing>
     <p:tnLst>
       <p:par>
@@ -34953,2327 +34687,8 @@
             <p:nvPr/>
           </p:nvPicPr>
           <p:blipFill>
-            <a:blip r:embed="rId2"/>
-            <a:srcRect l="0" t="781" r="0" b="781"/>
-            <a:stretch>
-              <a:fillRect/>
-            </a:stretch>
-          </p:blipFill>
-          <p:spPr>
-            <a:xfrm>
-              <a:off x="0" y="0"/>
-              <a:ext cx="12192000" cy="6858000"/>
-            </a:xfrm>
-            <a:prstGeom prst="rect">
-              <a:avLst/>
-            </a:prstGeom>
-          </p:spPr>
-        </p:pic>
-        <p:sp>
-          <p:nvSpPr>
-            <p:cNvPr id="3" name="Rectangle 3"/>
-            <p:cNvSpPr/>
-            <p:nvPr/>
-          </p:nvSpPr>
-          <p:spPr>
-            <a:xfrm>
-              <a:off x="0" y="1133475"/>
-              <a:ext cx="12192000" cy="5410200"/>
-            </a:xfrm>
-            <a:prstGeom prst="rect">
-              <a:avLst/>
-            </a:prstGeom>
-            <a:solidFill>
-              <a:srgbClr val="FFFFFF"/>
-            </a:solidFill>
-            <a:ln>
-              <a:noFill/>
-            </a:ln>
-          </p:spPr>
-        </p:sp>
-      </p:grpSp>
-      <p:sp>
-        <p:nvSpPr>
-          <p:cNvPr id="5" name="TextBox 5"/>
-          <p:cNvSpPr txBox="1"/>
-          <p:nvPr/>
-        </p:nvSpPr>
-        <p:spPr>
-          <a:xfrm>
-            <a:off x="445770" y="502920"/>
-            <a:ext cx="6961823" cy="487680"/>
-          </a:xfrm>
-          <a:prstGeom prst="rect">
-            <a:avLst/>
-          </a:prstGeom>
-          <a:noFill/>
-          <a:ln>
-            <a:noFill/>
-          </a:ln>
-        </p:spPr>
-        <p:txBody>
-          <a:bodyPr wrap="none" lIns="0" tIns="0" rIns="0" bIns="0" anchor="t" anchorCtr="0">
-            <a:spAutoFit/>
-          </a:bodyPr>
-          <a:lstStyle/>
-          <a:p>
-            <a:pPr algn="l"/>
-            <a:r>
-              <a:rPr lang="zh-CN" sz="2400" b="1" dirty="0">
-                <a:solidFill>
-                  <a:srgbClr val="FFFFFF"/>
-                </a:solidFill>
-                <a:latin typeface="Arial"/>
-                <a:ea typeface="Microsoft YaHei"/>
-                <a:cs typeface="Arial"/>
-              </a:rPr>
-              <a:t>Generating ENDBR Without Embedding It</a:t>
-            </a:r>
-          </a:p>
-        </p:txBody>
-      </p:sp>
-      <p:grpSp>
-        <p:nvGrpSpPr>
-          <p:cNvPr id="60" name="Group 60"/>
-          <p:cNvGrpSpPr/>
-          <p:nvPr/>
-        </p:nvGrpSpPr>
-        <p:grpSpPr>
-          <a:xfrm>
-            <a:off x="476250" y="1333500"/>
-            <a:ext cx="11239500" cy="4381500"/>
-            <a:chOff x="476250" y="1333500"/>
-            <a:chExt cx="11239500" cy="4381500"/>
-          </a:xfrm>
-        </p:grpSpPr>
-        <p:sp>
-          <p:nvSpPr>
-            <p:cNvPr id="6" name="Rectangle 6"/>
-            <p:cNvSpPr/>
-            <p:nvPr/>
-          </p:nvSpPr>
-          <p:spPr>
-            <a:xfrm>
-              <a:off x="476250" y="1333500"/>
-              <a:ext cx="6667500" cy="3238500"/>
-            </a:xfrm>
-            <a:prstGeom prst="roundRect">
-              <a:avLst>
-                <a:gd name="adj" fmla="val 2353"/>
-              </a:avLst>
-            </a:prstGeom>
-            <a:solidFill>
-              <a:srgbClr val="1E293B"/>
-            </a:solidFill>
-            <a:ln>
-              <a:noFill/>
-            </a:ln>
-          </p:spPr>
-        </p:sp>
-        <p:sp>
-          <p:nvSpPr>
-            <p:cNvPr id="7" name="TextBox 7"/>
-            <p:cNvSpPr txBox="1"/>
-            <p:nvPr/>
-          </p:nvSpPr>
-          <p:spPr>
-            <a:xfrm>
-              <a:off x="655320" y="1474470"/>
-              <a:ext cx="2934367" cy="182880"/>
-            </a:xfrm>
-            <a:prstGeom prst="rect">
-              <a:avLst/>
-            </a:prstGeom>
-            <a:noFill/>
-            <a:ln>
-              <a:noFill/>
-            </a:ln>
-          </p:spPr>
-          <p:txBody>
-            <a:bodyPr wrap="none" lIns="0" tIns="0" rIns="0" bIns="0" anchor="t" anchorCtr="0">
-              <a:spAutoFit/>
-            </a:bodyPr>
-            <a:lstStyle/>
-            <a:p>
-              <a:pPr algn="l"/>
-              <a:r>
-                <a:rPr lang="zh-CN" sz="900" dirty="0">
-                  <a:solidFill>
-                    <a:srgbClr val="6A9955"/>
-                  </a:solidFill>
-                  <a:latin typeface="Arial"/>
-                  <a:ea typeface="Microsoft YaHei"/>
-                  <a:cs typeface="Arial"/>
-                </a:rPr>
-                <a:t>/* arch/x86/include/asm/ibt.h lines 44–57 */</a:t>
-              </a:r>
-            </a:p>
-          </p:txBody>
-        </p:sp>
-        <p:sp>
-          <p:nvSpPr>
-            <p:cNvPr id="8" name="TextBox 8"/>
-            <p:cNvSpPr txBox="1"/>
-            <p:nvPr/>
-          </p:nvSpPr>
-          <p:spPr>
-            <a:xfrm>
-              <a:off x="653415" y="1744028"/>
-              <a:ext cx="2695003" cy="213360"/>
-            </a:xfrm>
-            <a:prstGeom prst="rect">
-              <a:avLst/>
-            </a:prstGeom>
-            <a:noFill/>
-            <a:ln>
-              <a:noFill/>
-            </a:ln>
-          </p:spPr>
-          <p:txBody>
-            <a:bodyPr wrap="none" lIns="0" tIns="0" rIns="0" bIns="0" anchor="t" anchorCtr="0">
-              <a:spAutoFit/>
-            </a:bodyPr>
-            <a:lstStyle/>
-            <a:p>
-              <a:pPr algn="l"/>
-              <a:r>
-                <a:rPr lang="zh-CN" sz="1050" dirty="0">
-                  <a:solidFill>
-                    <a:srgbClr val="AF00C0"/>
-                  </a:solidFill>
-                  <a:latin typeface="Consolas"/>
-                  <a:ea typeface="Microsoft YaHei"/>
-                  <a:cs typeface="Consolas"/>
-                </a:rPr>
-                <a:t xml:space="preserve">#define gen_endbr()                       \</a:t>
-              </a:r>
-            </a:p>
-          </p:txBody>
-        </p:sp>
-        <p:sp>
-          <p:nvSpPr>
-            <p:cNvPr id="9" name="TextBox 9"/>
-            <p:cNvSpPr txBox="1"/>
-            <p:nvPr/>
-          </p:nvSpPr>
-          <p:spPr>
-            <a:xfrm>
-              <a:off x="653415" y="1963102"/>
-              <a:ext cx="2418969" cy="213360"/>
-            </a:xfrm>
-            <a:prstGeom prst="rect">
-              <a:avLst/>
-            </a:prstGeom>
-            <a:noFill/>
-            <a:ln>
-              <a:noFill/>
-            </a:ln>
-          </p:spPr>
-          <p:txBody>
-            <a:bodyPr wrap="none" lIns="0" tIns="0" rIns="0" bIns="0" anchor="t" anchorCtr="0">
-              <a:spAutoFit/>
-            </a:bodyPr>
-            <a:lstStyle/>
-            <a:p>
-              <a:pPr algn="l"/>
-              <a:r>
-                <a:rPr lang="zh-CN" sz="1050" dirty="0">
-                  <a:solidFill>
-                    <a:srgbClr val="E0E0E0"/>
-                  </a:solidFill>
-                  <a:latin typeface="Consolas"/>
-                  <a:ea typeface="Microsoft YaHei"/>
-                  <a:cs typeface="Consolas"/>
-                </a:rPr>
-                <a:t xml:space="preserve">  asm volatile(                           \</a:t>
-              </a:r>
-            </a:p>
-          </p:txBody>
-        </p:sp>
-        <p:sp>
-          <p:nvSpPr>
-            <p:cNvPr id="10" name="TextBox 10"/>
-            <p:cNvSpPr txBox="1"/>
-            <p:nvPr/>
-          </p:nvSpPr>
-          <p:spPr>
-            <a:xfrm>
-              <a:off x="653415" y="2182178"/>
-              <a:ext cx="2464975" cy="213360"/>
-            </a:xfrm>
-            <a:prstGeom prst="rect">
-              <a:avLst/>
-            </a:prstGeom>
-            <a:noFill/>
-            <a:ln>
-              <a:noFill/>
-            </a:ln>
-          </p:spPr>
-          <p:txBody>
-            <a:bodyPr wrap="none" lIns="0" tIns="0" rIns="0" bIns="0" anchor="t" anchorCtr="0">
-              <a:spAutoFit/>
-            </a:bodyPr>
-            <a:lstStyle/>
-            <a:p>
-              <a:pPr algn="l"/>
-              <a:r>
-                <a:rPr lang="zh-CN" sz="1050" dirty="0">
-                  <a:solidFill>
-                    <a:srgbClr val="E0E0E0"/>
-                  </a:solidFill>
-                  <a:latin typeface="Consolas"/>
-                  <a:ea typeface="Microsoft YaHei"/>
-                  <a:cs typeface="Consolas"/>
-                </a:rPr>
-                <a:t xml:space="preserve">    ALTERNATIVE(                          \</a:t>
-              </a:r>
-            </a:p>
-          </p:txBody>
-        </p:sp>
-        <p:sp>
-          <p:nvSpPr>
-            <p:cNvPr id="11" name="TextBox 11"/>
-            <p:cNvSpPr txBox="1"/>
-            <p:nvPr/>
-          </p:nvSpPr>
-          <p:spPr>
-            <a:xfrm>
-              <a:off x="653415" y="2401252"/>
-              <a:ext cx="3262408" cy="213360"/>
-            </a:xfrm>
-            <a:prstGeom prst="rect">
-              <a:avLst/>
-            </a:prstGeom>
-            <a:noFill/>
-            <a:ln>
-              <a:noFill/>
-            </a:ln>
-          </p:spPr>
-          <p:txBody>
-            <a:bodyPr wrap="none" lIns="0" tIns="0" rIns="0" bIns="0" anchor="t" anchorCtr="0">
-              <a:spAutoFit/>
-            </a:bodyPr>
-            <a:lstStyle/>
-            <a:p>
-              <a:pPr algn="l"/>
-              <a:r>
-                <a:rPr lang="zh-CN" sz="1050" dirty="0">
-                  <a:solidFill>
-                    <a:srgbClr val="F79646"/>
-                  </a:solidFill>
-                  <a:latin typeface="Consolas"/>
-                  <a:ea typeface="Microsoft YaHei"/>
-                  <a:cs typeface="Consolas"/>
-                </a:rPr>
-                <a:t xml:space="preserve">      "mov $~0xfa1e0ff3, %[scratch]\n\t"  \</a:t>
-              </a:r>
-            </a:p>
-          </p:txBody>
-        </p:sp>
-        <p:sp>
-          <p:nvSpPr>
-            <p:cNvPr id="12" name="TextBox 12"/>
-            <p:cNvSpPr txBox="1"/>
-            <p:nvPr/>
-          </p:nvSpPr>
-          <p:spPr>
-            <a:xfrm>
-              <a:off x="653415" y="2620328"/>
-              <a:ext cx="2764012" cy="213360"/>
-            </a:xfrm>
-            <a:prstGeom prst="rect">
-              <a:avLst/>
-            </a:prstGeom>
-            <a:noFill/>
-            <a:ln>
-              <a:noFill/>
-            </a:ln>
-          </p:spPr>
-          <p:txBody>
-            <a:bodyPr wrap="none" lIns="0" tIns="0" rIns="0" bIns="0" anchor="t" anchorCtr="0">
-              <a:spAutoFit/>
-            </a:bodyPr>
-            <a:lstStyle/>
-            <a:p>
-              <a:pPr algn="l"/>
-              <a:r>
-                <a:rPr lang="zh-CN" sz="1050" dirty="0">
-                  <a:solidFill>
-                    <a:srgbClr val="F79646"/>
-                  </a:solidFill>
-                  <a:latin typeface="Consolas"/>
-                  <a:ea typeface="Microsoft YaHei"/>
-                  <a:cs typeface="Consolas"/>
-                </a:rPr>
-                <a:t xml:space="preserve">      "not %[scratch]\n\t",              \</a:t>
-              </a:r>
-            </a:p>
-          </p:txBody>
-        </p:sp>
-        <p:sp>
-          <p:nvSpPr>
-            <p:cNvPr id="13" name="TextBox 13"/>
-            <p:cNvSpPr txBox="1"/>
-            <p:nvPr/>
-          </p:nvSpPr>
-          <p:spPr>
-            <a:xfrm>
-              <a:off x="653415" y="2839402"/>
-              <a:ext cx="2112264" cy="213360"/>
-            </a:xfrm>
-            <a:prstGeom prst="rect">
-              <a:avLst/>
-            </a:prstGeom>
-            <a:noFill/>
-            <a:ln>
-              <a:noFill/>
-            </a:ln>
-          </p:spPr>
-          <p:txBody>
-            <a:bodyPr wrap="none" lIns="0" tIns="0" rIns="0" bIns="0" anchor="t" anchorCtr="0">
-              <a:spAutoFit/>
-            </a:bodyPr>
-            <a:lstStyle/>
-            <a:p>
-              <a:pPr algn="l"/>
-              <a:r>
-                <a:rPr lang="zh-CN" sz="1050" dirty="0">
-                  <a:solidFill>
-                    <a:srgbClr val="F79646"/>
-                  </a:solidFill>
-                  <a:latin typeface="Consolas"/>
-                  <a:ea typeface="Microsoft YaHei"/>
-                  <a:cs typeface="Consolas"/>
-                </a:rPr>
-                <a:t xml:space="preserve">      "",                                \</a:t>
-              </a:r>
-            </a:p>
-          </p:txBody>
-        </p:sp>
-        <p:sp>
-          <p:nvSpPr>
-            <p:cNvPr id="14" name="TextBox 14"/>
-            <p:cNvSpPr txBox="1"/>
-            <p:nvPr/>
-          </p:nvSpPr>
-          <p:spPr>
-            <a:xfrm>
-              <a:off x="653415" y="3058478"/>
-              <a:ext cx="2572321" cy="213360"/>
-            </a:xfrm>
-            <a:prstGeom prst="rect">
-              <a:avLst/>
-            </a:prstGeom>
-            <a:noFill/>
-            <a:ln>
-              <a:noFill/>
-            </a:ln>
-          </p:spPr>
-          <p:txBody>
-            <a:bodyPr wrap="none" lIns="0" tIns="0" rIns="0" bIns="0" anchor="t" anchorCtr="0">
-              <a:spAutoFit/>
-            </a:bodyPr>
-            <a:lstStyle/>
-            <a:p>
-              <a:pPr algn="l"/>
-              <a:r>
-                <a:rPr lang="zh-CN" sz="1050" dirty="0">
-                  <a:solidFill>
-                    <a:srgbClr val="E0E0E0"/>
-                  </a:solidFill>
-                  <a:latin typeface="Consolas"/>
-                  <a:ea typeface="Microsoft YaHei"/>
-                  <a:cs typeface="Consolas"/>
-                </a:rPr>
-                <a:t xml:space="preserve">      X86_FEATURE_IBT)                   \</a:t>
-              </a:r>
-            </a:p>
-          </p:txBody>
-        </p:sp>
-        <p:sp>
-          <p:nvSpPr>
-            <p:cNvPr id="15" name="TextBox 15"/>
-            <p:cNvSpPr txBox="1"/>
-            <p:nvPr/>
-          </p:nvSpPr>
-          <p:spPr>
-            <a:xfrm>
-              <a:off x="653415" y="3277552"/>
-              <a:ext cx="1146143" cy="213360"/>
-            </a:xfrm>
-            <a:prstGeom prst="rect">
-              <a:avLst/>
-            </a:prstGeom>
-            <a:noFill/>
-            <a:ln>
-              <a:noFill/>
-            </a:ln>
-          </p:spPr>
-          <p:txBody>
-            <a:bodyPr wrap="none" lIns="0" tIns="0" rIns="0" bIns="0" anchor="t" anchorCtr="0">
-              <a:spAutoFit/>
-            </a:bodyPr>
-            <a:lstStyle/>
-            <a:p>
-              <a:pPr algn="l"/>
-              <a:r>
-                <a:rPr lang="zh-CN" sz="1050" dirty="0">
-                  <a:solidFill>
-                    <a:srgbClr val="E0E0E0"/>
-                  </a:solidFill>
-                  <a:latin typeface="Consolas"/>
-                  <a:ea typeface="Microsoft YaHei"/>
-                  <a:cs typeface="Consolas"/>
-                </a:rPr>
-                <a:t xml:space="preserve">    : [scratch] </a:t>
-              </a:r>
-            </a:p>
-          </p:txBody>
-        </p:sp>
-        <p:sp>
-          <p:nvSpPr>
-            <p:cNvPr id="16" name="TextBox 16"/>
-            <p:cNvSpPr txBox="1"/>
-            <p:nvPr/>
-          </p:nvSpPr>
-          <p:spPr>
-            <a:xfrm>
-              <a:off x="2110740" y="3277552"/>
-              <a:ext cx="448389" cy="213360"/>
-            </a:xfrm>
-            <a:prstGeom prst="rect">
-              <a:avLst/>
-            </a:prstGeom>
-            <a:noFill/>
-            <a:ln>
-              <a:noFill/>
-            </a:ln>
-          </p:spPr>
-          <p:txBody>
-            <a:bodyPr wrap="none" lIns="0" tIns="0" rIns="0" bIns="0" anchor="t" anchorCtr="0">
-              <a:spAutoFit/>
-            </a:bodyPr>
-            <a:lstStyle/>
-            <a:p>
-              <a:pPr algn="l"/>
-              <a:r>
-                <a:rPr lang="zh-CN" sz="1050" dirty="0">
-                  <a:solidFill>
-                    <a:srgbClr val="F79646"/>
-                  </a:solidFill>
-                  <a:latin typeface="Consolas"/>
-                  <a:ea typeface="Microsoft YaHei"/>
-                  <a:cs typeface="Consolas"/>
-                </a:rPr>
-                <a:t>"=&amp;r"</a:t>
-              </a:r>
-            </a:p>
-          </p:txBody>
-        </p:sp>
-        <p:sp>
-          <p:nvSpPr>
-            <p:cNvPr id="17" name="TextBox 17"/>
-            <p:cNvSpPr txBox="1"/>
-            <p:nvPr/>
-          </p:nvSpPr>
-          <p:spPr>
-            <a:xfrm>
-              <a:off x="2653665" y="3277552"/>
-              <a:ext cx="1253490" cy="213360"/>
-            </a:xfrm>
-            <a:prstGeom prst="rect">
-              <a:avLst/>
-            </a:prstGeom>
-            <a:noFill/>
-            <a:ln>
-              <a:noFill/>
-            </a:ln>
-          </p:spPr>
-          <p:txBody>
-            <a:bodyPr wrap="none" lIns="0" tIns="0" rIns="0" bIns="0" anchor="t" anchorCtr="0">
-              <a:spAutoFit/>
-            </a:bodyPr>
-            <a:lstStyle/>
-            <a:p>
-              <a:pPr algn="l"/>
-              <a:r>
-                <a:rPr lang="zh-CN" sz="1050" dirty="0">
-                  <a:solidFill>
-                    <a:srgbClr val="E0E0E0"/>
-                  </a:solidFill>
-                  <a:latin typeface="Consolas"/>
-                  <a:ea typeface="Microsoft YaHei"/>
-                  <a:cs typeface="Consolas"/>
-                </a:rPr>
-                <a:t xml:space="preserve"> (__junk)          \</a:t>
-              </a:r>
-            </a:p>
-          </p:txBody>
-        </p:sp>
-        <p:sp>
-          <p:nvSpPr>
-            <p:cNvPr id="18" name="TextBox 18"/>
-            <p:cNvSpPr txBox="1"/>
-            <p:nvPr/>
-          </p:nvSpPr>
-          <p:spPr>
-            <a:xfrm>
-              <a:off x="653415" y="3496628"/>
-              <a:ext cx="2035588" cy="213360"/>
-            </a:xfrm>
-            <a:prstGeom prst="rect">
-              <a:avLst/>
-            </a:prstGeom>
-            <a:noFill/>
-            <a:ln>
-              <a:noFill/>
-            </a:ln>
-          </p:spPr>
-          <p:txBody>
-            <a:bodyPr wrap="none" lIns="0" tIns="0" rIns="0" bIns="0" anchor="t" anchorCtr="0">
-              <a:spAutoFit/>
-            </a:bodyPr>
-            <a:lstStyle/>
-            <a:p>
-              <a:pPr algn="l"/>
-              <a:r>
-                <a:rPr lang="zh-CN" sz="1050" dirty="0">
-                  <a:solidFill>
-                    <a:srgbClr val="E0E0E0"/>
-                  </a:solidFill>
-                  <a:latin typeface="Consolas"/>
-                  <a:ea typeface="Microsoft YaHei"/>
-                  <a:cs typeface="Consolas"/>
-                </a:rPr>
-                <a:t xml:space="preserve">    :                                    \</a:t>
-              </a:r>
-            </a:p>
-          </p:txBody>
-        </p:sp>
-        <p:sp>
-          <p:nvSpPr>
-            <p:cNvPr id="19" name="TextBox 19"/>
-            <p:cNvSpPr txBox="1"/>
-            <p:nvPr/>
-          </p:nvSpPr>
-          <p:spPr>
-            <a:xfrm>
-              <a:off x="653415" y="3715702"/>
-              <a:ext cx="341043" cy="213360"/>
-            </a:xfrm>
-            <a:prstGeom prst="rect">
-              <a:avLst/>
-            </a:prstGeom>
-            <a:noFill/>
-            <a:ln>
-              <a:noFill/>
-            </a:ln>
-          </p:spPr>
-          <p:txBody>
-            <a:bodyPr wrap="none" lIns="0" tIns="0" rIns="0" bIns="0" anchor="t" anchorCtr="0">
-              <a:spAutoFit/>
-            </a:bodyPr>
-            <a:lstStyle/>
-            <a:p>
-              <a:pPr algn="l"/>
-              <a:r>
-                <a:rPr lang="zh-CN" sz="1050" dirty="0">
-                  <a:solidFill>
-                    <a:srgbClr val="E0E0E0"/>
-                  </a:solidFill>
-                  <a:latin typeface="Consolas"/>
-                  <a:ea typeface="Microsoft YaHei"/>
-                  <a:cs typeface="Consolas"/>
-                </a:rPr>
-                <a:t xml:space="preserve">    : </a:t>
-              </a:r>
-            </a:p>
-          </p:txBody>
-        </p:sp>
-        <p:sp>
-          <p:nvSpPr>
-            <p:cNvPr id="20" name="TextBox 20"/>
-            <p:cNvSpPr txBox="1"/>
-            <p:nvPr/>
-          </p:nvSpPr>
-          <p:spPr>
-            <a:xfrm>
-              <a:off x="1062990" y="3715702"/>
-              <a:ext cx="762762" cy="213360"/>
-            </a:xfrm>
-            <a:prstGeom prst="rect">
-              <a:avLst/>
-            </a:prstGeom>
-            <a:noFill/>
-            <a:ln>
-              <a:noFill/>
-            </a:ln>
-          </p:spPr>
-          <p:txBody>
-            <a:bodyPr wrap="none" lIns="0" tIns="0" rIns="0" bIns="0" anchor="t" anchorCtr="0">
-              <a:spAutoFit/>
-            </a:bodyPr>
-            <a:lstStyle/>
-            <a:p>
-              <a:pPr algn="l"/>
-              <a:r>
-                <a:rPr lang="zh-CN" sz="1050" dirty="0">
-                  <a:solidFill>
-                    <a:srgbClr val="F79646"/>
-                  </a:solidFill>
-                  <a:latin typeface="Consolas"/>
-                  <a:ea typeface="Microsoft YaHei"/>
-                  <a:cs typeface="Consolas"/>
-                </a:rPr>
-                <a:t>"memory"</a:t>
-              </a:r>
-            </a:p>
-          </p:txBody>
-        </p:sp>
-        <p:sp>
-          <p:nvSpPr>
-            <p:cNvPr id="21" name="TextBox 21"/>
-            <p:cNvSpPr txBox="1"/>
-            <p:nvPr/>
-          </p:nvSpPr>
-          <p:spPr>
-            <a:xfrm>
-              <a:off x="1796415" y="3715702"/>
-              <a:ext cx="195358" cy="213360"/>
-            </a:xfrm>
-            <a:prstGeom prst="rect">
-              <a:avLst/>
-            </a:prstGeom>
-            <a:noFill/>
-            <a:ln>
-              <a:noFill/>
-            </a:ln>
-          </p:spPr>
-          <p:txBody>
-            <a:bodyPr wrap="none" lIns="0" tIns="0" rIns="0" bIns="0" anchor="t" anchorCtr="0">
-              <a:spAutoFit/>
-            </a:bodyPr>
-            <a:lstStyle/>
-            <a:p>
-              <a:pPr algn="l"/>
-              <a:r>
-                <a:rPr lang="zh-CN" sz="1050" dirty="0">
-                  <a:solidFill>
-                    <a:srgbClr val="E0E0E0"/>
-                  </a:solidFill>
-                  <a:latin typeface="Consolas"/>
-                  <a:ea typeface="Microsoft YaHei"/>
-                  <a:cs typeface="Consolas"/>
-                </a:rPr>
-                <a:t>);</a:t>
-              </a:r>
-            </a:p>
-          </p:txBody>
-        </p:sp>
-        <p:sp>
-          <p:nvSpPr>
-            <p:cNvPr id="22" name="TextBox 22"/>
-            <p:cNvSpPr txBox="1"/>
-            <p:nvPr/>
-          </p:nvSpPr>
-          <p:spPr>
-            <a:xfrm>
-              <a:off x="653415" y="4077652"/>
-              <a:ext cx="3837480" cy="213360"/>
-            </a:xfrm>
-            <a:prstGeom prst="rect">
-              <a:avLst/>
-            </a:prstGeom>
-            <a:noFill/>
-            <a:ln>
-              <a:noFill/>
-            </a:ln>
-          </p:spPr>
-          <p:txBody>
-            <a:bodyPr wrap="none" lIns="0" tIns="0" rIns="0" bIns="0" anchor="t" anchorCtr="0">
-              <a:spAutoFit/>
-            </a:bodyPr>
-            <a:lstStyle/>
-            <a:p>
-              <a:pPr algn="l"/>
-              <a:r>
-                <a:rPr lang="zh-CN" sz="1050" dirty="0">
-                  <a:solidFill>
-                    <a:srgbClr val="6A9955"/>
-                  </a:solidFill>
-                  <a:latin typeface="Consolas"/>
-                  <a:ea typeface="Microsoft YaHei"/>
-                  <a:cs typeface="Consolas"/>
-                </a:rPr>
-                <a:t>/* On non-IBT CPUs: ALTERNATIVE patches to NOP */</a:t>
-              </a:r>
-            </a:p>
-          </p:txBody>
-        </p:sp>
-        <p:sp>
-          <p:nvSpPr>
-            <p:cNvPr id="23" name="TextBox 23"/>
-            <p:cNvSpPr txBox="1"/>
-            <p:nvPr/>
-          </p:nvSpPr>
-          <p:spPr>
-            <a:xfrm>
-              <a:off x="653415" y="4296728"/>
-              <a:ext cx="3960162" cy="213360"/>
-            </a:xfrm>
-            <a:prstGeom prst="rect">
-              <a:avLst/>
-            </a:prstGeom>
-            <a:noFill/>
-            <a:ln>
-              <a:noFill/>
-            </a:ln>
-          </p:spPr>
-          <p:txBody>
-            <a:bodyPr wrap="none" lIns="0" tIns="0" rIns="0" bIns="0" anchor="t" anchorCtr="0">
-              <a:spAutoFit/>
-            </a:bodyPr>
-            <a:lstStyle/>
-            <a:p>
-              <a:pPr algn="l"/>
-              <a:r>
-                <a:rPr lang="zh-CN" sz="1050" dirty="0">
-                  <a:solidFill>
-                    <a:srgbClr val="6A9955"/>
-                  </a:solidFill>
-                  <a:latin typeface="Consolas"/>
-                  <a:ea typeface="Microsoft YaHei"/>
-                  <a:cs typeface="Consolas"/>
-                </a:rPr>
-                <a:t>/* On IBT CPUs: mov+not produces ENDBR64 opcode */</a:t>
-              </a:r>
-            </a:p>
-          </p:txBody>
-        </p:sp>
-        <p:sp>
-          <p:nvSpPr>
-            <p:cNvPr id="24" name="Rectangle 24"/>
-            <p:cNvSpPr/>
-            <p:nvPr/>
-          </p:nvSpPr>
-          <p:spPr>
-            <a:xfrm>
-              <a:off x="7429500" y="1333500"/>
-              <a:ext cx="4286250" cy="666750"/>
-            </a:xfrm>
-            <a:prstGeom prst="roundRect">
-              <a:avLst>
-                <a:gd name="adj" fmla="val 8571"/>
-              </a:avLst>
-            </a:prstGeom>
-            <a:solidFill>
-              <a:srgbClr val="F0FDF9"/>
-            </a:solidFill>
-            <a:ln w="14288">
-              <a:solidFill>
-                <a:srgbClr val="0AB36E"/>
-              </a:solidFill>
-            </a:ln>
-          </p:spPr>
-        </p:sp>
-        <p:grpSp>
-          <p:nvGrpSpPr>
-            <p:cNvPr id="28" name="Group 28"/>
-            <p:cNvGrpSpPr/>
-            <p:nvPr/>
-          </p:nvGrpSpPr>
-          <p:grpSpPr>
-            <a:xfrm>
-              <a:off x="7600950" y="1514475"/>
-              <a:ext cx="171450" cy="152400"/>
-              <a:chOff x="7600950" y="1514475"/>
-              <a:chExt cx="171450" cy="152400"/>
-            </a:xfrm>
-          </p:grpSpPr>
-          <p:sp>
-            <p:nvSpPr>
-              <p:cNvPr id="25" name="Freeform 25"/>
-              <p:cNvSpPr/>
-              <p:nvPr/>
-            </p:nvSpPr>
-            <p:spPr>
-              <a:xfrm>
-                <a:off x="7600950" y="1552575"/>
-                <a:ext cx="38100" cy="76200"/>
-              </a:xfrm>
-              <a:custGeom>
-                <a:avLst/>
-                <a:gdLst/>
-                <a:ahLst/>
-                <a:cxnLst/>
-                <a:rect l="l" t="t" r="r" b="b"/>
-                <a:pathLst>
-                  <a:path w="38100" h="76200">
-                    <a:moveTo>
-                      <a:pt x="38100" y="0"/>
-                    </a:moveTo>
-                    <a:lnTo>
-                      <a:pt x="0" y="38100"/>
-                    </a:lnTo>
-                    <a:lnTo>
-                      <a:pt x="38100" y="76200"/>
-                    </a:lnTo>
-                  </a:path>
-                </a:pathLst>
-              </a:custGeom>
-              <a:noFill/>
-              <a:ln w="19050">
-                <a:solidFill>
-                  <a:srgbClr val="0AB36E"/>
-                </a:solidFill>
-              </a:ln>
-            </p:spPr>
-          </p:sp>
-          <p:sp>
-            <p:nvSpPr>
-              <p:cNvPr id="26" name="Freeform 26"/>
-              <p:cNvSpPr/>
-              <p:nvPr/>
-            </p:nvSpPr>
-            <p:spPr>
-              <a:xfrm>
-                <a:off x="7734300" y="1552575"/>
-                <a:ext cx="38100" cy="76200"/>
-              </a:xfrm>
-              <a:custGeom>
-                <a:avLst/>
-                <a:gdLst/>
-                <a:ahLst/>
-                <a:cxnLst/>
-                <a:rect l="l" t="t" r="r" b="b"/>
-                <a:pathLst>
-                  <a:path w="38100" h="76200">
-                    <a:moveTo>
-                      <a:pt x="0" y="0"/>
-                    </a:moveTo>
-                    <a:lnTo>
-                      <a:pt x="38100" y="38100"/>
-                    </a:lnTo>
-                    <a:lnTo>
-                      <a:pt x="0" y="76200"/>
-                    </a:lnTo>
-                  </a:path>
-                </a:pathLst>
-              </a:custGeom>
-              <a:noFill/>
-              <a:ln w="19050">
-                <a:solidFill>
-                  <a:srgbClr val="0AB36E"/>
-                </a:solidFill>
-              </a:ln>
-            </p:spPr>
-          </p:sp>
-          <p:sp>
-            <p:nvSpPr>
-              <p:cNvPr id="27" name="Freeform 27"/>
-              <p:cNvSpPr/>
-              <p:nvPr/>
-            </p:nvSpPr>
-            <p:spPr>
-              <a:xfrm>
-                <a:off x="7667625" y="1514475"/>
-                <a:ext cx="38100" cy="152400"/>
-              </a:xfrm>
-              <a:custGeom>
-                <a:avLst/>
-                <a:gdLst/>
-                <a:ahLst/>
-                <a:cxnLst/>
-                <a:rect l="l" t="t" r="r" b="b"/>
-                <a:pathLst>
-                  <a:path w="38100" h="152400">
-                    <a:moveTo>
-                      <a:pt x="38100" y="0"/>
-                    </a:moveTo>
-                    <a:lnTo>
-                      <a:pt x="0" y="152400"/>
-                    </a:lnTo>
-                  </a:path>
-                </a:pathLst>
-              </a:custGeom>
-              <a:noFill/>
-              <a:ln w="19050">
-                <a:solidFill>
-                  <a:srgbClr val="0AB36E"/>
-                </a:solidFill>
-              </a:ln>
-            </p:spPr>
-          </p:sp>
-        </p:grpSp>
-        <p:sp>
-          <p:nvSpPr>
-            <p:cNvPr id="29" name="TextBox 29"/>
-            <p:cNvSpPr txBox="1"/>
-            <p:nvPr/>
-          </p:nvSpPr>
-          <p:spPr>
-            <a:xfrm>
-              <a:off x="7873365" y="1505902"/>
-              <a:ext cx="1773738" cy="213360"/>
-            </a:xfrm>
-            <a:prstGeom prst="rect">
-              <a:avLst/>
-            </a:prstGeom>
-            <a:noFill/>
-            <a:ln>
-              <a:noFill/>
-            </a:ln>
-          </p:spPr>
-          <p:txBody>
-            <a:bodyPr wrap="none" lIns="0" tIns="0" rIns="0" bIns="0" anchor="t" anchorCtr="0">
-              <a:spAutoFit/>
-            </a:bodyPr>
-            <a:lstStyle/>
-            <a:p>
-              <a:pPr algn="l"/>
-              <a:r>
-                <a:rPr lang="zh-CN" sz="1050" b="1" dirty="0">
-                  <a:solidFill>
-                    <a:srgbClr val="0AB36E"/>
-                  </a:solidFill>
-                  <a:latin typeface="Arial"/>
-                  <a:ea typeface="Microsoft YaHei"/>
-                  <a:cs typeface="Arial"/>
-                </a:rPr>
-                <a:t>MOV loads bitwise NOT</a:t>
-              </a:r>
-            </a:p>
-          </p:txBody>
-        </p:sp>
-        <p:sp>
-          <p:nvSpPr>
-            <p:cNvPr id="30" name="TextBox 30"/>
-            <p:cNvSpPr txBox="1"/>
-            <p:nvPr/>
-          </p:nvSpPr>
-          <p:spPr>
-            <a:xfrm>
-              <a:off x="7559992" y="1752124"/>
-              <a:ext cx="1762030" cy="198120"/>
-            </a:xfrm>
-            <a:prstGeom prst="rect">
-              <a:avLst/>
-            </a:prstGeom>
-            <a:noFill/>
-            <a:ln>
-              <a:noFill/>
-            </a:ln>
-          </p:spPr>
-          <p:txBody>
-            <a:bodyPr wrap="none" lIns="0" tIns="0" rIns="0" bIns="0" anchor="t" anchorCtr="0">
-              <a:spAutoFit/>
-            </a:bodyPr>
-            <a:lstStyle/>
-            <a:p>
-              <a:pPr algn="l"/>
-              <a:r>
-                <a:rPr lang="zh-CN" sz="975" dirty="0">
-                  <a:solidFill>
-                    <a:srgbClr val="333333"/>
-                  </a:solidFill>
-                  <a:latin typeface="Consolas"/>
-                  <a:ea typeface="Microsoft YaHei"/>
-                  <a:cs typeface="Consolas"/>
-                </a:rPr>
-                <a:t>~0xfa1e0ff3 = 0x05e1f00c</a:t>
-              </a:r>
-            </a:p>
-          </p:txBody>
-        </p:sp>
-        <p:sp>
-          <p:nvSpPr>
-            <p:cNvPr id="31" name="Rectangle 31"/>
-            <p:cNvSpPr/>
-            <p:nvPr/>
-          </p:nvSpPr>
-          <p:spPr>
-            <a:xfrm>
-              <a:off x="7429500" y="2143125"/>
-              <a:ext cx="4286250" cy="666750"/>
-            </a:xfrm>
-            <a:prstGeom prst="roundRect">
-              <a:avLst>
-                <a:gd name="adj" fmla="val 8571"/>
-              </a:avLst>
-            </a:prstGeom>
-            <a:solidFill>
-              <a:srgbClr val="F0FDF9"/>
-            </a:solidFill>
-            <a:ln w="14288">
-              <a:solidFill>
-                <a:srgbClr val="0AB36E"/>
-              </a:solidFill>
-            </a:ln>
-          </p:spPr>
-        </p:sp>
-        <p:grpSp>
-          <p:nvGrpSpPr>
-            <p:cNvPr id="34" name="Group 34"/>
-            <p:cNvGrpSpPr/>
-            <p:nvPr/>
-          </p:nvGrpSpPr>
-          <p:grpSpPr>
-            <a:xfrm>
-              <a:off x="7610475" y="2320425"/>
-              <a:ext cx="152400" cy="159750"/>
-              <a:chOff x="7610475" y="2320425"/>
-              <a:chExt cx="152400" cy="159750"/>
-            </a:xfrm>
-          </p:grpSpPr>
-          <p:sp>
-            <p:nvSpPr>
-              <p:cNvPr id="32" name="Freeform 32"/>
-              <p:cNvSpPr/>
-              <p:nvPr/>
-            </p:nvSpPr>
-            <p:spPr>
-              <a:xfrm>
-                <a:off x="7610475" y="2320425"/>
-                <a:ext cx="152400" cy="70350"/>
-              </a:xfrm>
-              <a:custGeom>
-                <a:avLst/>
-                <a:gdLst/>
-                <a:ahLst/>
-                <a:cxnLst/>
-                <a:rect l="l" t="t" r="r" b="b"/>
-                <a:pathLst>
-                  <a:path w="152400" h="70350">
-                    <a:moveTo>
-                      <a:pt x="152400" y="70350"/>
-                    </a:moveTo>
-                    <a:cubicBezTo>
-                      <a:pt x="147612" y="35894"/>
-                      <a:pt x="120357" y="8904"/>
-                      <a:pt x="85855" y="4452"/>
-                    </a:cubicBezTo>
-                    <a:cubicBezTo>
-                      <a:pt x="51354" y="0"/>
-                      <a:pt x="18140" y="19188"/>
-                      <a:pt x="4762" y="51300"/>
-                    </a:cubicBezTo>
-                    <a:moveTo>
-                      <a:pt x="0" y="13200"/>
-                    </a:moveTo>
-                    <a:lnTo>
-                      <a:pt x="0" y="51300"/>
-                    </a:lnTo>
-                    <a:lnTo>
-                      <a:pt x="38100" y="51300"/>
-                    </a:lnTo>
-                  </a:path>
-                </a:pathLst>
-              </a:custGeom>
-              <a:noFill/>
-              <a:ln w="19050">
-                <a:solidFill>
-                  <a:srgbClr val="0AB36E"/>
-                </a:solidFill>
-              </a:ln>
-            </p:spPr>
-          </p:sp>
-          <p:sp>
-            <p:nvSpPr>
-              <p:cNvPr id="33" name="Freeform 33"/>
-              <p:cNvSpPr/>
-              <p:nvPr/>
-            </p:nvSpPr>
-            <p:spPr>
-              <a:xfrm>
-                <a:off x="7610475" y="2409825"/>
-                <a:ext cx="152400" cy="70350"/>
-              </a:xfrm>
-              <a:custGeom>
-                <a:avLst/>
-                <a:gdLst/>
-                <a:ahLst/>
-                <a:cxnLst/>
-                <a:rect l="l" t="t" r="r" b="b"/>
-                <a:pathLst>
-                  <a:path w="152400" h="70350">
-                    <a:moveTo>
-                      <a:pt x="0" y="0"/>
-                    </a:moveTo>
-                    <a:cubicBezTo>
-                      <a:pt x="4788" y="34456"/>
-                      <a:pt x="32043" y="61446"/>
-                      <a:pt x="66545" y="65898"/>
-                    </a:cubicBezTo>
-                    <a:cubicBezTo>
-                      <a:pt x="101046" y="70350"/>
-                      <a:pt x="134260" y="51162"/>
-                      <a:pt x="147638" y="19050"/>
-                    </a:cubicBezTo>
-                    <a:moveTo>
-                      <a:pt x="152400" y="57150"/>
-                    </a:moveTo>
-                    <a:lnTo>
-                      <a:pt x="152400" y="19050"/>
-                    </a:lnTo>
-                    <a:lnTo>
-                      <a:pt x="114300" y="19050"/>
-                    </a:lnTo>
-                  </a:path>
-                </a:pathLst>
-              </a:custGeom>
-              <a:noFill/>
-              <a:ln w="19050">
-                <a:solidFill>
-                  <a:srgbClr val="0AB36E"/>
-                </a:solidFill>
-              </a:ln>
-            </p:spPr>
-          </p:sp>
-        </p:grpSp>
-        <p:sp>
-          <p:nvSpPr>
-            <p:cNvPr id="35" name="TextBox 35"/>
-            <p:cNvSpPr txBox="1"/>
-            <p:nvPr/>
-          </p:nvSpPr>
-          <p:spPr>
-            <a:xfrm>
-              <a:off x="7873365" y="2315528"/>
-              <a:ext cx="1500004" cy="213360"/>
-            </a:xfrm>
-            <a:prstGeom prst="rect">
-              <a:avLst/>
-            </a:prstGeom>
-            <a:noFill/>
-            <a:ln>
-              <a:noFill/>
-            </a:ln>
-          </p:spPr>
-          <p:txBody>
-            <a:bodyPr wrap="none" lIns="0" tIns="0" rIns="0" bIns="0" anchor="t" anchorCtr="0">
-              <a:spAutoFit/>
-            </a:bodyPr>
-            <a:lstStyle/>
-            <a:p>
-              <a:pPr algn="l"/>
-              <a:r>
-                <a:rPr lang="zh-CN" sz="1050" b="1" dirty="0">
-                  <a:solidFill>
-                    <a:srgbClr val="0AB36E"/>
-                  </a:solidFill>
-                  <a:latin typeface="Arial"/>
-                  <a:ea typeface="Microsoft YaHei"/>
-                  <a:cs typeface="Arial"/>
-                </a:rPr>
-                <a:t>NOT flips bits back</a:t>
-              </a:r>
-            </a:p>
-          </p:txBody>
-        </p:sp>
-        <p:sp>
-          <p:nvSpPr>
-            <p:cNvPr id="36" name="TextBox 36"/>
-            <p:cNvSpPr txBox="1"/>
-            <p:nvPr/>
-          </p:nvSpPr>
-          <p:spPr>
-            <a:xfrm>
-              <a:off x="7559992" y="2561749"/>
-              <a:ext cx="2815781" cy="198120"/>
-            </a:xfrm>
-            <a:prstGeom prst="rect">
-              <a:avLst/>
-            </a:prstGeom>
-            <a:noFill/>
-            <a:ln>
-              <a:noFill/>
-            </a:ln>
-          </p:spPr>
-          <p:txBody>
-            <a:bodyPr wrap="none" lIns="0" tIns="0" rIns="0" bIns="0" anchor="t" anchorCtr="0">
-              <a:spAutoFit/>
-            </a:bodyPr>
-            <a:lstStyle/>
-            <a:p>
-              <a:pPr algn="l"/>
-              <a:r>
-                <a:rPr lang="zh-CN" sz="975" dirty="0">
-                  <a:solidFill>
-                    <a:srgbClr val="333333"/>
-                  </a:solidFill>
-                  <a:latin typeface="Consolas"/>
-                  <a:ea typeface="Microsoft YaHei"/>
-                  <a:cs typeface="Consolas"/>
-                </a:rPr>
-                <a:t>NOT(0x05e1f00c) = 0xfa1e0ff3 = ENDBR64</a:t>
-              </a:r>
-            </a:p>
-          </p:txBody>
-        </p:sp>
-        <p:sp>
-          <p:nvSpPr>
-            <p:cNvPr id="37" name="Rectangle 37"/>
-            <p:cNvSpPr/>
-            <p:nvPr/>
-          </p:nvSpPr>
-          <p:spPr>
-            <a:xfrm>
-              <a:off x="7429500" y="2952750"/>
-              <a:ext cx="4286250" cy="666750"/>
-            </a:xfrm>
-            <a:prstGeom prst="roundRect">
-              <a:avLst>
-                <a:gd name="adj" fmla="val 8571"/>
-              </a:avLst>
-            </a:prstGeom>
-            <a:solidFill>
-              <a:srgbClr val="FEF2F2"/>
-            </a:solidFill>
-            <a:ln w="14288">
-              <a:solidFill>
-                <a:srgbClr val="EF4444"/>
-              </a:solidFill>
-            </a:ln>
-          </p:spPr>
-        </p:sp>
-        <p:grpSp>
-          <p:nvGrpSpPr>
-            <p:cNvPr id="41" name="Group 41"/>
-            <p:cNvGrpSpPr/>
-            <p:nvPr/>
-          </p:nvGrpSpPr>
-          <p:grpSpPr>
-            <a:xfrm>
-              <a:off x="7596983" y="3124200"/>
-              <a:ext cx="179383" cy="171450"/>
-              <a:chOff x="7596983" y="3124200"/>
-              <a:chExt cx="179383" cy="171450"/>
-            </a:xfrm>
-          </p:grpSpPr>
-          <p:sp>
-            <p:nvSpPr>
-              <p:cNvPr id="38" name="Freeform 38"/>
-              <p:cNvSpPr/>
-              <p:nvPr/>
-            </p:nvSpPr>
-            <p:spPr>
-              <a:xfrm>
-                <a:off x="7596983" y="3124200"/>
-                <a:ext cx="179383" cy="171450"/>
-              </a:xfrm>
-              <a:custGeom>
-                <a:avLst/>
-                <a:gdLst/>
-                <a:ahLst/>
-                <a:cxnLst/>
-                <a:rect l="l" t="t" r="r" b="b"/>
-                <a:pathLst>
-                  <a:path w="179383" h="171450">
-                    <a:moveTo>
-                      <a:pt x="89692" y="0"/>
-                    </a:moveTo>
-                    <a:cubicBezTo>
-                      <a:pt x="111940" y="19684"/>
-                      <a:pt x="140979" y="29933"/>
-                      <a:pt x="170654" y="28575"/>
-                    </a:cubicBezTo>
-                    <a:cubicBezTo>
-                      <a:pt x="179383" y="58269"/>
-                      <a:pt x="175697" y="90235"/>
-                      <a:pt x="160438" y="117163"/>
-                    </a:cubicBezTo>
-                    <a:cubicBezTo>
-                      <a:pt x="145178" y="144091"/>
-                      <a:pt x="119651" y="163679"/>
-                      <a:pt x="89692" y="171450"/>
-                    </a:cubicBezTo>
-                    <a:cubicBezTo>
-                      <a:pt x="59732" y="163679"/>
-                      <a:pt x="34205" y="144091"/>
-                      <a:pt x="18946" y="117163"/>
-                    </a:cubicBezTo>
-                    <a:cubicBezTo>
-                      <a:pt x="3686" y="90235"/>
-                      <a:pt x="0" y="58269"/>
-                      <a:pt x="8729" y="28575"/>
-                    </a:cubicBezTo>
-                    <a:cubicBezTo>
-                      <a:pt x="38405" y="29933"/>
-                      <a:pt x="67443" y="19684"/>
-                      <a:pt x="89692" y="0"/>
-                    </a:cubicBezTo>
-                  </a:path>
-                </a:pathLst>
-              </a:custGeom>
-              <a:noFill/>
-              <a:ln w="19050">
-                <a:solidFill>
-                  <a:srgbClr val="EF4444"/>
-                </a:solidFill>
-              </a:ln>
-            </p:spPr>
-          </p:sp>
-          <p:sp>
-            <p:nvSpPr>
-              <p:cNvPr id="39" name="Freeform 39"/>
-              <p:cNvSpPr/>
-              <p:nvPr/>
-            </p:nvSpPr>
-            <p:spPr>
-              <a:xfrm>
-                <a:off x="7677150" y="3190875"/>
-                <a:ext cx="19050" cy="19050"/>
-              </a:xfrm>
-              <a:custGeom>
-                <a:avLst/>
-                <a:gdLst/>
-                <a:ahLst/>
-                <a:cxnLst/>
-                <a:rect l="l" t="t" r="r" b="b"/>
-                <a:pathLst>
-                  <a:path w="19050" h="19050">
-                    <a:moveTo>
-                      <a:pt x="0" y="9525"/>
-                    </a:moveTo>
-                    <a:cubicBezTo>
-                      <a:pt x="0" y="14786"/>
-                      <a:pt x="4264" y="19050"/>
-                      <a:pt x="9525" y="19050"/>
-                    </a:cubicBezTo>
-                    <a:cubicBezTo>
-                      <a:pt x="14786" y="19050"/>
-                      <a:pt x="19050" y="14786"/>
-                      <a:pt x="19050" y="9525"/>
-                    </a:cubicBezTo>
-                    <a:cubicBezTo>
-                      <a:pt x="19050" y="4264"/>
-                      <a:pt x="14786" y="0"/>
-                      <a:pt x="9525" y="0"/>
-                    </a:cubicBezTo>
-                    <a:cubicBezTo>
-                      <a:pt x="4264" y="0"/>
-                      <a:pt x="0" y="4264"/>
-                      <a:pt x="0" y="9525"/>
-                    </a:cubicBezTo>
-                  </a:path>
-                </a:pathLst>
-              </a:custGeom>
-              <a:noFill/>
-              <a:ln w="19050">
-                <a:solidFill>
-                  <a:srgbClr val="EF4444"/>
-                </a:solidFill>
-              </a:ln>
-            </p:spPr>
-          </p:sp>
-          <p:sp>
-            <p:nvSpPr>
-              <p:cNvPr id="40" name="Freeform 40"/>
-              <p:cNvSpPr/>
-              <p:nvPr/>
-            </p:nvSpPr>
-            <p:spPr>
-              <a:xfrm>
-                <a:off x="7686675" y="3209925"/>
-                <a:ext cx="9525" cy="23812"/>
-              </a:xfrm>
-              <a:custGeom>
-                <a:avLst/>
-                <a:gdLst/>
-                <a:ahLst/>
-                <a:cxnLst/>
-                <a:rect l="l" t="t" r="r" b="b"/>
-                <a:pathLst>
-                  <a:path w="9525" h="23812">
-                    <a:moveTo>
-                      <a:pt x="0" y="0"/>
-                    </a:moveTo>
-                    <a:lnTo>
-                      <a:pt x="0" y="23812"/>
-                    </a:lnTo>
-                  </a:path>
-                </a:pathLst>
-              </a:custGeom>
-              <a:noFill/>
-              <a:ln w="19050">
-                <a:solidFill>
-                  <a:srgbClr val="EF4444"/>
-                </a:solidFill>
-              </a:ln>
-            </p:spPr>
-          </p:sp>
-        </p:grpSp>
-        <p:sp>
-          <p:nvSpPr>
-            <p:cNvPr id="42" name="TextBox 42"/>
-            <p:cNvSpPr txBox="1"/>
-            <p:nvPr/>
-          </p:nvSpPr>
-          <p:spPr>
-            <a:xfrm>
-              <a:off x="7873365" y="3125152"/>
-              <a:ext cx="1644922" cy="213360"/>
-            </a:xfrm>
-            <a:prstGeom prst="rect">
-              <a:avLst/>
-            </a:prstGeom>
-            <a:noFill/>
-            <a:ln>
-              <a:noFill/>
-            </a:ln>
-          </p:spPr>
-          <p:txBody>
-            <a:bodyPr wrap="none" lIns="0" tIns="0" rIns="0" bIns="0" anchor="t" anchorCtr="0">
-              <a:spAutoFit/>
-            </a:bodyPr>
-            <a:lstStyle/>
-            <a:p>
-              <a:pPr algn="l"/>
-              <a:r>
-                <a:rPr lang="zh-CN" sz="1050" b="1" dirty="0">
-                  <a:solidFill>
-                    <a:srgbClr val="EF4444"/>
-                  </a:solidFill>
-                  <a:latin typeface="Arial"/>
-                  <a:ea typeface="Microsoft YaHei"/>
-                  <a:cs typeface="Arial"/>
-                </a:rPr>
-                <a:t>Why not direct MOV?</a:t>
-              </a:r>
-            </a:p>
-          </p:txBody>
-        </p:sp>
-        <p:sp>
-          <p:nvSpPr>
-            <p:cNvPr id="43" name="TextBox 43"/>
-            <p:cNvSpPr txBox="1"/>
-            <p:nvPr/>
-          </p:nvSpPr>
-          <p:spPr>
-            <a:xfrm>
-              <a:off x="7559992" y="3371374"/>
-              <a:ext cx="3577614" cy="198120"/>
-            </a:xfrm>
-            <a:prstGeom prst="rect">
-              <a:avLst/>
-            </a:prstGeom>
-            <a:noFill/>
-            <a:ln>
-              <a:noFill/>
-            </a:ln>
-          </p:spPr>
-          <p:txBody>
-            <a:bodyPr wrap="none" lIns="0" tIns="0" rIns="0" bIns="0" anchor="t" anchorCtr="0">
-              <a:spAutoFit/>
-            </a:bodyPr>
-            <a:lstStyle/>
-            <a:p>
-              <a:pPr algn="l"/>
-              <a:r>
-                <a:rPr lang="zh-CN" sz="975" dirty="0">
-                  <a:solidFill>
-                    <a:srgbClr val="555555"/>
-                  </a:solidFill>
-                  <a:latin typeface="Arial"/>
-                  <a:ea typeface="Microsoft YaHei"/>
-                  <a:cs typeface="Arial"/>
-                </a:rPr>
-                <a:t>Direct encoding would create ENDBR gadget in .text</a:t>
-              </a:r>
-            </a:p>
-          </p:txBody>
-        </p:sp>
-        <p:sp>
-          <p:nvSpPr>
-            <p:cNvPr id="44" name="Rectangle 44"/>
-            <p:cNvSpPr/>
-            <p:nvPr/>
-          </p:nvSpPr>
-          <p:spPr>
-            <a:xfrm>
-              <a:off x="7429500" y="3762375"/>
-              <a:ext cx="4286250" cy="666750"/>
-            </a:xfrm>
-            <a:prstGeom prst="roundRect">
-              <a:avLst>
-                <a:gd name="adj" fmla="val 8571"/>
-              </a:avLst>
-            </a:prstGeom>
-            <a:solidFill>
-              <a:srgbClr val="FAF5FF"/>
-            </a:solidFill>
-            <a:ln w="14288">
-              <a:solidFill>
-                <a:srgbClr val="AF00C0"/>
-              </a:solidFill>
-            </a:ln>
-          </p:spPr>
-        </p:sp>
-        <p:grpSp>
-          <p:nvGrpSpPr>
-            <p:cNvPr id="47" name="Group 47"/>
-            <p:cNvGrpSpPr/>
-            <p:nvPr/>
-          </p:nvGrpSpPr>
-          <p:grpSpPr>
-            <a:xfrm>
-              <a:off x="7596188" y="3943350"/>
-              <a:ext cx="180975" cy="152400"/>
-              <a:chOff x="7596188" y="3943350"/>
-              <a:chExt cx="180975" cy="152400"/>
-            </a:xfrm>
-          </p:grpSpPr>
-          <p:sp>
-            <p:nvSpPr>
-              <p:cNvPr id="45" name="Freeform 45"/>
-              <p:cNvSpPr/>
-              <p:nvPr/>
-            </p:nvSpPr>
-            <p:spPr>
-              <a:xfrm>
-                <a:off x="7596188" y="3943350"/>
-                <a:ext cx="180975" cy="152400"/>
-              </a:xfrm>
-              <a:custGeom>
-                <a:avLst/>
-                <a:gdLst/>
-                <a:ahLst/>
-                <a:cxnLst/>
-                <a:rect l="l" t="t" r="r" b="b"/>
-                <a:pathLst>
-                  <a:path w="180975" h="152400">
-                    <a:moveTo>
-                      <a:pt x="23812" y="0"/>
-                    </a:moveTo>
-                    <a:cubicBezTo>
-                      <a:pt x="0" y="47625"/>
-                      <a:pt x="0" y="95250"/>
-                      <a:pt x="23812" y="152400"/>
-                    </a:cubicBezTo>
-                    <a:moveTo>
-                      <a:pt x="157162" y="0"/>
-                    </a:moveTo>
-                    <a:cubicBezTo>
-                      <a:pt x="180975" y="47625"/>
-                      <a:pt x="180975" y="95250"/>
-                      <a:pt x="157162" y="152400"/>
-                    </a:cubicBezTo>
-                    <a:moveTo>
-                      <a:pt x="61912" y="47625"/>
-                    </a:moveTo>
-                    <a:lnTo>
-                      <a:pt x="71438" y="47625"/>
-                    </a:lnTo>
-                    <a:cubicBezTo>
-                      <a:pt x="80962" y="47625"/>
-                      <a:pt x="80962" y="57150"/>
-                      <a:pt x="90640" y="81220"/>
-                    </a:cubicBezTo>
-                    <a:cubicBezTo>
-                      <a:pt x="100012" y="104775"/>
-                      <a:pt x="100012" y="114300"/>
-                      <a:pt x="109538" y="114300"/>
-                    </a:cubicBezTo>
-                    <a:lnTo>
-                      <a:pt x="119062" y="114300"/>
-                    </a:lnTo>
-                  </a:path>
-                </a:pathLst>
-              </a:custGeom>
-              <a:noFill/>
-              <a:ln w="19050">
-                <a:solidFill>
-                  <a:srgbClr val="AF00C0"/>
-                </a:solidFill>
-              </a:ln>
-            </p:spPr>
-          </p:sp>
-          <p:sp>
-            <p:nvSpPr>
-              <p:cNvPr id="46" name="Freeform 46"/>
-              <p:cNvSpPr/>
-              <p:nvPr/>
-            </p:nvSpPr>
-            <p:spPr>
-              <a:xfrm>
-                <a:off x="7648575" y="3990975"/>
-                <a:ext cx="76200" cy="66675"/>
-              </a:xfrm>
-              <a:custGeom>
-                <a:avLst/>
-                <a:gdLst/>
-                <a:ahLst/>
-                <a:cxnLst/>
-                <a:rect l="l" t="t" r="r" b="b"/>
-                <a:pathLst>
-                  <a:path w="76200" h="66675">
-                    <a:moveTo>
-                      <a:pt x="0" y="66675"/>
-                    </a:moveTo>
-                    <a:cubicBezTo>
-                      <a:pt x="14288" y="66675"/>
-                      <a:pt x="28575" y="47625"/>
-                      <a:pt x="38100" y="33338"/>
-                    </a:cubicBezTo>
-                    <a:cubicBezTo>
-                      <a:pt x="47625" y="19050"/>
-                      <a:pt x="61912" y="0"/>
-                      <a:pt x="76200" y="0"/>
-                    </a:cubicBezTo>
-                  </a:path>
-                </a:pathLst>
-              </a:custGeom>
-              <a:noFill/>
-              <a:ln w="19050">
-                <a:solidFill>
-                  <a:srgbClr val="AF00C0"/>
-                </a:solidFill>
-              </a:ln>
-            </p:spPr>
-          </p:sp>
-        </p:grpSp>
-        <p:sp>
-          <p:nvSpPr>
-            <p:cNvPr id="48" name="TextBox 48"/>
-            <p:cNvSpPr txBox="1"/>
-            <p:nvPr/>
-          </p:nvSpPr>
-          <p:spPr>
-            <a:xfrm>
-              <a:off x="7873365" y="3953828"/>
-              <a:ext cx="1588565" cy="213360"/>
-            </a:xfrm>
-            <a:prstGeom prst="rect">
-              <a:avLst/>
-            </a:prstGeom>
-            <a:noFill/>
-            <a:ln>
-              <a:noFill/>
-            </a:ln>
-          </p:spPr>
-          <p:txBody>
-            <a:bodyPr wrap="none" lIns="0" tIns="0" rIns="0" bIns="0" anchor="t" anchorCtr="0">
-              <a:spAutoFit/>
-            </a:bodyPr>
-            <a:lstStyle/>
-            <a:p>
-              <a:pPr algn="l"/>
-              <a:r>
-                <a:rPr lang="zh-CN" sz="1050" b="1" dirty="0">
-                  <a:solidFill>
-                    <a:srgbClr val="AF00C0"/>
-                  </a:solidFill>
-                  <a:latin typeface="Arial"/>
-                  <a:ea typeface="Microsoft YaHei"/>
-                  <a:cs typeface="Arial"/>
-                </a:rPr>
-                <a:t>"=&amp;r" early-clobber</a:t>
-              </a:r>
-            </a:p>
-          </p:txBody>
-        </p:sp>
-        <p:sp>
-          <p:nvSpPr>
-            <p:cNvPr id="49" name="TextBox 49"/>
-            <p:cNvSpPr txBox="1"/>
-            <p:nvPr/>
-          </p:nvSpPr>
-          <p:spPr>
-            <a:xfrm>
-              <a:off x="7559992" y="4200049"/>
-              <a:ext cx="3477935" cy="198120"/>
-            </a:xfrm>
-            <a:prstGeom prst="rect">
-              <a:avLst/>
-            </a:prstGeom>
-            <a:noFill/>
-            <a:ln>
-              <a:noFill/>
-            </a:ln>
-          </p:spPr>
-          <p:txBody>
-            <a:bodyPr wrap="none" lIns="0" tIns="0" rIns="0" bIns="0" anchor="t" anchorCtr="0">
-              <a:spAutoFit/>
-            </a:bodyPr>
-            <a:lstStyle/>
-            <a:p>
-              <a:pPr algn="l"/>
-              <a:r>
-                <a:rPr lang="zh-CN" sz="975" dirty="0">
-                  <a:solidFill>
-                    <a:srgbClr val="555555"/>
-                  </a:solidFill>
-                  <a:latin typeface="Arial"/>
-                  <a:ea typeface="Microsoft YaHei"/>
-                  <a:cs typeface="Arial"/>
-                </a:rPr>
-                <a:t>Scratch register written before inputs consumed</a:t>
-              </a:r>
-            </a:p>
-          </p:txBody>
-        </p:sp>
-        <p:sp>
-          <p:nvSpPr>
-            <p:cNvPr id="50" name="Rectangle 50"/>
-            <p:cNvSpPr/>
-            <p:nvPr/>
-          </p:nvSpPr>
-          <p:spPr>
-            <a:xfrm>
-              <a:off x="476250" y="4762500"/>
-              <a:ext cx="11239500" cy="952500"/>
-            </a:xfrm>
-            <a:prstGeom prst="roundRect">
-              <a:avLst>
-                <a:gd name="adj" fmla="val 8000"/>
-              </a:avLst>
-            </a:prstGeom>
-            <a:solidFill>
-              <a:srgbClr val="F8FAFC"/>
-            </a:solidFill>
-            <a:ln w="9525">
-              <a:solidFill>
-                <a:srgbClr val="64748B"/>
-              </a:solidFill>
-            </a:ln>
-          </p:spPr>
-        </p:sp>
-        <p:sp>
-          <p:nvSpPr>
-            <p:cNvPr id="51" name="TextBox 51"/>
-            <p:cNvSpPr txBox="1"/>
-            <p:nvPr/>
-          </p:nvSpPr>
-          <p:spPr>
-            <a:xfrm>
-              <a:off x="4850861" y="4887278"/>
-              <a:ext cx="2490278" cy="213360"/>
-            </a:xfrm>
-            <a:prstGeom prst="rect">
-              <a:avLst/>
-            </a:prstGeom>
-            <a:noFill/>
-            <a:ln>
-              <a:noFill/>
-            </a:ln>
-          </p:spPr>
-          <p:txBody>
-            <a:bodyPr wrap="none" lIns="0" tIns="0" rIns="0" bIns="0" anchor="t" anchorCtr="0">
-              <a:spAutoFit/>
-            </a:bodyPr>
-            <a:lstStyle/>
-            <a:p>
-              <a:pPr algn="ctr"/>
-              <a:r>
-                <a:rPr lang="zh-CN" sz="1050" b="1" dirty="0">
-                  <a:solidFill>
-                    <a:srgbClr val="333333"/>
-                  </a:solidFill>
-                  <a:latin typeface="Arial"/>
-                  <a:ea typeface="Microsoft YaHei"/>
-                  <a:cs typeface="Arial"/>
-                </a:rPr>
-                <a:t>Byte Transformation in Memory</a:t>
-              </a:r>
-            </a:p>
-          </p:txBody>
-        </p:sp>
-        <p:sp>
-          <p:nvSpPr>
-            <p:cNvPr id="52" name="Rectangle 52"/>
-            <p:cNvSpPr/>
-            <p:nvPr/>
-          </p:nvSpPr>
-          <p:spPr>
-            <a:xfrm>
-              <a:off x="1143000" y="5191125"/>
-              <a:ext cx="2286000" cy="381000"/>
-            </a:xfrm>
-            <a:prstGeom prst="roundRect">
-              <a:avLst>
-                <a:gd name="adj" fmla="val 10000"/>
-              </a:avLst>
-            </a:prstGeom>
-            <a:solidFill>
-              <a:srgbClr val="1E293B"/>
-            </a:solidFill>
-            <a:ln>
-              <a:noFill/>
-            </a:ln>
-          </p:spPr>
-        </p:sp>
-        <p:sp>
-          <p:nvSpPr>
-            <p:cNvPr id="53" name="TextBox 53"/>
-            <p:cNvSpPr txBox="1"/>
-            <p:nvPr/>
-          </p:nvSpPr>
-          <p:spPr>
-            <a:xfrm>
-              <a:off x="1840409" y="5317331"/>
-              <a:ext cx="891183" cy="228600"/>
-            </a:xfrm>
-            <a:prstGeom prst="rect">
-              <a:avLst/>
-            </a:prstGeom>
-            <a:noFill/>
-            <a:ln>
-              <a:noFill/>
-            </a:ln>
-          </p:spPr>
-          <p:txBody>
-            <a:bodyPr wrap="none" lIns="0" tIns="0" rIns="0" bIns="0" anchor="t" anchorCtr="0">
-              <a:spAutoFit/>
-            </a:bodyPr>
-            <a:lstStyle/>
-            <a:p>
-              <a:pPr algn="ctr"/>
-              <a:r>
-                <a:rPr lang="zh-CN" sz="1125" dirty="0">
-                  <a:solidFill>
-                    <a:srgbClr val="F79646"/>
-                  </a:solidFill>
-                  <a:latin typeface="Consolas"/>
-                  <a:ea typeface="Microsoft YaHei"/>
-                  <a:cs typeface="Consolas"/>
-                </a:rPr>
-                <a:t>0x05e1f00c</a:t>
-              </a:r>
-            </a:p>
-          </p:txBody>
-        </p:sp>
-        <p:sp>
-          <p:nvSpPr>
-            <p:cNvPr id="54" name="TextBox 54"/>
-            <p:cNvSpPr txBox="1"/>
-            <p:nvPr/>
-          </p:nvSpPr>
-          <p:spPr>
-            <a:xfrm>
-              <a:off x="3790950" y="5276850"/>
-              <a:ext cx="815816" cy="304800"/>
-            </a:xfrm>
-            <a:prstGeom prst="rect">
-              <a:avLst/>
-            </a:prstGeom>
-            <a:noFill/>
-            <a:ln>
-              <a:noFill/>
-            </a:ln>
-          </p:spPr>
-          <p:txBody>
-            <a:bodyPr wrap="none" lIns="0" tIns="0" rIns="0" bIns="0" anchor="t" anchorCtr="0">
-              <a:spAutoFit/>
-            </a:bodyPr>
-            <a:lstStyle/>
-            <a:p>
-              <a:pPr algn="l"/>
-              <a:r>
-                <a:rPr lang="zh-CN" sz="1500" dirty="0">
-                  <a:solidFill>
-                    <a:srgbClr val="333333"/>
-                  </a:solidFill>
-                  <a:latin typeface="Arial"/>
-                  <a:ea typeface="Microsoft YaHei"/>
-                  <a:cs typeface="Arial"/>
-                </a:rPr>
-                <a:t>→ NOT →</a:t>
-              </a:r>
-            </a:p>
-          </p:txBody>
-        </p:sp>
-        <p:sp>
-          <p:nvSpPr>
-            <p:cNvPr id="55" name="Rectangle 55"/>
-            <p:cNvSpPr/>
-            <p:nvPr/>
-          </p:nvSpPr>
-          <p:spPr>
-            <a:xfrm>
-              <a:off x="4953000" y="5191125"/>
-              <a:ext cx="2286000" cy="381000"/>
-            </a:xfrm>
-            <a:prstGeom prst="roundRect">
-              <a:avLst>
-                <a:gd name="adj" fmla="val 10000"/>
-              </a:avLst>
-            </a:prstGeom>
-            <a:solidFill>
-              <a:srgbClr val="1E293B"/>
-            </a:solidFill>
-            <a:ln>
-              <a:noFill/>
-            </a:ln>
-          </p:spPr>
-        </p:sp>
-        <p:sp>
-          <p:nvSpPr>
-            <p:cNvPr id="56" name="TextBox 56"/>
-            <p:cNvSpPr txBox="1"/>
-            <p:nvPr/>
-          </p:nvSpPr>
-          <p:spPr>
-            <a:xfrm>
-              <a:off x="5650409" y="5317331"/>
-              <a:ext cx="891183" cy="228600"/>
-            </a:xfrm>
-            <a:prstGeom prst="rect">
-              <a:avLst/>
-            </a:prstGeom>
-            <a:noFill/>
-            <a:ln>
-              <a:noFill/>
-            </a:ln>
-          </p:spPr>
-          <p:txBody>
-            <a:bodyPr wrap="none" lIns="0" tIns="0" rIns="0" bIns="0" anchor="t" anchorCtr="0">
-              <a:spAutoFit/>
-            </a:bodyPr>
-            <a:lstStyle/>
-            <a:p>
-              <a:pPr algn="ctr"/>
-              <a:r>
-                <a:rPr lang="zh-CN" sz="1125" dirty="0">
-                  <a:solidFill>
-                    <a:srgbClr val="0AB36E"/>
-                  </a:solidFill>
-                  <a:latin typeface="Consolas"/>
-                  <a:ea typeface="Microsoft YaHei"/>
-                  <a:cs typeface="Consolas"/>
-                </a:rPr>
-                <a:t>0xfa1e0ff3</a:t>
-              </a:r>
-            </a:p>
-          </p:txBody>
-        </p:sp>
-        <p:sp>
-          <p:nvSpPr>
-            <p:cNvPr id="57" name="TextBox 57"/>
-            <p:cNvSpPr txBox="1"/>
-            <p:nvPr/>
-          </p:nvSpPr>
-          <p:spPr>
-            <a:xfrm>
-              <a:off x="7600950" y="5276850"/>
-              <a:ext cx="1133475" cy="304800"/>
-            </a:xfrm>
-            <a:prstGeom prst="rect">
-              <a:avLst/>
-            </a:prstGeom>
-            <a:noFill/>
-            <a:ln>
-              <a:noFill/>
-            </a:ln>
-          </p:spPr>
-          <p:txBody>
-            <a:bodyPr wrap="none" lIns="0" tIns="0" rIns="0" bIns="0" anchor="t" anchorCtr="0">
-              <a:spAutoFit/>
-            </a:bodyPr>
-            <a:lstStyle/>
-            <a:p>
-              <a:pPr algn="l"/>
-              <a:r>
-                <a:rPr lang="zh-CN" sz="1500" dirty="0">
-                  <a:solidFill>
-                    <a:srgbClr val="333333"/>
-                  </a:solidFill>
-                  <a:latin typeface="Arial"/>
-                  <a:ea typeface="Microsoft YaHei"/>
-                  <a:cs typeface="Arial"/>
-                </a:rPr>
-                <a:t>→ decode →</a:t>
-              </a:r>
-            </a:p>
-          </p:txBody>
-        </p:sp>
-        <p:sp>
-          <p:nvSpPr>
-            <p:cNvPr id="58" name="Rectangle 58"/>
-            <p:cNvSpPr/>
-            <p:nvPr/>
-          </p:nvSpPr>
-          <p:spPr>
-            <a:xfrm>
-              <a:off x="8858250" y="5191125"/>
-              <a:ext cx="2286000" cy="381000"/>
-            </a:xfrm>
-            <a:prstGeom prst="roundRect">
-              <a:avLst>
-                <a:gd name="adj" fmla="val 10000"/>
-              </a:avLst>
-            </a:prstGeom>
-            <a:solidFill>
-              <a:srgbClr val="0AB36E"/>
-            </a:solidFill>
-            <a:ln>
-              <a:noFill/>
-            </a:ln>
-          </p:spPr>
-        </p:sp>
-        <p:sp>
-          <p:nvSpPr>
-            <p:cNvPr id="59" name="TextBox 59"/>
-            <p:cNvSpPr txBox="1"/>
-            <p:nvPr/>
-          </p:nvSpPr>
-          <p:spPr>
-            <a:xfrm>
-              <a:off x="9670673" y="5317331"/>
-              <a:ext cx="661154" cy="228600"/>
-            </a:xfrm>
-            <a:prstGeom prst="rect">
-              <a:avLst/>
-            </a:prstGeom>
-            <a:noFill/>
-            <a:ln>
-              <a:noFill/>
-            </a:ln>
-          </p:spPr>
-          <p:txBody>
-            <a:bodyPr wrap="none" lIns="0" tIns="0" rIns="0" bIns="0" anchor="t" anchorCtr="0">
-              <a:spAutoFit/>
-            </a:bodyPr>
-            <a:lstStyle/>
-            <a:p>
-              <a:pPr algn="ctr"/>
-              <a:r>
-                <a:rPr lang="zh-CN" sz="1125" dirty="0">
-                  <a:solidFill>
-                    <a:srgbClr val="FFFFFF"/>
-                  </a:solidFill>
-                  <a:latin typeface="Consolas"/>
-                  <a:ea typeface="Microsoft YaHei"/>
-                  <a:cs typeface="Consolas"/>
-                </a:rPr>
-                <a:t>ENDBR64</a:t>
-              </a:r>
-            </a:p>
-          </p:txBody>
-        </p:sp>
-      </p:grpSp>
-      <p:grpSp>
-        <p:nvGrpSpPr>
-          <p:cNvPr id="63" name="Group 63"/>
-          <p:cNvGrpSpPr/>
-          <p:nvPr/>
-        </p:nvGrpSpPr>
-        <p:grpSpPr>
-          <a:xfrm>
-            <a:off x="10283883" y="5886450"/>
-            <a:ext cx="1441392" cy="947738"/>
-            <a:chOff x="10283883" y="5886450"/>
-            <a:chExt cx="1441392" cy="947738"/>
-          </a:xfrm>
-        </p:grpSpPr>
-        <p:pic>
-          <p:nvPicPr>
-            <p:cNvPr id="61" name="Image 61"/>
-            <p:cNvPicPr>
-              <a:picLocks noChangeAspect="1"/>
-            </p:cNvPicPr>
-            <p:nvPr/>
-          </p:nvPicPr>
-          <p:blipFill>
             <a:blip r:embed="rId3"/>
-            <a:stretch>
-              <a:fillRect/>
-            </a:stretch>
-          </p:blipFill>
-          <p:spPr>
-            <a:xfrm>
-              <a:off x="10283883" y="5886450"/>
-              <a:ext cx="1158759" cy="381000"/>
-            </a:xfrm>
-            <a:prstGeom prst="rect">
-              <a:avLst/>
-            </a:prstGeom>
-          </p:spPr>
-        </p:pic>
-        <p:sp>
-          <p:nvSpPr>
-            <p:cNvPr id="62" name="TextBox 62"/>
-            <p:cNvSpPr txBox="1"/>
-            <p:nvPr/>
-          </p:nvSpPr>
-          <p:spPr>
-            <a:xfrm>
-              <a:off x="11585734" y="6681788"/>
-              <a:ext cx="139541" cy="152400"/>
-            </a:xfrm>
-            <a:prstGeom prst="rect">
-              <a:avLst/>
-            </a:prstGeom>
-            <a:noFill/>
-            <a:ln>
-              <a:noFill/>
-            </a:ln>
-          </p:spPr>
-          <p:txBody>
-            <a:bodyPr wrap="none" lIns="0" tIns="0" rIns="0" bIns="0" anchor="t" anchorCtr="0">
-              <a:spAutoFit/>
-            </a:bodyPr>
-            <a:lstStyle/>
-            <a:p>
-              <a:pPr algn="r"/>
-              <a:r>
-                <a:rPr lang="zh-CN" sz="750" dirty="0">
-                  <a:solidFill>
-                    <a:srgbClr val="FFFFFF">
-                      <a:alpha val="60000"/>
-                    </a:srgbClr>
-                  </a:solidFill>
-                  <a:latin typeface="Arial"/>
-                  <a:ea typeface="Microsoft YaHei"/>
-                  <a:cs typeface="Arial"/>
-                </a:rPr>
-                <a:t>06</a:t>
-              </a:r>
-            </a:p>
-          </p:txBody>
-        </p:sp>
-      </p:grpSp>
-    </p:spTree>
-  </p:cSld>
-  <p:clrMapOvr>
-    <a:masterClrMapping/>
-  </p:clrMapOvr>
-  <p:transition xmlns:p14="http://schemas.microsoft.com/office/powerpoint/2010/main" p14:dur="400">
-    <p:fade/>
-  </p:transition>
-  <p:timing>
-    <p:tnLst>
-      <p:par>
-        <p:cTn id="1" dur="indefinite" restart="never" nodeType="tmRoot">
-          <p:childTnLst>
-            <p:seq concurrent="1" nextAc="seek">
-              <p:cTn id="2" dur="indefinite" nodeType="mainSeq">
-                <p:childTnLst>
-                  <p:par>
-                    <p:cTn id="3" fill="hold">
-                      <p:stCondLst>
-                        <p:cond delay="indefinite"/>
-                        <p:cond evt="onBegin" delay="0">
-                          <p:tn val="2"/>
-                        </p:cond>
-                      </p:stCondLst>
-                      <p:childTnLst>
-                        <p:par>
-                          <p:cTn id="4" fill="hold">
-                            <p:stCondLst>
-                              <p:cond delay="0"/>
-                            </p:stCondLst>
-                            <p:childTnLst>
-                              <p:par>
-                                <p:cTn id="5" presetID="10" presetClass="entr" presetSubtype="0" fill="hold" nodeType="afterEffect">
-                                  <p:stCondLst>
-                                    <p:cond delay="0"/>
-                                  </p:stCondLst>
-                                  <p:childTnLst>
-                                    <p:set>
-                                      <p:cBhvr>
-                                        <p:cTn id="6" dur="1" fill="hold">
-                                          <p:stCondLst>
-                                            <p:cond delay="0"/>
-                                          </p:stCondLst>
-                                        </p:cTn>
-                                        <p:tgtEl>
-                                          <p:spTgt spid="60"/>
-                                        </p:tgtEl>
-                                        <p:attrNameLst>
-                                          <p:attrName>style.visibility</p:attrName>
-                                        </p:attrNameLst>
-                                      </p:cBhvr>
-                                      <p:to>
-                                        <p:strVal val="visible"/>
-                                      </p:to>
-                                    </p:set>
-                                    <p:animEffect transition="in" filter="fade">
-                                      <p:cBhvr>
-                                        <p:cTn id="7" dur="400"/>
-                                        <p:tgtEl>
-                                          <p:spTgt spid="60"/>
-                                        </p:tgtEl>
-                                      </p:cBhvr>
-                                    </p:animEffect>
-                                  </p:childTnLst>
-                                </p:cTn>
-                              </p:par>
-                            </p:childTnLst>
-                          </p:cTn>
-                        </p:par>
-                      </p:childTnLst>
-                    </p:cTn>
-                  </p:par>
-                </p:childTnLst>
-              </p:cTn>
-              <p:prevCondLst>
-                <p:cond evt="onPrev" delay="0">
-                  <p:tgtEl>
-                    <p:sldTgt/>
-                  </p:tgtEl>
-                </p:cond>
-              </p:prevCondLst>
-              <p:nextCondLst>
-                <p:cond evt="onNext" delay="0">
-                  <p:tgtEl>
-                    <p:sldTgt/>
-                  </p:tgtEl>
-                </p:cond>
-              </p:nextCondLst>
-            </p:seq>
-          </p:childTnLst>
-        </p:cTn>
-      </p:par>
-    </p:tnLst>
-    <p:bldLst>
-      <p:bldP spid="60" grpId="0"/>
-    </p:bldLst>
-  </p:timing>
-</p:sld>
-</file>
-
-<file path=ppt/slides/slide7.xml><?xml version="1.0" encoding="utf-8"?>
-<p:sld xmlns:a="http://schemas.openxmlformats.org/drawingml/2006/main" xmlns:r="http://schemas.openxmlformats.org/officeDocument/2006/relationships" xmlns:p="http://schemas.openxmlformats.org/presentationml/2006/main">
-  <p:cSld>
-    <p:spTree>
-      <p:nvGrpSpPr>
-        <p:cNvPr id="1" name=""/>
-        <p:cNvGrpSpPr/>
-        <p:nvPr/>
-      </p:nvGrpSpPr>
-      <p:grpSpPr>
-        <a:xfrm>
-          <a:off x="0" y="0"/>
-          <a:ext cx="0" cy="0"/>
-          <a:chOff x="0" y="0"/>
-          <a:chExt cx="0" cy="0"/>
-        </a:xfrm>
-      </p:grpSpPr>
-      <p:grpSp>
-        <p:nvGrpSpPr>
-          <p:cNvPr id="4" name="Group 4"/>
-          <p:cNvGrpSpPr/>
-          <p:nvPr/>
-        </p:nvGrpSpPr>
-        <p:grpSpPr>
-          <a:xfrm>
-            <a:off x="0" y="0"/>
-            <a:ext cx="12192000" cy="6858000"/>
-            <a:chOff x="0" y="0"/>
-            <a:chExt cx="12192000" cy="6858000"/>
-          </a:xfrm>
-        </p:grpSpPr>
-        <p:pic>
-          <p:nvPicPr>
-            <p:cNvPr id="2" name="Image 2"/>
-            <p:cNvPicPr>
-              <a:picLocks noChangeAspect="1"/>
-            </p:cNvPicPr>
-            <p:nvPr/>
-          </p:nvPicPr>
-          <p:blipFill>
-            <a:blip r:embed="rId2"/>
-            <a:srcRect l="0" t="781" r="0" b="781"/>
+            <a:srcRect t="781" b="781"/>
             <a:stretch>
               <a:fillRect/>
             </a:stretch>
@@ -39631,7 +37046,7 @@
             <p:nvPr/>
           </p:nvPicPr>
           <p:blipFill>
-            <a:blip r:embed="rId3"/>
+            <a:blip r:embed="rId4"/>
             <a:stretch>
               <a:fillRect/>
             </a:stretch>
@@ -39694,9 +37109,18 @@
   <p:clrMapOvr>
     <a:masterClrMapping/>
   </p:clrMapOvr>
-  <p:transition xmlns:p14="http://schemas.microsoft.com/office/powerpoint/2010/main" p14:dur="400">
-    <p:fade/>
-  </p:transition>
+  <mc:AlternateContent xmlns:mc="http://schemas.openxmlformats.org/markup-compatibility/2006">
+    <mc:Choice xmlns:p14="http://schemas.microsoft.com/office/powerpoint/2010/main" Requires="p14">
+      <p:transition p14:dur="400">
+        <p:fade/>
+      </p:transition>
+    </mc:Choice>
+    <mc:Fallback>
+      <p:transition>
+        <p:fade/>
+      </p:transition>
+    </mc:Fallback>
+  </mc:AlternateContent>
   <p:timing>
     <p:tnLst>
       <p:par>
@@ -39879,6 +37303,2334 @@
 </p:sld>
 </file>
 
+<file path=ppt/slides/slide7.xml><?xml version="1.0" encoding="utf-8"?>
+<p:sld xmlns:a="http://schemas.openxmlformats.org/drawingml/2006/main" xmlns:r="http://schemas.openxmlformats.org/officeDocument/2006/relationships" xmlns:p="http://schemas.openxmlformats.org/presentationml/2006/main">
+  <p:cSld>
+    <p:spTree>
+      <p:nvGrpSpPr>
+        <p:cNvPr id="1" name=""/>
+        <p:cNvGrpSpPr/>
+        <p:nvPr/>
+      </p:nvGrpSpPr>
+      <p:grpSpPr>
+        <a:xfrm>
+          <a:off x="0" y="0"/>
+          <a:ext cx="0" cy="0"/>
+          <a:chOff x="0" y="0"/>
+          <a:chExt cx="0" cy="0"/>
+        </a:xfrm>
+      </p:grpSpPr>
+      <p:grpSp>
+        <p:nvGrpSpPr>
+          <p:cNvPr id="4" name="Group 4"/>
+          <p:cNvGrpSpPr/>
+          <p:nvPr/>
+        </p:nvGrpSpPr>
+        <p:grpSpPr>
+          <a:xfrm>
+            <a:off x="0" y="0"/>
+            <a:ext cx="12192000" cy="6858000"/>
+            <a:chOff x="0" y="0"/>
+            <a:chExt cx="12192000" cy="6858000"/>
+          </a:xfrm>
+        </p:grpSpPr>
+        <p:pic>
+          <p:nvPicPr>
+            <p:cNvPr id="2" name="Image 2"/>
+            <p:cNvPicPr>
+              <a:picLocks noChangeAspect="1"/>
+            </p:cNvPicPr>
+            <p:nvPr/>
+          </p:nvPicPr>
+          <p:blipFill>
+            <a:blip r:embed="rId3"/>
+            <a:srcRect t="781" b="781"/>
+            <a:stretch>
+              <a:fillRect/>
+            </a:stretch>
+          </p:blipFill>
+          <p:spPr>
+            <a:xfrm>
+              <a:off x="0" y="0"/>
+              <a:ext cx="12192000" cy="6858000"/>
+            </a:xfrm>
+            <a:prstGeom prst="rect">
+              <a:avLst/>
+            </a:prstGeom>
+          </p:spPr>
+        </p:pic>
+        <p:sp>
+          <p:nvSpPr>
+            <p:cNvPr id="3" name="Rectangle 3"/>
+            <p:cNvSpPr/>
+            <p:nvPr/>
+          </p:nvSpPr>
+          <p:spPr>
+            <a:xfrm>
+              <a:off x="0" y="1133475"/>
+              <a:ext cx="12192000" cy="5410200"/>
+            </a:xfrm>
+            <a:prstGeom prst="rect">
+              <a:avLst/>
+            </a:prstGeom>
+            <a:solidFill>
+              <a:srgbClr val="FFFFFF"/>
+            </a:solidFill>
+            <a:ln>
+              <a:noFill/>
+            </a:ln>
+          </p:spPr>
+        </p:sp>
+      </p:grpSp>
+      <p:sp>
+        <p:nvSpPr>
+          <p:cNvPr id="5" name="TextBox 5"/>
+          <p:cNvSpPr txBox="1"/>
+          <p:nvPr/>
+        </p:nvSpPr>
+        <p:spPr>
+          <a:xfrm>
+            <a:off x="445770" y="502920"/>
+            <a:ext cx="6961823" cy="487680"/>
+          </a:xfrm>
+          <a:prstGeom prst="rect">
+            <a:avLst/>
+          </a:prstGeom>
+          <a:noFill/>
+          <a:ln>
+            <a:noFill/>
+          </a:ln>
+        </p:spPr>
+        <p:txBody>
+          <a:bodyPr wrap="none" lIns="0" tIns="0" rIns="0" bIns="0" anchor="t" anchorCtr="0">
+            <a:spAutoFit/>
+          </a:bodyPr>
+          <a:lstStyle/>
+          <a:p>
+            <a:pPr algn="l"/>
+            <a:r>
+              <a:rPr lang="zh-CN" sz="2400" b="1" dirty="0">
+                <a:solidFill>
+                  <a:srgbClr val="FFFFFF"/>
+                </a:solidFill>
+                <a:latin typeface="Arial"/>
+                <a:ea typeface="Microsoft YaHei"/>
+                <a:cs typeface="Arial"/>
+              </a:rPr>
+              <a:t>Generating ENDBR Without Embedding It</a:t>
+            </a:r>
+          </a:p>
+        </p:txBody>
+      </p:sp>
+      <p:grpSp>
+        <p:nvGrpSpPr>
+          <p:cNvPr id="60" name="Group 60"/>
+          <p:cNvGrpSpPr/>
+          <p:nvPr/>
+        </p:nvGrpSpPr>
+        <p:grpSpPr>
+          <a:xfrm>
+            <a:off x="476250" y="1333500"/>
+            <a:ext cx="11239500" cy="4381500"/>
+            <a:chOff x="476250" y="1333500"/>
+            <a:chExt cx="11239500" cy="4381500"/>
+          </a:xfrm>
+        </p:grpSpPr>
+        <p:sp>
+          <p:nvSpPr>
+            <p:cNvPr id="6" name="Rectangle 6"/>
+            <p:cNvSpPr/>
+            <p:nvPr/>
+          </p:nvSpPr>
+          <p:spPr>
+            <a:xfrm>
+              <a:off x="476250" y="1333500"/>
+              <a:ext cx="6667500" cy="3238500"/>
+            </a:xfrm>
+            <a:prstGeom prst="roundRect">
+              <a:avLst>
+                <a:gd name="adj" fmla="val 2353"/>
+              </a:avLst>
+            </a:prstGeom>
+            <a:solidFill>
+              <a:srgbClr val="1E293B"/>
+            </a:solidFill>
+            <a:ln>
+              <a:noFill/>
+            </a:ln>
+          </p:spPr>
+        </p:sp>
+        <p:sp>
+          <p:nvSpPr>
+            <p:cNvPr id="7" name="TextBox 7"/>
+            <p:cNvSpPr txBox="1"/>
+            <p:nvPr/>
+          </p:nvSpPr>
+          <p:spPr>
+            <a:xfrm>
+              <a:off x="655320" y="1474470"/>
+              <a:ext cx="2934367" cy="182880"/>
+            </a:xfrm>
+            <a:prstGeom prst="rect">
+              <a:avLst/>
+            </a:prstGeom>
+            <a:noFill/>
+            <a:ln>
+              <a:noFill/>
+            </a:ln>
+          </p:spPr>
+          <p:txBody>
+            <a:bodyPr wrap="none" lIns="0" tIns="0" rIns="0" bIns="0" anchor="t" anchorCtr="0">
+              <a:spAutoFit/>
+            </a:bodyPr>
+            <a:lstStyle/>
+            <a:p>
+              <a:pPr algn="l"/>
+              <a:r>
+                <a:rPr lang="zh-CN" sz="900" dirty="0">
+                  <a:solidFill>
+                    <a:srgbClr val="6A9955"/>
+                  </a:solidFill>
+                  <a:latin typeface="Arial"/>
+                  <a:ea typeface="Microsoft YaHei"/>
+                  <a:cs typeface="Arial"/>
+                </a:rPr>
+                <a:t>/* arch/x86/include/asm/ibt.h lines 44–57 */</a:t>
+              </a:r>
+            </a:p>
+          </p:txBody>
+        </p:sp>
+        <p:sp>
+          <p:nvSpPr>
+            <p:cNvPr id="8" name="TextBox 8"/>
+            <p:cNvSpPr txBox="1"/>
+            <p:nvPr/>
+          </p:nvSpPr>
+          <p:spPr>
+            <a:xfrm>
+              <a:off x="653415" y="1744028"/>
+              <a:ext cx="2695003" cy="213360"/>
+            </a:xfrm>
+            <a:prstGeom prst="rect">
+              <a:avLst/>
+            </a:prstGeom>
+            <a:noFill/>
+            <a:ln>
+              <a:noFill/>
+            </a:ln>
+          </p:spPr>
+          <p:txBody>
+            <a:bodyPr wrap="none" lIns="0" tIns="0" rIns="0" bIns="0" anchor="t" anchorCtr="0">
+              <a:spAutoFit/>
+            </a:bodyPr>
+            <a:lstStyle/>
+            <a:p>
+              <a:pPr algn="l"/>
+              <a:r>
+                <a:rPr lang="zh-CN" sz="1050" dirty="0">
+                  <a:solidFill>
+                    <a:srgbClr val="AF00C0"/>
+                  </a:solidFill>
+                  <a:latin typeface="Consolas"/>
+                  <a:ea typeface="Microsoft YaHei"/>
+                  <a:cs typeface="Consolas"/>
+                </a:rPr>
+                <a:t>#define gen_endbr()                       \</a:t>
+              </a:r>
+            </a:p>
+          </p:txBody>
+        </p:sp>
+        <p:sp>
+          <p:nvSpPr>
+            <p:cNvPr id="9" name="TextBox 9"/>
+            <p:cNvSpPr txBox="1"/>
+            <p:nvPr/>
+          </p:nvSpPr>
+          <p:spPr>
+            <a:xfrm>
+              <a:off x="653415" y="1963102"/>
+              <a:ext cx="2418969" cy="213360"/>
+            </a:xfrm>
+            <a:prstGeom prst="rect">
+              <a:avLst/>
+            </a:prstGeom>
+            <a:noFill/>
+            <a:ln>
+              <a:noFill/>
+            </a:ln>
+          </p:spPr>
+          <p:txBody>
+            <a:bodyPr wrap="none" lIns="0" tIns="0" rIns="0" bIns="0" anchor="t" anchorCtr="0">
+              <a:spAutoFit/>
+            </a:bodyPr>
+            <a:lstStyle/>
+            <a:p>
+              <a:pPr algn="l"/>
+              <a:r>
+                <a:rPr lang="zh-CN" sz="1050" dirty="0">
+                  <a:solidFill>
+                    <a:srgbClr val="E0E0E0"/>
+                  </a:solidFill>
+                  <a:latin typeface="Consolas"/>
+                  <a:ea typeface="Microsoft YaHei"/>
+                  <a:cs typeface="Consolas"/>
+                </a:rPr>
+                <a:t>  asm volatile(                           \</a:t>
+              </a:r>
+            </a:p>
+          </p:txBody>
+        </p:sp>
+        <p:sp>
+          <p:nvSpPr>
+            <p:cNvPr id="10" name="TextBox 10"/>
+            <p:cNvSpPr txBox="1"/>
+            <p:nvPr/>
+          </p:nvSpPr>
+          <p:spPr>
+            <a:xfrm>
+              <a:off x="653415" y="2182178"/>
+              <a:ext cx="2464975" cy="213360"/>
+            </a:xfrm>
+            <a:prstGeom prst="rect">
+              <a:avLst/>
+            </a:prstGeom>
+            <a:noFill/>
+            <a:ln>
+              <a:noFill/>
+            </a:ln>
+          </p:spPr>
+          <p:txBody>
+            <a:bodyPr wrap="none" lIns="0" tIns="0" rIns="0" bIns="0" anchor="t" anchorCtr="0">
+              <a:spAutoFit/>
+            </a:bodyPr>
+            <a:lstStyle/>
+            <a:p>
+              <a:pPr algn="l"/>
+              <a:r>
+                <a:rPr lang="zh-CN" sz="1050" dirty="0">
+                  <a:solidFill>
+                    <a:srgbClr val="E0E0E0"/>
+                  </a:solidFill>
+                  <a:latin typeface="Consolas"/>
+                  <a:ea typeface="Microsoft YaHei"/>
+                  <a:cs typeface="Consolas"/>
+                </a:rPr>
+                <a:t>    ALTERNATIVE(                          \</a:t>
+              </a:r>
+            </a:p>
+          </p:txBody>
+        </p:sp>
+        <p:sp>
+          <p:nvSpPr>
+            <p:cNvPr id="11" name="TextBox 11"/>
+            <p:cNvSpPr txBox="1"/>
+            <p:nvPr/>
+          </p:nvSpPr>
+          <p:spPr>
+            <a:xfrm>
+              <a:off x="653415" y="2401252"/>
+              <a:ext cx="3262408" cy="213360"/>
+            </a:xfrm>
+            <a:prstGeom prst="rect">
+              <a:avLst/>
+            </a:prstGeom>
+            <a:noFill/>
+            <a:ln>
+              <a:noFill/>
+            </a:ln>
+          </p:spPr>
+          <p:txBody>
+            <a:bodyPr wrap="none" lIns="0" tIns="0" rIns="0" bIns="0" anchor="t" anchorCtr="0">
+              <a:spAutoFit/>
+            </a:bodyPr>
+            <a:lstStyle/>
+            <a:p>
+              <a:pPr algn="l"/>
+              <a:r>
+                <a:rPr lang="zh-CN" sz="1050" dirty="0">
+                  <a:solidFill>
+                    <a:srgbClr val="F79646"/>
+                  </a:solidFill>
+                  <a:latin typeface="Consolas"/>
+                  <a:ea typeface="Microsoft YaHei"/>
+                  <a:cs typeface="Consolas"/>
+                </a:rPr>
+                <a:t>      "mov $~0xfa1e0ff3, %[scratch]\n\t"  \</a:t>
+              </a:r>
+            </a:p>
+          </p:txBody>
+        </p:sp>
+        <p:sp>
+          <p:nvSpPr>
+            <p:cNvPr id="12" name="TextBox 12"/>
+            <p:cNvSpPr txBox="1"/>
+            <p:nvPr/>
+          </p:nvSpPr>
+          <p:spPr>
+            <a:xfrm>
+              <a:off x="653415" y="2620328"/>
+              <a:ext cx="2764012" cy="213360"/>
+            </a:xfrm>
+            <a:prstGeom prst="rect">
+              <a:avLst/>
+            </a:prstGeom>
+            <a:noFill/>
+            <a:ln>
+              <a:noFill/>
+            </a:ln>
+          </p:spPr>
+          <p:txBody>
+            <a:bodyPr wrap="none" lIns="0" tIns="0" rIns="0" bIns="0" anchor="t" anchorCtr="0">
+              <a:spAutoFit/>
+            </a:bodyPr>
+            <a:lstStyle/>
+            <a:p>
+              <a:pPr algn="l"/>
+              <a:r>
+                <a:rPr lang="zh-CN" sz="1050" dirty="0">
+                  <a:solidFill>
+                    <a:srgbClr val="F79646"/>
+                  </a:solidFill>
+                  <a:latin typeface="Consolas"/>
+                  <a:ea typeface="Microsoft YaHei"/>
+                  <a:cs typeface="Consolas"/>
+                </a:rPr>
+                <a:t>      "not %[scratch]\n\t",              \</a:t>
+              </a:r>
+            </a:p>
+          </p:txBody>
+        </p:sp>
+        <p:sp>
+          <p:nvSpPr>
+            <p:cNvPr id="13" name="TextBox 13"/>
+            <p:cNvSpPr txBox="1"/>
+            <p:nvPr/>
+          </p:nvSpPr>
+          <p:spPr>
+            <a:xfrm>
+              <a:off x="653415" y="2839402"/>
+              <a:ext cx="2112264" cy="213360"/>
+            </a:xfrm>
+            <a:prstGeom prst="rect">
+              <a:avLst/>
+            </a:prstGeom>
+            <a:noFill/>
+            <a:ln>
+              <a:noFill/>
+            </a:ln>
+          </p:spPr>
+          <p:txBody>
+            <a:bodyPr wrap="none" lIns="0" tIns="0" rIns="0" bIns="0" anchor="t" anchorCtr="0">
+              <a:spAutoFit/>
+            </a:bodyPr>
+            <a:lstStyle/>
+            <a:p>
+              <a:pPr algn="l"/>
+              <a:r>
+                <a:rPr lang="zh-CN" sz="1050" dirty="0">
+                  <a:solidFill>
+                    <a:srgbClr val="F79646"/>
+                  </a:solidFill>
+                  <a:latin typeface="Consolas"/>
+                  <a:ea typeface="Microsoft YaHei"/>
+                  <a:cs typeface="Consolas"/>
+                </a:rPr>
+                <a:t>      "",                                \</a:t>
+              </a:r>
+            </a:p>
+          </p:txBody>
+        </p:sp>
+        <p:sp>
+          <p:nvSpPr>
+            <p:cNvPr id="14" name="TextBox 14"/>
+            <p:cNvSpPr txBox="1"/>
+            <p:nvPr/>
+          </p:nvSpPr>
+          <p:spPr>
+            <a:xfrm>
+              <a:off x="653415" y="3058478"/>
+              <a:ext cx="2572321" cy="213360"/>
+            </a:xfrm>
+            <a:prstGeom prst="rect">
+              <a:avLst/>
+            </a:prstGeom>
+            <a:noFill/>
+            <a:ln>
+              <a:noFill/>
+            </a:ln>
+          </p:spPr>
+          <p:txBody>
+            <a:bodyPr wrap="none" lIns="0" tIns="0" rIns="0" bIns="0" anchor="t" anchorCtr="0">
+              <a:spAutoFit/>
+            </a:bodyPr>
+            <a:lstStyle/>
+            <a:p>
+              <a:pPr algn="l"/>
+              <a:r>
+                <a:rPr lang="zh-CN" sz="1050" dirty="0">
+                  <a:solidFill>
+                    <a:srgbClr val="E0E0E0"/>
+                  </a:solidFill>
+                  <a:latin typeface="Consolas"/>
+                  <a:ea typeface="Microsoft YaHei"/>
+                  <a:cs typeface="Consolas"/>
+                </a:rPr>
+                <a:t>      X86_FEATURE_IBT)                   \</a:t>
+              </a:r>
+            </a:p>
+          </p:txBody>
+        </p:sp>
+        <p:sp>
+          <p:nvSpPr>
+            <p:cNvPr id="15" name="TextBox 15"/>
+            <p:cNvSpPr txBox="1"/>
+            <p:nvPr/>
+          </p:nvSpPr>
+          <p:spPr>
+            <a:xfrm>
+              <a:off x="653415" y="3277552"/>
+              <a:ext cx="1146143" cy="213360"/>
+            </a:xfrm>
+            <a:prstGeom prst="rect">
+              <a:avLst/>
+            </a:prstGeom>
+            <a:noFill/>
+            <a:ln>
+              <a:noFill/>
+            </a:ln>
+          </p:spPr>
+          <p:txBody>
+            <a:bodyPr wrap="none" lIns="0" tIns="0" rIns="0" bIns="0" anchor="t" anchorCtr="0">
+              <a:spAutoFit/>
+            </a:bodyPr>
+            <a:lstStyle/>
+            <a:p>
+              <a:pPr algn="l"/>
+              <a:r>
+                <a:rPr lang="zh-CN" sz="1050" dirty="0">
+                  <a:solidFill>
+                    <a:srgbClr val="E0E0E0"/>
+                  </a:solidFill>
+                  <a:latin typeface="Consolas"/>
+                  <a:ea typeface="Microsoft YaHei"/>
+                  <a:cs typeface="Consolas"/>
+                </a:rPr>
+                <a:t>    : [scratch] </a:t>
+              </a:r>
+            </a:p>
+          </p:txBody>
+        </p:sp>
+        <p:sp>
+          <p:nvSpPr>
+            <p:cNvPr id="16" name="TextBox 16"/>
+            <p:cNvSpPr txBox="1"/>
+            <p:nvPr/>
+          </p:nvSpPr>
+          <p:spPr>
+            <a:xfrm>
+              <a:off x="2110740" y="3277552"/>
+              <a:ext cx="448389" cy="213360"/>
+            </a:xfrm>
+            <a:prstGeom prst="rect">
+              <a:avLst/>
+            </a:prstGeom>
+            <a:noFill/>
+            <a:ln>
+              <a:noFill/>
+            </a:ln>
+          </p:spPr>
+          <p:txBody>
+            <a:bodyPr wrap="none" lIns="0" tIns="0" rIns="0" bIns="0" anchor="t" anchorCtr="0">
+              <a:spAutoFit/>
+            </a:bodyPr>
+            <a:lstStyle/>
+            <a:p>
+              <a:pPr algn="l"/>
+              <a:r>
+                <a:rPr lang="zh-CN" sz="1050" dirty="0">
+                  <a:solidFill>
+                    <a:srgbClr val="F79646"/>
+                  </a:solidFill>
+                  <a:latin typeface="Consolas"/>
+                  <a:ea typeface="Microsoft YaHei"/>
+                  <a:cs typeface="Consolas"/>
+                </a:rPr>
+                <a:t>"=&amp;r"</a:t>
+              </a:r>
+            </a:p>
+          </p:txBody>
+        </p:sp>
+        <p:sp>
+          <p:nvSpPr>
+            <p:cNvPr id="17" name="TextBox 17"/>
+            <p:cNvSpPr txBox="1"/>
+            <p:nvPr/>
+          </p:nvSpPr>
+          <p:spPr>
+            <a:xfrm>
+              <a:off x="2653665" y="3277552"/>
+              <a:ext cx="1253490" cy="213360"/>
+            </a:xfrm>
+            <a:prstGeom prst="rect">
+              <a:avLst/>
+            </a:prstGeom>
+            <a:noFill/>
+            <a:ln>
+              <a:noFill/>
+            </a:ln>
+          </p:spPr>
+          <p:txBody>
+            <a:bodyPr wrap="none" lIns="0" tIns="0" rIns="0" bIns="0" anchor="t" anchorCtr="0">
+              <a:spAutoFit/>
+            </a:bodyPr>
+            <a:lstStyle/>
+            <a:p>
+              <a:pPr algn="l"/>
+              <a:r>
+                <a:rPr lang="zh-CN" sz="1050" dirty="0">
+                  <a:solidFill>
+                    <a:srgbClr val="E0E0E0"/>
+                  </a:solidFill>
+                  <a:latin typeface="Consolas"/>
+                  <a:ea typeface="Microsoft YaHei"/>
+                  <a:cs typeface="Consolas"/>
+                </a:rPr>
+                <a:t> (__junk)          \</a:t>
+              </a:r>
+            </a:p>
+          </p:txBody>
+        </p:sp>
+        <p:sp>
+          <p:nvSpPr>
+            <p:cNvPr id="18" name="TextBox 18"/>
+            <p:cNvSpPr txBox="1"/>
+            <p:nvPr/>
+          </p:nvSpPr>
+          <p:spPr>
+            <a:xfrm>
+              <a:off x="653415" y="3496628"/>
+              <a:ext cx="2035588" cy="213360"/>
+            </a:xfrm>
+            <a:prstGeom prst="rect">
+              <a:avLst/>
+            </a:prstGeom>
+            <a:noFill/>
+            <a:ln>
+              <a:noFill/>
+            </a:ln>
+          </p:spPr>
+          <p:txBody>
+            <a:bodyPr wrap="none" lIns="0" tIns="0" rIns="0" bIns="0" anchor="t" anchorCtr="0">
+              <a:spAutoFit/>
+            </a:bodyPr>
+            <a:lstStyle/>
+            <a:p>
+              <a:pPr algn="l"/>
+              <a:r>
+                <a:rPr lang="zh-CN" sz="1050" dirty="0">
+                  <a:solidFill>
+                    <a:srgbClr val="E0E0E0"/>
+                  </a:solidFill>
+                  <a:latin typeface="Consolas"/>
+                  <a:ea typeface="Microsoft YaHei"/>
+                  <a:cs typeface="Consolas"/>
+                </a:rPr>
+                <a:t>    :                                    \</a:t>
+              </a:r>
+            </a:p>
+          </p:txBody>
+        </p:sp>
+        <p:sp>
+          <p:nvSpPr>
+            <p:cNvPr id="19" name="TextBox 19"/>
+            <p:cNvSpPr txBox="1"/>
+            <p:nvPr/>
+          </p:nvSpPr>
+          <p:spPr>
+            <a:xfrm>
+              <a:off x="653415" y="3715702"/>
+              <a:ext cx="341043" cy="213360"/>
+            </a:xfrm>
+            <a:prstGeom prst="rect">
+              <a:avLst/>
+            </a:prstGeom>
+            <a:noFill/>
+            <a:ln>
+              <a:noFill/>
+            </a:ln>
+          </p:spPr>
+          <p:txBody>
+            <a:bodyPr wrap="none" lIns="0" tIns="0" rIns="0" bIns="0" anchor="t" anchorCtr="0">
+              <a:spAutoFit/>
+            </a:bodyPr>
+            <a:lstStyle/>
+            <a:p>
+              <a:pPr algn="l"/>
+              <a:r>
+                <a:rPr lang="zh-CN" sz="1050" dirty="0">
+                  <a:solidFill>
+                    <a:srgbClr val="E0E0E0"/>
+                  </a:solidFill>
+                  <a:latin typeface="Consolas"/>
+                  <a:ea typeface="Microsoft YaHei"/>
+                  <a:cs typeface="Consolas"/>
+                </a:rPr>
+                <a:t>    : </a:t>
+              </a:r>
+            </a:p>
+          </p:txBody>
+        </p:sp>
+        <p:sp>
+          <p:nvSpPr>
+            <p:cNvPr id="20" name="TextBox 20"/>
+            <p:cNvSpPr txBox="1"/>
+            <p:nvPr/>
+          </p:nvSpPr>
+          <p:spPr>
+            <a:xfrm>
+              <a:off x="1062990" y="3715702"/>
+              <a:ext cx="762762" cy="213360"/>
+            </a:xfrm>
+            <a:prstGeom prst="rect">
+              <a:avLst/>
+            </a:prstGeom>
+            <a:noFill/>
+            <a:ln>
+              <a:noFill/>
+            </a:ln>
+          </p:spPr>
+          <p:txBody>
+            <a:bodyPr wrap="none" lIns="0" tIns="0" rIns="0" bIns="0" anchor="t" anchorCtr="0">
+              <a:spAutoFit/>
+            </a:bodyPr>
+            <a:lstStyle/>
+            <a:p>
+              <a:pPr algn="l"/>
+              <a:r>
+                <a:rPr lang="zh-CN" sz="1050" dirty="0">
+                  <a:solidFill>
+                    <a:srgbClr val="F79646"/>
+                  </a:solidFill>
+                  <a:latin typeface="Consolas"/>
+                  <a:ea typeface="Microsoft YaHei"/>
+                  <a:cs typeface="Consolas"/>
+                </a:rPr>
+                <a:t>"memory"</a:t>
+              </a:r>
+            </a:p>
+          </p:txBody>
+        </p:sp>
+        <p:sp>
+          <p:nvSpPr>
+            <p:cNvPr id="21" name="TextBox 21"/>
+            <p:cNvSpPr txBox="1"/>
+            <p:nvPr/>
+          </p:nvSpPr>
+          <p:spPr>
+            <a:xfrm>
+              <a:off x="1796415" y="3715702"/>
+              <a:ext cx="195358" cy="213360"/>
+            </a:xfrm>
+            <a:prstGeom prst="rect">
+              <a:avLst/>
+            </a:prstGeom>
+            <a:noFill/>
+            <a:ln>
+              <a:noFill/>
+            </a:ln>
+          </p:spPr>
+          <p:txBody>
+            <a:bodyPr wrap="none" lIns="0" tIns="0" rIns="0" bIns="0" anchor="t" anchorCtr="0">
+              <a:spAutoFit/>
+            </a:bodyPr>
+            <a:lstStyle/>
+            <a:p>
+              <a:pPr algn="l"/>
+              <a:r>
+                <a:rPr lang="zh-CN" sz="1050" dirty="0">
+                  <a:solidFill>
+                    <a:srgbClr val="E0E0E0"/>
+                  </a:solidFill>
+                  <a:latin typeface="Consolas"/>
+                  <a:ea typeface="Microsoft YaHei"/>
+                  <a:cs typeface="Consolas"/>
+                </a:rPr>
+                <a:t>);</a:t>
+              </a:r>
+            </a:p>
+          </p:txBody>
+        </p:sp>
+        <p:sp>
+          <p:nvSpPr>
+            <p:cNvPr id="22" name="TextBox 22"/>
+            <p:cNvSpPr txBox="1"/>
+            <p:nvPr/>
+          </p:nvSpPr>
+          <p:spPr>
+            <a:xfrm>
+              <a:off x="653415" y="4077652"/>
+              <a:ext cx="3837480" cy="213360"/>
+            </a:xfrm>
+            <a:prstGeom prst="rect">
+              <a:avLst/>
+            </a:prstGeom>
+            <a:noFill/>
+            <a:ln>
+              <a:noFill/>
+            </a:ln>
+          </p:spPr>
+          <p:txBody>
+            <a:bodyPr wrap="none" lIns="0" tIns="0" rIns="0" bIns="0" anchor="t" anchorCtr="0">
+              <a:spAutoFit/>
+            </a:bodyPr>
+            <a:lstStyle/>
+            <a:p>
+              <a:pPr algn="l"/>
+              <a:r>
+                <a:rPr lang="zh-CN" sz="1050" dirty="0">
+                  <a:solidFill>
+                    <a:srgbClr val="6A9955"/>
+                  </a:solidFill>
+                  <a:latin typeface="Consolas"/>
+                  <a:ea typeface="Microsoft YaHei"/>
+                  <a:cs typeface="Consolas"/>
+                </a:rPr>
+                <a:t>/* On non-IBT CPUs: ALTERNATIVE patches to NOP */</a:t>
+              </a:r>
+            </a:p>
+          </p:txBody>
+        </p:sp>
+        <p:sp>
+          <p:nvSpPr>
+            <p:cNvPr id="23" name="TextBox 23"/>
+            <p:cNvSpPr txBox="1"/>
+            <p:nvPr/>
+          </p:nvSpPr>
+          <p:spPr>
+            <a:xfrm>
+              <a:off x="653415" y="4296728"/>
+              <a:ext cx="3960162" cy="213360"/>
+            </a:xfrm>
+            <a:prstGeom prst="rect">
+              <a:avLst/>
+            </a:prstGeom>
+            <a:noFill/>
+            <a:ln>
+              <a:noFill/>
+            </a:ln>
+          </p:spPr>
+          <p:txBody>
+            <a:bodyPr wrap="none" lIns="0" tIns="0" rIns="0" bIns="0" anchor="t" anchorCtr="0">
+              <a:spAutoFit/>
+            </a:bodyPr>
+            <a:lstStyle/>
+            <a:p>
+              <a:pPr algn="l"/>
+              <a:r>
+                <a:rPr lang="zh-CN" sz="1050" dirty="0">
+                  <a:solidFill>
+                    <a:srgbClr val="6A9955"/>
+                  </a:solidFill>
+                  <a:latin typeface="Consolas"/>
+                  <a:ea typeface="Microsoft YaHei"/>
+                  <a:cs typeface="Consolas"/>
+                </a:rPr>
+                <a:t>/* On IBT CPUs: mov+not produces ENDBR64 opcode */</a:t>
+              </a:r>
+            </a:p>
+          </p:txBody>
+        </p:sp>
+        <p:sp>
+          <p:nvSpPr>
+            <p:cNvPr id="24" name="Rectangle 24"/>
+            <p:cNvSpPr/>
+            <p:nvPr/>
+          </p:nvSpPr>
+          <p:spPr>
+            <a:xfrm>
+              <a:off x="7429500" y="1333500"/>
+              <a:ext cx="4286250" cy="666750"/>
+            </a:xfrm>
+            <a:prstGeom prst="roundRect">
+              <a:avLst>
+                <a:gd name="adj" fmla="val 8571"/>
+              </a:avLst>
+            </a:prstGeom>
+            <a:solidFill>
+              <a:srgbClr val="F0FDF9"/>
+            </a:solidFill>
+            <a:ln w="14288">
+              <a:solidFill>
+                <a:srgbClr val="0AB36E"/>
+              </a:solidFill>
+            </a:ln>
+          </p:spPr>
+        </p:sp>
+        <p:grpSp>
+          <p:nvGrpSpPr>
+            <p:cNvPr id="28" name="Group 28"/>
+            <p:cNvGrpSpPr/>
+            <p:nvPr/>
+          </p:nvGrpSpPr>
+          <p:grpSpPr>
+            <a:xfrm>
+              <a:off x="7600950" y="1514475"/>
+              <a:ext cx="171450" cy="152400"/>
+              <a:chOff x="7600950" y="1514475"/>
+              <a:chExt cx="171450" cy="152400"/>
+            </a:xfrm>
+          </p:grpSpPr>
+          <p:sp>
+            <p:nvSpPr>
+              <p:cNvPr id="25" name="Freeform 25"/>
+              <p:cNvSpPr/>
+              <p:nvPr/>
+            </p:nvSpPr>
+            <p:spPr>
+              <a:xfrm>
+                <a:off x="7600950" y="1552575"/>
+                <a:ext cx="38100" cy="76200"/>
+              </a:xfrm>
+              <a:custGeom>
+                <a:avLst/>
+                <a:gdLst/>
+                <a:ahLst/>
+                <a:cxnLst/>
+                <a:rect l="l" t="t" r="r" b="b"/>
+                <a:pathLst>
+                  <a:path w="38100" h="76200">
+                    <a:moveTo>
+                      <a:pt x="38100" y="0"/>
+                    </a:moveTo>
+                    <a:lnTo>
+                      <a:pt x="0" y="38100"/>
+                    </a:lnTo>
+                    <a:lnTo>
+                      <a:pt x="38100" y="76200"/>
+                    </a:lnTo>
+                  </a:path>
+                </a:pathLst>
+              </a:custGeom>
+              <a:noFill/>
+              <a:ln w="19050">
+                <a:solidFill>
+                  <a:srgbClr val="0AB36E"/>
+                </a:solidFill>
+              </a:ln>
+            </p:spPr>
+          </p:sp>
+          <p:sp>
+            <p:nvSpPr>
+              <p:cNvPr id="26" name="Freeform 26"/>
+              <p:cNvSpPr/>
+              <p:nvPr/>
+            </p:nvSpPr>
+            <p:spPr>
+              <a:xfrm>
+                <a:off x="7734300" y="1552575"/>
+                <a:ext cx="38100" cy="76200"/>
+              </a:xfrm>
+              <a:custGeom>
+                <a:avLst/>
+                <a:gdLst/>
+                <a:ahLst/>
+                <a:cxnLst/>
+                <a:rect l="l" t="t" r="r" b="b"/>
+                <a:pathLst>
+                  <a:path w="38100" h="76200">
+                    <a:moveTo>
+                      <a:pt x="0" y="0"/>
+                    </a:moveTo>
+                    <a:lnTo>
+                      <a:pt x="38100" y="38100"/>
+                    </a:lnTo>
+                    <a:lnTo>
+                      <a:pt x="0" y="76200"/>
+                    </a:lnTo>
+                  </a:path>
+                </a:pathLst>
+              </a:custGeom>
+              <a:noFill/>
+              <a:ln w="19050">
+                <a:solidFill>
+                  <a:srgbClr val="0AB36E"/>
+                </a:solidFill>
+              </a:ln>
+            </p:spPr>
+          </p:sp>
+          <p:sp>
+            <p:nvSpPr>
+              <p:cNvPr id="27" name="Freeform 27"/>
+              <p:cNvSpPr/>
+              <p:nvPr/>
+            </p:nvSpPr>
+            <p:spPr>
+              <a:xfrm>
+                <a:off x="7667625" y="1514475"/>
+                <a:ext cx="38100" cy="152400"/>
+              </a:xfrm>
+              <a:custGeom>
+                <a:avLst/>
+                <a:gdLst/>
+                <a:ahLst/>
+                <a:cxnLst/>
+                <a:rect l="l" t="t" r="r" b="b"/>
+                <a:pathLst>
+                  <a:path w="38100" h="152400">
+                    <a:moveTo>
+                      <a:pt x="38100" y="0"/>
+                    </a:moveTo>
+                    <a:lnTo>
+                      <a:pt x="0" y="152400"/>
+                    </a:lnTo>
+                  </a:path>
+                </a:pathLst>
+              </a:custGeom>
+              <a:noFill/>
+              <a:ln w="19050">
+                <a:solidFill>
+                  <a:srgbClr val="0AB36E"/>
+                </a:solidFill>
+              </a:ln>
+            </p:spPr>
+          </p:sp>
+        </p:grpSp>
+        <p:sp>
+          <p:nvSpPr>
+            <p:cNvPr id="29" name="TextBox 29"/>
+            <p:cNvSpPr txBox="1"/>
+            <p:nvPr/>
+          </p:nvSpPr>
+          <p:spPr>
+            <a:xfrm>
+              <a:off x="7873365" y="1505902"/>
+              <a:ext cx="1773738" cy="213360"/>
+            </a:xfrm>
+            <a:prstGeom prst="rect">
+              <a:avLst/>
+            </a:prstGeom>
+            <a:noFill/>
+            <a:ln>
+              <a:noFill/>
+            </a:ln>
+          </p:spPr>
+          <p:txBody>
+            <a:bodyPr wrap="none" lIns="0" tIns="0" rIns="0" bIns="0" anchor="t" anchorCtr="0">
+              <a:spAutoFit/>
+            </a:bodyPr>
+            <a:lstStyle/>
+            <a:p>
+              <a:pPr algn="l"/>
+              <a:r>
+                <a:rPr lang="zh-CN" sz="1050" b="1" dirty="0">
+                  <a:solidFill>
+                    <a:srgbClr val="0AB36E"/>
+                  </a:solidFill>
+                  <a:latin typeface="Arial"/>
+                  <a:ea typeface="Microsoft YaHei"/>
+                  <a:cs typeface="Arial"/>
+                </a:rPr>
+                <a:t>MOV loads bitwise NOT</a:t>
+              </a:r>
+            </a:p>
+          </p:txBody>
+        </p:sp>
+        <p:sp>
+          <p:nvSpPr>
+            <p:cNvPr id="30" name="TextBox 30"/>
+            <p:cNvSpPr txBox="1"/>
+            <p:nvPr/>
+          </p:nvSpPr>
+          <p:spPr>
+            <a:xfrm>
+              <a:off x="7559992" y="1752124"/>
+              <a:ext cx="1762030" cy="198120"/>
+            </a:xfrm>
+            <a:prstGeom prst="rect">
+              <a:avLst/>
+            </a:prstGeom>
+            <a:noFill/>
+            <a:ln>
+              <a:noFill/>
+            </a:ln>
+          </p:spPr>
+          <p:txBody>
+            <a:bodyPr wrap="none" lIns="0" tIns="0" rIns="0" bIns="0" anchor="t" anchorCtr="0">
+              <a:spAutoFit/>
+            </a:bodyPr>
+            <a:lstStyle/>
+            <a:p>
+              <a:pPr algn="l"/>
+              <a:r>
+                <a:rPr lang="zh-CN" sz="975" dirty="0">
+                  <a:solidFill>
+                    <a:srgbClr val="333333"/>
+                  </a:solidFill>
+                  <a:latin typeface="Consolas"/>
+                  <a:ea typeface="Microsoft YaHei"/>
+                  <a:cs typeface="Consolas"/>
+                </a:rPr>
+                <a:t>~0xfa1e0ff3 = 0x05e1f00c</a:t>
+              </a:r>
+            </a:p>
+          </p:txBody>
+        </p:sp>
+        <p:sp>
+          <p:nvSpPr>
+            <p:cNvPr id="31" name="Rectangle 31"/>
+            <p:cNvSpPr/>
+            <p:nvPr/>
+          </p:nvSpPr>
+          <p:spPr>
+            <a:xfrm>
+              <a:off x="7429500" y="2143125"/>
+              <a:ext cx="4286250" cy="666750"/>
+            </a:xfrm>
+            <a:prstGeom prst="roundRect">
+              <a:avLst>
+                <a:gd name="adj" fmla="val 8571"/>
+              </a:avLst>
+            </a:prstGeom>
+            <a:solidFill>
+              <a:srgbClr val="F0FDF9"/>
+            </a:solidFill>
+            <a:ln w="14288">
+              <a:solidFill>
+                <a:srgbClr val="0AB36E"/>
+              </a:solidFill>
+            </a:ln>
+          </p:spPr>
+        </p:sp>
+        <p:grpSp>
+          <p:nvGrpSpPr>
+            <p:cNvPr id="34" name="Group 34"/>
+            <p:cNvGrpSpPr/>
+            <p:nvPr/>
+          </p:nvGrpSpPr>
+          <p:grpSpPr>
+            <a:xfrm>
+              <a:off x="7610475" y="2320425"/>
+              <a:ext cx="152400" cy="159750"/>
+              <a:chOff x="7610475" y="2320425"/>
+              <a:chExt cx="152400" cy="159750"/>
+            </a:xfrm>
+          </p:grpSpPr>
+          <p:sp>
+            <p:nvSpPr>
+              <p:cNvPr id="32" name="Freeform 32"/>
+              <p:cNvSpPr/>
+              <p:nvPr/>
+            </p:nvSpPr>
+            <p:spPr>
+              <a:xfrm>
+                <a:off x="7610475" y="2320425"/>
+                <a:ext cx="152400" cy="70350"/>
+              </a:xfrm>
+              <a:custGeom>
+                <a:avLst/>
+                <a:gdLst/>
+                <a:ahLst/>
+                <a:cxnLst/>
+                <a:rect l="l" t="t" r="r" b="b"/>
+                <a:pathLst>
+                  <a:path w="152400" h="70350">
+                    <a:moveTo>
+                      <a:pt x="152400" y="70350"/>
+                    </a:moveTo>
+                    <a:cubicBezTo>
+                      <a:pt x="147612" y="35894"/>
+                      <a:pt x="120357" y="8904"/>
+                      <a:pt x="85855" y="4452"/>
+                    </a:cubicBezTo>
+                    <a:cubicBezTo>
+                      <a:pt x="51354" y="0"/>
+                      <a:pt x="18140" y="19188"/>
+                      <a:pt x="4762" y="51300"/>
+                    </a:cubicBezTo>
+                    <a:moveTo>
+                      <a:pt x="0" y="13200"/>
+                    </a:moveTo>
+                    <a:lnTo>
+                      <a:pt x="0" y="51300"/>
+                    </a:lnTo>
+                    <a:lnTo>
+                      <a:pt x="38100" y="51300"/>
+                    </a:lnTo>
+                  </a:path>
+                </a:pathLst>
+              </a:custGeom>
+              <a:noFill/>
+              <a:ln w="19050">
+                <a:solidFill>
+                  <a:srgbClr val="0AB36E"/>
+                </a:solidFill>
+              </a:ln>
+            </p:spPr>
+          </p:sp>
+          <p:sp>
+            <p:nvSpPr>
+              <p:cNvPr id="33" name="Freeform 33"/>
+              <p:cNvSpPr/>
+              <p:nvPr/>
+            </p:nvSpPr>
+            <p:spPr>
+              <a:xfrm>
+                <a:off x="7610475" y="2409825"/>
+                <a:ext cx="152400" cy="70350"/>
+              </a:xfrm>
+              <a:custGeom>
+                <a:avLst/>
+                <a:gdLst/>
+                <a:ahLst/>
+                <a:cxnLst/>
+                <a:rect l="l" t="t" r="r" b="b"/>
+                <a:pathLst>
+                  <a:path w="152400" h="70350">
+                    <a:moveTo>
+                      <a:pt x="0" y="0"/>
+                    </a:moveTo>
+                    <a:cubicBezTo>
+                      <a:pt x="4788" y="34456"/>
+                      <a:pt x="32043" y="61446"/>
+                      <a:pt x="66545" y="65898"/>
+                    </a:cubicBezTo>
+                    <a:cubicBezTo>
+                      <a:pt x="101046" y="70350"/>
+                      <a:pt x="134260" y="51162"/>
+                      <a:pt x="147638" y="19050"/>
+                    </a:cubicBezTo>
+                    <a:moveTo>
+                      <a:pt x="152400" y="57150"/>
+                    </a:moveTo>
+                    <a:lnTo>
+                      <a:pt x="152400" y="19050"/>
+                    </a:lnTo>
+                    <a:lnTo>
+                      <a:pt x="114300" y="19050"/>
+                    </a:lnTo>
+                  </a:path>
+                </a:pathLst>
+              </a:custGeom>
+              <a:noFill/>
+              <a:ln w="19050">
+                <a:solidFill>
+                  <a:srgbClr val="0AB36E"/>
+                </a:solidFill>
+              </a:ln>
+            </p:spPr>
+          </p:sp>
+        </p:grpSp>
+        <p:sp>
+          <p:nvSpPr>
+            <p:cNvPr id="35" name="TextBox 35"/>
+            <p:cNvSpPr txBox="1"/>
+            <p:nvPr/>
+          </p:nvSpPr>
+          <p:spPr>
+            <a:xfrm>
+              <a:off x="7873365" y="2315528"/>
+              <a:ext cx="1500004" cy="213360"/>
+            </a:xfrm>
+            <a:prstGeom prst="rect">
+              <a:avLst/>
+            </a:prstGeom>
+            <a:noFill/>
+            <a:ln>
+              <a:noFill/>
+            </a:ln>
+          </p:spPr>
+          <p:txBody>
+            <a:bodyPr wrap="none" lIns="0" tIns="0" rIns="0" bIns="0" anchor="t" anchorCtr="0">
+              <a:spAutoFit/>
+            </a:bodyPr>
+            <a:lstStyle/>
+            <a:p>
+              <a:pPr algn="l"/>
+              <a:r>
+                <a:rPr lang="zh-CN" sz="1050" b="1" dirty="0">
+                  <a:solidFill>
+                    <a:srgbClr val="0AB36E"/>
+                  </a:solidFill>
+                  <a:latin typeface="Arial"/>
+                  <a:ea typeface="Microsoft YaHei"/>
+                  <a:cs typeface="Arial"/>
+                </a:rPr>
+                <a:t>NOT flips bits back</a:t>
+              </a:r>
+            </a:p>
+          </p:txBody>
+        </p:sp>
+        <p:sp>
+          <p:nvSpPr>
+            <p:cNvPr id="36" name="TextBox 36"/>
+            <p:cNvSpPr txBox="1"/>
+            <p:nvPr/>
+          </p:nvSpPr>
+          <p:spPr>
+            <a:xfrm>
+              <a:off x="7559992" y="2561749"/>
+              <a:ext cx="2815781" cy="198120"/>
+            </a:xfrm>
+            <a:prstGeom prst="rect">
+              <a:avLst/>
+            </a:prstGeom>
+            <a:noFill/>
+            <a:ln>
+              <a:noFill/>
+            </a:ln>
+          </p:spPr>
+          <p:txBody>
+            <a:bodyPr wrap="none" lIns="0" tIns="0" rIns="0" bIns="0" anchor="t" anchorCtr="0">
+              <a:spAutoFit/>
+            </a:bodyPr>
+            <a:lstStyle/>
+            <a:p>
+              <a:pPr algn="l"/>
+              <a:r>
+                <a:rPr lang="zh-CN" sz="975" dirty="0">
+                  <a:solidFill>
+                    <a:srgbClr val="333333"/>
+                  </a:solidFill>
+                  <a:latin typeface="Consolas"/>
+                  <a:ea typeface="Microsoft YaHei"/>
+                  <a:cs typeface="Consolas"/>
+                </a:rPr>
+                <a:t>NOT(0x05e1f00c) = 0xfa1e0ff3 = ENDBR64</a:t>
+              </a:r>
+            </a:p>
+          </p:txBody>
+        </p:sp>
+        <p:sp>
+          <p:nvSpPr>
+            <p:cNvPr id="37" name="Rectangle 37"/>
+            <p:cNvSpPr/>
+            <p:nvPr/>
+          </p:nvSpPr>
+          <p:spPr>
+            <a:xfrm>
+              <a:off x="7429500" y="2952750"/>
+              <a:ext cx="4286250" cy="666750"/>
+            </a:xfrm>
+            <a:prstGeom prst="roundRect">
+              <a:avLst>
+                <a:gd name="adj" fmla="val 8571"/>
+              </a:avLst>
+            </a:prstGeom>
+            <a:solidFill>
+              <a:srgbClr val="FEF2F2"/>
+            </a:solidFill>
+            <a:ln w="14288">
+              <a:solidFill>
+                <a:srgbClr val="EF4444"/>
+              </a:solidFill>
+            </a:ln>
+          </p:spPr>
+        </p:sp>
+        <p:grpSp>
+          <p:nvGrpSpPr>
+            <p:cNvPr id="41" name="Group 41"/>
+            <p:cNvGrpSpPr/>
+            <p:nvPr/>
+          </p:nvGrpSpPr>
+          <p:grpSpPr>
+            <a:xfrm>
+              <a:off x="7596983" y="3124200"/>
+              <a:ext cx="179383" cy="171450"/>
+              <a:chOff x="7596983" y="3124200"/>
+              <a:chExt cx="179383" cy="171450"/>
+            </a:xfrm>
+          </p:grpSpPr>
+          <p:sp>
+            <p:nvSpPr>
+              <p:cNvPr id="38" name="Freeform 38"/>
+              <p:cNvSpPr/>
+              <p:nvPr/>
+            </p:nvSpPr>
+            <p:spPr>
+              <a:xfrm>
+                <a:off x="7596983" y="3124200"/>
+                <a:ext cx="179383" cy="171450"/>
+              </a:xfrm>
+              <a:custGeom>
+                <a:avLst/>
+                <a:gdLst/>
+                <a:ahLst/>
+                <a:cxnLst/>
+                <a:rect l="l" t="t" r="r" b="b"/>
+                <a:pathLst>
+                  <a:path w="179383" h="171450">
+                    <a:moveTo>
+                      <a:pt x="89692" y="0"/>
+                    </a:moveTo>
+                    <a:cubicBezTo>
+                      <a:pt x="111940" y="19684"/>
+                      <a:pt x="140979" y="29933"/>
+                      <a:pt x="170654" y="28575"/>
+                    </a:cubicBezTo>
+                    <a:cubicBezTo>
+                      <a:pt x="179383" y="58269"/>
+                      <a:pt x="175697" y="90235"/>
+                      <a:pt x="160438" y="117163"/>
+                    </a:cubicBezTo>
+                    <a:cubicBezTo>
+                      <a:pt x="145178" y="144091"/>
+                      <a:pt x="119651" y="163679"/>
+                      <a:pt x="89692" y="171450"/>
+                    </a:cubicBezTo>
+                    <a:cubicBezTo>
+                      <a:pt x="59732" y="163679"/>
+                      <a:pt x="34205" y="144091"/>
+                      <a:pt x="18946" y="117163"/>
+                    </a:cubicBezTo>
+                    <a:cubicBezTo>
+                      <a:pt x="3686" y="90235"/>
+                      <a:pt x="0" y="58269"/>
+                      <a:pt x="8729" y="28575"/>
+                    </a:cubicBezTo>
+                    <a:cubicBezTo>
+                      <a:pt x="38405" y="29933"/>
+                      <a:pt x="67443" y="19684"/>
+                      <a:pt x="89692" y="0"/>
+                    </a:cubicBezTo>
+                  </a:path>
+                </a:pathLst>
+              </a:custGeom>
+              <a:noFill/>
+              <a:ln w="19050">
+                <a:solidFill>
+                  <a:srgbClr val="EF4444"/>
+                </a:solidFill>
+              </a:ln>
+            </p:spPr>
+          </p:sp>
+          <p:sp>
+            <p:nvSpPr>
+              <p:cNvPr id="39" name="Freeform 39"/>
+              <p:cNvSpPr/>
+              <p:nvPr/>
+            </p:nvSpPr>
+            <p:spPr>
+              <a:xfrm>
+                <a:off x="7677150" y="3190875"/>
+                <a:ext cx="19050" cy="19050"/>
+              </a:xfrm>
+              <a:custGeom>
+                <a:avLst/>
+                <a:gdLst/>
+                <a:ahLst/>
+                <a:cxnLst/>
+                <a:rect l="l" t="t" r="r" b="b"/>
+                <a:pathLst>
+                  <a:path w="19050" h="19050">
+                    <a:moveTo>
+                      <a:pt x="0" y="9525"/>
+                    </a:moveTo>
+                    <a:cubicBezTo>
+                      <a:pt x="0" y="14786"/>
+                      <a:pt x="4264" y="19050"/>
+                      <a:pt x="9525" y="19050"/>
+                    </a:cubicBezTo>
+                    <a:cubicBezTo>
+                      <a:pt x="14786" y="19050"/>
+                      <a:pt x="19050" y="14786"/>
+                      <a:pt x="19050" y="9525"/>
+                    </a:cubicBezTo>
+                    <a:cubicBezTo>
+                      <a:pt x="19050" y="4264"/>
+                      <a:pt x="14786" y="0"/>
+                      <a:pt x="9525" y="0"/>
+                    </a:cubicBezTo>
+                    <a:cubicBezTo>
+                      <a:pt x="4264" y="0"/>
+                      <a:pt x="0" y="4264"/>
+                      <a:pt x="0" y="9525"/>
+                    </a:cubicBezTo>
+                  </a:path>
+                </a:pathLst>
+              </a:custGeom>
+              <a:noFill/>
+              <a:ln w="19050">
+                <a:solidFill>
+                  <a:srgbClr val="EF4444"/>
+                </a:solidFill>
+              </a:ln>
+            </p:spPr>
+          </p:sp>
+          <p:sp>
+            <p:nvSpPr>
+              <p:cNvPr id="40" name="Freeform 40"/>
+              <p:cNvSpPr/>
+              <p:nvPr/>
+            </p:nvSpPr>
+            <p:spPr>
+              <a:xfrm>
+                <a:off x="7686675" y="3209925"/>
+                <a:ext cx="9525" cy="23812"/>
+              </a:xfrm>
+              <a:custGeom>
+                <a:avLst/>
+                <a:gdLst/>
+                <a:ahLst/>
+                <a:cxnLst/>
+                <a:rect l="l" t="t" r="r" b="b"/>
+                <a:pathLst>
+                  <a:path w="9525" h="23812">
+                    <a:moveTo>
+                      <a:pt x="0" y="0"/>
+                    </a:moveTo>
+                    <a:lnTo>
+                      <a:pt x="0" y="23812"/>
+                    </a:lnTo>
+                  </a:path>
+                </a:pathLst>
+              </a:custGeom>
+              <a:noFill/>
+              <a:ln w="19050">
+                <a:solidFill>
+                  <a:srgbClr val="EF4444"/>
+                </a:solidFill>
+              </a:ln>
+            </p:spPr>
+          </p:sp>
+        </p:grpSp>
+        <p:sp>
+          <p:nvSpPr>
+            <p:cNvPr id="42" name="TextBox 42"/>
+            <p:cNvSpPr txBox="1"/>
+            <p:nvPr/>
+          </p:nvSpPr>
+          <p:spPr>
+            <a:xfrm>
+              <a:off x="7873365" y="3125152"/>
+              <a:ext cx="1644922" cy="213360"/>
+            </a:xfrm>
+            <a:prstGeom prst="rect">
+              <a:avLst/>
+            </a:prstGeom>
+            <a:noFill/>
+            <a:ln>
+              <a:noFill/>
+            </a:ln>
+          </p:spPr>
+          <p:txBody>
+            <a:bodyPr wrap="none" lIns="0" tIns="0" rIns="0" bIns="0" anchor="t" anchorCtr="0">
+              <a:spAutoFit/>
+            </a:bodyPr>
+            <a:lstStyle/>
+            <a:p>
+              <a:pPr algn="l"/>
+              <a:r>
+                <a:rPr lang="zh-CN" sz="1050" b="1" dirty="0">
+                  <a:solidFill>
+                    <a:srgbClr val="EF4444"/>
+                  </a:solidFill>
+                  <a:latin typeface="Arial"/>
+                  <a:ea typeface="Microsoft YaHei"/>
+                  <a:cs typeface="Arial"/>
+                </a:rPr>
+                <a:t>Why not direct MOV?</a:t>
+              </a:r>
+            </a:p>
+          </p:txBody>
+        </p:sp>
+        <p:sp>
+          <p:nvSpPr>
+            <p:cNvPr id="43" name="TextBox 43"/>
+            <p:cNvSpPr txBox="1"/>
+            <p:nvPr/>
+          </p:nvSpPr>
+          <p:spPr>
+            <a:xfrm>
+              <a:off x="7559992" y="3371374"/>
+              <a:ext cx="3577614" cy="198120"/>
+            </a:xfrm>
+            <a:prstGeom prst="rect">
+              <a:avLst/>
+            </a:prstGeom>
+            <a:noFill/>
+            <a:ln>
+              <a:noFill/>
+            </a:ln>
+          </p:spPr>
+          <p:txBody>
+            <a:bodyPr wrap="none" lIns="0" tIns="0" rIns="0" bIns="0" anchor="t" anchorCtr="0">
+              <a:spAutoFit/>
+            </a:bodyPr>
+            <a:lstStyle/>
+            <a:p>
+              <a:pPr algn="l"/>
+              <a:r>
+                <a:rPr lang="zh-CN" sz="975" dirty="0">
+                  <a:solidFill>
+                    <a:srgbClr val="555555"/>
+                  </a:solidFill>
+                  <a:latin typeface="Arial"/>
+                  <a:ea typeface="Microsoft YaHei"/>
+                  <a:cs typeface="Arial"/>
+                </a:rPr>
+                <a:t>Direct encoding would create ENDBR gadget in .text</a:t>
+              </a:r>
+            </a:p>
+          </p:txBody>
+        </p:sp>
+        <p:sp>
+          <p:nvSpPr>
+            <p:cNvPr id="44" name="Rectangle 44"/>
+            <p:cNvSpPr/>
+            <p:nvPr/>
+          </p:nvSpPr>
+          <p:spPr>
+            <a:xfrm>
+              <a:off x="7429500" y="3762375"/>
+              <a:ext cx="4286250" cy="666750"/>
+            </a:xfrm>
+            <a:prstGeom prst="roundRect">
+              <a:avLst>
+                <a:gd name="adj" fmla="val 8571"/>
+              </a:avLst>
+            </a:prstGeom>
+            <a:solidFill>
+              <a:srgbClr val="FAF5FF"/>
+            </a:solidFill>
+            <a:ln w="14288">
+              <a:solidFill>
+                <a:srgbClr val="AF00C0"/>
+              </a:solidFill>
+            </a:ln>
+          </p:spPr>
+        </p:sp>
+        <p:grpSp>
+          <p:nvGrpSpPr>
+            <p:cNvPr id="47" name="Group 47"/>
+            <p:cNvGrpSpPr/>
+            <p:nvPr/>
+          </p:nvGrpSpPr>
+          <p:grpSpPr>
+            <a:xfrm>
+              <a:off x="7596188" y="3943350"/>
+              <a:ext cx="180975" cy="152400"/>
+              <a:chOff x="7596188" y="3943350"/>
+              <a:chExt cx="180975" cy="152400"/>
+            </a:xfrm>
+          </p:grpSpPr>
+          <p:sp>
+            <p:nvSpPr>
+              <p:cNvPr id="45" name="Freeform 45"/>
+              <p:cNvSpPr/>
+              <p:nvPr/>
+            </p:nvSpPr>
+            <p:spPr>
+              <a:xfrm>
+                <a:off x="7596188" y="3943350"/>
+                <a:ext cx="180975" cy="152400"/>
+              </a:xfrm>
+              <a:custGeom>
+                <a:avLst/>
+                <a:gdLst/>
+                <a:ahLst/>
+                <a:cxnLst/>
+                <a:rect l="l" t="t" r="r" b="b"/>
+                <a:pathLst>
+                  <a:path w="180975" h="152400">
+                    <a:moveTo>
+                      <a:pt x="23812" y="0"/>
+                    </a:moveTo>
+                    <a:cubicBezTo>
+                      <a:pt x="0" y="47625"/>
+                      <a:pt x="0" y="95250"/>
+                      <a:pt x="23812" y="152400"/>
+                    </a:cubicBezTo>
+                    <a:moveTo>
+                      <a:pt x="157162" y="0"/>
+                    </a:moveTo>
+                    <a:cubicBezTo>
+                      <a:pt x="180975" y="47625"/>
+                      <a:pt x="180975" y="95250"/>
+                      <a:pt x="157162" y="152400"/>
+                    </a:cubicBezTo>
+                    <a:moveTo>
+                      <a:pt x="61912" y="47625"/>
+                    </a:moveTo>
+                    <a:lnTo>
+                      <a:pt x="71438" y="47625"/>
+                    </a:lnTo>
+                    <a:cubicBezTo>
+                      <a:pt x="80962" y="47625"/>
+                      <a:pt x="80962" y="57150"/>
+                      <a:pt x="90640" y="81220"/>
+                    </a:cubicBezTo>
+                    <a:cubicBezTo>
+                      <a:pt x="100012" y="104775"/>
+                      <a:pt x="100012" y="114300"/>
+                      <a:pt x="109538" y="114300"/>
+                    </a:cubicBezTo>
+                    <a:lnTo>
+                      <a:pt x="119062" y="114300"/>
+                    </a:lnTo>
+                  </a:path>
+                </a:pathLst>
+              </a:custGeom>
+              <a:noFill/>
+              <a:ln w="19050">
+                <a:solidFill>
+                  <a:srgbClr val="AF00C0"/>
+                </a:solidFill>
+              </a:ln>
+            </p:spPr>
+          </p:sp>
+          <p:sp>
+            <p:nvSpPr>
+              <p:cNvPr id="46" name="Freeform 46"/>
+              <p:cNvSpPr/>
+              <p:nvPr/>
+            </p:nvSpPr>
+            <p:spPr>
+              <a:xfrm>
+                <a:off x="7648575" y="3990975"/>
+                <a:ext cx="76200" cy="66675"/>
+              </a:xfrm>
+              <a:custGeom>
+                <a:avLst/>
+                <a:gdLst/>
+                <a:ahLst/>
+                <a:cxnLst/>
+                <a:rect l="l" t="t" r="r" b="b"/>
+                <a:pathLst>
+                  <a:path w="76200" h="66675">
+                    <a:moveTo>
+                      <a:pt x="0" y="66675"/>
+                    </a:moveTo>
+                    <a:cubicBezTo>
+                      <a:pt x="14288" y="66675"/>
+                      <a:pt x="28575" y="47625"/>
+                      <a:pt x="38100" y="33338"/>
+                    </a:cubicBezTo>
+                    <a:cubicBezTo>
+                      <a:pt x="47625" y="19050"/>
+                      <a:pt x="61912" y="0"/>
+                      <a:pt x="76200" y="0"/>
+                    </a:cubicBezTo>
+                  </a:path>
+                </a:pathLst>
+              </a:custGeom>
+              <a:noFill/>
+              <a:ln w="19050">
+                <a:solidFill>
+                  <a:srgbClr val="AF00C0"/>
+                </a:solidFill>
+              </a:ln>
+            </p:spPr>
+          </p:sp>
+        </p:grpSp>
+        <p:sp>
+          <p:nvSpPr>
+            <p:cNvPr id="48" name="TextBox 48"/>
+            <p:cNvSpPr txBox="1"/>
+            <p:nvPr/>
+          </p:nvSpPr>
+          <p:spPr>
+            <a:xfrm>
+              <a:off x="7873365" y="3953828"/>
+              <a:ext cx="1588565" cy="213360"/>
+            </a:xfrm>
+            <a:prstGeom prst="rect">
+              <a:avLst/>
+            </a:prstGeom>
+            <a:noFill/>
+            <a:ln>
+              <a:noFill/>
+            </a:ln>
+          </p:spPr>
+          <p:txBody>
+            <a:bodyPr wrap="none" lIns="0" tIns="0" rIns="0" bIns="0" anchor="t" anchorCtr="0">
+              <a:spAutoFit/>
+            </a:bodyPr>
+            <a:lstStyle/>
+            <a:p>
+              <a:pPr algn="l"/>
+              <a:r>
+                <a:rPr lang="zh-CN" sz="1050" b="1" dirty="0">
+                  <a:solidFill>
+                    <a:srgbClr val="AF00C0"/>
+                  </a:solidFill>
+                  <a:latin typeface="Arial"/>
+                  <a:ea typeface="Microsoft YaHei"/>
+                  <a:cs typeface="Arial"/>
+                </a:rPr>
+                <a:t>"=&amp;r" early-clobber</a:t>
+              </a:r>
+            </a:p>
+          </p:txBody>
+        </p:sp>
+        <p:sp>
+          <p:nvSpPr>
+            <p:cNvPr id="49" name="TextBox 49"/>
+            <p:cNvSpPr txBox="1"/>
+            <p:nvPr/>
+          </p:nvSpPr>
+          <p:spPr>
+            <a:xfrm>
+              <a:off x="7559992" y="4200049"/>
+              <a:ext cx="3477935" cy="198120"/>
+            </a:xfrm>
+            <a:prstGeom prst="rect">
+              <a:avLst/>
+            </a:prstGeom>
+            <a:noFill/>
+            <a:ln>
+              <a:noFill/>
+            </a:ln>
+          </p:spPr>
+          <p:txBody>
+            <a:bodyPr wrap="none" lIns="0" tIns="0" rIns="0" bIns="0" anchor="t" anchorCtr="0">
+              <a:spAutoFit/>
+            </a:bodyPr>
+            <a:lstStyle/>
+            <a:p>
+              <a:pPr algn="l"/>
+              <a:r>
+                <a:rPr lang="zh-CN" sz="975" dirty="0">
+                  <a:solidFill>
+                    <a:srgbClr val="555555"/>
+                  </a:solidFill>
+                  <a:latin typeface="Arial"/>
+                  <a:ea typeface="Microsoft YaHei"/>
+                  <a:cs typeface="Arial"/>
+                </a:rPr>
+                <a:t>Scratch register written before inputs consumed</a:t>
+              </a:r>
+            </a:p>
+          </p:txBody>
+        </p:sp>
+        <p:sp>
+          <p:nvSpPr>
+            <p:cNvPr id="50" name="Rectangle 50"/>
+            <p:cNvSpPr/>
+            <p:nvPr/>
+          </p:nvSpPr>
+          <p:spPr>
+            <a:xfrm>
+              <a:off x="476250" y="4762500"/>
+              <a:ext cx="11239500" cy="952500"/>
+            </a:xfrm>
+            <a:prstGeom prst="roundRect">
+              <a:avLst>
+                <a:gd name="adj" fmla="val 8000"/>
+              </a:avLst>
+            </a:prstGeom>
+            <a:solidFill>
+              <a:srgbClr val="F8FAFC"/>
+            </a:solidFill>
+            <a:ln w="9525">
+              <a:solidFill>
+                <a:srgbClr val="64748B"/>
+              </a:solidFill>
+            </a:ln>
+          </p:spPr>
+        </p:sp>
+        <p:sp>
+          <p:nvSpPr>
+            <p:cNvPr id="51" name="TextBox 51"/>
+            <p:cNvSpPr txBox="1"/>
+            <p:nvPr/>
+          </p:nvSpPr>
+          <p:spPr>
+            <a:xfrm>
+              <a:off x="4850861" y="4887278"/>
+              <a:ext cx="2490278" cy="213360"/>
+            </a:xfrm>
+            <a:prstGeom prst="rect">
+              <a:avLst/>
+            </a:prstGeom>
+            <a:noFill/>
+            <a:ln>
+              <a:noFill/>
+            </a:ln>
+          </p:spPr>
+          <p:txBody>
+            <a:bodyPr wrap="none" lIns="0" tIns="0" rIns="0" bIns="0" anchor="t" anchorCtr="0">
+              <a:spAutoFit/>
+            </a:bodyPr>
+            <a:lstStyle/>
+            <a:p>
+              <a:pPr algn="ctr"/>
+              <a:r>
+                <a:rPr lang="zh-CN" sz="1050" b="1" dirty="0">
+                  <a:solidFill>
+                    <a:srgbClr val="333333"/>
+                  </a:solidFill>
+                  <a:latin typeface="Arial"/>
+                  <a:ea typeface="Microsoft YaHei"/>
+                  <a:cs typeface="Arial"/>
+                </a:rPr>
+                <a:t>Byte Transformation in Memory</a:t>
+              </a:r>
+            </a:p>
+          </p:txBody>
+        </p:sp>
+        <p:sp>
+          <p:nvSpPr>
+            <p:cNvPr id="52" name="Rectangle 52"/>
+            <p:cNvSpPr/>
+            <p:nvPr/>
+          </p:nvSpPr>
+          <p:spPr>
+            <a:xfrm>
+              <a:off x="1143000" y="5191125"/>
+              <a:ext cx="2286000" cy="381000"/>
+            </a:xfrm>
+            <a:prstGeom prst="roundRect">
+              <a:avLst>
+                <a:gd name="adj" fmla="val 10000"/>
+              </a:avLst>
+            </a:prstGeom>
+            <a:solidFill>
+              <a:srgbClr val="1E293B"/>
+            </a:solidFill>
+            <a:ln>
+              <a:noFill/>
+            </a:ln>
+          </p:spPr>
+        </p:sp>
+        <p:sp>
+          <p:nvSpPr>
+            <p:cNvPr id="53" name="TextBox 53"/>
+            <p:cNvSpPr txBox="1"/>
+            <p:nvPr/>
+          </p:nvSpPr>
+          <p:spPr>
+            <a:xfrm>
+              <a:off x="1840409" y="5317331"/>
+              <a:ext cx="891183" cy="228600"/>
+            </a:xfrm>
+            <a:prstGeom prst="rect">
+              <a:avLst/>
+            </a:prstGeom>
+            <a:noFill/>
+            <a:ln>
+              <a:noFill/>
+            </a:ln>
+          </p:spPr>
+          <p:txBody>
+            <a:bodyPr wrap="none" lIns="0" tIns="0" rIns="0" bIns="0" anchor="t" anchorCtr="0">
+              <a:spAutoFit/>
+            </a:bodyPr>
+            <a:lstStyle/>
+            <a:p>
+              <a:pPr algn="ctr"/>
+              <a:r>
+                <a:rPr lang="zh-CN" sz="1125" dirty="0">
+                  <a:solidFill>
+                    <a:srgbClr val="F79646"/>
+                  </a:solidFill>
+                  <a:latin typeface="Consolas"/>
+                  <a:ea typeface="Microsoft YaHei"/>
+                  <a:cs typeface="Consolas"/>
+                </a:rPr>
+                <a:t>0x05e1f00c</a:t>
+              </a:r>
+            </a:p>
+          </p:txBody>
+        </p:sp>
+        <p:sp>
+          <p:nvSpPr>
+            <p:cNvPr id="54" name="TextBox 54"/>
+            <p:cNvSpPr txBox="1"/>
+            <p:nvPr/>
+          </p:nvSpPr>
+          <p:spPr>
+            <a:xfrm>
+              <a:off x="3790950" y="5276850"/>
+              <a:ext cx="815816" cy="304800"/>
+            </a:xfrm>
+            <a:prstGeom prst="rect">
+              <a:avLst/>
+            </a:prstGeom>
+            <a:noFill/>
+            <a:ln>
+              <a:noFill/>
+            </a:ln>
+          </p:spPr>
+          <p:txBody>
+            <a:bodyPr wrap="none" lIns="0" tIns="0" rIns="0" bIns="0" anchor="t" anchorCtr="0">
+              <a:spAutoFit/>
+            </a:bodyPr>
+            <a:lstStyle/>
+            <a:p>
+              <a:pPr algn="l"/>
+              <a:r>
+                <a:rPr lang="zh-CN" sz="1500" dirty="0">
+                  <a:solidFill>
+                    <a:srgbClr val="333333"/>
+                  </a:solidFill>
+                  <a:latin typeface="Arial"/>
+                  <a:ea typeface="Microsoft YaHei"/>
+                  <a:cs typeface="Arial"/>
+                </a:rPr>
+                <a:t>→ NOT →</a:t>
+              </a:r>
+            </a:p>
+          </p:txBody>
+        </p:sp>
+        <p:sp>
+          <p:nvSpPr>
+            <p:cNvPr id="55" name="Rectangle 55"/>
+            <p:cNvSpPr/>
+            <p:nvPr/>
+          </p:nvSpPr>
+          <p:spPr>
+            <a:xfrm>
+              <a:off x="4953000" y="5191125"/>
+              <a:ext cx="2286000" cy="381000"/>
+            </a:xfrm>
+            <a:prstGeom prst="roundRect">
+              <a:avLst>
+                <a:gd name="adj" fmla="val 10000"/>
+              </a:avLst>
+            </a:prstGeom>
+            <a:solidFill>
+              <a:srgbClr val="1E293B"/>
+            </a:solidFill>
+            <a:ln>
+              <a:noFill/>
+            </a:ln>
+          </p:spPr>
+        </p:sp>
+        <p:sp>
+          <p:nvSpPr>
+            <p:cNvPr id="56" name="TextBox 56"/>
+            <p:cNvSpPr txBox="1"/>
+            <p:nvPr/>
+          </p:nvSpPr>
+          <p:spPr>
+            <a:xfrm>
+              <a:off x="5650409" y="5317331"/>
+              <a:ext cx="891183" cy="228600"/>
+            </a:xfrm>
+            <a:prstGeom prst="rect">
+              <a:avLst/>
+            </a:prstGeom>
+            <a:noFill/>
+            <a:ln>
+              <a:noFill/>
+            </a:ln>
+          </p:spPr>
+          <p:txBody>
+            <a:bodyPr wrap="none" lIns="0" tIns="0" rIns="0" bIns="0" anchor="t" anchorCtr="0">
+              <a:spAutoFit/>
+            </a:bodyPr>
+            <a:lstStyle/>
+            <a:p>
+              <a:pPr algn="ctr"/>
+              <a:r>
+                <a:rPr lang="zh-CN" sz="1125" dirty="0">
+                  <a:solidFill>
+                    <a:srgbClr val="0AB36E"/>
+                  </a:solidFill>
+                  <a:latin typeface="Consolas"/>
+                  <a:ea typeface="Microsoft YaHei"/>
+                  <a:cs typeface="Consolas"/>
+                </a:rPr>
+                <a:t>0xfa1e0ff3</a:t>
+              </a:r>
+            </a:p>
+          </p:txBody>
+        </p:sp>
+        <p:sp>
+          <p:nvSpPr>
+            <p:cNvPr id="57" name="TextBox 57"/>
+            <p:cNvSpPr txBox="1"/>
+            <p:nvPr/>
+          </p:nvSpPr>
+          <p:spPr>
+            <a:xfrm>
+              <a:off x="7600950" y="5276850"/>
+              <a:ext cx="1133475" cy="304800"/>
+            </a:xfrm>
+            <a:prstGeom prst="rect">
+              <a:avLst/>
+            </a:prstGeom>
+            <a:noFill/>
+            <a:ln>
+              <a:noFill/>
+            </a:ln>
+          </p:spPr>
+          <p:txBody>
+            <a:bodyPr wrap="none" lIns="0" tIns="0" rIns="0" bIns="0" anchor="t" anchorCtr="0">
+              <a:spAutoFit/>
+            </a:bodyPr>
+            <a:lstStyle/>
+            <a:p>
+              <a:pPr algn="l"/>
+              <a:r>
+                <a:rPr lang="zh-CN" sz="1500" dirty="0">
+                  <a:solidFill>
+                    <a:srgbClr val="333333"/>
+                  </a:solidFill>
+                  <a:latin typeface="Arial"/>
+                  <a:ea typeface="Microsoft YaHei"/>
+                  <a:cs typeface="Arial"/>
+                </a:rPr>
+                <a:t>→ decode →</a:t>
+              </a:r>
+            </a:p>
+          </p:txBody>
+        </p:sp>
+        <p:sp>
+          <p:nvSpPr>
+            <p:cNvPr id="58" name="Rectangle 58"/>
+            <p:cNvSpPr/>
+            <p:nvPr/>
+          </p:nvSpPr>
+          <p:spPr>
+            <a:xfrm>
+              <a:off x="8858250" y="5191125"/>
+              <a:ext cx="2286000" cy="381000"/>
+            </a:xfrm>
+            <a:prstGeom prst="roundRect">
+              <a:avLst>
+                <a:gd name="adj" fmla="val 10000"/>
+              </a:avLst>
+            </a:prstGeom>
+            <a:solidFill>
+              <a:srgbClr val="0AB36E"/>
+            </a:solidFill>
+            <a:ln>
+              <a:noFill/>
+            </a:ln>
+          </p:spPr>
+        </p:sp>
+        <p:sp>
+          <p:nvSpPr>
+            <p:cNvPr id="59" name="TextBox 59"/>
+            <p:cNvSpPr txBox="1"/>
+            <p:nvPr/>
+          </p:nvSpPr>
+          <p:spPr>
+            <a:xfrm>
+              <a:off x="9670673" y="5317331"/>
+              <a:ext cx="661154" cy="228600"/>
+            </a:xfrm>
+            <a:prstGeom prst="rect">
+              <a:avLst/>
+            </a:prstGeom>
+            <a:noFill/>
+            <a:ln>
+              <a:noFill/>
+            </a:ln>
+          </p:spPr>
+          <p:txBody>
+            <a:bodyPr wrap="none" lIns="0" tIns="0" rIns="0" bIns="0" anchor="t" anchorCtr="0">
+              <a:spAutoFit/>
+            </a:bodyPr>
+            <a:lstStyle/>
+            <a:p>
+              <a:pPr algn="ctr"/>
+              <a:r>
+                <a:rPr lang="zh-CN" sz="1125" dirty="0">
+                  <a:solidFill>
+                    <a:srgbClr val="FFFFFF"/>
+                  </a:solidFill>
+                  <a:latin typeface="Consolas"/>
+                  <a:ea typeface="Microsoft YaHei"/>
+                  <a:cs typeface="Consolas"/>
+                </a:rPr>
+                <a:t>ENDBR64</a:t>
+              </a:r>
+            </a:p>
+          </p:txBody>
+        </p:sp>
+      </p:grpSp>
+      <p:grpSp>
+        <p:nvGrpSpPr>
+          <p:cNvPr id="63" name="Group 63"/>
+          <p:cNvGrpSpPr/>
+          <p:nvPr/>
+        </p:nvGrpSpPr>
+        <p:grpSpPr>
+          <a:xfrm>
+            <a:off x="10283883" y="5886450"/>
+            <a:ext cx="1441392" cy="947738"/>
+            <a:chOff x="10283883" y="5886450"/>
+            <a:chExt cx="1441392" cy="947738"/>
+          </a:xfrm>
+        </p:grpSpPr>
+        <p:pic>
+          <p:nvPicPr>
+            <p:cNvPr id="61" name="Image 61"/>
+            <p:cNvPicPr>
+              <a:picLocks noChangeAspect="1"/>
+            </p:cNvPicPr>
+            <p:nvPr/>
+          </p:nvPicPr>
+          <p:blipFill>
+            <a:blip r:embed="rId4"/>
+            <a:stretch>
+              <a:fillRect/>
+            </a:stretch>
+          </p:blipFill>
+          <p:spPr>
+            <a:xfrm>
+              <a:off x="10283883" y="5886450"/>
+              <a:ext cx="1158759" cy="381000"/>
+            </a:xfrm>
+            <a:prstGeom prst="rect">
+              <a:avLst/>
+            </a:prstGeom>
+          </p:spPr>
+        </p:pic>
+        <p:sp>
+          <p:nvSpPr>
+            <p:cNvPr id="62" name="TextBox 62"/>
+            <p:cNvSpPr txBox="1"/>
+            <p:nvPr/>
+          </p:nvSpPr>
+          <p:spPr>
+            <a:xfrm>
+              <a:off x="11585734" y="6681788"/>
+              <a:ext cx="139541" cy="152400"/>
+            </a:xfrm>
+            <a:prstGeom prst="rect">
+              <a:avLst/>
+            </a:prstGeom>
+            <a:noFill/>
+            <a:ln>
+              <a:noFill/>
+            </a:ln>
+          </p:spPr>
+          <p:txBody>
+            <a:bodyPr wrap="none" lIns="0" tIns="0" rIns="0" bIns="0" anchor="t" anchorCtr="0">
+              <a:spAutoFit/>
+            </a:bodyPr>
+            <a:lstStyle/>
+            <a:p>
+              <a:pPr algn="r"/>
+              <a:r>
+                <a:rPr lang="zh-CN" sz="750" dirty="0">
+                  <a:solidFill>
+                    <a:srgbClr val="FFFFFF">
+                      <a:alpha val="60000"/>
+                    </a:srgbClr>
+                  </a:solidFill>
+                  <a:latin typeface="Arial"/>
+                  <a:ea typeface="Microsoft YaHei"/>
+                  <a:cs typeface="Arial"/>
+                </a:rPr>
+                <a:t>06</a:t>
+              </a:r>
+            </a:p>
+          </p:txBody>
+        </p:sp>
+      </p:grpSp>
+    </p:spTree>
+  </p:cSld>
+  <p:clrMapOvr>
+    <a:masterClrMapping/>
+  </p:clrMapOvr>
+  <mc:AlternateContent xmlns:mc="http://schemas.openxmlformats.org/markup-compatibility/2006">
+    <mc:Choice xmlns:p14="http://schemas.microsoft.com/office/powerpoint/2010/main" Requires="p14">
+      <p:transition p14:dur="400">
+        <p:fade/>
+      </p:transition>
+    </mc:Choice>
+    <mc:Fallback>
+      <p:transition>
+        <p:fade/>
+      </p:transition>
+    </mc:Fallback>
+  </mc:AlternateContent>
+  <p:timing>
+    <p:tnLst>
+      <p:par>
+        <p:cTn id="1" dur="indefinite" restart="never" nodeType="tmRoot">
+          <p:childTnLst>
+            <p:seq concurrent="1" nextAc="seek">
+              <p:cTn id="2" dur="indefinite" nodeType="mainSeq">
+                <p:childTnLst>
+                  <p:par>
+                    <p:cTn id="3" fill="hold">
+                      <p:stCondLst>
+                        <p:cond delay="indefinite"/>
+                        <p:cond evt="onBegin" delay="0">
+                          <p:tn val="2"/>
+                        </p:cond>
+                      </p:stCondLst>
+                      <p:childTnLst>
+                        <p:par>
+                          <p:cTn id="4" fill="hold">
+                            <p:stCondLst>
+                              <p:cond delay="0"/>
+                            </p:stCondLst>
+                            <p:childTnLst>
+                              <p:par>
+                                <p:cTn id="5" presetID="10" presetClass="entr" presetSubtype="0" fill="hold" nodeType="afterEffect">
+                                  <p:stCondLst>
+                                    <p:cond delay="0"/>
+                                  </p:stCondLst>
+                                  <p:childTnLst>
+                                    <p:set>
+                                      <p:cBhvr>
+                                        <p:cTn id="6" dur="1" fill="hold">
+                                          <p:stCondLst>
+                                            <p:cond delay="0"/>
+                                          </p:stCondLst>
+                                        </p:cTn>
+                                        <p:tgtEl>
+                                          <p:spTgt spid="60"/>
+                                        </p:tgtEl>
+                                        <p:attrNameLst>
+                                          <p:attrName>style.visibility</p:attrName>
+                                        </p:attrNameLst>
+                                      </p:cBhvr>
+                                      <p:to>
+                                        <p:strVal val="visible"/>
+                                      </p:to>
+                                    </p:set>
+                                    <p:animEffect transition="in" filter="fade">
+                                      <p:cBhvr>
+                                        <p:cTn id="7" dur="400"/>
+                                        <p:tgtEl>
+                                          <p:spTgt spid="60"/>
+                                        </p:tgtEl>
+                                      </p:cBhvr>
+                                    </p:animEffect>
+                                  </p:childTnLst>
+                                </p:cTn>
+                              </p:par>
+                            </p:childTnLst>
+                          </p:cTn>
+                        </p:par>
+                      </p:childTnLst>
+                    </p:cTn>
+                  </p:par>
+                </p:childTnLst>
+              </p:cTn>
+              <p:prevCondLst>
+                <p:cond evt="onPrev" delay="0">
+                  <p:tgtEl>
+                    <p:sldTgt/>
+                  </p:tgtEl>
+                </p:cond>
+              </p:prevCondLst>
+              <p:nextCondLst>
+                <p:cond evt="onNext" delay="0">
+                  <p:tgtEl>
+                    <p:sldTgt/>
+                  </p:tgtEl>
+                </p:cond>
+              </p:nextCondLst>
+            </p:seq>
+          </p:childTnLst>
+        </p:cTn>
+      </p:par>
+    </p:tnLst>
+    <p:bldLst>
+      <p:bldP spid="60" grpId="0"/>
+    </p:bldLst>
+  </p:timing>
+</p:sld>
+</file>
+
 <file path=ppt/slides/slide8.xml><?xml version="1.0" encoding="utf-8"?>
 <p:sld xmlns:a="http://schemas.openxmlformats.org/drawingml/2006/main" xmlns:r="http://schemas.openxmlformats.org/officeDocument/2006/relationships" xmlns:p="http://schemas.openxmlformats.org/presentationml/2006/main">
   <p:cSld>
@@ -39919,8 +39671,8 @@
             <p:nvPr/>
           </p:nvPicPr>
           <p:blipFill>
-            <a:blip r:embed="rId2"/>
-            <a:srcRect l="0" t="781" r="0" b="781"/>
+            <a:blip r:embed="rId3"/>
+            <a:srcRect t="781" b="781"/>
             <a:stretch>
               <a:fillRect/>
             </a:stretch>
@@ -40151,7 +39903,7 @@
                   <a:ea typeface="Microsoft YaHei"/>
                   <a:cs typeface="Consolas"/>
                 </a:rPr>
-                <a:t xml:space="preserve"> cp_error_code {</a:t>
+                <a:t> cp_error_code {</a:t>
               </a:r>
             </a:p>
           </p:txBody>
@@ -40191,7 +39943,7 @@
                   <a:ea typeface="Microsoft YaHei"/>
                   <a:cs typeface="Consolas"/>
                 </a:rPr>
-                <a:t xml:space="preserve">    CP_EC        = </a:t>
+                <a:t>    CP_EC        = </a:t>
               </a:r>
             </a:p>
           </p:txBody>
@@ -40351,7 +40103,7 @@
                   <a:ea typeface="Microsoft YaHei"/>
                   <a:cs typeface="Consolas"/>
                 </a:rPr>
-                <a:t xml:space="preserve">    CP_RET       = </a:t>
+                <a:t>    CP_RET       = </a:t>
               </a:r>
             </a:p>
           </p:txBody>
@@ -40511,7 +40263,7 @@
                   <a:ea typeface="Microsoft YaHei"/>
                   <a:cs typeface="Consolas"/>
                 </a:rPr>
-                <a:t xml:space="preserve">    CP_IRET      = </a:t>
+                <a:t>    CP_IRET      = </a:t>
               </a:r>
             </a:p>
           </p:txBody>
@@ -40671,7 +40423,7 @@
                   <a:ea typeface="Microsoft YaHei"/>
                   <a:cs typeface="Consolas"/>
                 </a:rPr>
-                <a:t xml:space="preserve">    CP_ENDBR     = </a:t>
+                <a:t>    CP_ENDBR     = </a:t>
               </a:r>
             </a:p>
           </p:txBody>
@@ -40831,7 +40583,7 @@
                   <a:ea typeface="Microsoft YaHei"/>
                   <a:cs typeface="Consolas"/>
                 </a:rPr>
-                <a:t xml:space="preserve">    CP_RSTORSSP  = </a:t>
+                <a:t>    CP_RSTORSSP  = </a:t>
               </a:r>
             </a:p>
           </p:txBody>
@@ -40991,7 +40743,7 @@
                   <a:ea typeface="Microsoft YaHei"/>
                   <a:cs typeface="Consolas"/>
                 </a:rPr>
-                <a:t xml:space="preserve">    CP_SETSSBSY  = </a:t>
+                <a:t>    CP_SETSSBSY  = </a:t>
               </a:r>
             </a:p>
           </p:txBody>
@@ -42236,7 +41988,7 @@
             <p:nvPr/>
           </p:nvPicPr>
           <p:blipFill>
-            <a:blip r:embed="rId3"/>
+            <a:blip r:embed="rId4"/>
             <a:stretch>
               <a:fillRect/>
             </a:stretch>
@@ -42299,9 +42051,18 @@
   <p:clrMapOvr>
     <a:masterClrMapping/>
   </p:clrMapOvr>
-  <p:transition xmlns:p14="http://schemas.microsoft.com/office/powerpoint/2010/main" p14:dur="400">
-    <p:fade/>
-  </p:transition>
+  <mc:AlternateContent xmlns:mc="http://schemas.openxmlformats.org/markup-compatibility/2006">
+    <mc:Choice xmlns:p14="http://schemas.microsoft.com/office/powerpoint/2010/main" Requires="p14">
+      <p:transition p14:dur="400">
+        <p:fade/>
+      </p:transition>
+    </mc:Choice>
+    <mc:Fallback>
+      <p:transition>
+        <p:fade/>
+      </p:transition>
+    </mc:Fallback>
+  </mc:AlternateContent>
   <p:timing>
     <p:tnLst>
       <p:par>
@@ -42434,8 +42195,8 @@
             <p:nvPr/>
           </p:nvPicPr>
           <p:blipFill>
-            <a:blip r:embed="rId2"/>
-            <a:srcRect l="0" t="781" r="0" b="781"/>
+            <a:blip r:embed="rId3"/>
+            <a:srcRect t="781" b="781"/>
             <a:stretch>
               <a:fillRect/>
             </a:stretch>
@@ -42826,7 +42587,7 @@
                   <a:ea typeface="Microsoft YaHei"/>
                   <a:cs typeface="Consolas"/>
                 </a:rPr>
-                <a:t xml:space="preserve">        pr_err(</a:t>
+                <a:t>        pr_err(</a:t>
               </a:r>
             </a:p>
           </p:txBody>
@@ -42946,7 +42707,7 @@
                   <a:ea typeface="Microsoft YaHei"/>
                   <a:cs typeface="Consolas"/>
                 </a:rPr>
-                <a:t xml:space="preserve">        BUG();</a:t>
+                <a:t>        BUG();</a:t>
               </a:r>
             </a:p>
           </p:txBody>
@@ -42986,7 +42747,7 @@
                   <a:ea typeface="Microsoft YaHei"/>
                   <a:cs typeface="Consolas"/>
                 </a:rPr>
-                <a:t xml:space="preserve">    }</a:t>
+                <a:t>    }</a:t>
               </a:r>
             </a:p>
           </p:txBody>
@@ -43106,7 +42867,7 @@
                   <a:ea typeface="Microsoft YaHei"/>
                   <a:cs typeface="Consolas"/>
                 </a:rPr>
-                <a:t xml:space="preserve">        force_sig_fault(SIGSEGV, SEGV_CPERR,</a:t>
+                <a:t>        force_sig_fault(SIGSEGV, SEGV_CPERR,</a:t>
               </a:r>
             </a:p>
           </p:txBody>
@@ -43146,7 +42907,7 @@
                   <a:ea typeface="Microsoft YaHei"/>
                   <a:cs typeface="Consolas"/>
                 </a:rPr>
-                <a:t xml:space="preserve">                        (</a:t>
+                <a:t>                        (</a:t>
               </a:r>
             </a:p>
           </p:txBody>
@@ -43346,7 +43107,7 @@
                   <a:ea typeface="Microsoft YaHei"/>
                   <a:cs typeface="Consolas"/>
                 </a:rPr>
-                <a:t xml:space="preserve">    }</a:t>
+                <a:t>    }</a:t>
               </a:r>
             </a:p>
           </p:txBody>
@@ -43426,7 +43187,7 @@
                   <a:ea typeface="Microsoft YaHei"/>
                   <a:cs typeface="Consolas"/>
                 </a:rPr>
-                <a:t xml:space="preserve">    ibt_fatal = !sysctl_ibt_warn;</a:t>
+                <a:t>    ibt_fatal = !sysctl_ibt_warn;</a:t>
               </a:r>
             </a:p>
           </p:txBody>
@@ -43466,7 +43227,7 @@
                   <a:ea typeface="Microsoft YaHei"/>
                   <a:cs typeface="Consolas"/>
                 </a:rPr>
-                <a:t xml:space="preserve">    ibt_fatal = !sysctl_ibt_warn;</a:t>
+                <a:t>    ibt_fatal = !sysctl_ibt_warn;</a:t>
               </a:r>
             </a:p>
           </p:txBody>
@@ -44701,7 +44462,7 @@
             <p:nvPr/>
           </p:nvPicPr>
           <p:blipFill>
-            <a:blip r:embed="rId3"/>
+            <a:blip r:embed="rId4"/>
             <a:stretch>
               <a:fillRect/>
             </a:stretch>
@@ -44764,9 +44525,18 @@
   <p:clrMapOvr>
     <a:masterClrMapping/>
   </p:clrMapOvr>
-  <p:transition xmlns:p14="http://schemas.microsoft.com/office/powerpoint/2010/main" p14:dur="400">
-    <p:fade/>
-  </p:transition>
+  <mc:AlternateContent xmlns:mc="http://schemas.openxmlformats.org/markup-compatibility/2006">
+    <mc:Choice xmlns:p14="http://schemas.microsoft.com/office/powerpoint/2010/main" Requires="p14">
+      <p:transition p14:dur="400">
+        <p:fade/>
+      </p:transition>
+    </mc:Choice>
+    <mc:Fallback>
+      <p:transition>
+        <p:fade/>
+      </p:transition>
+    </mc:Fallback>
+  </mc:AlternateContent>
   <p:timing>
     <p:tnLst>
       <p:par>
@@ -45177,4 +44947,299 @@
   </a:objectDefaults>
   <a:extraClrSchemeLst/>
 </a:theme>
+</file>
+
+<file path=ppt/theme/theme2.xml><?xml version="1.0" encoding="utf-8"?>
+<a:theme xmlns:a="http://schemas.openxmlformats.org/drawingml/2006/main" name="Office Theme">
+  <a:themeElements>
+    <a:clrScheme name="Office">
+      <a:dk1>
+        <a:sysClr val="windowText" lastClr="000000"/>
+      </a:dk1>
+      <a:lt1>
+        <a:sysClr val="window" lastClr="FFFFFF"/>
+      </a:lt1>
+      <a:dk2>
+        <a:srgbClr val="44546A"/>
+      </a:dk2>
+      <a:lt2>
+        <a:srgbClr val="E7E6E6"/>
+      </a:lt2>
+      <a:accent1>
+        <a:srgbClr val="4472C4"/>
+      </a:accent1>
+      <a:accent2>
+        <a:srgbClr val="ED7D31"/>
+      </a:accent2>
+      <a:accent3>
+        <a:srgbClr val="A5A5A5"/>
+      </a:accent3>
+      <a:accent4>
+        <a:srgbClr val="FFC000"/>
+      </a:accent4>
+      <a:accent5>
+        <a:srgbClr val="5B9BD5"/>
+      </a:accent5>
+      <a:accent6>
+        <a:srgbClr val="70AD47"/>
+      </a:accent6>
+      <a:hlink>
+        <a:srgbClr val="0563C1"/>
+      </a:hlink>
+      <a:folHlink>
+        <a:srgbClr val="954F72"/>
+      </a:folHlink>
+    </a:clrScheme>
+    <a:fontScheme name="Office">
+      <a:majorFont>
+        <a:latin typeface="Calibri Light" panose="020F0302020204030204"/>
+        <a:ea typeface=""/>
+        <a:cs typeface=""/>
+        <a:font script="Jpan" typeface="游ゴシック Light"/>
+        <a:font script="Hang" typeface="맑은 고딕"/>
+        <a:font script="Hans" typeface="等线 Light"/>
+        <a:font script="Hant" typeface="新細明體"/>
+        <a:font script="Arab" typeface="Times New Roman"/>
+        <a:font script="Hebr" typeface="Times New Roman"/>
+        <a:font script="Thai" typeface="Angsana New"/>
+        <a:font script="Ethi" typeface="Nyala"/>
+        <a:font script="Beng" typeface="Vrinda"/>
+        <a:font script="Gujr" typeface="Shruti"/>
+        <a:font script="Khmr" typeface="MoolBoran"/>
+        <a:font script="Knda" typeface="Tunga"/>
+        <a:font script="Guru" typeface="Raavi"/>
+        <a:font script="Cans" typeface="Euphemia"/>
+        <a:font script="Cher" typeface="Plantagenet Cherokee"/>
+        <a:font script="Yiii" typeface="Microsoft Yi Baiti"/>
+        <a:font script="Tibt" typeface="Microsoft Himalaya"/>
+        <a:font script="Thaa" typeface="MV Boli"/>
+        <a:font script="Deva" typeface="Mangal"/>
+        <a:font script="Telu" typeface="Gautami"/>
+        <a:font script="Taml" typeface="Latha"/>
+        <a:font script="Syrc" typeface="Estrangelo Edessa"/>
+        <a:font script="Orya" typeface="Kalinga"/>
+        <a:font script="Mlym" typeface="Kartika"/>
+        <a:font script="Laoo" typeface="DokChampa"/>
+        <a:font script="Sinh" typeface="Iskoola Pota"/>
+        <a:font script="Mong" typeface="Mongolian Baiti"/>
+        <a:font script="Viet" typeface="Times New Roman"/>
+        <a:font script="Uigh" typeface="Microsoft Uighur"/>
+        <a:font script="Geor" typeface="Sylfaen"/>
+        <a:font script="Armn" typeface="Arial"/>
+        <a:font script="Bugi" typeface="Leelawadee UI"/>
+        <a:font script="Bopo" typeface="Microsoft JhengHei"/>
+        <a:font script="Java" typeface="Javanese Text"/>
+        <a:font script="Lisu" typeface="Segoe UI"/>
+        <a:font script="Mymr" typeface="Myanmar Text"/>
+        <a:font script="Nkoo" typeface="Ebrima"/>
+        <a:font script="Olck" typeface="Nirmala UI"/>
+        <a:font script="Osma" typeface="Ebrima"/>
+        <a:font script="Phag" typeface="Phagspa"/>
+        <a:font script="Syrn" typeface="Estrangelo Edessa"/>
+        <a:font script="Syrj" typeface="Estrangelo Edessa"/>
+        <a:font script="Syre" typeface="Estrangelo Edessa"/>
+        <a:font script="Sora" typeface="Nirmala UI"/>
+        <a:font script="Tale" typeface="Microsoft Tai Le"/>
+        <a:font script="Talu" typeface="Microsoft New Tai Lue"/>
+        <a:font script="Tfng" typeface="Ebrima"/>
+      </a:majorFont>
+      <a:minorFont>
+        <a:latin typeface="Calibri" panose="020F0502020204030204"/>
+        <a:ea typeface=""/>
+        <a:cs typeface=""/>
+        <a:font script="Jpan" typeface="游ゴシック"/>
+        <a:font script="Hang" typeface="맑은 고딕"/>
+        <a:font script="Hans" typeface="等线"/>
+        <a:font script="Hant" typeface="新細明體"/>
+        <a:font script="Arab" typeface="Arial"/>
+        <a:font script="Hebr" typeface="Arial"/>
+        <a:font script="Thai" typeface="Cordia New"/>
+        <a:font script="Ethi" typeface="Nyala"/>
+        <a:font script="Beng" typeface="Vrinda"/>
+        <a:font script="Gujr" typeface="Shruti"/>
+        <a:font script="Khmr" typeface="DaunPenh"/>
+        <a:font script="Knda" typeface="Tunga"/>
+        <a:font script="Guru" typeface="Raavi"/>
+        <a:font script="Cans" typeface="Euphemia"/>
+        <a:font script="Cher" typeface="Plantagenet Cherokee"/>
+        <a:font script="Yiii" typeface="Microsoft Yi Baiti"/>
+        <a:font script="Tibt" typeface="Microsoft Himalaya"/>
+        <a:font script="Thaa" typeface="MV Boli"/>
+        <a:font script="Deva" typeface="Mangal"/>
+        <a:font script="Telu" typeface="Gautami"/>
+        <a:font script="Taml" typeface="Latha"/>
+        <a:font script="Syrc" typeface="Estrangelo Edessa"/>
+        <a:font script="Orya" typeface="Kalinga"/>
+        <a:font script="Mlym" typeface="Kartika"/>
+        <a:font script="Laoo" typeface="DokChampa"/>
+        <a:font script="Sinh" typeface="Iskoola Pota"/>
+        <a:font script="Mong" typeface="Mongolian Baiti"/>
+        <a:font script="Viet" typeface="Arial"/>
+        <a:font script="Uigh" typeface="Microsoft Uighur"/>
+        <a:font script="Geor" typeface="Sylfaen"/>
+        <a:font script="Armn" typeface="Arial"/>
+        <a:font script="Bugi" typeface="Leelawadee UI"/>
+        <a:font script="Bopo" typeface="Microsoft JhengHei"/>
+        <a:font script="Java" typeface="Javanese Text"/>
+        <a:font script="Lisu" typeface="Segoe UI"/>
+        <a:font script="Mymr" typeface="Myanmar Text"/>
+        <a:font script="Nkoo" typeface="Ebrima"/>
+        <a:font script="Olck" typeface="Nirmala UI"/>
+        <a:font script="Osma" typeface="Ebrima"/>
+        <a:font script="Phag" typeface="Phagspa"/>
+        <a:font script="Syrn" typeface="Estrangelo Edessa"/>
+        <a:font script="Syrj" typeface="Estrangelo Edessa"/>
+        <a:font script="Syre" typeface="Estrangelo Edessa"/>
+        <a:font script="Sora" typeface="Nirmala UI"/>
+        <a:font script="Tale" typeface="Microsoft Tai Le"/>
+        <a:font script="Talu" typeface="Microsoft New Tai Lue"/>
+        <a:font script="Tfng" typeface="Ebrima"/>
+      </a:minorFont>
+    </a:fontScheme>
+    <a:fmtScheme name="Office">
+      <a:fillStyleLst>
+        <a:solidFill>
+          <a:schemeClr val="phClr"/>
+        </a:solidFill>
+        <a:gradFill rotWithShape="1">
+          <a:gsLst>
+            <a:gs pos="0">
+              <a:schemeClr val="phClr">
+                <a:lumMod val="110000"/>
+                <a:satMod val="105000"/>
+                <a:tint val="67000"/>
+              </a:schemeClr>
+            </a:gs>
+            <a:gs pos="50000">
+              <a:schemeClr val="phClr">
+                <a:lumMod val="105000"/>
+                <a:satMod val="103000"/>
+                <a:tint val="73000"/>
+              </a:schemeClr>
+            </a:gs>
+            <a:gs pos="100000">
+              <a:schemeClr val="phClr">
+                <a:lumMod val="105000"/>
+                <a:satMod val="109000"/>
+                <a:tint val="81000"/>
+              </a:schemeClr>
+            </a:gs>
+          </a:gsLst>
+          <a:lin ang="5400000" scaled="0"/>
+        </a:gradFill>
+        <a:gradFill rotWithShape="1">
+          <a:gsLst>
+            <a:gs pos="0">
+              <a:schemeClr val="phClr">
+                <a:satMod val="103000"/>
+                <a:lumMod val="102000"/>
+                <a:tint val="94000"/>
+              </a:schemeClr>
+            </a:gs>
+            <a:gs pos="50000">
+              <a:schemeClr val="phClr">
+                <a:satMod val="110000"/>
+                <a:lumMod val="100000"/>
+                <a:shade val="100000"/>
+              </a:schemeClr>
+            </a:gs>
+            <a:gs pos="100000">
+              <a:schemeClr val="phClr">
+                <a:lumMod val="99000"/>
+                <a:satMod val="120000"/>
+                <a:shade val="78000"/>
+              </a:schemeClr>
+            </a:gs>
+          </a:gsLst>
+          <a:lin ang="5400000" scaled="0"/>
+        </a:gradFill>
+      </a:fillStyleLst>
+      <a:lnStyleLst>
+        <a:ln w="6350" cap="flat" cmpd="sng" algn="ctr">
+          <a:solidFill>
+            <a:schemeClr val="phClr"/>
+          </a:solidFill>
+          <a:prstDash val="solid"/>
+          <a:miter lim="800000"/>
+        </a:ln>
+        <a:ln w="12700" cap="flat" cmpd="sng" algn="ctr">
+          <a:solidFill>
+            <a:schemeClr val="phClr"/>
+          </a:solidFill>
+          <a:prstDash val="solid"/>
+          <a:miter lim="800000"/>
+        </a:ln>
+        <a:ln w="19050" cap="flat" cmpd="sng" algn="ctr">
+          <a:solidFill>
+            <a:schemeClr val="phClr"/>
+          </a:solidFill>
+          <a:prstDash val="solid"/>
+          <a:miter lim="800000"/>
+        </a:ln>
+      </a:lnStyleLst>
+      <a:effectStyleLst>
+        <a:effectStyle>
+          <a:effectLst/>
+        </a:effectStyle>
+        <a:effectStyle>
+          <a:effectLst/>
+        </a:effectStyle>
+        <a:effectStyle>
+          <a:effectLst>
+            <a:outerShdw blurRad="57150" dist="19050" dir="5400000" algn="ctr" rotWithShape="0">
+              <a:srgbClr val="000000">
+                <a:alpha val="63000"/>
+              </a:srgbClr>
+            </a:outerShdw>
+          </a:effectLst>
+        </a:effectStyle>
+      </a:effectStyleLst>
+      <a:bgFillStyleLst>
+        <a:solidFill>
+          <a:schemeClr val="phClr"/>
+        </a:solidFill>
+        <a:solidFill>
+          <a:schemeClr val="phClr">
+            <a:tint val="95000"/>
+            <a:satMod val="170000"/>
+          </a:schemeClr>
+        </a:solidFill>
+        <a:gradFill rotWithShape="1">
+          <a:gsLst>
+            <a:gs pos="0">
+              <a:schemeClr val="phClr">
+                <a:tint val="93000"/>
+                <a:satMod val="150000"/>
+                <a:shade val="98000"/>
+                <a:lumMod val="102000"/>
+              </a:schemeClr>
+            </a:gs>
+            <a:gs pos="50000">
+              <a:schemeClr val="phClr">
+                <a:tint val="98000"/>
+                <a:satMod val="130000"/>
+                <a:shade val="90000"/>
+                <a:lumMod val="103000"/>
+              </a:schemeClr>
+            </a:gs>
+            <a:gs pos="100000">
+              <a:schemeClr val="phClr">
+                <a:shade val="63000"/>
+                <a:satMod val="120000"/>
+              </a:schemeClr>
+            </a:gs>
+          </a:gsLst>
+          <a:lin ang="5400000" scaled="0"/>
+        </a:gradFill>
+      </a:bgFillStyleLst>
+    </a:fmtScheme>
+  </a:themeElements>
+  <a:objectDefaults/>
+  <a:extraClrSchemeLst/>
+  <a:extLst>
+    <a:ext uri="{05A4C25C-085E-4340-85A3-A5531E510DB2}">
+      <thm15:themeFamily xmlns:thm15="http://schemas.microsoft.com/office/thememl/2012/main" name="Office Theme" id="{62F939B6-93AF-4DB8-9C6B-D6C7DFDC589F}" vid="{4A3C46E8-61CC-4603-A589-7422A47A8E4A}"/>
+    </a:ext>
+  </a:extLst>
+</a:theme>
 </file>
--- a/slides/Intel_CET_Linux_Summit_NA_2026.pptx
+++ b/slides/Intel_CET_Linux_Summit_NA_2026.pptx
@@ -225,7 +225,7 @@
           <a:p>
             <a:fld id="{F49FE757-DDF4-A24B-877B-B462EA62A178}" type="datetimeFigureOut">
               <a:rPr lang="en-US" smtClean="0"/>
-              <a:t>5/19/26</a:t>
+              <a:t>5/20/26</a:t>
             </a:fld>
             <a:endParaRPr lang="en-US"/>
           </a:p>
@@ -1674,7 +1674,7 @@
           <a:p>
             <a:fld id="{5BCAD085-E8A6-8845-BD4E-CB4CCA059FC4}" type="datetimeFigureOut">
               <a:rPr lang="en-US" smtClean="0"/>
-              <a:t>5/19/26</a:t>
+              <a:t>5/20/26</a:t>
             </a:fld>
             <a:endParaRPr lang="en-US"/>
           </a:p>
@@ -1842,7 +1842,7 @@
           <a:p>
             <a:fld id="{5BCAD085-E8A6-8845-BD4E-CB4CCA059FC4}" type="datetimeFigureOut">
               <a:rPr lang="en-US" smtClean="0"/>
-              <a:t>5/19/26</a:t>
+              <a:t>5/20/26</a:t>
             </a:fld>
             <a:endParaRPr lang="en-US"/>
           </a:p>
@@ -2020,7 +2020,7 @@
           <a:p>
             <a:fld id="{5BCAD085-E8A6-8845-BD4E-CB4CCA059FC4}" type="datetimeFigureOut">
               <a:rPr lang="en-US" smtClean="0"/>
-              <a:t>5/19/26</a:t>
+              <a:t>5/20/26</a:t>
             </a:fld>
             <a:endParaRPr lang="en-US"/>
           </a:p>
@@ -2188,7 +2188,7 @@
           <a:p>
             <a:fld id="{5BCAD085-E8A6-8845-BD4E-CB4CCA059FC4}" type="datetimeFigureOut">
               <a:rPr lang="en-US" smtClean="0"/>
-              <a:t>5/19/26</a:t>
+              <a:t>5/20/26</a:t>
             </a:fld>
             <a:endParaRPr lang="en-US"/>
           </a:p>
@@ -2433,7 +2433,7 @@
           <a:p>
             <a:fld id="{5BCAD085-E8A6-8845-BD4E-CB4CCA059FC4}" type="datetimeFigureOut">
               <a:rPr lang="en-US" smtClean="0"/>
-              <a:t>5/19/26</a:t>
+              <a:t>5/20/26</a:t>
             </a:fld>
             <a:endParaRPr lang="en-US"/>
           </a:p>
@@ -2718,7 +2718,7 @@
           <a:p>
             <a:fld id="{5BCAD085-E8A6-8845-BD4E-CB4CCA059FC4}" type="datetimeFigureOut">
               <a:rPr lang="en-US" smtClean="0"/>
-              <a:t>5/19/26</a:t>
+              <a:t>5/20/26</a:t>
             </a:fld>
             <a:endParaRPr lang="en-US"/>
           </a:p>
@@ -3137,7 +3137,7 @@
           <a:p>
             <a:fld id="{5BCAD085-E8A6-8845-BD4E-CB4CCA059FC4}" type="datetimeFigureOut">
               <a:rPr lang="en-US" smtClean="0"/>
-              <a:t>5/19/26</a:t>
+              <a:t>5/20/26</a:t>
             </a:fld>
             <a:endParaRPr lang="en-US"/>
           </a:p>
@@ -3254,7 +3254,7 @@
           <a:p>
             <a:fld id="{5BCAD085-E8A6-8845-BD4E-CB4CCA059FC4}" type="datetimeFigureOut">
               <a:rPr lang="en-US" smtClean="0"/>
-              <a:t>5/19/26</a:t>
+              <a:t>5/20/26</a:t>
             </a:fld>
             <a:endParaRPr lang="en-US"/>
           </a:p>
@@ -3349,7 +3349,7 @@
           <a:p>
             <a:fld id="{5BCAD085-E8A6-8845-BD4E-CB4CCA059FC4}" type="datetimeFigureOut">
               <a:rPr lang="en-US" smtClean="0"/>
-              <a:t>5/19/26</a:t>
+              <a:t>5/20/26</a:t>
             </a:fld>
             <a:endParaRPr lang="en-US"/>
           </a:p>
@@ -3624,7 +3624,7 @@
           <a:p>
             <a:fld id="{5BCAD085-E8A6-8845-BD4E-CB4CCA059FC4}" type="datetimeFigureOut">
               <a:rPr lang="en-US" smtClean="0"/>
-              <a:t>5/19/26</a:t>
+              <a:t>5/20/26</a:t>
             </a:fld>
             <a:endParaRPr lang="en-US"/>
           </a:p>
@@ -3876,7 +3876,7 @@
           <a:p>
             <a:fld id="{5BCAD085-E8A6-8845-BD4E-CB4CCA059FC4}" type="datetimeFigureOut">
               <a:rPr lang="en-US" smtClean="0"/>
-              <a:t>5/19/26</a:t>
+              <a:t>5/20/26</a:t>
             </a:fld>
             <a:endParaRPr lang="en-US"/>
           </a:p>
@@ -4087,7 +4087,7 @@
           <a:p>
             <a:fld id="{5BCAD085-E8A6-8845-BD4E-CB4CCA059FC4}" type="datetimeFigureOut">
               <a:rPr lang="en-US" smtClean="0"/>
-              <a:t>5/19/26</a:t>
+              <a:t>5/20/26</a:t>
             </a:fld>
             <a:endParaRPr lang="en-US"/>
           </a:p>
@@ -4638,7 +4638,7 @@
         </p:nvGrpSpPr>
         <p:grpSpPr>
           <a:xfrm>
-            <a:off x="588757" y="4594860"/>
+            <a:off x="447675" y="4606436"/>
             <a:ext cx="2573991" cy="533400"/>
             <a:chOff x="438150" y="4581525"/>
             <a:chExt cx="2573991" cy="533400"/>
@@ -4744,13 +4744,13 @@
   <p:clrMapOvr>
     <a:masterClrMapping/>
   </p:clrMapOvr>
-  <mc:AlternateContent xmlns:mc="http://schemas.openxmlformats.org/markup-compatibility/2006">
-    <mc:Choice xmlns:p14="http://schemas.microsoft.com/office/powerpoint/2010/main" Requires="p14">
+  <mc:AlternateContent xmlns:mc="http://schemas.openxmlformats.org/markup-compatibility/2006" xmlns:p14="http://schemas.microsoft.com/office/powerpoint/2010/main">
+    <mc:Choice Requires="p14">
       <p:transition p14:dur="400">
         <p:fade/>
       </p:transition>
     </mc:Choice>
-    <mc:Fallback>
+    <mc:Fallback xmlns="">
       <p:transition>
         <p:fade/>
       </p:transition>
@@ -7682,13 +7682,13 @@
   <p:clrMapOvr>
     <a:masterClrMapping/>
   </p:clrMapOvr>
-  <mc:AlternateContent xmlns:mc="http://schemas.openxmlformats.org/markup-compatibility/2006">
-    <mc:Choice xmlns:p14="http://schemas.microsoft.com/office/powerpoint/2010/main" Requires="p14">
+  <mc:AlternateContent xmlns:mc="http://schemas.openxmlformats.org/markup-compatibility/2006" xmlns:p14="http://schemas.microsoft.com/office/powerpoint/2010/main">
+    <mc:Choice Requires="p14">
       <p:transition p14:dur="400">
         <p:fade/>
       </p:transition>
     </mc:Choice>
-    <mc:Fallback>
+    <mc:Fallback xmlns="">
       <p:transition>
         <p:fade/>
       </p:transition>
@@ -10269,13 +10269,13 @@
   <p:clrMapOvr>
     <a:masterClrMapping/>
   </p:clrMapOvr>
-  <mc:AlternateContent xmlns:mc="http://schemas.openxmlformats.org/markup-compatibility/2006">
-    <mc:Choice xmlns:p14="http://schemas.microsoft.com/office/powerpoint/2010/main" Requires="p14">
+  <mc:AlternateContent xmlns:mc="http://schemas.openxmlformats.org/markup-compatibility/2006" xmlns:p14="http://schemas.microsoft.com/office/powerpoint/2010/main">
+    <mc:Choice Requires="p14">
       <p:transition p14:dur="400">
         <p:fade/>
       </p:transition>
     </mc:Choice>
-    <mc:Fallback>
+    <mc:Fallback xmlns="">
       <p:transition>
         <p:fade/>
       </p:transition>
@@ -12169,97 +12169,13 @@
         </p:sp>
         <p:sp>
           <p:nvSpPr>
-            <p:cNvPr id="47" name="TextBox 47"/>
-            <p:cNvSpPr txBox="1"/>
-            <p:nvPr/>
-          </p:nvSpPr>
-          <p:spPr>
-            <a:xfrm>
-              <a:off x="3806071" y="5307806"/>
-              <a:ext cx="4579858" cy="228600"/>
-            </a:xfrm>
-            <a:prstGeom prst="rect">
-              <a:avLst/>
-            </a:prstGeom>
-            <a:noFill/>
-            <a:ln>
-              <a:noFill/>
-            </a:ln>
-          </p:spPr>
-          <p:txBody>
-            <a:bodyPr wrap="none" lIns="0" tIns="0" rIns="0" bIns="0" anchor="t" anchorCtr="0">
-              <a:spAutoFit/>
-            </a:bodyPr>
-            <a:lstStyle/>
-            <a:p>
-              <a:pPr algn="ctr"/>
-              <a:r>
-                <a:rPr lang="zh-CN" sz="1125" b="1" dirty="0">
-                  <a:solidFill>
-                    <a:srgbClr val="0AB36E"/>
-                  </a:solidFill>
-                  <a:latin typeface="Arial"/>
-                  <a:ea typeface="Microsoft YaHei"/>
-                  <a:cs typeface="Arial"/>
-                </a:rPr>
-                <a:t>sa_restorer</a:t>
-              </a:r>
-              <a:r>
-                <a:rPr lang="zh-CN" sz="1125" dirty="0">
-                  <a:solidFill>
-                    <a:srgbClr val="FFFFFF"/>
-                  </a:solidFill>
-                  <a:latin typeface="Arial"/>
-                  <a:ea typeface="Microsoft YaHei"/>
-                  <a:cs typeface="Arial"/>
-                </a:rPr>
-                <a:t> = </a:t>
-              </a:r>
-              <a:r>
-                <a:rPr lang="zh-CN" sz="1125" dirty="0">
-                  <a:solidFill>
-                    <a:srgbClr val="F79646"/>
-                  </a:solidFill>
-                  <a:latin typeface="Consolas"/>
-                  <a:ea typeface="Microsoft YaHei"/>
-                  <a:cs typeface="Consolas"/>
-                </a:rPr>
-                <a:t>__restore_rt</a:t>
-              </a:r>
-              <a:r>
-                <a:rPr lang="zh-CN" sz="1125" dirty="0">
-                  <a:solidFill>
-                    <a:srgbClr val="FFFFFF"/>
-                  </a:solidFill>
-                  <a:latin typeface="Arial"/>
-                  <a:ea typeface="Microsoft YaHei"/>
-                  <a:cs typeface="Arial"/>
-                </a:rPr>
-                <a:t> in vDSO — calls </a:t>
-              </a:r>
-              <a:r>
-                <a:rPr lang="zh-CN" sz="1125" dirty="0">
-                  <a:solidFill>
-                    <a:srgbClr val="F79646"/>
-                  </a:solidFill>
-                  <a:latin typeface="Consolas"/>
-                  <a:ea typeface="Microsoft YaHei"/>
-                  <a:cs typeface="Consolas"/>
-                </a:rPr>
-                <a:t>rt_sigreturn</a:t>
-              </a:r>
-            </a:p>
-          </p:txBody>
-        </p:sp>
-        <p:sp>
-          <p:nvSpPr>
             <p:cNvPr id="48" name="TextBox 48"/>
             <p:cNvSpPr txBox="1"/>
             <p:nvPr/>
           </p:nvSpPr>
           <p:spPr>
             <a:xfrm>
-              <a:off x="3484840" y="5533549"/>
+              <a:off x="3484840" y="5349239"/>
               <a:ext cx="5222319" cy="198120"/>
             </a:xfrm>
             <a:prstGeom prst="rect">
@@ -12380,13 +12296,13 @@
   <p:clrMapOvr>
     <a:masterClrMapping/>
   </p:clrMapOvr>
-  <mc:AlternateContent xmlns:mc="http://schemas.openxmlformats.org/markup-compatibility/2006">
-    <mc:Choice xmlns:p14="http://schemas.microsoft.com/office/powerpoint/2010/main" Requires="p14">
+  <mc:AlternateContent xmlns:mc="http://schemas.openxmlformats.org/markup-compatibility/2006" xmlns:p14="http://schemas.microsoft.com/office/powerpoint/2010/main">
+    <mc:Choice Requires="p14">
       <p:transition p14:dur="400">
         <p:fade/>
       </p:transition>
     </mc:Choice>
-    <mc:Fallback>
+    <mc:Fallback xmlns="">
       <p:transition>
         <p:fade/>
       </p:transition>
@@ -14128,7 +14044,7 @@
           <p:spPr>
             <a:xfrm>
               <a:off x="7607618" y="2523649"/>
-              <a:ext cx="1633871" cy="198120"/>
+              <a:ext cx="965008" cy="150041"/>
             </a:xfrm>
             <a:prstGeom prst="rect">
               <a:avLst/>
@@ -14154,7 +14070,7 @@
                   <a:ea typeface="Microsoft YaHei"/>
                   <a:cs typeface="Consolas"/>
                 </a:rPr>
-                <a:t>= __restore_rt in vDSO</a:t>
+                <a:t>= __restore_rt</a:t>
               </a:r>
             </a:p>
           </p:txBody>
@@ -14734,13 +14650,13 @@
   <p:clrMapOvr>
     <a:masterClrMapping/>
   </p:clrMapOvr>
-  <mc:AlternateContent xmlns:mc="http://schemas.openxmlformats.org/markup-compatibility/2006">
-    <mc:Choice xmlns:p14="http://schemas.microsoft.com/office/powerpoint/2010/main" Requires="p14">
+  <mc:AlternateContent xmlns:mc="http://schemas.openxmlformats.org/markup-compatibility/2006" xmlns:p14="http://schemas.microsoft.com/office/powerpoint/2010/main">
+    <mc:Choice Requires="p14">
       <p:transition p14:dur="400">
         <p:fade/>
       </p:transition>
     </mc:Choice>
-    <mc:Fallback>
+    <mc:Fallback xmlns="">
       <p:transition>
         <p:fade/>
       </p:transition>
@@ -17695,13 +17611,13 @@
   <p:clrMapOvr>
     <a:masterClrMapping/>
   </p:clrMapOvr>
-  <mc:AlternateContent xmlns:mc="http://schemas.openxmlformats.org/markup-compatibility/2006">
-    <mc:Choice xmlns:p14="http://schemas.microsoft.com/office/powerpoint/2010/main" Requires="p14">
+  <mc:AlternateContent xmlns:mc="http://schemas.openxmlformats.org/markup-compatibility/2006" xmlns:p14="http://schemas.microsoft.com/office/powerpoint/2010/main">
+    <mc:Choice Requires="p14">
       <p:transition p14:dur="400">
         <p:fade/>
       </p:transition>
     </mc:Choice>
-    <mc:Fallback>
+    <mc:Fallback xmlns="">
       <p:transition>
         <p:fade/>
       </p:transition>
@@ -20173,13 +20089,13 @@
   <p:clrMapOvr>
     <a:masterClrMapping/>
   </p:clrMapOvr>
-  <mc:AlternateContent xmlns:mc="http://schemas.openxmlformats.org/markup-compatibility/2006">
-    <mc:Choice xmlns:p14="http://schemas.microsoft.com/office/powerpoint/2010/main" Requires="p14">
+  <mc:AlternateContent xmlns:mc="http://schemas.openxmlformats.org/markup-compatibility/2006" xmlns:p14="http://schemas.microsoft.com/office/powerpoint/2010/main">
+    <mc:Choice Requires="p14">
       <p:transition p14:dur="400">
         <p:fade/>
       </p:transition>
     </mc:Choice>
-    <mc:Fallback>
+    <mc:Fallback xmlns="">
       <p:transition>
         <p:fade/>
       </p:transition>
@@ -21424,10 +21340,10 @@
         </p:nvGrpSpPr>
         <p:grpSpPr>
           <a:xfrm>
-            <a:off x="476250" y="3314700"/>
-            <a:ext cx="5238750" cy="1585912"/>
-            <a:chOff x="476250" y="3314700"/>
-            <a:chExt cx="5238750" cy="1585912"/>
+            <a:off x="476250" y="3314699"/>
+            <a:ext cx="5238750" cy="1629251"/>
+            <a:chOff x="476250" y="3314699"/>
+            <a:chExt cx="5238750" cy="1629251"/>
           </a:xfrm>
         </p:grpSpPr>
         <p:sp>
@@ -21438,8 +21354,8 @@
           </p:nvSpPr>
           <p:spPr>
             <a:xfrm>
-              <a:off x="476250" y="3314700"/>
-              <a:ext cx="5238750" cy="1238250"/>
+              <a:off x="476250" y="3314699"/>
+              <a:ext cx="5238750" cy="1629251"/>
             </a:xfrm>
             <a:prstGeom prst="roundRect">
               <a:avLst>
@@ -22679,7 +22595,7 @@
         </p:nvGrpSpPr>
         <p:grpSpPr>
           <a:xfrm>
-            <a:off x="476250" y="4762500"/>
+            <a:off x="429696" y="5024437"/>
             <a:ext cx="11239500" cy="1000125"/>
             <a:chOff x="476250" y="4762500"/>
             <a:chExt cx="11239500" cy="1000125"/>
@@ -22944,13 +22860,13 @@
   <p:clrMapOvr>
     <a:masterClrMapping/>
   </p:clrMapOvr>
-  <mc:AlternateContent xmlns:mc="http://schemas.openxmlformats.org/markup-compatibility/2006">
-    <mc:Choice xmlns:p14="http://schemas.microsoft.com/office/powerpoint/2010/main" Requires="p14">
+  <mc:AlternateContent xmlns:mc="http://schemas.openxmlformats.org/markup-compatibility/2006" xmlns:p14="http://schemas.microsoft.com/office/powerpoint/2010/main">
+    <mc:Choice Requires="p14">
       <p:transition p14:dur="400">
         <p:fade/>
       </p:transition>
     </mc:Choice>
-    <mc:Fallback>
+    <mc:Fallback xmlns="">
       <p:transition>
         <p:fade/>
       </p:transition>
@@ -25263,13 +25179,13 @@
   <p:clrMapOvr>
     <a:masterClrMapping/>
   </p:clrMapOvr>
-  <mc:AlternateContent xmlns:mc="http://schemas.openxmlformats.org/markup-compatibility/2006">
-    <mc:Choice xmlns:p14="http://schemas.microsoft.com/office/powerpoint/2010/main" Requires="p14">
+  <mc:AlternateContent xmlns:mc="http://schemas.openxmlformats.org/markup-compatibility/2006" xmlns:p14="http://schemas.microsoft.com/office/powerpoint/2010/main">
+    <mc:Choice Requires="p14">
       <p:transition p14:dur="400">
         <p:fade/>
       </p:transition>
     </mc:Choice>
-    <mc:Fallback>
+    <mc:Fallback xmlns="">
       <p:transition>
         <p:fade/>
       </p:transition>
@@ -27037,13 +26953,13 @@
   <p:clrMapOvr>
     <a:masterClrMapping/>
   </p:clrMapOvr>
-  <mc:AlternateContent xmlns:mc="http://schemas.openxmlformats.org/markup-compatibility/2006">
-    <mc:Choice xmlns:p14="http://schemas.microsoft.com/office/powerpoint/2010/main" Requires="p14">
+  <mc:AlternateContent xmlns:mc="http://schemas.openxmlformats.org/markup-compatibility/2006" xmlns:p14="http://schemas.microsoft.com/office/powerpoint/2010/main">
+    <mc:Choice Requires="p14">
       <p:transition p14:dur="400">
         <p:fade/>
       </p:transition>
     </mc:Choice>
-    <mc:Fallback>
+    <mc:Fallback xmlns="">
       <p:transition>
         <p:fade/>
       </p:transition>
@@ -28416,13 +28332,13 @@
   <p:clrMapOvr>
     <a:masterClrMapping/>
   </p:clrMapOvr>
-  <mc:AlternateContent xmlns:mc="http://schemas.openxmlformats.org/markup-compatibility/2006">
-    <mc:Choice xmlns:p14="http://schemas.microsoft.com/office/powerpoint/2010/main" Requires="p14">
+  <mc:AlternateContent xmlns:mc="http://schemas.openxmlformats.org/markup-compatibility/2006" xmlns:p14="http://schemas.microsoft.com/office/powerpoint/2010/main">
+    <mc:Choice Requires="p14">
       <p:transition p14:dur="400">
         <p:fade/>
       </p:transition>
     </mc:Choice>
-    <mc:Fallback>
+    <mc:Fallback xmlns="">
       <p:transition>
         <p:fade/>
       </p:transition>
@@ -30245,13 +30161,13 @@
   <p:clrMapOvr>
     <a:masterClrMapping/>
   </p:clrMapOvr>
-  <mc:AlternateContent xmlns:mc="http://schemas.openxmlformats.org/markup-compatibility/2006">
-    <mc:Choice xmlns:p14="http://schemas.microsoft.com/office/powerpoint/2010/main" Requires="p14">
+  <mc:AlternateContent xmlns:mc="http://schemas.openxmlformats.org/markup-compatibility/2006" xmlns:p14="http://schemas.microsoft.com/office/powerpoint/2010/main">
+    <mc:Choice Requires="p14">
       <p:transition p14:dur="400">
         <p:fade/>
       </p:transition>
     </mc:Choice>
-    <mc:Fallback>
+    <mc:Fallback xmlns="">
       <p:transition>
         <p:fade/>
       </p:transition>
@@ -32445,13 +32361,13 @@
   <p:clrMapOvr>
     <a:masterClrMapping/>
   </p:clrMapOvr>
-  <mc:AlternateContent xmlns:mc="http://schemas.openxmlformats.org/markup-compatibility/2006">
-    <mc:Choice xmlns:p14="http://schemas.microsoft.com/office/powerpoint/2010/main" Requires="p14">
+  <mc:AlternateContent xmlns:mc="http://schemas.openxmlformats.org/markup-compatibility/2006" xmlns:p14="http://schemas.microsoft.com/office/powerpoint/2010/main">
+    <mc:Choice Requires="p14">
       <p:transition p14:dur="400">
         <p:fade/>
       </p:transition>
     </mc:Choice>
-    <mc:Fallback>
+    <mc:Fallback xmlns="">
       <p:transition>
         <p:fade/>
       </p:transition>
@@ -34543,13 +34459,13 @@
   <p:clrMapOvr>
     <a:masterClrMapping/>
   </p:clrMapOvr>
-  <mc:AlternateContent xmlns:mc="http://schemas.openxmlformats.org/markup-compatibility/2006">
-    <mc:Choice xmlns:p14="http://schemas.microsoft.com/office/powerpoint/2010/main" Requires="p14">
+  <mc:AlternateContent xmlns:mc="http://schemas.openxmlformats.org/markup-compatibility/2006" xmlns:p14="http://schemas.microsoft.com/office/powerpoint/2010/main">
+    <mc:Choice Requires="p14">
       <p:transition p14:dur="400">
         <p:fade/>
       </p:transition>
     </mc:Choice>
-    <mc:Fallback>
+    <mc:Fallback xmlns="">
       <p:transition>
         <p:fade/>
       </p:transition>
@@ -37109,13 +37025,13 @@
   <p:clrMapOvr>
     <a:masterClrMapping/>
   </p:clrMapOvr>
-  <mc:AlternateContent xmlns:mc="http://schemas.openxmlformats.org/markup-compatibility/2006">
-    <mc:Choice xmlns:p14="http://schemas.microsoft.com/office/powerpoint/2010/main" Requires="p14">
+  <mc:AlternateContent xmlns:mc="http://schemas.openxmlformats.org/markup-compatibility/2006" xmlns:p14="http://schemas.microsoft.com/office/powerpoint/2010/main">
+    <mc:Choice Requires="p14">
       <p:transition p14:dur="400">
         <p:fade/>
       </p:transition>
     </mc:Choice>
-    <mc:Fallback>
+    <mc:Fallback xmlns="">
       <p:transition>
         <p:fade/>
       </p:transition>
@@ -39527,13 +39443,13 @@
   <p:clrMapOvr>
     <a:masterClrMapping/>
   </p:clrMapOvr>
-  <mc:AlternateContent xmlns:mc="http://schemas.openxmlformats.org/markup-compatibility/2006">
-    <mc:Choice xmlns:p14="http://schemas.microsoft.com/office/powerpoint/2010/main" Requires="p14">
+  <mc:AlternateContent xmlns:mc="http://schemas.openxmlformats.org/markup-compatibility/2006" xmlns:p14="http://schemas.microsoft.com/office/powerpoint/2010/main">
+    <mc:Choice Requires="p14">
       <p:transition p14:dur="400">
         <p:fade/>
       </p:transition>
     </mc:Choice>
-    <mc:Fallback>
+    <mc:Fallback xmlns="">
       <p:transition>
         <p:fade/>
       </p:transition>
@@ -42051,13 +41967,13 @@
   <p:clrMapOvr>
     <a:masterClrMapping/>
   </p:clrMapOvr>
-  <mc:AlternateContent xmlns:mc="http://schemas.openxmlformats.org/markup-compatibility/2006">
-    <mc:Choice xmlns:p14="http://schemas.microsoft.com/office/powerpoint/2010/main" Requires="p14">
+  <mc:AlternateContent xmlns:mc="http://schemas.openxmlformats.org/markup-compatibility/2006" xmlns:p14="http://schemas.microsoft.com/office/powerpoint/2010/main">
+    <mc:Choice Requires="p14">
       <p:transition p14:dur="400">
         <p:fade/>
       </p:transition>
     </mc:Choice>
-    <mc:Fallback>
+    <mc:Fallback xmlns="">
       <p:transition>
         <p:fade/>
       </p:transition>
@@ -44525,13 +44441,13 @@
   <p:clrMapOvr>
     <a:masterClrMapping/>
   </p:clrMapOvr>
-  <mc:AlternateContent xmlns:mc="http://schemas.openxmlformats.org/markup-compatibility/2006">
-    <mc:Choice xmlns:p14="http://schemas.microsoft.com/office/powerpoint/2010/main" Requires="p14">
+  <mc:AlternateContent xmlns:mc="http://schemas.openxmlformats.org/markup-compatibility/2006" xmlns:p14="http://schemas.microsoft.com/office/powerpoint/2010/main">
+    <mc:Choice Requires="p14">
       <p:transition p14:dur="400">
         <p:fade/>
       </p:transition>
     </mc:Choice>
-    <mc:Fallback>
+    <mc:Fallback xmlns="">
       <p:transition>
         <p:fade/>
       </p:transition>

--- a/slides/Intel_CET_Linux_Summit_NA_2026.pptx
+++ b/slides/Intel_CET_Linux_Summit_NA_2026.pptx
@@ -37375,6 +37375,13 @@
               <a:noFill/>
             </a:ln>
           </p:spPr>
+          <p:txBody>
+            <a:bodyPr/>
+            <a:lstStyle/>
+            <a:p>
+              <a:endParaRPr lang="en-US" dirty="0"/>
+            </a:p>
+          </p:txBody>
         </p:sp>
         <p:sp>
           <p:nvSpPr>
@@ -37464,8 +37471,8 @@
           </p:nvSpPr>
           <p:spPr>
             <a:xfrm>
-              <a:off x="653415" y="1963102"/>
-              <a:ext cx="2418969" cy="213360"/>
+              <a:off x="691147" y="2198553"/>
+              <a:ext cx="3097002" cy="161583"/>
             </a:xfrm>
             <a:prstGeom prst="rect">
               <a:avLst/>
@@ -37491,21 +37498,43 @@
                   <a:ea typeface="Microsoft YaHei"/>
                   <a:cs typeface="Consolas"/>
                 </a:rPr>
-                <a:t>  asm volatile(                           \</a:t>
-              </a:r>
-            </a:p>
-          </p:txBody>
-        </p:sp>
-        <p:sp>
-          <p:nvSpPr>
-            <p:cNvPr id="10" name="TextBox 10"/>
-            <p:cNvSpPr txBox="1"/>
-            <p:nvPr/>
-          </p:nvSpPr>
-          <p:spPr>
-            <a:xfrm>
-              <a:off x="653415" y="2182178"/>
-              <a:ext cx="2464975" cy="213360"/>
+                <a:t>  asm (                           </a:t>
+              </a:r>
+              <a:r>
+                <a:rPr lang="en-US" altLang="zh-CN" sz="1050" dirty="0">
+                  <a:solidFill>
+                    <a:srgbClr val="E0E0E0"/>
+                  </a:solidFill>
+                  <a:latin typeface="Consolas"/>
+                  <a:ea typeface="Microsoft YaHei"/>
+                  <a:cs typeface="Consolas"/>
+                </a:rPr>
+                <a:t>       </a:t>
+              </a:r>
+              <a:r>
+                <a:rPr lang="zh-CN" sz="1050" dirty="0">
+                  <a:solidFill>
+                    <a:srgbClr val="E0E0E0"/>
+                  </a:solidFill>
+                  <a:latin typeface="Consolas"/>
+                  <a:ea typeface="Microsoft YaHei"/>
+                  <a:cs typeface="Consolas"/>
+                </a:rPr>
+                <a:t>\</a:t>
+              </a:r>
+            </a:p>
+          </p:txBody>
+        </p:sp>
+        <p:sp>
+          <p:nvSpPr>
+            <p:cNvPr id="11" name="TextBox 11"/>
+            <p:cNvSpPr txBox="1"/>
+            <p:nvPr/>
+          </p:nvSpPr>
+          <p:spPr>
+            <a:xfrm>
+              <a:off x="653415" y="2401252"/>
+              <a:ext cx="3097002" cy="161583"/>
             </a:xfrm>
             <a:prstGeom prst="rect">
               <a:avLst/>
@@ -37525,27 +37554,217 @@
               <a:r>
                 <a:rPr lang="zh-CN" sz="1050" dirty="0">
                   <a:solidFill>
+                    <a:srgbClr val="F79646"/>
+                  </a:solidFill>
+                  <a:latin typeface="Consolas"/>
+                  <a:ea typeface="Microsoft YaHei"/>
+                  <a:cs typeface="Consolas"/>
+                </a:rPr>
+                <a:t>      "mov $~0xfa1e0ff3, %[</a:t>
+              </a:r>
+              <a:r>
+                <a:rPr lang="en-US" altLang="zh-CN" sz="1050" dirty="0" err="1">
+                  <a:solidFill>
+                    <a:srgbClr val="F79646"/>
+                  </a:solidFill>
+                  <a:latin typeface="Consolas"/>
+                  <a:ea typeface="Microsoft YaHei"/>
+                  <a:cs typeface="Consolas"/>
+                </a:rPr>
+                <a:t>endbr</a:t>
+              </a:r>
+              <a:r>
+                <a:rPr lang="zh-CN" sz="1050" dirty="0">
+                  <a:solidFill>
+                    <a:srgbClr val="F79646"/>
+                  </a:solidFill>
+                  <a:latin typeface="Consolas"/>
+                  <a:ea typeface="Microsoft YaHei"/>
+                  <a:cs typeface="Consolas"/>
+                </a:rPr>
+                <a:t>]\n\t"  </a:t>
+              </a:r>
+              <a:r>
+                <a:rPr lang="en-US" altLang="zh-CN" sz="1050" dirty="0">
+                  <a:solidFill>
+                    <a:srgbClr val="F79646"/>
+                  </a:solidFill>
+                  <a:latin typeface="Consolas"/>
+                  <a:ea typeface="Microsoft YaHei"/>
+                  <a:cs typeface="Consolas"/>
+                </a:rPr>
+                <a:t> </a:t>
+              </a:r>
+              <a:r>
+                <a:rPr lang="zh-CN" sz="1050" dirty="0">
+                  <a:solidFill>
+                    <a:srgbClr val="F79646"/>
+                  </a:solidFill>
+                  <a:latin typeface="Consolas"/>
+                  <a:ea typeface="Microsoft YaHei"/>
+                  <a:cs typeface="Consolas"/>
+                </a:rPr>
+                <a:t>\</a:t>
+              </a:r>
+            </a:p>
+          </p:txBody>
+        </p:sp>
+        <p:sp>
+          <p:nvSpPr>
+            <p:cNvPr id="12" name="TextBox 12"/>
+            <p:cNvSpPr txBox="1"/>
+            <p:nvPr/>
+          </p:nvSpPr>
+          <p:spPr>
+            <a:xfrm>
+              <a:off x="653415" y="2620328"/>
+              <a:ext cx="3097002" cy="161583"/>
+            </a:xfrm>
+            <a:prstGeom prst="rect">
+              <a:avLst/>
+            </a:prstGeom>
+            <a:noFill/>
+            <a:ln>
+              <a:noFill/>
+            </a:ln>
+          </p:spPr>
+          <p:txBody>
+            <a:bodyPr wrap="none" lIns="0" tIns="0" rIns="0" bIns="0" anchor="t" anchorCtr="0">
+              <a:spAutoFit/>
+            </a:bodyPr>
+            <a:lstStyle/>
+            <a:p>
+              <a:pPr algn="l"/>
+              <a:r>
+                <a:rPr lang="zh-CN" sz="1050" dirty="0">
+                  <a:solidFill>
+                    <a:srgbClr val="F79646"/>
+                  </a:solidFill>
+                  <a:latin typeface="Consolas"/>
+                  <a:ea typeface="Microsoft YaHei"/>
+                  <a:cs typeface="Consolas"/>
+                </a:rPr>
+                <a:t>      "not %[</a:t>
+              </a:r>
+              <a:r>
+                <a:rPr lang="en-US" altLang="zh-CN" sz="1050" dirty="0" err="1">
+                  <a:solidFill>
+                    <a:srgbClr val="F79646"/>
+                  </a:solidFill>
+                  <a:latin typeface="Consolas"/>
+                  <a:ea typeface="Microsoft YaHei"/>
+                  <a:cs typeface="Consolas"/>
+                </a:rPr>
+                <a:t>endbr</a:t>
+              </a:r>
+              <a:r>
+                <a:rPr lang="zh-CN" sz="1050" dirty="0">
+                  <a:solidFill>
+                    <a:srgbClr val="F79646"/>
+                  </a:solidFill>
+                  <a:latin typeface="Consolas"/>
+                  <a:ea typeface="Microsoft YaHei"/>
+                  <a:cs typeface="Consolas"/>
+                </a:rPr>
+                <a:t>]\n\t",              </a:t>
+              </a:r>
+              <a:r>
+                <a:rPr lang="en-US" altLang="zh-CN" sz="1050" dirty="0">
+                  <a:solidFill>
+                    <a:srgbClr val="F79646"/>
+                  </a:solidFill>
+                  <a:latin typeface="Consolas"/>
+                  <a:ea typeface="Microsoft YaHei"/>
+                  <a:cs typeface="Consolas"/>
+                </a:rPr>
+                <a:t>  </a:t>
+              </a:r>
+              <a:r>
+                <a:rPr lang="zh-CN" sz="1050" dirty="0">
+                  <a:solidFill>
+                    <a:srgbClr val="F79646"/>
+                  </a:solidFill>
+                  <a:latin typeface="Consolas"/>
+                  <a:ea typeface="Microsoft YaHei"/>
+                  <a:cs typeface="Consolas"/>
+                </a:rPr>
+                <a:t>\</a:t>
+              </a:r>
+            </a:p>
+          </p:txBody>
+        </p:sp>
+        <p:sp>
+          <p:nvSpPr>
+            <p:cNvPr id="15" name="TextBox 15"/>
+            <p:cNvSpPr txBox="1"/>
+            <p:nvPr/>
+          </p:nvSpPr>
+          <p:spPr>
+            <a:xfrm>
+              <a:off x="653415" y="2826746"/>
+              <a:ext cx="1032334" cy="161583"/>
+            </a:xfrm>
+            <a:prstGeom prst="rect">
+              <a:avLst/>
+            </a:prstGeom>
+            <a:noFill/>
+            <a:ln>
+              <a:noFill/>
+            </a:ln>
+          </p:spPr>
+          <p:txBody>
+            <a:bodyPr wrap="none" lIns="0" tIns="0" rIns="0" bIns="0" anchor="t" anchorCtr="0">
+              <a:spAutoFit/>
+            </a:bodyPr>
+            <a:lstStyle/>
+            <a:p>
+              <a:pPr algn="l"/>
+              <a:r>
+                <a:rPr lang="zh-CN" sz="1050" dirty="0">
+                  <a:solidFill>
                     <a:srgbClr val="E0E0E0"/>
                   </a:solidFill>
                   <a:latin typeface="Consolas"/>
                   <a:ea typeface="Microsoft YaHei"/>
                   <a:cs typeface="Consolas"/>
                 </a:rPr>
-                <a:t>    ALTERNATIVE(                          \</a:t>
-              </a:r>
-            </a:p>
-          </p:txBody>
-        </p:sp>
-        <p:sp>
-          <p:nvSpPr>
-            <p:cNvPr id="11" name="TextBox 11"/>
-            <p:cNvSpPr txBox="1"/>
-            <p:nvPr/>
-          </p:nvSpPr>
-          <p:spPr>
-            <a:xfrm>
-              <a:off x="653415" y="2401252"/>
-              <a:ext cx="3262408" cy="213360"/>
+                <a:t>    : [</a:t>
+              </a:r>
+              <a:r>
+                <a:rPr lang="en-US" altLang="zh-CN" sz="1050" dirty="0" err="1">
+                  <a:solidFill>
+                    <a:srgbClr val="E0E0E0"/>
+                  </a:solidFill>
+                  <a:latin typeface="Consolas"/>
+                  <a:ea typeface="Microsoft YaHei"/>
+                  <a:cs typeface="Consolas"/>
+                </a:rPr>
+                <a:t>endbr</a:t>
+              </a:r>
+              <a:r>
+                <a:rPr lang="zh-CN" sz="1050" dirty="0">
+                  <a:solidFill>
+                    <a:srgbClr val="E0E0E0"/>
+                  </a:solidFill>
+                  <a:latin typeface="Consolas"/>
+                  <a:ea typeface="Microsoft YaHei"/>
+                  <a:cs typeface="Consolas"/>
+                </a:rPr>
+                <a:t>] </a:t>
+              </a:r>
+            </a:p>
+          </p:txBody>
+        </p:sp>
+        <p:sp>
+          <p:nvSpPr>
+            <p:cNvPr id="16" name="TextBox 16"/>
+            <p:cNvSpPr txBox="1"/>
+            <p:nvPr/>
+          </p:nvSpPr>
+          <p:spPr>
+            <a:xfrm>
+              <a:off x="1713610" y="2823041"/>
+              <a:ext cx="448389" cy="213360"/>
             </a:xfrm>
             <a:prstGeom prst="rect">
               <a:avLst/>
@@ -37571,21 +37790,21 @@
                   <a:ea typeface="Microsoft YaHei"/>
                   <a:cs typeface="Consolas"/>
                 </a:rPr>
-                <a:t>      "mov $~0xfa1e0ff3, %[scratch]\n\t"  \</a:t>
-              </a:r>
-            </a:p>
-          </p:txBody>
-        </p:sp>
-        <p:sp>
-          <p:nvSpPr>
-            <p:cNvPr id="12" name="TextBox 12"/>
-            <p:cNvSpPr txBox="1"/>
-            <p:nvPr/>
-          </p:nvSpPr>
-          <p:spPr>
-            <a:xfrm>
-              <a:off x="653415" y="2620328"/>
-              <a:ext cx="2764012" cy="213360"/>
+                <a:t>"=&amp;r"</a:t>
+              </a:r>
+            </a:p>
+          </p:txBody>
+        </p:sp>
+        <p:sp>
+          <p:nvSpPr>
+            <p:cNvPr id="17" name="TextBox 17"/>
+            <p:cNvSpPr txBox="1"/>
+            <p:nvPr/>
+          </p:nvSpPr>
+          <p:spPr>
+            <a:xfrm>
+              <a:off x="2049994" y="2815589"/>
+              <a:ext cx="1327286" cy="161583"/>
             </a:xfrm>
             <a:prstGeom prst="rect">
               <a:avLst/>
@@ -37605,453 +37824,35 @@
               <a:r>
                 <a:rPr lang="zh-CN" sz="1050" dirty="0">
                   <a:solidFill>
-                    <a:srgbClr val="F79646"/>
+                    <a:srgbClr val="E0E0E0"/>
                   </a:solidFill>
                   <a:latin typeface="Consolas"/>
                   <a:ea typeface="Microsoft YaHei"/>
                   <a:cs typeface="Consolas"/>
                 </a:rPr>
-                <a:t>      "not %[scratch]\n\t",              \</a:t>
-              </a:r>
-            </a:p>
-          </p:txBody>
-        </p:sp>
-        <p:sp>
-          <p:nvSpPr>
-            <p:cNvPr id="13" name="TextBox 13"/>
-            <p:cNvSpPr txBox="1"/>
-            <p:nvPr/>
-          </p:nvSpPr>
-          <p:spPr>
-            <a:xfrm>
-              <a:off x="653415" y="2839402"/>
-              <a:ext cx="2112264" cy="213360"/>
-            </a:xfrm>
-            <a:prstGeom prst="rect">
-              <a:avLst/>
-            </a:prstGeom>
-            <a:noFill/>
-            <a:ln>
-              <a:noFill/>
-            </a:ln>
-          </p:spPr>
-          <p:txBody>
-            <a:bodyPr wrap="none" lIns="0" tIns="0" rIns="0" bIns="0" anchor="t" anchorCtr="0">
-              <a:spAutoFit/>
-            </a:bodyPr>
-            <a:lstStyle/>
-            <a:p>
-              <a:pPr algn="l"/>
+                <a:t> (</a:t>
+              </a:r>
+              <a:r>
+                <a:rPr lang="en-US" altLang="zh-CN" sz="1050" dirty="0" err="1">
+                  <a:solidFill>
+                    <a:srgbClr val="E0E0E0"/>
+                  </a:solidFill>
+                  <a:latin typeface="Consolas"/>
+                  <a:ea typeface="Microsoft YaHei"/>
+                  <a:cs typeface="Consolas"/>
+                </a:rPr>
+                <a:t>endbr</a:t>
+              </a:r>
               <a:r>
                 <a:rPr lang="zh-CN" sz="1050" dirty="0">
                   <a:solidFill>
-                    <a:srgbClr val="F79646"/>
+                    <a:srgbClr val="E0E0E0"/>
                   </a:solidFill>
                   <a:latin typeface="Consolas"/>
                   <a:ea typeface="Microsoft YaHei"/>
                   <a:cs typeface="Consolas"/>
                 </a:rPr>
-                <a:t>      "",                                \</a:t>
-              </a:r>
-            </a:p>
-          </p:txBody>
-        </p:sp>
-        <p:sp>
-          <p:nvSpPr>
-            <p:cNvPr id="14" name="TextBox 14"/>
-            <p:cNvSpPr txBox="1"/>
-            <p:nvPr/>
-          </p:nvSpPr>
-          <p:spPr>
-            <a:xfrm>
-              <a:off x="653415" y="3058478"/>
-              <a:ext cx="2572321" cy="213360"/>
-            </a:xfrm>
-            <a:prstGeom prst="rect">
-              <a:avLst/>
-            </a:prstGeom>
-            <a:noFill/>
-            <a:ln>
-              <a:noFill/>
-            </a:ln>
-          </p:spPr>
-          <p:txBody>
-            <a:bodyPr wrap="none" lIns="0" tIns="0" rIns="0" bIns="0" anchor="t" anchorCtr="0">
-              <a:spAutoFit/>
-            </a:bodyPr>
-            <a:lstStyle/>
-            <a:p>
-              <a:pPr algn="l"/>
-              <a:r>
-                <a:rPr lang="zh-CN" sz="1050" dirty="0">
-                  <a:solidFill>
-                    <a:srgbClr val="E0E0E0"/>
-                  </a:solidFill>
-                  <a:latin typeface="Consolas"/>
-                  <a:ea typeface="Microsoft YaHei"/>
-                  <a:cs typeface="Consolas"/>
-                </a:rPr>
-                <a:t>      X86_FEATURE_IBT)                   \</a:t>
-              </a:r>
-            </a:p>
-          </p:txBody>
-        </p:sp>
-        <p:sp>
-          <p:nvSpPr>
-            <p:cNvPr id="15" name="TextBox 15"/>
-            <p:cNvSpPr txBox="1"/>
-            <p:nvPr/>
-          </p:nvSpPr>
-          <p:spPr>
-            <a:xfrm>
-              <a:off x="653415" y="3277552"/>
-              <a:ext cx="1146143" cy="213360"/>
-            </a:xfrm>
-            <a:prstGeom prst="rect">
-              <a:avLst/>
-            </a:prstGeom>
-            <a:noFill/>
-            <a:ln>
-              <a:noFill/>
-            </a:ln>
-          </p:spPr>
-          <p:txBody>
-            <a:bodyPr wrap="none" lIns="0" tIns="0" rIns="0" bIns="0" anchor="t" anchorCtr="0">
-              <a:spAutoFit/>
-            </a:bodyPr>
-            <a:lstStyle/>
-            <a:p>
-              <a:pPr algn="l"/>
-              <a:r>
-                <a:rPr lang="zh-CN" sz="1050" dirty="0">
-                  <a:solidFill>
-                    <a:srgbClr val="E0E0E0"/>
-                  </a:solidFill>
-                  <a:latin typeface="Consolas"/>
-                  <a:ea typeface="Microsoft YaHei"/>
-                  <a:cs typeface="Consolas"/>
-                </a:rPr>
-                <a:t>    : [scratch] </a:t>
-              </a:r>
-            </a:p>
-          </p:txBody>
-        </p:sp>
-        <p:sp>
-          <p:nvSpPr>
-            <p:cNvPr id="16" name="TextBox 16"/>
-            <p:cNvSpPr txBox="1"/>
-            <p:nvPr/>
-          </p:nvSpPr>
-          <p:spPr>
-            <a:xfrm>
-              <a:off x="2110740" y="3277552"/>
-              <a:ext cx="448389" cy="213360"/>
-            </a:xfrm>
-            <a:prstGeom prst="rect">
-              <a:avLst/>
-            </a:prstGeom>
-            <a:noFill/>
-            <a:ln>
-              <a:noFill/>
-            </a:ln>
-          </p:spPr>
-          <p:txBody>
-            <a:bodyPr wrap="none" lIns="0" tIns="0" rIns="0" bIns="0" anchor="t" anchorCtr="0">
-              <a:spAutoFit/>
-            </a:bodyPr>
-            <a:lstStyle/>
-            <a:p>
-              <a:pPr algn="l"/>
-              <a:r>
-                <a:rPr lang="zh-CN" sz="1050" dirty="0">
-                  <a:solidFill>
-                    <a:srgbClr val="F79646"/>
-                  </a:solidFill>
-                  <a:latin typeface="Consolas"/>
-                  <a:ea typeface="Microsoft YaHei"/>
-                  <a:cs typeface="Consolas"/>
-                </a:rPr>
-                <a:t>"=&amp;r"</a:t>
-              </a:r>
-            </a:p>
-          </p:txBody>
-        </p:sp>
-        <p:sp>
-          <p:nvSpPr>
-            <p:cNvPr id="17" name="TextBox 17"/>
-            <p:cNvSpPr txBox="1"/>
-            <p:nvPr/>
-          </p:nvSpPr>
-          <p:spPr>
-            <a:xfrm>
-              <a:off x="2653665" y="3277552"/>
-              <a:ext cx="1253490" cy="213360"/>
-            </a:xfrm>
-            <a:prstGeom prst="rect">
-              <a:avLst/>
-            </a:prstGeom>
-            <a:noFill/>
-            <a:ln>
-              <a:noFill/>
-            </a:ln>
-          </p:spPr>
-          <p:txBody>
-            <a:bodyPr wrap="none" lIns="0" tIns="0" rIns="0" bIns="0" anchor="t" anchorCtr="0">
-              <a:spAutoFit/>
-            </a:bodyPr>
-            <a:lstStyle/>
-            <a:p>
-              <a:pPr algn="l"/>
-              <a:r>
-                <a:rPr lang="zh-CN" sz="1050" dirty="0">
-                  <a:solidFill>
-                    <a:srgbClr val="E0E0E0"/>
-                  </a:solidFill>
-                  <a:latin typeface="Consolas"/>
-                  <a:ea typeface="Microsoft YaHei"/>
-                  <a:cs typeface="Consolas"/>
-                </a:rPr>
-                <a:t> (__junk)          \</a:t>
-              </a:r>
-            </a:p>
-          </p:txBody>
-        </p:sp>
-        <p:sp>
-          <p:nvSpPr>
-            <p:cNvPr id="18" name="TextBox 18"/>
-            <p:cNvSpPr txBox="1"/>
-            <p:nvPr/>
-          </p:nvSpPr>
-          <p:spPr>
-            <a:xfrm>
-              <a:off x="653415" y="3496628"/>
-              <a:ext cx="2035588" cy="213360"/>
-            </a:xfrm>
-            <a:prstGeom prst="rect">
-              <a:avLst/>
-            </a:prstGeom>
-            <a:noFill/>
-            <a:ln>
-              <a:noFill/>
-            </a:ln>
-          </p:spPr>
-          <p:txBody>
-            <a:bodyPr wrap="none" lIns="0" tIns="0" rIns="0" bIns="0" anchor="t" anchorCtr="0">
-              <a:spAutoFit/>
-            </a:bodyPr>
-            <a:lstStyle/>
-            <a:p>
-              <a:pPr algn="l"/>
-              <a:r>
-                <a:rPr lang="zh-CN" sz="1050" dirty="0">
-                  <a:solidFill>
-                    <a:srgbClr val="E0E0E0"/>
-                  </a:solidFill>
-                  <a:latin typeface="Consolas"/>
-                  <a:ea typeface="Microsoft YaHei"/>
-                  <a:cs typeface="Consolas"/>
-                </a:rPr>
-                <a:t>    :                                    \</a:t>
-              </a:r>
-            </a:p>
-          </p:txBody>
-        </p:sp>
-        <p:sp>
-          <p:nvSpPr>
-            <p:cNvPr id="19" name="TextBox 19"/>
-            <p:cNvSpPr txBox="1"/>
-            <p:nvPr/>
-          </p:nvSpPr>
-          <p:spPr>
-            <a:xfrm>
-              <a:off x="653415" y="3715702"/>
-              <a:ext cx="341043" cy="213360"/>
-            </a:xfrm>
-            <a:prstGeom prst="rect">
-              <a:avLst/>
-            </a:prstGeom>
-            <a:noFill/>
-            <a:ln>
-              <a:noFill/>
-            </a:ln>
-          </p:spPr>
-          <p:txBody>
-            <a:bodyPr wrap="none" lIns="0" tIns="0" rIns="0" bIns="0" anchor="t" anchorCtr="0">
-              <a:spAutoFit/>
-            </a:bodyPr>
-            <a:lstStyle/>
-            <a:p>
-              <a:pPr algn="l"/>
-              <a:r>
-                <a:rPr lang="zh-CN" sz="1050" dirty="0">
-                  <a:solidFill>
-                    <a:srgbClr val="E0E0E0"/>
-                  </a:solidFill>
-                  <a:latin typeface="Consolas"/>
-                  <a:ea typeface="Microsoft YaHei"/>
-                  <a:cs typeface="Consolas"/>
-                </a:rPr>
-                <a:t>    : </a:t>
-              </a:r>
-            </a:p>
-          </p:txBody>
-        </p:sp>
-        <p:sp>
-          <p:nvSpPr>
-            <p:cNvPr id="20" name="TextBox 20"/>
-            <p:cNvSpPr txBox="1"/>
-            <p:nvPr/>
-          </p:nvSpPr>
-          <p:spPr>
-            <a:xfrm>
-              <a:off x="1062990" y="3715702"/>
-              <a:ext cx="762762" cy="213360"/>
-            </a:xfrm>
-            <a:prstGeom prst="rect">
-              <a:avLst/>
-            </a:prstGeom>
-            <a:noFill/>
-            <a:ln>
-              <a:noFill/>
-            </a:ln>
-          </p:spPr>
-          <p:txBody>
-            <a:bodyPr wrap="none" lIns="0" tIns="0" rIns="0" bIns="0" anchor="t" anchorCtr="0">
-              <a:spAutoFit/>
-            </a:bodyPr>
-            <a:lstStyle/>
-            <a:p>
-              <a:pPr algn="l"/>
-              <a:r>
-                <a:rPr lang="zh-CN" sz="1050" dirty="0">
-                  <a:solidFill>
-                    <a:srgbClr val="F79646"/>
-                  </a:solidFill>
-                  <a:latin typeface="Consolas"/>
-                  <a:ea typeface="Microsoft YaHei"/>
-                  <a:cs typeface="Consolas"/>
-                </a:rPr>
-                <a:t>"memory"</a:t>
-              </a:r>
-            </a:p>
-          </p:txBody>
-        </p:sp>
-        <p:sp>
-          <p:nvSpPr>
-            <p:cNvPr id="21" name="TextBox 21"/>
-            <p:cNvSpPr txBox="1"/>
-            <p:nvPr/>
-          </p:nvSpPr>
-          <p:spPr>
-            <a:xfrm>
-              <a:off x="1796415" y="3715702"/>
-              <a:ext cx="195358" cy="213360"/>
-            </a:xfrm>
-            <a:prstGeom prst="rect">
-              <a:avLst/>
-            </a:prstGeom>
-            <a:noFill/>
-            <a:ln>
-              <a:noFill/>
-            </a:ln>
-          </p:spPr>
-          <p:txBody>
-            <a:bodyPr wrap="none" lIns="0" tIns="0" rIns="0" bIns="0" anchor="t" anchorCtr="0">
-              <a:spAutoFit/>
-            </a:bodyPr>
-            <a:lstStyle/>
-            <a:p>
-              <a:pPr algn="l"/>
-              <a:r>
-                <a:rPr lang="zh-CN" sz="1050" dirty="0">
-                  <a:solidFill>
-                    <a:srgbClr val="E0E0E0"/>
-                  </a:solidFill>
-                  <a:latin typeface="Consolas"/>
-                  <a:ea typeface="Microsoft YaHei"/>
-                  <a:cs typeface="Consolas"/>
-                </a:rPr>
-                <a:t>);</a:t>
-              </a:r>
-            </a:p>
-          </p:txBody>
-        </p:sp>
-        <p:sp>
-          <p:nvSpPr>
-            <p:cNvPr id="22" name="TextBox 22"/>
-            <p:cNvSpPr txBox="1"/>
-            <p:nvPr/>
-          </p:nvSpPr>
-          <p:spPr>
-            <a:xfrm>
-              <a:off x="653415" y="4077652"/>
-              <a:ext cx="3837480" cy="213360"/>
-            </a:xfrm>
-            <a:prstGeom prst="rect">
-              <a:avLst/>
-            </a:prstGeom>
-            <a:noFill/>
-            <a:ln>
-              <a:noFill/>
-            </a:ln>
-          </p:spPr>
-          <p:txBody>
-            <a:bodyPr wrap="none" lIns="0" tIns="0" rIns="0" bIns="0" anchor="t" anchorCtr="0">
-              <a:spAutoFit/>
-            </a:bodyPr>
-            <a:lstStyle/>
-            <a:p>
-              <a:pPr algn="l"/>
-              <a:r>
-                <a:rPr lang="zh-CN" sz="1050" dirty="0">
-                  <a:solidFill>
-                    <a:srgbClr val="6A9955"/>
-                  </a:solidFill>
-                  <a:latin typeface="Consolas"/>
-                  <a:ea typeface="Microsoft YaHei"/>
-                  <a:cs typeface="Consolas"/>
-                </a:rPr>
-                <a:t>/* On non-IBT CPUs: ALTERNATIVE patches to NOP */</a:t>
-              </a:r>
-            </a:p>
-          </p:txBody>
-        </p:sp>
-        <p:sp>
-          <p:nvSpPr>
-            <p:cNvPr id="23" name="TextBox 23"/>
-            <p:cNvSpPr txBox="1"/>
-            <p:nvPr/>
-          </p:nvSpPr>
-          <p:spPr>
-            <a:xfrm>
-              <a:off x="653415" y="4296728"/>
-              <a:ext cx="3960162" cy="213360"/>
-            </a:xfrm>
-            <a:prstGeom prst="rect">
-              <a:avLst/>
-            </a:prstGeom>
-            <a:noFill/>
-            <a:ln>
-              <a:noFill/>
-            </a:ln>
-          </p:spPr>
-          <p:txBody>
-            <a:bodyPr wrap="none" lIns="0" tIns="0" rIns="0" bIns="0" anchor="t" anchorCtr="0">
-              <a:spAutoFit/>
-            </a:bodyPr>
-            <a:lstStyle/>
-            <a:p>
-              <a:pPr algn="l"/>
-              <a:r>
-                <a:rPr lang="zh-CN" sz="1050" dirty="0">
-                  <a:solidFill>
-                    <a:srgbClr val="6A9955"/>
-                  </a:solidFill>
-                  <a:latin typeface="Consolas"/>
-                  <a:ea typeface="Microsoft YaHei"/>
-                  <a:cs typeface="Consolas"/>
-                </a:rPr>
-                <a:t>/* On IBT CPUs: mov+not produces ENDBR64 opcode */</a:t>
+                <a:t>)          </a:t>
               </a:r>
             </a:p>
           </p:txBody>
@@ -38791,235 +38592,6 @@
         </p:sp>
         <p:sp>
           <p:nvSpPr>
-            <p:cNvPr id="44" name="Rectangle 44"/>
-            <p:cNvSpPr/>
-            <p:nvPr/>
-          </p:nvSpPr>
-          <p:spPr>
-            <a:xfrm>
-              <a:off x="7429500" y="3762375"/>
-              <a:ext cx="4286250" cy="666750"/>
-            </a:xfrm>
-            <a:prstGeom prst="roundRect">
-              <a:avLst>
-                <a:gd name="adj" fmla="val 8571"/>
-              </a:avLst>
-            </a:prstGeom>
-            <a:solidFill>
-              <a:srgbClr val="FAF5FF"/>
-            </a:solidFill>
-            <a:ln w="14288">
-              <a:solidFill>
-                <a:srgbClr val="AF00C0"/>
-              </a:solidFill>
-            </a:ln>
-          </p:spPr>
-        </p:sp>
-        <p:grpSp>
-          <p:nvGrpSpPr>
-            <p:cNvPr id="47" name="Group 47"/>
-            <p:cNvGrpSpPr/>
-            <p:nvPr/>
-          </p:nvGrpSpPr>
-          <p:grpSpPr>
-            <a:xfrm>
-              <a:off x="7596188" y="3943350"/>
-              <a:ext cx="180975" cy="152400"/>
-              <a:chOff x="7596188" y="3943350"/>
-              <a:chExt cx="180975" cy="152400"/>
-            </a:xfrm>
-          </p:grpSpPr>
-          <p:sp>
-            <p:nvSpPr>
-              <p:cNvPr id="45" name="Freeform 45"/>
-              <p:cNvSpPr/>
-              <p:nvPr/>
-            </p:nvSpPr>
-            <p:spPr>
-              <a:xfrm>
-                <a:off x="7596188" y="3943350"/>
-                <a:ext cx="180975" cy="152400"/>
-              </a:xfrm>
-              <a:custGeom>
-                <a:avLst/>
-                <a:gdLst/>
-                <a:ahLst/>
-                <a:cxnLst/>
-                <a:rect l="l" t="t" r="r" b="b"/>
-                <a:pathLst>
-                  <a:path w="180975" h="152400">
-                    <a:moveTo>
-                      <a:pt x="23812" y="0"/>
-                    </a:moveTo>
-                    <a:cubicBezTo>
-                      <a:pt x="0" y="47625"/>
-                      <a:pt x="0" y="95250"/>
-                      <a:pt x="23812" y="152400"/>
-                    </a:cubicBezTo>
-                    <a:moveTo>
-                      <a:pt x="157162" y="0"/>
-                    </a:moveTo>
-                    <a:cubicBezTo>
-                      <a:pt x="180975" y="47625"/>
-                      <a:pt x="180975" y="95250"/>
-                      <a:pt x="157162" y="152400"/>
-                    </a:cubicBezTo>
-                    <a:moveTo>
-                      <a:pt x="61912" y="47625"/>
-                    </a:moveTo>
-                    <a:lnTo>
-                      <a:pt x="71438" y="47625"/>
-                    </a:lnTo>
-                    <a:cubicBezTo>
-                      <a:pt x="80962" y="47625"/>
-                      <a:pt x="80962" y="57150"/>
-                      <a:pt x="90640" y="81220"/>
-                    </a:cubicBezTo>
-                    <a:cubicBezTo>
-                      <a:pt x="100012" y="104775"/>
-                      <a:pt x="100012" y="114300"/>
-                      <a:pt x="109538" y="114300"/>
-                    </a:cubicBezTo>
-                    <a:lnTo>
-                      <a:pt x="119062" y="114300"/>
-                    </a:lnTo>
-                  </a:path>
-                </a:pathLst>
-              </a:custGeom>
-              <a:noFill/>
-              <a:ln w="19050">
-                <a:solidFill>
-                  <a:srgbClr val="AF00C0"/>
-                </a:solidFill>
-              </a:ln>
-            </p:spPr>
-          </p:sp>
-          <p:sp>
-            <p:nvSpPr>
-              <p:cNvPr id="46" name="Freeform 46"/>
-              <p:cNvSpPr/>
-              <p:nvPr/>
-            </p:nvSpPr>
-            <p:spPr>
-              <a:xfrm>
-                <a:off x="7648575" y="3990975"/>
-                <a:ext cx="76200" cy="66675"/>
-              </a:xfrm>
-              <a:custGeom>
-                <a:avLst/>
-                <a:gdLst/>
-                <a:ahLst/>
-                <a:cxnLst/>
-                <a:rect l="l" t="t" r="r" b="b"/>
-                <a:pathLst>
-                  <a:path w="76200" h="66675">
-                    <a:moveTo>
-                      <a:pt x="0" y="66675"/>
-                    </a:moveTo>
-                    <a:cubicBezTo>
-                      <a:pt x="14288" y="66675"/>
-                      <a:pt x="28575" y="47625"/>
-                      <a:pt x="38100" y="33338"/>
-                    </a:cubicBezTo>
-                    <a:cubicBezTo>
-                      <a:pt x="47625" y="19050"/>
-                      <a:pt x="61912" y="0"/>
-                      <a:pt x="76200" y="0"/>
-                    </a:cubicBezTo>
-                  </a:path>
-                </a:pathLst>
-              </a:custGeom>
-              <a:noFill/>
-              <a:ln w="19050">
-                <a:solidFill>
-                  <a:srgbClr val="AF00C0"/>
-                </a:solidFill>
-              </a:ln>
-            </p:spPr>
-          </p:sp>
-        </p:grpSp>
-        <p:sp>
-          <p:nvSpPr>
-            <p:cNvPr id="48" name="TextBox 48"/>
-            <p:cNvSpPr txBox="1"/>
-            <p:nvPr/>
-          </p:nvSpPr>
-          <p:spPr>
-            <a:xfrm>
-              <a:off x="7873365" y="3953828"/>
-              <a:ext cx="1588565" cy="213360"/>
-            </a:xfrm>
-            <a:prstGeom prst="rect">
-              <a:avLst/>
-            </a:prstGeom>
-            <a:noFill/>
-            <a:ln>
-              <a:noFill/>
-            </a:ln>
-          </p:spPr>
-          <p:txBody>
-            <a:bodyPr wrap="none" lIns="0" tIns="0" rIns="0" bIns="0" anchor="t" anchorCtr="0">
-              <a:spAutoFit/>
-            </a:bodyPr>
-            <a:lstStyle/>
-            <a:p>
-              <a:pPr algn="l"/>
-              <a:r>
-                <a:rPr lang="zh-CN" sz="1050" b="1" dirty="0">
-                  <a:solidFill>
-                    <a:srgbClr val="AF00C0"/>
-                  </a:solidFill>
-                  <a:latin typeface="Arial"/>
-                  <a:ea typeface="Microsoft YaHei"/>
-                  <a:cs typeface="Arial"/>
-                </a:rPr>
-                <a:t>"=&amp;r" early-clobber</a:t>
-              </a:r>
-            </a:p>
-          </p:txBody>
-        </p:sp>
-        <p:sp>
-          <p:nvSpPr>
-            <p:cNvPr id="49" name="TextBox 49"/>
-            <p:cNvSpPr txBox="1"/>
-            <p:nvPr/>
-          </p:nvSpPr>
-          <p:spPr>
-            <a:xfrm>
-              <a:off x="7559992" y="4200049"/>
-              <a:ext cx="3477935" cy="198120"/>
-            </a:xfrm>
-            <a:prstGeom prst="rect">
-              <a:avLst/>
-            </a:prstGeom>
-            <a:noFill/>
-            <a:ln>
-              <a:noFill/>
-            </a:ln>
-          </p:spPr>
-          <p:txBody>
-            <a:bodyPr wrap="none" lIns="0" tIns="0" rIns="0" bIns="0" anchor="t" anchorCtr="0">
-              <a:spAutoFit/>
-            </a:bodyPr>
-            <a:lstStyle/>
-            <a:p>
-              <a:pPr algn="l"/>
-              <a:r>
-                <a:rPr lang="zh-CN" sz="975" dirty="0">
-                  <a:solidFill>
-                    <a:srgbClr val="555555"/>
-                  </a:solidFill>
-                  <a:latin typeface="Arial"/>
-                  <a:ea typeface="Microsoft YaHei"/>
-                  <a:cs typeface="Arial"/>
-                </a:rPr>
-                <a:t>Scratch register written before inputs consumed</a:t>
-              </a:r>
-            </a:p>
-          </p:txBody>
-        </p:sp>
-        <p:sp>
-          <p:nvSpPr>
             <p:cNvPr id="50" name="Rectangle 50"/>
             <p:cNvSpPr/>
             <p:nvPr/>
@@ -39438,6 +39010,52 @@
           </p:txBody>
         </p:sp>
       </p:grpSp>
+      <p:sp>
+        <p:nvSpPr>
+          <p:cNvPr id="64" name="TextBox 21">
+            <a:extLst>
+              <a:ext uri="{FF2B5EF4-FFF2-40B4-BE49-F238E27FC236}">
+                <a16:creationId xmlns:a16="http://schemas.microsoft.com/office/drawing/2014/main" id="{1197BD67-83DF-CAC7-8631-8573AF7D6CB6}"/>
+              </a:ext>
+            </a:extLst>
+          </p:cNvPr>
+          <p:cNvSpPr txBox="1"/>
+          <p:nvPr/>
+        </p:nvSpPr>
+        <p:spPr>
+          <a:xfrm>
+            <a:off x="2633913" y="2823041"/>
+            <a:ext cx="195358" cy="213360"/>
+          </a:xfrm>
+          <a:prstGeom prst="rect">
+            <a:avLst/>
+          </a:prstGeom>
+          <a:noFill/>
+          <a:ln>
+            <a:noFill/>
+          </a:ln>
+        </p:spPr>
+        <p:txBody>
+          <a:bodyPr wrap="none" lIns="0" tIns="0" rIns="0" bIns="0" anchor="t" anchorCtr="0">
+            <a:spAutoFit/>
+          </a:bodyPr>
+          <a:lstStyle/>
+          <a:p>
+            <a:pPr algn="l"/>
+            <a:r>
+              <a:rPr lang="zh-CN" sz="1050" dirty="0">
+                <a:solidFill>
+                  <a:srgbClr val="E0E0E0"/>
+                </a:solidFill>
+                <a:latin typeface="Consolas"/>
+                <a:ea typeface="Microsoft YaHei"/>
+                <a:cs typeface="Consolas"/>
+              </a:rPr>
+              <a:t>);</a:t>
+            </a:r>
+          </a:p>
+        </p:txBody>
+      </p:sp>
     </p:spTree>
   </p:cSld>
   <p:clrMapOvr>
@@ -42192,2171 +41810,6 @@
       </p:sp>
       <p:grpSp>
         <p:nvGrpSpPr>
-          <p:cNvPr id="62" name="Group 62"/>
-          <p:cNvGrpSpPr/>
-          <p:nvPr/>
-        </p:nvGrpSpPr>
-        <p:grpSpPr>
-          <a:xfrm>
-            <a:off x="476250" y="1333500"/>
-            <a:ext cx="11239500" cy="4448175"/>
-            <a:chOff x="476250" y="1333500"/>
-            <a:chExt cx="11239500" cy="4448175"/>
-          </a:xfrm>
-        </p:grpSpPr>
-        <p:sp>
-          <p:nvSpPr>
-            <p:cNvPr id="6" name="Rectangle 6"/>
-            <p:cNvSpPr/>
-            <p:nvPr/>
-          </p:nvSpPr>
-          <p:spPr>
-            <a:xfrm>
-              <a:off x="476250" y="1333500"/>
-              <a:ext cx="6858000" cy="3476625"/>
-            </a:xfrm>
-            <a:prstGeom prst="roundRect">
-              <a:avLst>
-                <a:gd name="adj" fmla="val 2192"/>
-              </a:avLst>
-            </a:prstGeom>
-            <a:solidFill>
-              <a:srgbClr val="1E293B"/>
-            </a:solidFill>
-            <a:ln>
-              <a:noFill/>
-            </a:ln>
-          </p:spPr>
-        </p:sp>
-        <p:sp>
-          <p:nvSpPr>
-            <p:cNvPr id="7" name="TextBox 7"/>
-            <p:cNvSpPr txBox="1"/>
-            <p:nvPr/>
-          </p:nvSpPr>
-          <p:spPr>
-            <a:xfrm>
-              <a:off x="655320" y="1503045"/>
-              <a:ext cx="2691193" cy="182880"/>
-            </a:xfrm>
-            <a:prstGeom prst="rect">
-              <a:avLst/>
-            </a:prstGeom>
-            <a:noFill/>
-            <a:ln>
-              <a:noFill/>
-            </a:ln>
-          </p:spPr>
-          <p:txBody>
-            <a:bodyPr wrap="none" lIns="0" tIns="0" rIns="0" bIns="0" anchor="t" anchorCtr="0">
-              <a:spAutoFit/>
-            </a:bodyPr>
-            <a:lstStyle/>
-            <a:p>
-              <a:pPr algn="l"/>
-              <a:r>
-                <a:rPr lang="zh-CN" sz="900" dirty="0">
-                  <a:solidFill>
-                    <a:srgbClr val="6A9955"/>
-                  </a:solidFill>
-                  <a:latin typeface="Arial"/>
-                  <a:ea typeface="Microsoft YaHei"/>
-                  <a:cs typeface="Arial"/>
-                </a:rPr>
-                <a:t>/* arch/x86/kernel/cet.c lines 149–162 */</a:t>
-              </a:r>
-            </a:p>
-          </p:txBody>
-        </p:sp>
-        <p:sp>
-          <p:nvSpPr>
-            <p:cNvPr id="8" name="TextBox 8"/>
-            <p:cNvSpPr txBox="1"/>
-            <p:nvPr/>
-          </p:nvSpPr>
-          <p:spPr>
-            <a:xfrm>
-              <a:off x="653415" y="1791652"/>
-              <a:ext cx="2119932" cy="213360"/>
-            </a:xfrm>
-            <a:prstGeom prst="rect">
-              <a:avLst/>
-            </a:prstGeom>
-            <a:noFill/>
-            <a:ln>
-              <a:noFill/>
-            </a:ln>
-          </p:spPr>
-          <p:txBody>
-            <a:bodyPr wrap="none" lIns="0" tIns="0" rIns="0" bIns="0" anchor="t" anchorCtr="0">
-              <a:spAutoFit/>
-            </a:bodyPr>
-            <a:lstStyle/>
-            <a:p>
-              <a:pPr algn="l"/>
-              <a:r>
-                <a:rPr lang="zh-CN" sz="1050" dirty="0">
-                  <a:solidFill>
-                    <a:srgbClr val="0AB36E"/>
-                  </a:solidFill>
-                  <a:latin typeface="Consolas"/>
-                  <a:ea typeface="Microsoft YaHei"/>
-                  <a:cs typeface="Consolas"/>
-                </a:rPr>
-                <a:t>DEFINE_IDTENTRY_ERRORCODE</a:t>
-              </a:r>
-            </a:p>
-          </p:txBody>
-        </p:sp>
-        <p:sp>
-          <p:nvSpPr>
-            <p:cNvPr id="9" name="TextBox 9"/>
-            <p:cNvSpPr txBox="1"/>
-            <p:nvPr/>
-          </p:nvSpPr>
-          <p:spPr>
-            <a:xfrm>
-              <a:off x="2796540" y="1791652"/>
-              <a:ext cx="1974247" cy="213360"/>
-            </a:xfrm>
-            <a:prstGeom prst="rect">
-              <a:avLst/>
-            </a:prstGeom>
-            <a:noFill/>
-            <a:ln>
-              <a:noFill/>
-            </a:ln>
-          </p:spPr>
-          <p:txBody>
-            <a:bodyPr wrap="none" lIns="0" tIns="0" rIns="0" bIns="0" anchor="t" anchorCtr="0">
-              <a:spAutoFit/>
-            </a:bodyPr>
-            <a:lstStyle/>
-            <a:p>
-              <a:pPr algn="l"/>
-              <a:r>
-                <a:rPr lang="zh-CN" sz="1050" dirty="0">
-                  <a:solidFill>
-                    <a:srgbClr val="E0E0E0"/>
-                  </a:solidFill>
-                  <a:latin typeface="Consolas"/>
-                  <a:ea typeface="Microsoft YaHei"/>
-                  <a:cs typeface="Consolas"/>
-                </a:rPr>
-                <a:t>(exc_control_protection)</a:t>
-              </a:r>
-            </a:p>
-          </p:txBody>
-        </p:sp>
-        <p:sp>
-          <p:nvSpPr>
-            <p:cNvPr id="10" name="TextBox 10"/>
-            <p:cNvSpPr txBox="1"/>
-            <p:nvPr/>
-          </p:nvSpPr>
-          <p:spPr>
-            <a:xfrm>
-              <a:off x="653415" y="2010728"/>
-              <a:ext cx="111014" cy="213360"/>
-            </a:xfrm>
-            <a:prstGeom prst="rect">
-              <a:avLst/>
-            </a:prstGeom>
-            <a:noFill/>
-            <a:ln>
-              <a:noFill/>
-            </a:ln>
-          </p:spPr>
-          <p:txBody>
-            <a:bodyPr wrap="none" lIns="0" tIns="0" rIns="0" bIns="0" anchor="t" anchorCtr="0">
-              <a:spAutoFit/>
-            </a:bodyPr>
-            <a:lstStyle/>
-            <a:p>
-              <a:pPr algn="l"/>
-              <a:r>
-                <a:rPr lang="zh-CN" sz="1050" dirty="0">
-                  <a:solidFill>
-                    <a:srgbClr val="E0E0E0"/>
-                  </a:solidFill>
-                  <a:latin typeface="Consolas"/>
-                  <a:ea typeface="Microsoft YaHei"/>
-                  <a:cs typeface="Consolas"/>
-                </a:rPr>
-                <a:t>{</a:t>
-              </a:r>
-            </a:p>
-          </p:txBody>
-        </p:sp>
-        <p:sp>
-          <p:nvSpPr>
-            <p:cNvPr id="11" name="TextBox 11"/>
-            <p:cNvSpPr txBox="1"/>
-            <p:nvPr/>
-          </p:nvSpPr>
-          <p:spPr>
-            <a:xfrm>
-              <a:off x="1062990" y="2258378"/>
-              <a:ext cx="157020" cy="213360"/>
-            </a:xfrm>
-            <a:prstGeom prst="rect">
-              <a:avLst/>
-            </a:prstGeom>
-            <a:noFill/>
-            <a:ln>
-              <a:noFill/>
-            </a:ln>
-          </p:spPr>
-          <p:txBody>
-            <a:bodyPr wrap="none" lIns="0" tIns="0" rIns="0" bIns="0" anchor="t" anchorCtr="0">
-              <a:spAutoFit/>
-            </a:bodyPr>
-            <a:lstStyle/>
-            <a:p>
-              <a:pPr algn="l"/>
-              <a:r>
-                <a:rPr lang="zh-CN" sz="1050" dirty="0">
-                  <a:solidFill>
-                    <a:srgbClr val="0AB36E"/>
-                  </a:solidFill>
-                  <a:latin typeface="Consolas"/>
-                  <a:ea typeface="Microsoft YaHei"/>
-                  <a:cs typeface="Consolas"/>
-                </a:rPr>
-                <a:t>if</a:t>
-              </a:r>
-            </a:p>
-          </p:txBody>
-        </p:sp>
-        <p:sp>
-          <p:nvSpPr>
-            <p:cNvPr id="12" name="TextBox 12"/>
-            <p:cNvSpPr txBox="1"/>
-            <p:nvPr/>
-          </p:nvSpPr>
-          <p:spPr>
-            <a:xfrm>
-              <a:off x="1224915" y="2258378"/>
-              <a:ext cx="3331416" cy="213360"/>
-            </a:xfrm>
-            <a:prstGeom prst="rect">
-              <a:avLst/>
-            </a:prstGeom>
-            <a:noFill/>
-            <a:ln>
-              <a:noFill/>
-            </a:ln>
-          </p:spPr>
-          <p:txBody>
-            <a:bodyPr wrap="none" lIns="0" tIns="0" rIns="0" bIns="0" anchor="t" anchorCtr="0">
-              <a:spAutoFit/>
-            </a:bodyPr>
-            <a:lstStyle/>
-            <a:p>
-              <a:pPr algn="l"/>
-              <a:r>
-                <a:rPr lang="zh-CN" sz="1050" dirty="0">
-                  <a:solidFill>
-                    <a:srgbClr val="E0E0E0"/>
-                  </a:solidFill>
-                  <a:latin typeface="Consolas"/>
-                  <a:ea typeface="Microsoft YaHei"/>
-                  <a:cs typeface="Consolas"/>
-                </a:rPr>
-                <a:t>(!cpu_feature_enabled(X86_FEATURE_IBT)) {</a:t>
-              </a:r>
-            </a:p>
-          </p:txBody>
-        </p:sp>
-        <p:sp>
-          <p:nvSpPr>
-            <p:cNvPr id="13" name="TextBox 13"/>
-            <p:cNvSpPr txBox="1"/>
-            <p:nvPr/>
-          </p:nvSpPr>
-          <p:spPr>
-            <a:xfrm>
-              <a:off x="653415" y="2477452"/>
-              <a:ext cx="985123" cy="213360"/>
-            </a:xfrm>
-            <a:prstGeom prst="rect">
-              <a:avLst/>
-            </a:prstGeom>
-            <a:noFill/>
-            <a:ln>
-              <a:noFill/>
-            </a:ln>
-          </p:spPr>
-          <p:txBody>
-            <a:bodyPr wrap="none" lIns="0" tIns="0" rIns="0" bIns="0" anchor="t" anchorCtr="0">
-              <a:spAutoFit/>
-            </a:bodyPr>
-            <a:lstStyle/>
-            <a:p>
-              <a:pPr algn="l"/>
-              <a:r>
-                <a:rPr lang="zh-CN" sz="1050" dirty="0">
-                  <a:solidFill>
-                    <a:srgbClr val="E0E0E0"/>
-                  </a:solidFill>
-                  <a:latin typeface="Consolas"/>
-                  <a:ea typeface="Microsoft YaHei"/>
-                  <a:cs typeface="Consolas"/>
-                </a:rPr>
-                <a:t>        pr_err(</a:t>
-              </a:r>
-            </a:p>
-          </p:txBody>
-        </p:sp>
-        <p:sp>
-          <p:nvSpPr>
-            <p:cNvPr id="14" name="TextBox 14"/>
-            <p:cNvSpPr txBox="1"/>
-            <p:nvPr/>
-          </p:nvSpPr>
-          <p:spPr>
-            <a:xfrm>
-              <a:off x="1796415" y="2477452"/>
-              <a:ext cx="1506522" cy="213360"/>
-            </a:xfrm>
-            <a:prstGeom prst="rect">
-              <a:avLst/>
-            </a:prstGeom>
-            <a:noFill/>
-            <a:ln>
-              <a:noFill/>
-            </a:ln>
-          </p:spPr>
-          <p:txBody>
-            <a:bodyPr wrap="none" lIns="0" tIns="0" rIns="0" bIns="0" anchor="t" anchorCtr="0">
-              <a:spAutoFit/>
-            </a:bodyPr>
-            <a:lstStyle/>
-            <a:p>
-              <a:pPr algn="l"/>
-              <a:r>
-                <a:rPr lang="zh-CN" sz="1050" dirty="0">
-                  <a:solidFill>
-                    <a:srgbClr val="F79646"/>
-                  </a:solidFill>
-                  <a:latin typeface="Consolas"/>
-                  <a:ea typeface="Microsoft YaHei"/>
-                  <a:cs typeface="Consolas"/>
-                </a:rPr>
-                <a:t>"unexpected #CP\n"</a:t>
-              </a:r>
-            </a:p>
-          </p:txBody>
-        </p:sp>
-        <p:sp>
-          <p:nvSpPr>
-            <p:cNvPr id="15" name="TextBox 15"/>
-            <p:cNvSpPr txBox="1"/>
-            <p:nvPr/>
-          </p:nvSpPr>
-          <p:spPr>
-            <a:xfrm>
-              <a:off x="3463290" y="2477452"/>
-              <a:ext cx="195358" cy="213360"/>
-            </a:xfrm>
-            <a:prstGeom prst="rect">
-              <a:avLst/>
-            </a:prstGeom>
-            <a:noFill/>
-            <a:ln>
-              <a:noFill/>
-            </a:ln>
-          </p:spPr>
-          <p:txBody>
-            <a:bodyPr wrap="none" lIns="0" tIns="0" rIns="0" bIns="0" anchor="t" anchorCtr="0">
-              <a:spAutoFit/>
-            </a:bodyPr>
-            <a:lstStyle/>
-            <a:p>
-              <a:pPr algn="l"/>
-              <a:r>
-                <a:rPr lang="zh-CN" sz="1050" dirty="0">
-                  <a:solidFill>
-                    <a:srgbClr val="E0E0E0"/>
-                  </a:solidFill>
-                  <a:latin typeface="Consolas"/>
-                  <a:ea typeface="Microsoft YaHei"/>
-                  <a:cs typeface="Consolas"/>
-                </a:rPr>
-                <a:t>);</a:t>
-              </a:r>
-            </a:p>
-          </p:txBody>
-        </p:sp>
-        <p:sp>
-          <p:nvSpPr>
-            <p:cNvPr id="16" name="TextBox 16"/>
-            <p:cNvSpPr txBox="1"/>
-            <p:nvPr/>
-          </p:nvSpPr>
-          <p:spPr>
-            <a:xfrm>
-              <a:off x="653415" y="2696528"/>
-              <a:ext cx="900779" cy="213360"/>
-            </a:xfrm>
-            <a:prstGeom prst="rect">
-              <a:avLst/>
-            </a:prstGeom>
-            <a:noFill/>
-            <a:ln>
-              <a:noFill/>
-            </a:ln>
-          </p:spPr>
-          <p:txBody>
-            <a:bodyPr wrap="none" lIns="0" tIns="0" rIns="0" bIns="0" anchor="t" anchorCtr="0">
-              <a:spAutoFit/>
-            </a:bodyPr>
-            <a:lstStyle/>
-            <a:p>
-              <a:pPr algn="l"/>
-              <a:r>
-                <a:rPr lang="zh-CN" sz="1050" dirty="0">
-                  <a:solidFill>
-                    <a:srgbClr val="E0E0E0"/>
-                  </a:solidFill>
-                  <a:latin typeface="Consolas"/>
-                  <a:ea typeface="Microsoft YaHei"/>
-                  <a:cs typeface="Consolas"/>
-                </a:rPr>
-                <a:t>        BUG();</a:t>
-              </a:r>
-            </a:p>
-          </p:txBody>
-        </p:sp>
-        <p:sp>
-          <p:nvSpPr>
-            <p:cNvPr id="17" name="TextBox 17"/>
-            <p:cNvSpPr txBox="1"/>
-            <p:nvPr/>
-          </p:nvSpPr>
-          <p:spPr>
-            <a:xfrm>
-              <a:off x="653415" y="2915602"/>
-              <a:ext cx="295037" cy="213360"/>
-            </a:xfrm>
-            <a:prstGeom prst="rect">
-              <a:avLst/>
-            </a:prstGeom>
-            <a:noFill/>
-            <a:ln>
-              <a:noFill/>
-            </a:ln>
-          </p:spPr>
-          <p:txBody>
-            <a:bodyPr wrap="none" lIns="0" tIns="0" rIns="0" bIns="0" anchor="t" anchorCtr="0">
-              <a:spAutoFit/>
-            </a:bodyPr>
-            <a:lstStyle/>
-            <a:p>
-              <a:pPr algn="l"/>
-              <a:r>
-                <a:rPr lang="zh-CN" sz="1050" dirty="0">
-                  <a:solidFill>
-                    <a:srgbClr val="E0E0E0"/>
-                  </a:solidFill>
-                  <a:latin typeface="Consolas"/>
-                  <a:ea typeface="Microsoft YaHei"/>
-                  <a:cs typeface="Consolas"/>
-                </a:rPr>
-                <a:t>    }</a:t>
-              </a:r>
-            </a:p>
-          </p:txBody>
-        </p:sp>
-        <p:sp>
-          <p:nvSpPr>
-            <p:cNvPr id="18" name="TextBox 18"/>
-            <p:cNvSpPr txBox="1"/>
-            <p:nvPr/>
-          </p:nvSpPr>
-          <p:spPr>
-            <a:xfrm>
-              <a:off x="1062990" y="3201352"/>
-              <a:ext cx="157020" cy="213360"/>
-            </a:xfrm>
-            <a:prstGeom prst="rect">
-              <a:avLst/>
-            </a:prstGeom>
-            <a:noFill/>
-            <a:ln>
-              <a:noFill/>
-            </a:ln>
-          </p:spPr>
-          <p:txBody>
-            <a:bodyPr wrap="none" lIns="0" tIns="0" rIns="0" bIns="0" anchor="t" anchorCtr="0">
-              <a:spAutoFit/>
-            </a:bodyPr>
-            <a:lstStyle/>
-            <a:p>
-              <a:pPr algn="l"/>
-              <a:r>
-                <a:rPr lang="zh-CN" sz="1050" dirty="0">
-                  <a:solidFill>
-                    <a:srgbClr val="0AB36E"/>
-                  </a:solidFill>
-                  <a:latin typeface="Consolas"/>
-                  <a:ea typeface="Microsoft YaHei"/>
-                  <a:cs typeface="Consolas"/>
-                </a:rPr>
-                <a:t>if</a:t>
-              </a:r>
-            </a:p>
-          </p:txBody>
-        </p:sp>
-        <p:sp>
-          <p:nvSpPr>
-            <p:cNvPr id="19" name="TextBox 19"/>
-            <p:cNvSpPr txBox="1"/>
-            <p:nvPr/>
-          </p:nvSpPr>
-          <p:spPr>
-            <a:xfrm>
-              <a:off x="1224915" y="3201352"/>
-              <a:ext cx="1621536" cy="213360"/>
-            </a:xfrm>
-            <a:prstGeom prst="rect">
-              <a:avLst/>
-            </a:prstGeom>
-            <a:noFill/>
-            <a:ln>
-              <a:noFill/>
-            </a:ln>
-          </p:spPr>
-          <p:txBody>
-            <a:bodyPr wrap="none" lIns="0" tIns="0" rIns="0" bIns="0" anchor="t" anchorCtr="0">
-              <a:spAutoFit/>
-            </a:bodyPr>
-            <a:lstStyle/>
-            <a:p>
-              <a:pPr algn="l"/>
-              <a:r>
-                <a:rPr lang="zh-CN" sz="1050" dirty="0">
-                  <a:solidFill>
-                    <a:srgbClr val="E0E0E0"/>
-                  </a:solidFill>
-                  <a:latin typeface="Consolas"/>
-                  <a:ea typeface="Microsoft YaHei"/>
-                  <a:cs typeface="Consolas"/>
-                </a:rPr>
-                <a:t>(user_mode(regs)) {</a:t>
-              </a:r>
-            </a:p>
-          </p:txBody>
-        </p:sp>
-        <p:sp>
-          <p:nvSpPr>
-            <p:cNvPr id="20" name="TextBox 20"/>
-            <p:cNvSpPr txBox="1"/>
-            <p:nvPr/>
-          </p:nvSpPr>
-          <p:spPr>
-            <a:xfrm>
-              <a:off x="653415" y="3420428"/>
-              <a:ext cx="3277743" cy="213360"/>
-            </a:xfrm>
-            <a:prstGeom prst="rect">
-              <a:avLst/>
-            </a:prstGeom>
-            <a:noFill/>
-            <a:ln>
-              <a:noFill/>
-            </a:ln>
-          </p:spPr>
-          <p:txBody>
-            <a:bodyPr wrap="none" lIns="0" tIns="0" rIns="0" bIns="0" anchor="t" anchorCtr="0">
-              <a:spAutoFit/>
-            </a:bodyPr>
-            <a:lstStyle/>
-            <a:p>
-              <a:pPr algn="l"/>
-              <a:r>
-                <a:rPr lang="zh-CN" sz="1050" dirty="0">
-                  <a:solidFill>
-                    <a:srgbClr val="E0E0E0"/>
-                  </a:solidFill>
-                  <a:latin typeface="Consolas"/>
-                  <a:ea typeface="Microsoft YaHei"/>
-                  <a:cs typeface="Consolas"/>
-                </a:rPr>
-                <a:t>        force_sig_fault(SIGSEGV, SEGV_CPERR,</a:t>
-              </a:r>
-            </a:p>
-          </p:txBody>
-        </p:sp>
-        <p:sp>
-          <p:nvSpPr>
-            <p:cNvPr id="21" name="TextBox 21"/>
-            <p:cNvSpPr txBox="1"/>
-            <p:nvPr/>
-          </p:nvSpPr>
-          <p:spPr>
-            <a:xfrm>
-              <a:off x="653415" y="3639502"/>
-              <a:ext cx="1215152" cy="213360"/>
-            </a:xfrm>
-            <a:prstGeom prst="rect">
-              <a:avLst/>
-            </a:prstGeom>
-            <a:noFill/>
-            <a:ln>
-              <a:noFill/>
-            </a:ln>
-          </p:spPr>
-          <p:txBody>
-            <a:bodyPr wrap="none" lIns="0" tIns="0" rIns="0" bIns="0" anchor="t" anchorCtr="0">
-              <a:spAutoFit/>
-            </a:bodyPr>
-            <a:lstStyle/>
-            <a:p>
-              <a:pPr algn="l"/>
-              <a:r>
-                <a:rPr lang="zh-CN" sz="1050" dirty="0">
-                  <a:solidFill>
-                    <a:srgbClr val="E0E0E0"/>
-                  </a:solidFill>
-                  <a:latin typeface="Consolas"/>
-                  <a:ea typeface="Microsoft YaHei"/>
-                  <a:cs typeface="Consolas"/>
-                </a:rPr>
-                <a:t>                        (</a:t>
-              </a:r>
-            </a:p>
-          </p:txBody>
-        </p:sp>
-        <p:sp>
-          <p:nvSpPr>
-            <p:cNvPr id="22" name="TextBox 22"/>
-            <p:cNvSpPr txBox="1"/>
-            <p:nvPr/>
-          </p:nvSpPr>
-          <p:spPr>
-            <a:xfrm>
-              <a:off x="2310765" y="3639502"/>
-              <a:ext cx="325707" cy="213360"/>
-            </a:xfrm>
-            <a:prstGeom prst="rect">
-              <a:avLst/>
-            </a:prstGeom>
-            <a:noFill/>
-            <a:ln>
-              <a:noFill/>
-            </a:ln>
-          </p:spPr>
-          <p:txBody>
-            <a:bodyPr wrap="none" lIns="0" tIns="0" rIns="0" bIns="0" anchor="t" anchorCtr="0">
-              <a:spAutoFit/>
-            </a:bodyPr>
-            <a:lstStyle/>
-            <a:p>
-              <a:pPr algn="l"/>
-              <a:r>
-                <a:rPr lang="zh-CN" sz="1050" dirty="0">
-                  <a:solidFill>
-                    <a:srgbClr val="0AB36E"/>
-                  </a:solidFill>
-                  <a:latin typeface="Consolas"/>
-                  <a:ea typeface="Microsoft YaHei"/>
-                  <a:cs typeface="Consolas"/>
-                </a:rPr>
-                <a:t>void</a:t>
-              </a:r>
-            </a:p>
-          </p:txBody>
-        </p:sp>
-        <p:sp>
-          <p:nvSpPr>
-            <p:cNvPr id="23" name="TextBox 23"/>
-            <p:cNvSpPr txBox="1"/>
-            <p:nvPr/>
-          </p:nvSpPr>
-          <p:spPr>
-            <a:xfrm>
-              <a:off x="2653665" y="3639502"/>
-              <a:ext cx="1552527" cy="213360"/>
-            </a:xfrm>
-            <a:prstGeom prst="rect">
-              <a:avLst/>
-            </a:prstGeom>
-            <a:noFill/>
-            <a:ln>
-              <a:noFill/>
-            </a:ln>
-          </p:spPr>
-          <p:txBody>
-            <a:bodyPr wrap="none" lIns="0" tIns="0" rIns="0" bIns="0" anchor="t" anchorCtr="0">
-              <a:spAutoFit/>
-            </a:bodyPr>
-            <a:lstStyle/>
-            <a:p>
-              <a:pPr algn="l"/>
-              <a:r>
-                <a:rPr lang="zh-CN" sz="1050" dirty="0">
-                  <a:solidFill>
-                    <a:srgbClr val="E0E0E0"/>
-                  </a:solidFill>
-                  <a:latin typeface="Consolas"/>
-                  <a:ea typeface="Microsoft YaHei"/>
-                  <a:cs typeface="Consolas"/>
-                </a:rPr>
-                <a:t>__user *)regs-&gt;ip);</a:t>
-              </a:r>
-            </a:p>
-          </p:txBody>
-        </p:sp>
-        <p:sp>
-          <p:nvSpPr>
-            <p:cNvPr id="24" name="TextBox 24"/>
-            <p:cNvSpPr txBox="1"/>
-            <p:nvPr/>
-          </p:nvSpPr>
-          <p:spPr>
-            <a:xfrm>
-              <a:off x="1320165" y="3858578"/>
-              <a:ext cx="532733" cy="213360"/>
-            </a:xfrm>
-            <a:prstGeom prst="rect">
-              <a:avLst/>
-            </a:prstGeom>
-            <a:noFill/>
-            <a:ln>
-              <a:noFill/>
-            </a:ln>
-          </p:spPr>
-          <p:txBody>
-            <a:bodyPr wrap="none" lIns="0" tIns="0" rIns="0" bIns="0" anchor="t" anchorCtr="0">
-              <a:spAutoFit/>
-            </a:bodyPr>
-            <a:lstStyle/>
-            <a:p>
-              <a:pPr algn="l"/>
-              <a:r>
-                <a:rPr lang="zh-CN" sz="1050" dirty="0">
-                  <a:solidFill>
-                    <a:srgbClr val="0AB36E"/>
-                  </a:solidFill>
-                  <a:latin typeface="Consolas"/>
-                  <a:ea typeface="Microsoft YaHei"/>
-                  <a:cs typeface="Consolas"/>
-                </a:rPr>
-                <a:t>return</a:t>
-              </a:r>
-            </a:p>
-          </p:txBody>
-        </p:sp>
-        <p:sp>
-          <p:nvSpPr>
-            <p:cNvPr id="25" name="TextBox 25"/>
-            <p:cNvSpPr txBox="1"/>
-            <p:nvPr/>
-          </p:nvSpPr>
-          <p:spPr>
-            <a:xfrm>
-              <a:off x="1824990" y="3858578"/>
-              <a:ext cx="111014" cy="213360"/>
-            </a:xfrm>
-            <a:prstGeom prst="rect">
-              <a:avLst/>
-            </a:prstGeom>
-            <a:noFill/>
-            <a:ln>
-              <a:noFill/>
-            </a:ln>
-          </p:spPr>
-          <p:txBody>
-            <a:bodyPr wrap="none" lIns="0" tIns="0" rIns="0" bIns="0" anchor="t" anchorCtr="0">
-              <a:spAutoFit/>
-            </a:bodyPr>
-            <a:lstStyle/>
-            <a:p>
-              <a:pPr algn="l"/>
-              <a:r>
-                <a:rPr lang="zh-CN" sz="1050" dirty="0">
-                  <a:solidFill>
-                    <a:srgbClr val="E0E0E0"/>
-                  </a:solidFill>
-                  <a:latin typeface="Consolas"/>
-                  <a:ea typeface="Microsoft YaHei"/>
-                  <a:cs typeface="Consolas"/>
-                </a:rPr>
-                <a:t>;</a:t>
-              </a:r>
-            </a:p>
-          </p:txBody>
-        </p:sp>
-        <p:sp>
-          <p:nvSpPr>
-            <p:cNvPr id="26" name="TextBox 26"/>
-            <p:cNvSpPr txBox="1"/>
-            <p:nvPr/>
-          </p:nvSpPr>
-          <p:spPr>
-            <a:xfrm>
-              <a:off x="653415" y="4077652"/>
-              <a:ext cx="295037" cy="213360"/>
-            </a:xfrm>
-            <a:prstGeom prst="rect">
-              <a:avLst/>
-            </a:prstGeom>
-            <a:noFill/>
-            <a:ln>
-              <a:noFill/>
-            </a:ln>
-          </p:spPr>
-          <p:txBody>
-            <a:bodyPr wrap="none" lIns="0" tIns="0" rIns="0" bIns="0" anchor="t" anchorCtr="0">
-              <a:spAutoFit/>
-            </a:bodyPr>
-            <a:lstStyle/>
-            <a:p>
-              <a:pPr algn="l"/>
-              <a:r>
-                <a:rPr lang="zh-CN" sz="1050" dirty="0">
-                  <a:solidFill>
-                    <a:srgbClr val="E0E0E0"/>
-                  </a:solidFill>
-                  <a:latin typeface="Consolas"/>
-                  <a:ea typeface="Microsoft YaHei"/>
-                  <a:cs typeface="Consolas"/>
-                </a:rPr>
-                <a:t>    }</a:t>
-              </a:r>
-            </a:p>
-          </p:txBody>
-        </p:sp>
-        <p:sp>
-          <p:nvSpPr>
-            <p:cNvPr id="27" name="TextBox 27"/>
-            <p:cNvSpPr txBox="1"/>
-            <p:nvPr/>
-          </p:nvSpPr>
-          <p:spPr>
-            <a:xfrm>
-              <a:off x="1062990" y="4363402"/>
-              <a:ext cx="1805559" cy="213360"/>
-            </a:xfrm>
-            <a:prstGeom prst="rect">
-              <a:avLst/>
-            </a:prstGeom>
-            <a:noFill/>
-            <a:ln>
-              <a:noFill/>
-            </a:ln>
-          </p:spPr>
-          <p:txBody>
-            <a:bodyPr wrap="none" lIns="0" tIns="0" rIns="0" bIns="0" anchor="t" anchorCtr="0">
-              <a:spAutoFit/>
-            </a:bodyPr>
-            <a:lstStyle/>
-            <a:p>
-              <a:pPr algn="l"/>
-              <a:r>
-                <a:rPr lang="zh-CN" sz="1050" dirty="0">
-                  <a:solidFill>
-                    <a:srgbClr val="6A9955"/>
-                  </a:solidFill>
-                  <a:latin typeface="Consolas"/>
-                  <a:ea typeface="Microsoft YaHei"/>
-                  <a:cs typeface="Consolas"/>
-                </a:rPr>
-                <a:t>/* kernel-mode fault */</a:t>
-              </a:r>
-            </a:p>
-          </p:txBody>
-        </p:sp>
-        <p:sp>
-          <p:nvSpPr>
-            <p:cNvPr id="28" name="TextBox 28"/>
-            <p:cNvSpPr txBox="1"/>
-            <p:nvPr/>
-          </p:nvSpPr>
-          <p:spPr>
-            <a:xfrm>
-              <a:off x="653415" y="4582478"/>
-              <a:ext cx="2418969" cy="213360"/>
-            </a:xfrm>
-            <a:prstGeom prst="rect">
-              <a:avLst/>
-            </a:prstGeom>
-            <a:noFill/>
-            <a:ln>
-              <a:noFill/>
-            </a:ln>
-          </p:spPr>
-          <p:txBody>
-            <a:bodyPr wrap="none" lIns="0" tIns="0" rIns="0" bIns="0" anchor="t" anchorCtr="0">
-              <a:spAutoFit/>
-            </a:bodyPr>
-            <a:lstStyle/>
-            <a:p>
-              <a:pPr algn="l"/>
-              <a:r>
-                <a:rPr lang="zh-CN" sz="1050" dirty="0">
-                  <a:solidFill>
-                    <a:srgbClr val="E0E0E0"/>
-                  </a:solidFill>
-                  <a:latin typeface="Consolas"/>
-                  <a:ea typeface="Microsoft YaHei"/>
-                  <a:cs typeface="Consolas"/>
-                </a:rPr>
-                <a:t>    ibt_fatal = !sysctl_ibt_warn;</a:t>
-              </a:r>
-            </a:p>
-          </p:txBody>
-        </p:sp>
-        <p:sp>
-          <p:nvSpPr>
-            <p:cNvPr id="29" name="TextBox 29"/>
-            <p:cNvSpPr txBox="1"/>
-            <p:nvPr/>
-          </p:nvSpPr>
-          <p:spPr>
-            <a:xfrm>
-              <a:off x="653415" y="4582478"/>
-              <a:ext cx="2418969" cy="213360"/>
-            </a:xfrm>
-            <a:prstGeom prst="rect">
-              <a:avLst/>
-            </a:prstGeom>
-            <a:noFill/>
-            <a:ln>
-              <a:noFill/>
-            </a:ln>
-          </p:spPr>
-          <p:txBody>
-            <a:bodyPr wrap="none" lIns="0" tIns="0" rIns="0" bIns="0" anchor="t" anchorCtr="0">
-              <a:spAutoFit/>
-            </a:bodyPr>
-            <a:lstStyle/>
-            <a:p>
-              <a:pPr algn="l"/>
-              <a:r>
-                <a:rPr lang="zh-CN" sz="1050" dirty="0">
-                  <a:solidFill>
-                    <a:srgbClr val="E0E0E0"/>
-                  </a:solidFill>
-                  <a:latin typeface="Consolas"/>
-                  <a:ea typeface="Microsoft YaHei"/>
-                  <a:cs typeface="Consolas"/>
-                </a:rPr>
-                <a:t>    ibt_fatal = !sysctl_ibt_warn;</a:t>
-              </a:r>
-            </a:p>
-          </p:txBody>
-        </p:sp>
-        <p:sp>
-          <p:nvSpPr>
-            <p:cNvPr id="30" name="TextBox 30"/>
-            <p:cNvSpPr txBox="1"/>
-            <p:nvPr/>
-          </p:nvSpPr>
-          <p:spPr>
-            <a:xfrm>
-              <a:off x="7700010" y="1442085"/>
-              <a:ext cx="1309440" cy="243840"/>
-            </a:xfrm>
-            <a:prstGeom prst="rect">
-              <a:avLst/>
-            </a:prstGeom>
-            <a:noFill/>
-            <a:ln>
-              <a:noFill/>
-            </a:ln>
-          </p:spPr>
-          <p:txBody>
-            <a:bodyPr wrap="none" lIns="0" tIns="0" rIns="0" bIns="0" anchor="t" anchorCtr="0">
-              <a:spAutoFit/>
-            </a:bodyPr>
-            <a:lstStyle/>
-            <a:p>
-              <a:pPr algn="l"/>
-              <a:r>
-                <a:rPr lang="zh-CN" sz="1200" b="1" dirty="0">
-                  <a:solidFill>
-                    <a:srgbClr val="333333"/>
-                  </a:solidFill>
-                  <a:latin typeface="Arial"/>
-                  <a:ea typeface="Microsoft YaHei"/>
-                  <a:cs typeface="Arial"/>
-                </a:rPr>
-                <a:t>Dispatch Logic</a:t>
-              </a:r>
-            </a:p>
-          </p:txBody>
-        </p:sp>
-        <p:sp>
-          <p:nvSpPr>
-            <p:cNvPr id="31" name="Rectangle 31"/>
-            <p:cNvSpPr/>
-            <p:nvPr/>
-          </p:nvSpPr>
-          <p:spPr>
-            <a:xfrm>
-              <a:off x="7620000" y="1762125"/>
-              <a:ext cx="4095750" cy="857250"/>
-            </a:xfrm>
-            <a:prstGeom prst="roundRect">
-              <a:avLst>
-                <a:gd name="adj" fmla="val 8889"/>
-              </a:avLst>
-            </a:prstGeom>
-            <a:solidFill>
-              <a:srgbClr val="FEF2F2"/>
-            </a:solidFill>
-            <a:ln w="14288">
-              <a:solidFill>
-                <a:srgbClr val="EF4444"/>
-              </a:solidFill>
-            </a:ln>
-          </p:spPr>
-        </p:sp>
-        <p:grpSp>
-          <p:nvGrpSpPr>
-            <p:cNvPr id="34" name="Group 34"/>
-            <p:cNvGrpSpPr/>
-            <p:nvPr/>
-          </p:nvGrpSpPr>
-          <p:grpSpPr>
-            <a:xfrm>
-              <a:off x="7820025" y="1933575"/>
-              <a:ext cx="114300" cy="171450"/>
-              <a:chOff x="7820025" y="1933575"/>
-              <a:chExt cx="114300" cy="171450"/>
-            </a:xfrm>
-          </p:grpSpPr>
-          <p:sp>
-            <p:nvSpPr>
-              <p:cNvPr id="32" name="Freeform 32"/>
-              <p:cNvSpPr/>
-              <p:nvPr/>
-            </p:nvSpPr>
-            <p:spPr>
-              <a:xfrm>
-                <a:off x="7839075" y="1933575"/>
-                <a:ext cx="76200" cy="76200"/>
-              </a:xfrm>
-              <a:custGeom>
-                <a:avLst/>
-                <a:gdLst/>
-                <a:ahLst/>
-                <a:cxnLst/>
-                <a:rect l="l" t="t" r="r" b="b"/>
-                <a:pathLst>
-                  <a:path w="76200" h="76200">
-                    <a:moveTo>
-                      <a:pt x="0" y="38100"/>
-                    </a:moveTo>
-                    <a:cubicBezTo>
-                      <a:pt x="0" y="59142"/>
-                      <a:pt x="17058" y="76200"/>
-                      <a:pt x="38100" y="76200"/>
-                    </a:cubicBezTo>
-                    <a:cubicBezTo>
-                      <a:pt x="59142" y="76200"/>
-                      <a:pt x="76200" y="59142"/>
-                      <a:pt x="76200" y="38100"/>
-                    </a:cubicBezTo>
-                    <a:cubicBezTo>
-                      <a:pt x="76200" y="17058"/>
-                      <a:pt x="59142" y="0"/>
-                      <a:pt x="38100" y="0"/>
-                    </a:cubicBezTo>
-                    <a:cubicBezTo>
-                      <a:pt x="17058" y="0"/>
-                      <a:pt x="0" y="17058"/>
-                      <a:pt x="0" y="38100"/>
-                    </a:cubicBezTo>
-                  </a:path>
-                </a:pathLst>
-              </a:custGeom>
-              <a:noFill/>
-              <a:ln w="19050">
-                <a:solidFill>
-                  <a:srgbClr val="EF4444"/>
-                </a:solidFill>
-              </a:ln>
-            </p:spPr>
-          </p:sp>
-          <p:sp>
-            <p:nvSpPr>
-              <p:cNvPr id="33" name="Freeform 33"/>
-              <p:cNvSpPr/>
-              <p:nvPr/>
-            </p:nvSpPr>
-            <p:spPr>
-              <a:xfrm>
-                <a:off x="7820025" y="2047875"/>
-                <a:ext cx="114300" cy="57150"/>
-              </a:xfrm>
-              <a:custGeom>
-                <a:avLst/>
-                <a:gdLst/>
-                <a:ahLst/>
-                <a:cxnLst/>
-                <a:rect l="l" t="t" r="r" b="b"/>
-                <a:pathLst>
-                  <a:path w="114300" h="57150">
-                    <a:moveTo>
-                      <a:pt x="0" y="57150"/>
-                    </a:moveTo>
-                    <a:lnTo>
-                      <a:pt x="0" y="38100"/>
-                    </a:lnTo>
-                    <a:cubicBezTo>
-                      <a:pt x="0" y="17058"/>
-                      <a:pt x="17058" y="0"/>
-                      <a:pt x="38100" y="0"/>
-                    </a:cubicBezTo>
-                    <a:lnTo>
-                      <a:pt x="76200" y="0"/>
-                    </a:lnTo>
-                    <a:cubicBezTo>
-                      <a:pt x="97242" y="0"/>
-                      <a:pt x="114300" y="17058"/>
-                      <a:pt x="114300" y="38100"/>
-                    </a:cubicBezTo>
-                    <a:lnTo>
-                      <a:pt x="114300" y="57150"/>
-                    </a:lnTo>
-                  </a:path>
-                </a:pathLst>
-              </a:custGeom>
-              <a:noFill/>
-              <a:ln w="19050">
-                <a:solidFill>
-                  <a:srgbClr val="EF4444"/>
-                </a:solidFill>
-              </a:ln>
-            </p:spPr>
-          </p:sp>
-        </p:grpSp>
-        <p:sp>
-          <p:nvSpPr>
-            <p:cNvPr id="35" name="TextBox 35"/>
-            <p:cNvSpPr txBox="1"/>
-            <p:nvPr/>
-          </p:nvSpPr>
-          <p:spPr>
-            <a:xfrm>
-              <a:off x="8062912" y="1935956"/>
-              <a:ext cx="1253478" cy="228600"/>
-            </a:xfrm>
-            <a:prstGeom prst="rect">
-              <a:avLst/>
-            </a:prstGeom>
-            <a:noFill/>
-            <a:ln>
-              <a:noFill/>
-            </a:ln>
-          </p:spPr>
-          <p:txBody>
-            <a:bodyPr wrap="none" lIns="0" tIns="0" rIns="0" bIns="0" anchor="t" anchorCtr="0">
-              <a:spAutoFit/>
-            </a:bodyPr>
-            <a:lstStyle/>
-            <a:p>
-              <a:pPr algn="l"/>
-              <a:r>
-                <a:rPr lang="zh-CN" sz="1125" b="1" dirty="0">
-                  <a:solidFill>
-                    <a:srgbClr val="EF4444"/>
-                  </a:solidFill>
-                  <a:latin typeface="Arial"/>
-                  <a:ea typeface="Microsoft YaHei"/>
-                  <a:cs typeface="Arial"/>
-                </a:rPr>
-                <a:t>User-mode #CP</a:t>
-              </a:r>
-            </a:p>
-          </p:txBody>
-        </p:sp>
-        <p:sp>
-          <p:nvSpPr>
-            <p:cNvPr id="36" name="TextBox 36"/>
-            <p:cNvSpPr txBox="1"/>
-            <p:nvPr/>
-          </p:nvSpPr>
-          <p:spPr>
-            <a:xfrm>
-              <a:off x="7797165" y="2191702"/>
-              <a:ext cx="3040047" cy="213360"/>
-            </a:xfrm>
-            <a:prstGeom prst="rect">
-              <a:avLst/>
-            </a:prstGeom>
-            <a:noFill/>
-            <a:ln>
-              <a:noFill/>
-            </a:ln>
-          </p:spPr>
-          <p:txBody>
-            <a:bodyPr wrap="none" lIns="0" tIns="0" rIns="0" bIns="0" anchor="t" anchorCtr="0">
-              <a:spAutoFit/>
-            </a:bodyPr>
-            <a:lstStyle/>
-            <a:p>
-              <a:pPr algn="l"/>
-              <a:r>
-                <a:rPr lang="zh-CN" sz="1050" dirty="0">
-                  <a:solidFill>
-                    <a:srgbClr val="333333"/>
-                  </a:solidFill>
-                  <a:latin typeface="Arial"/>
-                  <a:ea typeface="Microsoft YaHei"/>
-                  <a:cs typeface="Arial"/>
-                </a:rPr>
-                <a:t>Sends SIGSEGV with si_code = SEGV_CPERR</a:t>
-              </a:r>
-            </a:p>
-          </p:txBody>
-        </p:sp>
-        <p:sp>
-          <p:nvSpPr>
-            <p:cNvPr id="37" name="TextBox 37"/>
-            <p:cNvSpPr txBox="1"/>
-            <p:nvPr/>
-          </p:nvSpPr>
-          <p:spPr>
-            <a:xfrm>
-              <a:off x="7798118" y="2399824"/>
-              <a:ext cx="3221617" cy="198120"/>
-            </a:xfrm>
-            <a:prstGeom prst="rect">
-              <a:avLst/>
-            </a:prstGeom>
-            <a:noFill/>
-            <a:ln>
-              <a:noFill/>
-            </a:ln>
-          </p:spPr>
-          <p:txBody>
-            <a:bodyPr wrap="none" lIns="0" tIns="0" rIns="0" bIns="0" anchor="t" anchorCtr="0">
-              <a:spAutoFit/>
-            </a:bodyPr>
-            <a:lstStyle/>
-            <a:p>
-              <a:pPr algn="l"/>
-              <a:r>
-                <a:rPr lang="zh-CN" sz="975" dirty="0">
-                  <a:solidFill>
-                    <a:srgbClr val="555555"/>
-                  </a:solidFill>
-                  <a:latin typeface="Arial"/>
-                  <a:ea typeface="Microsoft YaHei"/>
-                  <a:cs typeface="Arial"/>
-                </a:rPr>
-                <a:t>Process terminated — standard signal handling</a:t>
-              </a:r>
-            </a:p>
-          </p:txBody>
-        </p:sp>
-        <p:sp>
-          <p:nvSpPr>
-            <p:cNvPr id="38" name="Rectangle 38"/>
-            <p:cNvSpPr/>
-            <p:nvPr/>
-          </p:nvSpPr>
-          <p:spPr>
-            <a:xfrm>
-              <a:off x="7620000" y="2762250"/>
-              <a:ext cx="4095750" cy="1000125"/>
-            </a:xfrm>
-            <a:prstGeom prst="roundRect">
-              <a:avLst>
-                <a:gd name="adj" fmla="val 7619"/>
-              </a:avLst>
-            </a:prstGeom>
-            <a:solidFill>
-              <a:srgbClr val="FFF7ED"/>
-            </a:solidFill>
-            <a:ln w="14288">
-              <a:solidFill>
-                <a:srgbClr val="F79646"/>
-              </a:solidFill>
-            </a:ln>
-          </p:spPr>
-        </p:sp>
-        <p:grpSp>
-          <p:nvGrpSpPr>
-            <p:cNvPr id="49" name="Group 49"/>
-            <p:cNvGrpSpPr/>
-            <p:nvPr/>
-          </p:nvGrpSpPr>
-          <p:grpSpPr>
-            <a:xfrm>
-              <a:off x="7791450" y="2933700"/>
-              <a:ext cx="171450" cy="171450"/>
-              <a:chOff x="7791450" y="2933700"/>
-              <a:chExt cx="171450" cy="171450"/>
-            </a:xfrm>
-          </p:grpSpPr>
-          <p:sp>
-            <p:nvSpPr>
-              <p:cNvPr id="39" name="Freeform 39"/>
-              <p:cNvSpPr/>
-              <p:nvPr/>
-            </p:nvSpPr>
-            <p:spPr>
-              <a:xfrm>
-                <a:off x="7810500" y="2952750"/>
-                <a:ext cx="133350" cy="133350"/>
-              </a:xfrm>
-              <a:custGeom>
-                <a:avLst/>
-                <a:gdLst/>
-                <a:ahLst/>
-                <a:cxnLst/>
-                <a:rect l="l" t="t" r="r" b="b"/>
-                <a:pathLst>
-                  <a:path w="133350" h="133350">
-                    <a:moveTo>
-                      <a:pt x="0" y="9525"/>
-                    </a:moveTo>
-                    <a:cubicBezTo>
-                      <a:pt x="0" y="4264"/>
-                      <a:pt x="4264" y="0"/>
-                      <a:pt x="9525" y="0"/>
-                    </a:cubicBezTo>
-                    <a:lnTo>
-                      <a:pt x="123825" y="0"/>
-                    </a:lnTo>
-                    <a:cubicBezTo>
-                      <a:pt x="129086" y="0"/>
-                      <a:pt x="133350" y="4264"/>
-                      <a:pt x="133350" y="9525"/>
-                    </a:cubicBezTo>
-                    <a:lnTo>
-                      <a:pt x="133350" y="123825"/>
-                    </a:lnTo>
-                    <a:cubicBezTo>
-                      <a:pt x="133350" y="129086"/>
-                      <a:pt x="129086" y="133350"/>
-                      <a:pt x="123825" y="133350"/>
-                    </a:cubicBezTo>
-                    <a:lnTo>
-                      <a:pt x="9525" y="133350"/>
-                    </a:lnTo>
-                    <a:cubicBezTo>
-                      <a:pt x="4264" y="133350"/>
-                      <a:pt x="0" y="129086"/>
-                      <a:pt x="0" y="123825"/>
-                    </a:cubicBezTo>
-                    <a:lnTo>
-                      <a:pt x="0" y="9525"/>
-                    </a:lnTo>
-                  </a:path>
-                </a:pathLst>
-              </a:custGeom>
-              <a:noFill/>
-              <a:ln w="19050">
-                <a:solidFill>
-                  <a:srgbClr val="F79646"/>
-                </a:solidFill>
-              </a:ln>
-            </p:spPr>
-          </p:sp>
-          <p:sp>
-            <p:nvSpPr>
-              <p:cNvPr id="40" name="Freeform 40"/>
-              <p:cNvSpPr/>
-              <p:nvPr/>
-            </p:nvSpPr>
-            <p:spPr>
-              <a:xfrm>
-                <a:off x="7848600" y="2990850"/>
-                <a:ext cx="57150" cy="57150"/>
-              </a:xfrm>
-              <a:custGeom>
-                <a:avLst/>
-                <a:gdLst/>
-                <a:ahLst/>
-                <a:cxnLst/>
-                <a:rect l="l" t="t" r="r" b="b"/>
-                <a:pathLst>
-                  <a:path w="57150" h="57150">
-                    <a:moveTo>
-                      <a:pt x="0" y="0"/>
-                    </a:moveTo>
-                    <a:lnTo>
-                      <a:pt x="57150" y="0"/>
-                    </a:lnTo>
-                    <a:lnTo>
-                      <a:pt x="57150" y="57150"/>
-                    </a:lnTo>
-                    <a:lnTo>
-                      <a:pt x="0" y="57150"/>
-                    </a:lnTo>
-                    <a:lnTo>
-                      <a:pt x="0" y="0"/>
-                    </a:lnTo>
-                  </a:path>
-                </a:pathLst>
-              </a:custGeom>
-              <a:noFill/>
-              <a:ln w="19050">
-                <a:solidFill>
-                  <a:srgbClr val="F79646"/>
-                </a:solidFill>
-              </a:ln>
-            </p:spPr>
-          </p:sp>
-          <p:sp>
-            <p:nvSpPr>
-              <p:cNvPr id="41" name="Freeform 41"/>
-              <p:cNvSpPr/>
-              <p:nvPr/>
-            </p:nvSpPr>
-            <p:spPr>
-              <a:xfrm>
-                <a:off x="7791450" y="3000375"/>
-                <a:ext cx="19050" cy="9525"/>
-              </a:xfrm>
-              <a:custGeom>
-                <a:avLst/>
-                <a:gdLst/>
-                <a:ahLst/>
-                <a:cxnLst/>
-                <a:rect l="l" t="t" r="r" b="b"/>
-                <a:pathLst>
-                  <a:path w="19050" h="9525">
-                    <a:moveTo>
-                      <a:pt x="0" y="0"/>
-                    </a:moveTo>
-                    <a:lnTo>
-                      <a:pt x="19050" y="0"/>
-                    </a:lnTo>
-                  </a:path>
-                </a:pathLst>
-              </a:custGeom>
-              <a:noFill/>
-              <a:ln w="19050">
-                <a:solidFill>
-                  <a:srgbClr val="F79646"/>
-                </a:solidFill>
-              </a:ln>
-            </p:spPr>
-          </p:sp>
-          <p:sp>
-            <p:nvSpPr>
-              <p:cNvPr id="42" name="Freeform 42"/>
-              <p:cNvSpPr/>
-              <p:nvPr/>
-            </p:nvSpPr>
-            <p:spPr>
-              <a:xfrm>
-                <a:off x="7791450" y="3038475"/>
-                <a:ext cx="19050" cy="9525"/>
-              </a:xfrm>
-              <a:custGeom>
-                <a:avLst/>
-                <a:gdLst/>
-                <a:ahLst/>
-                <a:cxnLst/>
-                <a:rect l="l" t="t" r="r" b="b"/>
-                <a:pathLst>
-                  <a:path w="19050" h="9525">
-                    <a:moveTo>
-                      <a:pt x="0" y="0"/>
-                    </a:moveTo>
-                    <a:lnTo>
-                      <a:pt x="19050" y="0"/>
-                    </a:lnTo>
-                  </a:path>
-                </a:pathLst>
-              </a:custGeom>
-              <a:noFill/>
-              <a:ln w="19050">
-                <a:solidFill>
-                  <a:srgbClr val="F79646"/>
-                </a:solidFill>
-              </a:ln>
-            </p:spPr>
-          </p:sp>
-          <p:sp>
-            <p:nvSpPr>
-              <p:cNvPr id="43" name="Freeform 43"/>
-              <p:cNvSpPr/>
-              <p:nvPr/>
-            </p:nvSpPr>
-            <p:spPr>
-              <a:xfrm>
-                <a:off x="7858125" y="2933700"/>
-                <a:ext cx="9525" cy="19050"/>
-              </a:xfrm>
-              <a:custGeom>
-                <a:avLst/>
-                <a:gdLst/>
-                <a:ahLst/>
-                <a:cxnLst/>
-                <a:rect l="l" t="t" r="r" b="b"/>
-                <a:pathLst>
-                  <a:path w="9525" h="19050">
-                    <a:moveTo>
-                      <a:pt x="0" y="0"/>
-                    </a:moveTo>
-                    <a:lnTo>
-                      <a:pt x="0" y="19050"/>
-                    </a:lnTo>
-                  </a:path>
-                </a:pathLst>
-              </a:custGeom>
-              <a:noFill/>
-              <a:ln w="19050">
-                <a:solidFill>
-                  <a:srgbClr val="F79646"/>
-                </a:solidFill>
-              </a:ln>
-            </p:spPr>
-          </p:sp>
-          <p:sp>
-            <p:nvSpPr>
-              <p:cNvPr id="44" name="Freeform 44"/>
-              <p:cNvSpPr/>
-              <p:nvPr/>
-            </p:nvSpPr>
-            <p:spPr>
-              <a:xfrm>
-                <a:off x="7896225" y="2933700"/>
-                <a:ext cx="9525" cy="19050"/>
-              </a:xfrm>
-              <a:custGeom>
-                <a:avLst/>
-                <a:gdLst/>
-                <a:ahLst/>
-                <a:cxnLst/>
-                <a:rect l="l" t="t" r="r" b="b"/>
-                <a:pathLst>
-                  <a:path w="9525" h="19050">
-                    <a:moveTo>
-                      <a:pt x="0" y="0"/>
-                    </a:moveTo>
-                    <a:lnTo>
-                      <a:pt x="0" y="19050"/>
-                    </a:lnTo>
-                  </a:path>
-                </a:pathLst>
-              </a:custGeom>
-              <a:noFill/>
-              <a:ln w="19050">
-                <a:solidFill>
-                  <a:srgbClr val="F79646"/>
-                </a:solidFill>
-              </a:ln>
-            </p:spPr>
-          </p:sp>
-          <p:sp>
-            <p:nvSpPr>
-              <p:cNvPr id="45" name="Freeform 45"/>
-              <p:cNvSpPr/>
-              <p:nvPr/>
-            </p:nvSpPr>
-            <p:spPr>
-              <a:xfrm>
-                <a:off x="7943850" y="3000375"/>
-                <a:ext cx="19050" cy="9525"/>
-              </a:xfrm>
-              <a:custGeom>
-                <a:avLst/>
-                <a:gdLst/>
-                <a:ahLst/>
-                <a:cxnLst/>
-                <a:rect l="l" t="t" r="r" b="b"/>
-                <a:pathLst>
-                  <a:path w="19050" h="9525">
-                    <a:moveTo>
-                      <a:pt x="19050" y="0"/>
-                    </a:moveTo>
-                    <a:lnTo>
-                      <a:pt x="0" y="0"/>
-                    </a:lnTo>
-                  </a:path>
-                </a:pathLst>
-              </a:custGeom>
-              <a:noFill/>
-              <a:ln w="19050">
-                <a:solidFill>
-                  <a:srgbClr val="F79646"/>
-                </a:solidFill>
-              </a:ln>
-            </p:spPr>
-          </p:sp>
-          <p:sp>
-            <p:nvSpPr>
-              <p:cNvPr id="46" name="Freeform 46"/>
-              <p:cNvSpPr/>
-              <p:nvPr/>
-            </p:nvSpPr>
-            <p:spPr>
-              <a:xfrm>
-                <a:off x="7943850" y="3038475"/>
-                <a:ext cx="19050" cy="9525"/>
-              </a:xfrm>
-              <a:custGeom>
-                <a:avLst/>
-                <a:gdLst/>
-                <a:ahLst/>
-                <a:cxnLst/>
-                <a:rect l="l" t="t" r="r" b="b"/>
-                <a:pathLst>
-                  <a:path w="19050" h="9525">
-                    <a:moveTo>
-                      <a:pt x="19050" y="0"/>
-                    </a:moveTo>
-                    <a:lnTo>
-                      <a:pt x="0" y="0"/>
-                    </a:lnTo>
-                  </a:path>
-                </a:pathLst>
-              </a:custGeom>
-              <a:noFill/>
-              <a:ln w="19050">
-                <a:solidFill>
-                  <a:srgbClr val="F79646"/>
-                </a:solidFill>
-              </a:ln>
-            </p:spPr>
-          </p:sp>
-          <p:sp>
-            <p:nvSpPr>
-              <p:cNvPr id="47" name="Freeform 47"/>
-              <p:cNvSpPr/>
-              <p:nvPr/>
-            </p:nvSpPr>
-            <p:spPr>
-              <a:xfrm>
-                <a:off x="7896225" y="3086100"/>
-                <a:ext cx="9525" cy="19050"/>
-              </a:xfrm>
-              <a:custGeom>
-                <a:avLst/>
-                <a:gdLst/>
-                <a:ahLst/>
-                <a:cxnLst/>
-                <a:rect l="l" t="t" r="r" b="b"/>
-                <a:pathLst>
-                  <a:path w="9525" h="19050">
-                    <a:moveTo>
-                      <a:pt x="0" y="19050"/>
-                    </a:moveTo>
-                    <a:lnTo>
-                      <a:pt x="0" y="0"/>
-                    </a:lnTo>
-                  </a:path>
-                </a:pathLst>
-              </a:custGeom>
-              <a:noFill/>
-              <a:ln w="19050">
-                <a:solidFill>
-                  <a:srgbClr val="F79646"/>
-                </a:solidFill>
-              </a:ln>
-            </p:spPr>
-          </p:sp>
-          <p:sp>
-            <p:nvSpPr>
-              <p:cNvPr id="48" name="Freeform 48"/>
-              <p:cNvSpPr/>
-              <p:nvPr/>
-            </p:nvSpPr>
-            <p:spPr>
-              <a:xfrm>
-                <a:off x="7858125" y="3086100"/>
-                <a:ext cx="9525" cy="19050"/>
-              </a:xfrm>
-              <a:custGeom>
-                <a:avLst/>
-                <a:gdLst/>
-                <a:ahLst/>
-                <a:cxnLst/>
-                <a:rect l="l" t="t" r="r" b="b"/>
-                <a:pathLst>
-                  <a:path w="9525" h="19050">
-                    <a:moveTo>
-                      <a:pt x="0" y="19050"/>
-                    </a:moveTo>
-                    <a:lnTo>
-                      <a:pt x="0" y="0"/>
-                    </a:lnTo>
-                  </a:path>
-                </a:pathLst>
-              </a:custGeom>
-              <a:noFill/>
-              <a:ln w="19050">
-                <a:solidFill>
-                  <a:srgbClr val="F79646"/>
-                </a:solidFill>
-              </a:ln>
-            </p:spPr>
-          </p:sp>
-        </p:grpSp>
-        <p:sp>
-          <p:nvSpPr>
-            <p:cNvPr id="50" name="TextBox 50"/>
-            <p:cNvSpPr txBox="1"/>
-            <p:nvPr/>
-          </p:nvSpPr>
-          <p:spPr>
-            <a:xfrm>
-              <a:off x="8062912" y="2936081"/>
-              <a:ext cx="1400121" cy="228600"/>
-            </a:xfrm>
-            <a:prstGeom prst="rect">
-              <a:avLst/>
-            </a:prstGeom>
-            <a:noFill/>
-            <a:ln>
-              <a:noFill/>
-            </a:ln>
-          </p:spPr>
-          <p:txBody>
-            <a:bodyPr wrap="none" lIns="0" tIns="0" rIns="0" bIns="0" anchor="t" anchorCtr="0">
-              <a:spAutoFit/>
-            </a:bodyPr>
-            <a:lstStyle/>
-            <a:p>
-              <a:pPr algn="l"/>
-              <a:r>
-                <a:rPr lang="zh-CN" sz="1125" b="1" dirty="0">
-                  <a:solidFill>
-                    <a:srgbClr val="F79646"/>
-                  </a:solidFill>
-                  <a:latin typeface="Arial"/>
-                  <a:ea typeface="Microsoft YaHei"/>
-                  <a:cs typeface="Arial"/>
-                </a:rPr>
-                <a:t>Kernel-mode #CP</a:t>
-              </a:r>
-            </a:p>
-          </p:txBody>
-        </p:sp>
-        <p:sp>
-          <p:nvSpPr>
-            <p:cNvPr id="51" name="TextBox 51"/>
-            <p:cNvSpPr txBox="1"/>
-            <p:nvPr/>
-          </p:nvSpPr>
-          <p:spPr>
-            <a:xfrm>
-              <a:off x="7797165" y="3191828"/>
-              <a:ext cx="2503313" cy="213360"/>
-            </a:xfrm>
-            <a:prstGeom prst="rect">
-              <a:avLst/>
-            </a:prstGeom>
-            <a:noFill/>
-            <a:ln>
-              <a:noFill/>
-            </a:ln>
-          </p:spPr>
-          <p:txBody>
-            <a:bodyPr wrap="none" lIns="0" tIns="0" rIns="0" bIns="0" anchor="t" anchorCtr="0">
-              <a:spAutoFit/>
-            </a:bodyPr>
-            <a:lstStyle/>
-            <a:p>
-              <a:pPr algn="l"/>
-              <a:r>
-                <a:rPr lang="zh-CN" sz="1050" dirty="0">
-                  <a:solidFill>
-                    <a:srgbClr val="333333"/>
-                  </a:solidFill>
-                  <a:latin typeface="Arial"/>
-                  <a:ea typeface="Microsoft YaHei"/>
-                  <a:cs typeface="Arial"/>
-                </a:rPr>
-                <a:t>Default: BUG() — panic the kernel</a:t>
-              </a:r>
-            </a:p>
-          </p:txBody>
-        </p:sp>
-        <p:sp>
-          <p:nvSpPr>
-            <p:cNvPr id="52" name="TextBox 52"/>
-            <p:cNvSpPr txBox="1"/>
-            <p:nvPr/>
-          </p:nvSpPr>
-          <p:spPr>
-            <a:xfrm>
-              <a:off x="7797165" y="3391852"/>
-              <a:ext cx="2733342" cy="213360"/>
-            </a:xfrm>
-            <a:prstGeom prst="rect">
-              <a:avLst/>
-            </a:prstGeom>
-            <a:noFill/>
-            <a:ln>
-              <a:noFill/>
-            </a:ln>
-          </p:spPr>
-          <p:txBody>
-            <a:bodyPr wrap="none" lIns="0" tIns="0" rIns="0" bIns="0" anchor="t" anchorCtr="0">
-              <a:spAutoFit/>
-            </a:bodyPr>
-            <a:lstStyle/>
-            <a:p>
-              <a:pPr algn="l"/>
-              <a:r>
-                <a:rPr lang="zh-CN" sz="1050" dirty="0">
-                  <a:solidFill>
-                    <a:srgbClr val="333333"/>
-                  </a:solidFill>
-                  <a:latin typeface="Arial"/>
-                  <a:ea typeface="Microsoft YaHei"/>
-                  <a:cs typeface="Arial"/>
-                </a:rPr>
-                <a:t>ibt=warn: WARN() — log and continue</a:t>
-              </a:r>
-            </a:p>
-          </p:txBody>
-        </p:sp>
-        <p:sp>
-          <p:nvSpPr>
-            <p:cNvPr id="53" name="TextBox 53"/>
-            <p:cNvSpPr txBox="1"/>
-            <p:nvPr/>
-          </p:nvSpPr>
-          <p:spPr>
-            <a:xfrm>
-              <a:off x="7798118" y="3599974"/>
-              <a:ext cx="3428095" cy="198120"/>
-            </a:xfrm>
-            <a:prstGeom prst="rect">
-              <a:avLst/>
-            </a:prstGeom>
-            <a:noFill/>
-            <a:ln>
-              <a:noFill/>
-            </a:ln>
-          </p:spPr>
-          <p:txBody>
-            <a:bodyPr wrap="none" lIns="0" tIns="0" rIns="0" bIns="0" anchor="t" anchorCtr="0">
-              <a:spAutoFit/>
-            </a:bodyPr>
-            <a:lstStyle/>
-            <a:p>
-              <a:pPr algn="l"/>
-              <a:r>
-                <a:rPr lang="zh-CN" sz="975" dirty="0">
-                  <a:solidFill>
-                    <a:srgbClr val="555555"/>
-                  </a:solidFill>
-                  <a:latin typeface="Arial"/>
-                  <a:ea typeface="Microsoft YaHei"/>
-                  <a:cs typeface="Arial"/>
-                </a:rPr>
-                <a:t>Boot param allows permissive mode for debugging</a:t>
-              </a:r>
-            </a:p>
-          </p:txBody>
-        </p:sp>
-        <p:sp>
-          <p:nvSpPr>
-            <p:cNvPr id="54" name="Rectangle 54"/>
-            <p:cNvSpPr/>
-            <p:nvPr/>
-          </p:nvSpPr>
-          <p:spPr>
-            <a:xfrm>
-              <a:off x="7620000" y="3905250"/>
-              <a:ext cx="4095750" cy="666750"/>
-            </a:xfrm>
-            <a:prstGeom prst="roundRect">
-              <a:avLst>
-                <a:gd name="adj" fmla="val 11429"/>
-              </a:avLst>
-            </a:prstGeom>
-            <a:solidFill>
-              <a:srgbClr val="F0FDF9"/>
-            </a:solidFill>
-            <a:ln w="14288">
-              <a:solidFill>
-                <a:srgbClr val="0AB36E"/>
-              </a:solidFill>
-            </a:ln>
-          </p:spPr>
-        </p:sp>
-        <p:sp>
-          <p:nvSpPr>
-            <p:cNvPr id="55" name="Freeform 55"/>
-            <p:cNvSpPr/>
-            <p:nvPr/>
-          </p:nvSpPr>
-          <p:spPr>
-            <a:xfrm>
-              <a:off x="7810500" y="4076700"/>
-              <a:ext cx="133350" cy="171450"/>
-            </a:xfrm>
-            <a:custGeom>
-              <a:avLst/>
-              <a:gdLst/>
-              <a:ahLst/>
-              <a:cxnLst/>
-              <a:rect l="l" t="t" r="r" b="b"/>
-              <a:pathLst>
-                <a:path w="133350" h="171450">
-                  <a:moveTo>
-                    <a:pt x="76200" y="0"/>
-                  </a:moveTo>
-                  <a:lnTo>
-                    <a:pt x="76200" y="66675"/>
-                  </a:lnTo>
-                  <a:lnTo>
-                    <a:pt x="133350" y="66675"/>
-                  </a:lnTo>
-                  <a:lnTo>
-                    <a:pt x="57150" y="171450"/>
-                  </a:lnTo>
-                  <a:lnTo>
-                    <a:pt x="57150" y="104775"/>
-                  </a:lnTo>
-                  <a:lnTo>
-                    <a:pt x="0" y="104775"/>
-                  </a:lnTo>
-                  <a:lnTo>
-                    <a:pt x="76200" y="0"/>
-                  </a:lnTo>
-                </a:path>
-              </a:pathLst>
-            </a:custGeom>
-            <a:noFill/>
-            <a:ln w="19050">
-              <a:solidFill>
-                <a:srgbClr val="0AB36E"/>
-              </a:solidFill>
-            </a:ln>
-          </p:spPr>
-        </p:sp>
-        <p:sp>
-          <p:nvSpPr>
-            <p:cNvPr id="56" name="TextBox 56"/>
-            <p:cNvSpPr txBox="1"/>
-            <p:nvPr/>
-          </p:nvSpPr>
-          <p:spPr>
-            <a:xfrm>
-              <a:off x="8062912" y="4079081"/>
-              <a:ext cx="1011948" cy="228600"/>
-            </a:xfrm>
-            <a:prstGeom prst="rect">
-              <a:avLst/>
-            </a:prstGeom>
-            <a:noFill/>
-            <a:ln>
-              <a:noFill/>
-            </a:ln>
-          </p:spPr>
-          <p:txBody>
-            <a:bodyPr wrap="none" lIns="0" tIns="0" rIns="0" bIns="0" anchor="t" anchorCtr="0">
-              <a:spAutoFit/>
-            </a:bodyPr>
-            <a:lstStyle/>
-            <a:p>
-              <a:pPr algn="l"/>
-              <a:r>
-                <a:rPr lang="zh-CN" sz="1125" b="1" dirty="0">
-                  <a:solidFill>
-                    <a:srgbClr val="0AB36E"/>
-                  </a:solidFill>
-                  <a:latin typeface="Arial"/>
-                  <a:ea typeface="Microsoft YaHei"/>
-                  <a:cs typeface="Arial"/>
-                </a:rPr>
-                <a:t>FRED-aware</a:t>
-              </a:r>
-            </a:p>
-          </p:txBody>
-        </p:sp>
-        <p:sp>
-          <p:nvSpPr>
-            <p:cNvPr id="57" name="TextBox 57"/>
-            <p:cNvSpPr txBox="1"/>
-            <p:nvPr/>
-          </p:nvSpPr>
-          <p:spPr>
-            <a:xfrm>
-              <a:off x="7797165" y="4325302"/>
-              <a:ext cx="3699462" cy="213360"/>
-            </a:xfrm>
-            <a:prstGeom prst="rect">
-              <a:avLst/>
-            </a:prstGeom>
-            <a:noFill/>
-            <a:ln>
-              <a:noFill/>
-            </a:ln>
-          </p:spPr>
-          <p:txBody>
-            <a:bodyPr wrap="none" lIns="0" tIns="0" rIns="0" bIns="0" anchor="t" anchorCtr="0">
-              <a:spAutoFit/>
-            </a:bodyPr>
-            <a:lstStyle/>
-            <a:p>
-              <a:pPr algn="l"/>
-              <a:r>
-                <a:rPr lang="zh-CN" sz="1050" dirty="0">
-                  <a:solidFill>
-                    <a:srgbClr val="333333"/>
-                  </a:solidFill>
-                  <a:latin typeface="Arial"/>
-                  <a:ea typeface="Microsoft YaHei"/>
-                  <a:cs typeface="Arial"/>
-                </a:rPr>
-                <a:t>Clears WFE (Wait-For-ENDBRANCH) state on entry</a:t>
-              </a:r>
-            </a:p>
-          </p:txBody>
-        </p:sp>
-        <p:sp>
-          <p:nvSpPr>
-            <p:cNvPr id="58" name="Rectangle 58"/>
-            <p:cNvSpPr/>
-            <p:nvPr/>
-          </p:nvSpPr>
-          <p:spPr>
-            <a:xfrm>
-              <a:off x="476250" y="5000625"/>
-              <a:ext cx="11239500" cy="762000"/>
-            </a:xfrm>
-            <a:prstGeom prst="roundRect">
-              <a:avLst>
-                <a:gd name="adj" fmla="val 10000"/>
-              </a:avLst>
-            </a:prstGeom>
-            <a:solidFill>
-              <a:srgbClr val="1E293B"/>
-            </a:solidFill>
-            <a:ln>
-              <a:noFill/>
-            </a:ln>
-          </p:spPr>
-        </p:sp>
-        <p:sp>
-          <p:nvSpPr>
-            <p:cNvPr id="59" name="TextBox 59"/>
-            <p:cNvSpPr txBox="1"/>
-            <p:nvPr/>
-          </p:nvSpPr>
-          <p:spPr>
-            <a:xfrm>
-              <a:off x="843915" y="5173028"/>
-              <a:ext cx="1733483" cy="213360"/>
-            </a:xfrm>
-            <a:prstGeom prst="rect">
-              <a:avLst/>
-            </a:prstGeom>
-            <a:noFill/>
-            <a:ln>
-              <a:noFill/>
-            </a:ln>
-          </p:spPr>
-          <p:txBody>
-            <a:bodyPr wrap="none" lIns="0" tIns="0" rIns="0" bIns="0" anchor="t" anchorCtr="0">
-              <a:spAutoFit/>
-            </a:bodyPr>
-            <a:lstStyle/>
-            <a:p>
-              <a:pPr algn="l"/>
-              <a:r>
-                <a:rPr lang="zh-CN" sz="1050" b="1" dirty="0">
-                  <a:solidFill>
-                    <a:srgbClr val="0AB36E"/>
-                  </a:solidFill>
-                  <a:latin typeface="Arial"/>
-                  <a:ea typeface="Microsoft YaHei"/>
-                  <a:cs typeface="Arial"/>
-                </a:rPr>
-                <a:t>Handler Flow Summary</a:t>
-              </a:r>
-            </a:p>
-          </p:txBody>
-        </p:sp>
-        <p:sp>
-          <p:nvSpPr>
-            <p:cNvPr id="60" name="TextBox 60"/>
-            <p:cNvSpPr txBox="1"/>
-            <p:nvPr/>
-          </p:nvSpPr>
-          <p:spPr>
-            <a:xfrm>
-              <a:off x="844868" y="5438299"/>
-              <a:ext cx="5542717" cy="198120"/>
-            </a:xfrm>
-            <a:prstGeom prst="rect">
-              <a:avLst/>
-            </a:prstGeom>
-            <a:noFill/>
-            <a:ln>
-              <a:noFill/>
-            </a:ln>
-          </p:spPr>
-          <p:txBody>
-            <a:bodyPr wrap="none" lIns="0" tIns="0" rIns="0" bIns="0" anchor="t" anchorCtr="0">
-              <a:spAutoFit/>
-            </a:bodyPr>
-            <a:lstStyle/>
-            <a:p>
-              <a:pPr algn="l"/>
-              <a:r>
-                <a:rPr lang="zh-CN" sz="975" dirty="0">
-                  <a:solidFill>
-                    <a:srgbClr val="E0E0E0"/>
-                  </a:solidFill>
-                  <a:latin typeface="Consolas"/>
-                  <a:ea typeface="Microsoft YaHei"/>
-                  <a:cs typeface="Consolas"/>
-                </a:rPr>
-                <a:t>#CP trap → check IBT enabled → user_mode? → SIGSEGV : (ibt_warn? → WARN : BUG)</a:t>
-              </a:r>
-            </a:p>
-          </p:txBody>
-        </p:sp>
-        <p:sp>
-          <p:nvSpPr>
-            <p:cNvPr id="61" name="TextBox 61"/>
-            <p:cNvSpPr txBox="1"/>
-            <p:nvPr/>
-          </p:nvSpPr>
-          <p:spPr>
-            <a:xfrm>
-              <a:off x="845820" y="5598795"/>
-              <a:ext cx="5339810" cy="182880"/>
-            </a:xfrm>
-            <a:prstGeom prst="rect">
-              <a:avLst/>
-            </a:prstGeom>
-            <a:noFill/>
-            <a:ln>
-              <a:noFill/>
-            </a:ln>
-          </p:spPr>
-          <p:txBody>
-            <a:bodyPr wrap="none" lIns="0" tIns="0" rIns="0" bIns="0" anchor="t" anchorCtr="0">
-              <a:spAutoFit/>
-            </a:bodyPr>
-            <a:lstStyle/>
-            <a:p>
-              <a:pPr algn="l"/>
-              <a:r>
-                <a:rPr lang="zh-CN" sz="900" dirty="0">
-                  <a:solidFill>
-                    <a:srgbClr val="6A9955"/>
-                  </a:solidFill>
-                  <a:latin typeface="Arial"/>
-                  <a:ea typeface="Microsoft YaHei"/>
-                  <a:cs typeface="Arial"/>
-                </a:rPr>
-                <a:t>FRED (Flexible Return and Event Delivery) automatically manages the tracker state</a:t>
-              </a:r>
-            </a:p>
-          </p:txBody>
-        </p:sp>
-      </p:grpSp>
-      <p:grpSp>
-        <p:nvGrpSpPr>
           <p:cNvPr id="65" name="Group 65"/>
           <p:cNvGrpSpPr/>
           <p:nvPr/>
@@ -44436,6 +41889,36 @@
           </p:txBody>
         </p:sp>
       </p:grpSp>
+      <p:pic>
+        <p:nvPicPr>
+          <p:cNvPr id="298" name="Picture 297">
+            <a:extLst>
+              <a:ext uri="{FF2B5EF4-FFF2-40B4-BE49-F238E27FC236}">
+                <a16:creationId xmlns:a16="http://schemas.microsoft.com/office/drawing/2014/main" id="{1039C27B-79CF-E478-A6D3-1349C74B1411}"/>
+              </a:ext>
+            </a:extLst>
+          </p:cNvPr>
+          <p:cNvPicPr>
+            <a:picLocks noChangeAspect="1"/>
+          </p:cNvPicPr>
+          <p:nvPr/>
+        </p:nvPicPr>
+        <p:blipFill>
+          <a:blip r:embed="rId5"/>
+          <a:stretch>
+            <a:fillRect/>
+          </a:stretch>
+        </p:blipFill>
+        <p:spPr>
+          <a:xfrm>
+            <a:off x="294771" y="1271664"/>
+            <a:ext cx="11147871" cy="4522092"/>
+          </a:xfrm>
+          <a:prstGeom prst="rect">
+            <a:avLst/>
+          </a:prstGeom>
+        </p:spPr>
+      </p:pic>
     </p:spTree>
   </p:cSld>
   <p:clrMapOvr>
@@ -44453,95 +41936,6 @@
       </p:transition>
     </mc:Fallback>
   </mc:AlternateContent>
-  <p:timing>
-    <p:tnLst>
-      <p:par>
-        <p:cTn id="1" dur="indefinite" restart="never" nodeType="tmRoot">
-          <p:childTnLst>
-            <p:seq concurrent="1" nextAc="seek">
-              <p:cTn id="2" dur="indefinite" nodeType="mainSeq">
-                <p:childTnLst>
-                  <p:par>
-                    <p:cTn id="3" fill="hold">
-                      <p:stCondLst>
-                        <p:cond delay="indefinite"/>
-                        <p:cond evt="onBegin" delay="0">
-                          <p:tn val="2"/>
-                        </p:cond>
-                      </p:stCondLst>
-                      <p:childTnLst>
-                        <p:par>
-                          <p:cTn id="4" fill="hold">
-                            <p:stCondLst>
-                              <p:cond delay="0"/>
-                            </p:stCondLst>
-                            <p:childTnLst>
-                              <p:par>
-                                <p:cTn id="5" presetID="10" presetClass="entr" presetSubtype="0" fill="hold" nodeType="afterEffect">
-                                  <p:stCondLst>
-                                    <p:cond delay="0"/>
-                                  </p:stCondLst>
-                                  <p:childTnLst>
-                                    <p:set>
-                                      <p:cBhvr>
-                                        <p:cTn id="6" dur="1" fill="hold">
-                                          <p:stCondLst>
-                                            <p:cond delay="0"/>
-                                          </p:stCondLst>
-                                        </p:cTn>
-                                        <p:tgtEl>
-                                          <p:spTgt spid="62"/>
-                                        </p:tgtEl>
-                                        <p:attrNameLst>
-                                          <p:attrName>style.visibility</p:attrName>
-                                        </p:attrNameLst>
-                                      </p:cBhvr>
-                                      <p:to>
-                                        <p:strVal val="visible"/>
-                                      </p:to>
-                                    </p:set>
-                                    <p:animEffect transition="in" filter="fade">
-                                      <p:cBhvr>
-                                        <p:cTn id="7" dur="400"/>
-                                        <p:tgtEl>
-                                          <p:spTgt spid="62"/>
-                                        </p:tgtEl>
-                                      </p:cBhvr>
-                                    </p:animEffect>
-                                  </p:childTnLst>
-                                </p:cTn>
-                              </p:par>
-                            </p:childTnLst>
-                          </p:cTn>
-                        </p:par>
-                      </p:childTnLst>
-                    </p:cTn>
-                  </p:par>
-                </p:childTnLst>
-              </p:cTn>
-              <p:prevCondLst>
-                <p:cond evt="onPrev" delay="0">
-                  <p:tgtEl>
-                    <p:sldTgt/>
-                  </p:tgtEl>
-                </p:cond>
-              </p:prevCondLst>
-              <p:nextCondLst>
-                <p:cond evt="onNext" delay="0">
-                  <p:tgtEl>
-                    <p:sldTgt/>
-                  </p:tgtEl>
-                </p:cond>
-              </p:nextCondLst>
-            </p:seq>
-          </p:childTnLst>
-        </p:cTn>
-      </p:par>
-    </p:tnLst>
-    <p:bldLst>
-      <p:bldP spid="62" grpId="0"/>
-    </p:bldLst>
-  </p:timing>
 </p:sld>
 </file>
 
